--- a/public/downloads/dg32-lite-datasheet.pptx
+++ b/public/downloads/dg32-lite-datasheet.pptx
@@ -2,24 +2,24 @@
 <file path=ppt/presentation.xml><?xml version="1.0" encoding="utf-8"?>
 <p:presentation xmlns:p="http://schemas.openxmlformats.org/presentationml/2006/main">
   <p:sldMasterIdLst>
-    <p:sldMasterId xmlns:r="http://schemas.openxmlformats.org/officeDocument/2006/relationships" id="2147483648" r:id="R0c464d35150f4073"/>
+    <p:sldMasterId xmlns:r="http://schemas.openxmlformats.org/officeDocument/2006/relationships" id="2147483648" r:id="Rce12b4e600524109"/>
   </p:sldMasterIdLst>
   <p:notesMasterIdLst>
-    <p:notesMasterId xmlns:r="http://schemas.openxmlformats.org/officeDocument/2006/relationships" r:id="Re772916f52d1460b"/>
+    <p:notesMasterId xmlns:r="http://schemas.openxmlformats.org/officeDocument/2006/relationships" r:id="R3ca22fc3136a4770"/>
   </p:notesMasterIdLst>
   <p:sldIdLst>
-    <p:sldId xmlns:r="http://schemas.openxmlformats.org/officeDocument/2006/relationships" id="256" r:id="Re1f54516b1534c0e"/>
-    <p:sldId xmlns:r="http://schemas.openxmlformats.org/officeDocument/2006/relationships" id="257" r:id="R4689128a0e7745b4"/>
-    <p:sldId xmlns:r="http://schemas.openxmlformats.org/officeDocument/2006/relationships" id="258" r:id="R00bf739e27ee4066"/>
-    <p:sldId xmlns:r="http://schemas.openxmlformats.org/officeDocument/2006/relationships" id="259" r:id="R7cee69ae0a9a4b24"/>
-    <p:sldId xmlns:r="http://schemas.openxmlformats.org/officeDocument/2006/relationships" id="260" r:id="R5b589e24780d4671"/>
-    <p:sldId xmlns:r="http://schemas.openxmlformats.org/officeDocument/2006/relationships" id="261" r:id="Rff13f778ed054fc3"/>
-    <p:sldId xmlns:r="http://schemas.openxmlformats.org/officeDocument/2006/relationships" id="262" r:id="Rd2782e94ee194853"/>
-    <p:sldId xmlns:r="http://schemas.openxmlformats.org/officeDocument/2006/relationships" id="263" r:id="Rfc6a6404b3c34ff6"/>
-    <p:sldId xmlns:r="http://schemas.openxmlformats.org/officeDocument/2006/relationships" id="264" r:id="Rc7a3a0f787a14dd6"/>
-    <p:sldId xmlns:r="http://schemas.openxmlformats.org/officeDocument/2006/relationships" id="265" r:id="R8f9c304756fc4e78"/>
-    <p:sldId xmlns:r="http://schemas.openxmlformats.org/officeDocument/2006/relationships" id="266" r:id="R95b29b0c43824690"/>
-    <p:sldId xmlns:r="http://schemas.openxmlformats.org/officeDocument/2006/relationships" id="267" r:id="R3c5104b2dc244481"/>
+    <p:sldId xmlns:r="http://schemas.openxmlformats.org/officeDocument/2006/relationships" id="256" r:id="R6f721dfd74574ab4"/>
+    <p:sldId xmlns:r="http://schemas.openxmlformats.org/officeDocument/2006/relationships" id="257" r:id="Rb96cc717fd644bcd"/>
+    <p:sldId xmlns:r="http://schemas.openxmlformats.org/officeDocument/2006/relationships" id="258" r:id="R5ded9ab2c59043ef"/>
+    <p:sldId xmlns:r="http://schemas.openxmlformats.org/officeDocument/2006/relationships" id="259" r:id="R3bc99bd6390d45c0"/>
+    <p:sldId xmlns:r="http://schemas.openxmlformats.org/officeDocument/2006/relationships" id="260" r:id="Rc2dbdd3b811c4c6a"/>
+    <p:sldId xmlns:r="http://schemas.openxmlformats.org/officeDocument/2006/relationships" id="261" r:id="Rafc542b84e49487a"/>
+    <p:sldId xmlns:r="http://schemas.openxmlformats.org/officeDocument/2006/relationships" id="262" r:id="R2dce94719ced493f"/>
+    <p:sldId xmlns:r="http://schemas.openxmlformats.org/officeDocument/2006/relationships" id="263" r:id="R57a3fd2190db43ad"/>
+    <p:sldId xmlns:r="http://schemas.openxmlformats.org/officeDocument/2006/relationships" id="264" r:id="R3a525eae5974485f"/>
+    <p:sldId xmlns:r="http://schemas.openxmlformats.org/officeDocument/2006/relationships" id="265" r:id="R6092be50fe7b4dcb"/>
+    <p:sldId xmlns:r="http://schemas.openxmlformats.org/officeDocument/2006/relationships" id="266" r:id="Rff4372293efb4a3e"/>
+    <p:sldId xmlns:r="http://schemas.openxmlformats.org/officeDocument/2006/relationships" id="267" r:id="R24cdf49b0bff48a2"/>
   </p:sldIdLst>
   <p:sldSz cx="12192000" cy="6858000"/>
   <p:notesSz cx="6858000" cy="9144000"/>
@@ -523,7 +523,7 @@
           <a:lstStyle xmlns:a="http://schemas.openxmlformats.org/drawingml/2006/main"/>
           <a:p xmlns:a="http://schemas.openxmlformats.org/drawingml/2006/main">
             <a:r>
-              <a:t>These are the limits firmware can plan on. The UARTs run at one hundred fifteen thousand two hundred baud, SPI to twenty-five megahertz, and I squared C at one hundred or four hundred kilohertz. PWM dead-time reaches five point one microseconds, and the brake acts within two cycles. The ADC samples at about two hundred kilosamples per second, and on this silicon it runs untrimmed.</a:t>
+              <a:t>These are the numbers a firmware plan can count on before any part is measured. The UARTs run at one hundred fifteen thousand two hundred baud, SPI to twenty-five megahertz, and I squared C at one hundred or four hundred kilohertz. PWM dead-time reaches five point one microseconds, and the brake acts within two cycles. The ADC samples at about two hundred kilosamples per second, and on this silicon it runs untrimmed.</a:t>
             </a:r>
           </a:p>
         </p:txBody>
@@ -593,7 +593,7 @@
           <a:lstStyle xmlns:a="http://schemas.openxmlformats.org/drawingml/2006/main"/>
           <a:p xmlns:a="http://schemas.openxmlformats.org/drawingml/2006/main">
             <a:r>
-              <a:t>The package is settled: a nine-by-nine millimetre QFN with a half-millimetre pitch and an exposed ground paddle. Three things are still preliminary. The pin map waits on the foundry's bond-diagram confirmation, the electrical section waits on characterisation, and the control core stays frozen for feature work until silicon test.</a:t>
+              <a:t>A design team can commit to the package today: nine by nine millimetres, half-millimetre lead spacing, and an exposed paddle for ground. Three things can still move. Pin assignments wait for the foundry to confirm its bonding plan, the electrical numbers wait for measured parts, and the control core accepts no new features before it has been tested in silicon.</a:t>
             </a:r>
           </a:p>
         </p:txBody>
@@ -663,7 +663,7 @@
           <a:lstStyle xmlns:a="http://schemas.openxmlformats.org/drawingml/2006/main"/>
           <a:p xmlns:a="http://schemas.openxmlformats.org/drawingml/2006/main">
             <a:r>
-              <a:t>So here is what is fixed and what is not. Fixed now: the package, the pin groups, the rails, the clock and the boot path. Measured at first silicon: every electrical limit, and the final pin map. The register-level detail lives in the engineering datasheet; this deck is the plan you build around.</a:t>
+              <a:t>So the dividing line is clear. You can design around the package, the pin groups, the supplies, the clock and the boot sequence now. What still needs real parts is all of the electrical limits and the confirmed pin assignment. Register-level detail belongs to the engineering datasheet; this overview is what a board and firmware plan starts from.</a:t>
             </a:r>
           </a:p>
         </p:txBody>
@@ -803,7 +803,7 @@
           <a:lstStyle xmlns:a="http://schemas.openxmlformats.org/drawingml/2006/main"/>
           <a:p xmlns:a="http://schemas.openxmlformats.org/drawingml/2006/main">
             <a:r>
-              <a:t>The datasheet lists nine features. Two RISC-V cores in lockstep with a fault comparator. Thirty-two kilobytes of SRAM and a sixty-four kilobyte boot ROM. Three-phase PWM with a hardware brake, four DShot channels, encoder and Hall inputs, a CORDIC and an on-die ADC. Serial ports, SPI, I squared C and GPIO, with supervision. And it boots itself, with no management core.</a:t>
+              <a:t>The datasheet lists nine features, so one chip can boot, drive and guard a motor by itself. Two RISC-V cores in lockstep with a comparator that flags faults. Thirty-two kilobytes of SRAM and a sixty-four kilobyte boot ROM. Three-phase PWM with a hardware brake, four DShot channels, encoder and Hall inputs, a CORDIC and an on-die ADC. Serial ports, SPI, I squared C and GPIO, with supervision, and no management core.</a:t>
             </a:r>
           </a:p>
         </p:txBody>
@@ -943,7 +943,7 @@
           <a:lstStyle xmlns:a="http://schemas.openxmlformats.org/drawingml/2006/main"/>
           <a:p xmlns:a="http://schemas.openxmlformats.org/drawingml/2006/main">
             <a:r>
-              <a:t>The pins are placed by job. One side carries the motor: all six gate outputs, the sample trigger, the encoder and two Hall inputs. The opposite side carries the boot flash and the serial ports. The bottom holds JTAG, the clock and the resets, and the top holds I squared C, GPIO, the fault output and the supply-good inputs.</a:t>
+              <a:t>The pins are grouped by job rather than scattered. One side carries the motor: all six gate outputs, the sample trigger, the encoder and two Hall inputs. The opposite side carries the boot flash and the serial ports. The bottom holds JTAG, the clock and the resets, and the top holds I squared C, GPIO, the fault output and the supply-good inputs.</a:t>
             </a:r>
           </a:p>
         </p:txBody>
@@ -1291,7 +1291,7 @@
   </p:cSld>
   <p:clrMap bg1="lt1" tx1="dk1" bg2="lt2" tx2="dk2" accent1="accent1" accent2="accent2" accent3="accent3" accent4="accent4" accent5="accent5" accent6="accent6" hlink="hlink" folHlink="folHlink"/>
   <p:sldLayoutIdLst>
-    <p:sldLayoutId xmlns:r="http://schemas.openxmlformats.org/officeDocument/2006/relationships" id="2147483649" r:id="Rec52e3a39844419a"/>
+    <p:sldLayoutId xmlns:r="http://schemas.openxmlformats.org/officeDocument/2006/relationships" id="2147483649" r:id="Ra668ac1b3c324371"/>
   </p:sldLayoutIdLst>
   <p:txStyles>
     <p:titleStyle>
@@ -1835,7 +1835,7 @@
           <p:cNvPr id="107" name="">
             <a:extLst xmlns:a="http://schemas.openxmlformats.org/drawingml/2006/main">
               <a:ext uri="{FF2B5EF4-FFF2-40B4-BE49-F238E27FC236}">
-                <a16:creationId xmlns:a16="http://schemas.microsoft.com/office/drawing/2014/main" id="{22A0A974-D30A-43E3-9A09-96D370586DA2}"/>
+                <a16:creationId xmlns:a16="http://schemas.microsoft.com/office/drawing/2014/main" id="{EC630311-538B-44A3-9482-3F273D1CDB7A}"/>
               </a:ext>
             </a:extLst>
           </p:cNvPr>
@@ -1866,7 +1866,7 @@
           <p:cNvPr id="2" name="">
             <a:extLst xmlns:a="http://schemas.openxmlformats.org/drawingml/2006/main">
               <a:ext uri="{FF2B5EF4-FFF2-40B4-BE49-F238E27FC236}">
-                <a16:creationId xmlns:a16="http://schemas.microsoft.com/office/drawing/2014/main" id="{B47353BC-AC72-47CB-84DC-2DE61ACBD0C5}"/>
+                <a16:creationId xmlns:a16="http://schemas.microsoft.com/office/drawing/2014/main" id="{17A9F81F-516C-4ED8-A46A-0CB8AB11821A}"/>
               </a:ext>
             </a:extLst>
           </p:cNvPr>
@@ -1911,7 +1911,7 @@
           <p:cNvPr id="3" name="">
             <a:extLst xmlns:a="http://schemas.openxmlformats.org/drawingml/2006/main">
               <a:ext uri="{FF2B5EF4-FFF2-40B4-BE49-F238E27FC236}">
-                <a16:creationId xmlns:a16="http://schemas.microsoft.com/office/drawing/2014/main" id="{03E66364-5E63-42D1-8E4A-70086F015F19}"/>
+                <a16:creationId xmlns:a16="http://schemas.microsoft.com/office/drawing/2014/main" id="{DFCACC00-946D-428E-9A12-3A4D2E1CCBD8}"/>
               </a:ext>
             </a:extLst>
           </p:cNvPr>
@@ -1956,7 +1956,7 @@
           <p:cNvPr id="4" name="">
             <a:extLst xmlns:a="http://schemas.openxmlformats.org/drawingml/2006/main">
               <a:ext uri="{FF2B5EF4-FFF2-40B4-BE49-F238E27FC236}">
-                <a16:creationId xmlns:a16="http://schemas.microsoft.com/office/drawing/2014/main" id="{7C571D80-48CD-4398-A0D2-6EBBBBCD2DE0}"/>
+                <a16:creationId xmlns:a16="http://schemas.microsoft.com/office/drawing/2014/main" id="{5DE98E2B-3663-48D2-B5DA-6AF8BF641B9D}"/>
               </a:ext>
             </a:extLst>
           </p:cNvPr>
@@ -1987,7 +1987,7 @@
           <p:cNvPr id="5" name="">
             <a:extLst xmlns:a="http://schemas.openxmlformats.org/drawingml/2006/main">
               <a:ext uri="{FF2B5EF4-FFF2-40B4-BE49-F238E27FC236}">
-                <a16:creationId xmlns:a16="http://schemas.microsoft.com/office/drawing/2014/main" id="{2366E6B4-2A0F-499B-9161-168FC21D42E9}"/>
+                <a16:creationId xmlns:a16="http://schemas.microsoft.com/office/drawing/2014/main" id="{1D9617B6-8EC7-4450-94EE-9D9FBBE44875}"/>
               </a:ext>
             </a:extLst>
           </p:cNvPr>
@@ -2032,7 +2032,7 @@
           <p:cNvPr id="6" name="">
             <a:extLst xmlns:a="http://schemas.openxmlformats.org/drawingml/2006/main">
               <a:ext uri="{FF2B5EF4-FFF2-40B4-BE49-F238E27FC236}">
-                <a16:creationId xmlns:a16="http://schemas.microsoft.com/office/drawing/2014/main" id="{9248862C-7867-4A40-8140-B7818922AB2C}"/>
+                <a16:creationId xmlns:a16="http://schemas.microsoft.com/office/drawing/2014/main" id="{D9C73FBB-296C-4CA0-8080-E9F100BFBACD}"/>
               </a:ext>
             </a:extLst>
           </p:cNvPr>
@@ -2065,7 +2065,7 @@
           <p:cNvPr id="7" name="">
             <a:extLst xmlns:a="http://schemas.openxmlformats.org/drawingml/2006/main">
               <a:ext uri="{FF2B5EF4-FFF2-40B4-BE49-F238E27FC236}">
-                <a16:creationId xmlns:a16="http://schemas.microsoft.com/office/drawing/2014/main" id="{F4B14987-8774-49C3-AA99-10629B724802}"/>
+                <a16:creationId xmlns:a16="http://schemas.microsoft.com/office/drawing/2014/main" id="{6EE15A1B-C7B7-4933-86BE-CBA7D997BFB5}"/>
               </a:ext>
             </a:extLst>
           </p:cNvPr>
@@ -2096,7 +2096,7 @@
           <p:cNvPr id="8" name="">
             <a:extLst xmlns:a="http://schemas.openxmlformats.org/drawingml/2006/main">
               <a:ext uri="{FF2B5EF4-FFF2-40B4-BE49-F238E27FC236}">
-                <a16:creationId xmlns:a16="http://schemas.microsoft.com/office/drawing/2014/main" id="{91AD6F54-621F-468E-9719-6FBBCBF7997F}"/>
+                <a16:creationId xmlns:a16="http://schemas.microsoft.com/office/drawing/2014/main" id="{1DB3678C-AB23-4761-B4C8-13267921D577}"/>
               </a:ext>
             </a:extLst>
           </p:cNvPr>
@@ -2127,7 +2127,7 @@
           <p:cNvPr id="9" name="">
             <a:extLst xmlns:a="http://schemas.openxmlformats.org/drawingml/2006/main">
               <a:ext uri="{FF2B5EF4-FFF2-40B4-BE49-F238E27FC236}">
-                <a16:creationId xmlns:a16="http://schemas.microsoft.com/office/drawing/2014/main" id="{33CBBEA0-23C5-4FAA-B99A-3E79910F5BF4}"/>
+                <a16:creationId xmlns:a16="http://schemas.microsoft.com/office/drawing/2014/main" id="{F12625A2-6436-4FA9-A187-6EADAA605E93}"/>
               </a:ext>
             </a:extLst>
           </p:cNvPr>
@@ -2158,7 +2158,7 @@
           <p:cNvPr id="10" name="">
             <a:extLst xmlns:a="http://schemas.openxmlformats.org/drawingml/2006/main">
               <a:ext uri="{FF2B5EF4-FFF2-40B4-BE49-F238E27FC236}">
-                <a16:creationId xmlns:a16="http://schemas.microsoft.com/office/drawing/2014/main" id="{E0727188-09D6-4796-BA84-E5B3B325B067}"/>
+                <a16:creationId xmlns:a16="http://schemas.microsoft.com/office/drawing/2014/main" id="{EF589FBB-3499-4EFA-B062-F0FDF8ED6E4F}"/>
               </a:ext>
             </a:extLst>
           </p:cNvPr>
@@ -2189,7 +2189,7 @@
           <p:cNvPr id="11" name="">
             <a:extLst xmlns:a="http://schemas.openxmlformats.org/drawingml/2006/main">
               <a:ext uri="{FF2B5EF4-FFF2-40B4-BE49-F238E27FC236}">
-                <a16:creationId xmlns:a16="http://schemas.microsoft.com/office/drawing/2014/main" id="{43407204-FF7F-410B-B1FC-F15F2BC50A3A}"/>
+                <a16:creationId xmlns:a16="http://schemas.microsoft.com/office/drawing/2014/main" id="{E681CAEE-2A92-4E3F-AD1A-377E096C0984}"/>
               </a:ext>
             </a:extLst>
           </p:cNvPr>
@@ -2220,7 +2220,7 @@
           <p:cNvPr id="12" name="">
             <a:extLst xmlns:a="http://schemas.openxmlformats.org/drawingml/2006/main">
               <a:ext uri="{FF2B5EF4-FFF2-40B4-BE49-F238E27FC236}">
-                <a16:creationId xmlns:a16="http://schemas.microsoft.com/office/drawing/2014/main" id="{01537C91-C980-4FE5-9D56-D8F10FFC712E}"/>
+                <a16:creationId xmlns:a16="http://schemas.microsoft.com/office/drawing/2014/main" id="{7A2B6857-D770-483F-8CEC-750D66FC4AF4}"/>
               </a:ext>
             </a:extLst>
           </p:cNvPr>
@@ -2251,7 +2251,7 @@
           <p:cNvPr id="13" name="">
             <a:extLst xmlns:a="http://schemas.openxmlformats.org/drawingml/2006/main">
               <a:ext uri="{FF2B5EF4-FFF2-40B4-BE49-F238E27FC236}">
-                <a16:creationId xmlns:a16="http://schemas.microsoft.com/office/drawing/2014/main" id="{D9E0D210-AF82-488E-90F5-1952B5A9162F}"/>
+                <a16:creationId xmlns:a16="http://schemas.microsoft.com/office/drawing/2014/main" id="{57BDB9CC-0E2F-4AEE-AAEA-EBDAE0F7BAA0}"/>
               </a:ext>
             </a:extLst>
           </p:cNvPr>
@@ -2282,7 +2282,7 @@
           <p:cNvPr id="14" name="">
             <a:extLst xmlns:a="http://schemas.openxmlformats.org/drawingml/2006/main">
               <a:ext uri="{FF2B5EF4-FFF2-40B4-BE49-F238E27FC236}">
-                <a16:creationId xmlns:a16="http://schemas.microsoft.com/office/drawing/2014/main" id="{557209CE-0854-49AF-A90A-E04EF27FC9F2}"/>
+                <a16:creationId xmlns:a16="http://schemas.microsoft.com/office/drawing/2014/main" id="{0A1EF145-46A5-4DBC-B431-AF3CFBE45ED2}"/>
               </a:ext>
             </a:extLst>
           </p:cNvPr>
@@ -2313,7 +2313,7 @@
           <p:cNvPr id="15" name="">
             <a:extLst xmlns:a="http://schemas.openxmlformats.org/drawingml/2006/main">
               <a:ext uri="{FF2B5EF4-FFF2-40B4-BE49-F238E27FC236}">
-                <a16:creationId xmlns:a16="http://schemas.microsoft.com/office/drawing/2014/main" id="{9B7C25DA-4692-4228-B51A-FCDA4738F490}"/>
+                <a16:creationId xmlns:a16="http://schemas.microsoft.com/office/drawing/2014/main" id="{C884592C-D9B0-471A-A065-E0F2BDEFFDC3}"/>
               </a:ext>
             </a:extLst>
           </p:cNvPr>
@@ -2344,7 +2344,7 @@
           <p:cNvPr id="16" name="">
             <a:extLst xmlns:a="http://schemas.openxmlformats.org/drawingml/2006/main">
               <a:ext uri="{FF2B5EF4-FFF2-40B4-BE49-F238E27FC236}">
-                <a16:creationId xmlns:a16="http://schemas.microsoft.com/office/drawing/2014/main" id="{64407DCA-FEEE-4FB6-8B74-9E3A674B68C2}"/>
+                <a16:creationId xmlns:a16="http://schemas.microsoft.com/office/drawing/2014/main" id="{EB718CB2-3DBB-40E6-A24E-A78763642E4B}"/>
               </a:ext>
             </a:extLst>
           </p:cNvPr>
@@ -2375,7 +2375,7 @@
           <p:cNvPr id="17" name="">
             <a:extLst xmlns:a="http://schemas.openxmlformats.org/drawingml/2006/main">
               <a:ext uri="{FF2B5EF4-FFF2-40B4-BE49-F238E27FC236}">
-                <a16:creationId xmlns:a16="http://schemas.microsoft.com/office/drawing/2014/main" id="{72CC5AD2-B8AB-40F6-99AB-BBB0A29031F9}"/>
+                <a16:creationId xmlns:a16="http://schemas.microsoft.com/office/drawing/2014/main" id="{EE0447EB-AB33-46D8-9662-4B55AF999A8C}"/>
               </a:ext>
             </a:extLst>
           </p:cNvPr>
@@ -2406,7 +2406,7 @@
           <p:cNvPr id="18" name="">
             <a:extLst xmlns:a="http://schemas.openxmlformats.org/drawingml/2006/main">
               <a:ext uri="{FF2B5EF4-FFF2-40B4-BE49-F238E27FC236}">
-                <a16:creationId xmlns:a16="http://schemas.microsoft.com/office/drawing/2014/main" id="{E675F5A3-53F0-4137-86D9-231B2F00C235}"/>
+                <a16:creationId xmlns:a16="http://schemas.microsoft.com/office/drawing/2014/main" id="{4D44D703-0EF2-4935-8978-DC3E9CCD0E44}"/>
               </a:ext>
             </a:extLst>
           </p:cNvPr>
@@ -2437,7 +2437,7 @@
           <p:cNvPr id="19" name="">
             <a:extLst xmlns:a="http://schemas.openxmlformats.org/drawingml/2006/main">
               <a:ext uri="{FF2B5EF4-FFF2-40B4-BE49-F238E27FC236}">
-                <a16:creationId xmlns:a16="http://schemas.microsoft.com/office/drawing/2014/main" id="{415D5CD0-25AA-4116-896B-CBFCAD5CB4DE}"/>
+                <a16:creationId xmlns:a16="http://schemas.microsoft.com/office/drawing/2014/main" id="{81353357-F895-45BB-ABAC-9EB86DEC062B}"/>
               </a:ext>
             </a:extLst>
           </p:cNvPr>
@@ -2468,7 +2468,7 @@
           <p:cNvPr id="20" name="">
             <a:extLst xmlns:a="http://schemas.openxmlformats.org/drawingml/2006/main">
               <a:ext uri="{FF2B5EF4-FFF2-40B4-BE49-F238E27FC236}">
-                <a16:creationId xmlns:a16="http://schemas.microsoft.com/office/drawing/2014/main" id="{E8E76FB0-EDC9-4E8F-8E4F-023F602B1EB2}"/>
+                <a16:creationId xmlns:a16="http://schemas.microsoft.com/office/drawing/2014/main" id="{77CC1F4F-F791-41F6-8697-A88D68C7B6F1}"/>
               </a:ext>
             </a:extLst>
           </p:cNvPr>
@@ -2499,7 +2499,7 @@
           <p:cNvPr id="21" name="">
             <a:extLst xmlns:a="http://schemas.openxmlformats.org/drawingml/2006/main">
               <a:ext uri="{FF2B5EF4-FFF2-40B4-BE49-F238E27FC236}">
-                <a16:creationId xmlns:a16="http://schemas.microsoft.com/office/drawing/2014/main" id="{B73A589F-AC00-436F-8768-35DF30581D36}"/>
+                <a16:creationId xmlns:a16="http://schemas.microsoft.com/office/drawing/2014/main" id="{8CA262B2-6892-46FD-8E53-F3D7EE5F84EA}"/>
               </a:ext>
             </a:extLst>
           </p:cNvPr>
@@ -2530,7 +2530,7 @@
           <p:cNvPr id="22" name="">
             <a:extLst xmlns:a="http://schemas.openxmlformats.org/drawingml/2006/main">
               <a:ext uri="{FF2B5EF4-FFF2-40B4-BE49-F238E27FC236}">
-                <a16:creationId xmlns:a16="http://schemas.microsoft.com/office/drawing/2014/main" id="{BBFA2729-2093-4B1E-9C24-3F652BFCFA6E}"/>
+                <a16:creationId xmlns:a16="http://schemas.microsoft.com/office/drawing/2014/main" id="{B0F59801-A3EB-4468-8116-70F05A5EE4C1}"/>
               </a:ext>
             </a:extLst>
           </p:cNvPr>
@@ -2561,7 +2561,7 @@
           <p:cNvPr id="23" name="">
             <a:extLst xmlns:a="http://schemas.openxmlformats.org/drawingml/2006/main">
               <a:ext uri="{FF2B5EF4-FFF2-40B4-BE49-F238E27FC236}">
-                <a16:creationId xmlns:a16="http://schemas.microsoft.com/office/drawing/2014/main" id="{F4D2BA35-0753-42FB-97C5-86321F4CCEB5}"/>
+                <a16:creationId xmlns:a16="http://schemas.microsoft.com/office/drawing/2014/main" id="{A08B7B02-AA4F-4718-B44C-0823D876BC6F}"/>
               </a:ext>
             </a:extLst>
           </p:cNvPr>
@@ -2592,7 +2592,7 @@
           <p:cNvPr id="24" name="">
             <a:extLst xmlns:a="http://schemas.openxmlformats.org/drawingml/2006/main">
               <a:ext uri="{FF2B5EF4-FFF2-40B4-BE49-F238E27FC236}">
-                <a16:creationId xmlns:a16="http://schemas.microsoft.com/office/drawing/2014/main" id="{CC742B35-EC8C-4F71-B20C-02D550420B48}"/>
+                <a16:creationId xmlns:a16="http://schemas.microsoft.com/office/drawing/2014/main" id="{1E0A50A0-EBF3-422B-8574-870F6338C2A6}"/>
               </a:ext>
             </a:extLst>
           </p:cNvPr>
@@ -2623,7 +2623,7 @@
           <p:cNvPr id="25" name="">
             <a:extLst xmlns:a="http://schemas.openxmlformats.org/drawingml/2006/main">
               <a:ext uri="{FF2B5EF4-FFF2-40B4-BE49-F238E27FC236}">
-                <a16:creationId xmlns:a16="http://schemas.microsoft.com/office/drawing/2014/main" id="{E3CB412D-B453-49B7-96F2-CBCB4663B8C1}"/>
+                <a16:creationId xmlns:a16="http://schemas.microsoft.com/office/drawing/2014/main" id="{4897C895-7F0D-4D24-AC19-F132CEA6167E}"/>
               </a:ext>
             </a:extLst>
           </p:cNvPr>
@@ -2654,7 +2654,7 @@
           <p:cNvPr id="26" name="">
             <a:extLst xmlns:a="http://schemas.openxmlformats.org/drawingml/2006/main">
               <a:ext uri="{FF2B5EF4-FFF2-40B4-BE49-F238E27FC236}">
-                <a16:creationId xmlns:a16="http://schemas.microsoft.com/office/drawing/2014/main" id="{5ED2A1E4-479C-483C-B2CC-E5C70CB1626E}"/>
+                <a16:creationId xmlns:a16="http://schemas.microsoft.com/office/drawing/2014/main" id="{B5B71701-5562-4F91-9451-D99FD6463AE9}"/>
               </a:ext>
             </a:extLst>
           </p:cNvPr>
@@ -2685,7 +2685,7 @@
           <p:cNvPr id="27" name="">
             <a:extLst xmlns:a="http://schemas.openxmlformats.org/drawingml/2006/main">
               <a:ext uri="{FF2B5EF4-FFF2-40B4-BE49-F238E27FC236}">
-                <a16:creationId xmlns:a16="http://schemas.microsoft.com/office/drawing/2014/main" id="{7DB3CAF1-A8BA-4A22-8D9B-46258AD4E436}"/>
+                <a16:creationId xmlns:a16="http://schemas.microsoft.com/office/drawing/2014/main" id="{19D4E03F-D8D3-4B5E-88B7-3931FA42AACA}"/>
               </a:ext>
             </a:extLst>
           </p:cNvPr>
@@ -2716,7 +2716,7 @@
           <p:cNvPr id="28" name="">
             <a:extLst xmlns:a="http://schemas.openxmlformats.org/drawingml/2006/main">
               <a:ext uri="{FF2B5EF4-FFF2-40B4-BE49-F238E27FC236}">
-                <a16:creationId xmlns:a16="http://schemas.microsoft.com/office/drawing/2014/main" id="{0E9B89E8-1DB7-4409-89A4-3BAEC7710F17}"/>
+                <a16:creationId xmlns:a16="http://schemas.microsoft.com/office/drawing/2014/main" id="{D677FA53-AF27-4F3E-BD08-4F263E9356D5}"/>
               </a:ext>
             </a:extLst>
           </p:cNvPr>
@@ -2747,7 +2747,7 @@
           <p:cNvPr id="29" name="">
             <a:extLst xmlns:a="http://schemas.openxmlformats.org/drawingml/2006/main">
               <a:ext uri="{FF2B5EF4-FFF2-40B4-BE49-F238E27FC236}">
-                <a16:creationId xmlns:a16="http://schemas.microsoft.com/office/drawing/2014/main" id="{75F737C1-2AE0-4E49-B594-FE14355D37A6}"/>
+                <a16:creationId xmlns:a16="http://schemas.microsoft.com/office/drawing/2014/main" id="{9927CB4A-6E7F-4B63-A040-DE9F92EC67B6}"/>
               </a:ext>
             </a:extLst>
           </p:cNvPr>
@@ -2778,7 +2778,7 @@
           <p:cNvPr id="30" name="">
             <a:extLst xmlns:a="http://schemas.openxmlformats.org/drawingml/2006/main">
               <a:ext uri="{FF2B5EF4-FFF2-40B4-BE49-F238E27FC236}">
-                <a16:creationId xmlns:a16="http://schemas.microsoft.com/office/drawing/2014/main" id="{0028ABE1-4EDC-4321-8477-F40C6915F296}"/>
+                <a16:creationId xmlns:a16="http://schemas.microsoft.com/office/drawing/2014/main" id="{8A18CC53-0F4F-4DBC-850E-F53FAFCA741D}"/>
               </a:ext>
             </a:extLst>
           </p:cNvPr>
@@ -2809,7 +2809,7 @@
           <p:cNvPr id="31" name="">
             <a:extLst xmlns:a="http://schemas.openxmlformats.org/drawingml/2006/main">
               <a:ext uri="{FF2B5EF4-FFF2-40B4-BE49-F238E27FC236}">
-                <a16:creationId xmlns:a16="http://schemas.microsoft.com/office/drawing/2014/main" id="{76A73CDA-5C06-4ECF-868A-7BBE60A209AF}"/>
+                <a16:creationId xmlns:a16="http://schemas.microsoft.com/office/drawing/2014/main" id="{A754D636-A491-4337-BDAE-1AC0A4004073}"/>
               </a:ext>
             </a:extLst>
           </p:cNvPr>
@@ -2840,7 +2840,7 @@
           <p:cNvPr id="32" name="">
             <a:extLst xmlns:a="http://schemas.openxmlformats.org/drawingml/2006/main">
               <a:ext uri="{FF2B5EF4-FFF2-40B4-BE49-F238E27FC236}">
-                <a16:creationId xmlns:a16="http://schemas.microsoft.com/office/drawing/2014/main" id="{B3A2D9BB-B580-41F9-8BB6-831CC2CC8B09}"/>
+                <a16:creationId xmlns:a16="http://schemas.microsoft.com/office/drawing/2014/main" id="{BC6BC7C7-AA68-4E38-8DE7-D4DCDE97FA81}"/>
               </a:ext>
             </a:extLst>
           </p:cNvPr>
@@ -2871,7 +2871,7 @@
           <p:cNvPr id="33" name="">
             <a:extLst xmlns:a="http://schemas.openxmlformats.org/drawingml/2006/main">
               <a:ext uri="{FF2B5EF4-FFF2-40B4-BE49-F238E27FC236}">
-                <a16:creationId xmlns:a16="http://schemas.microsoft.com/office/drawing/2014/main" id="{225F7869-C9FE-4F55-BFB8-FAD6DDAEBF7C}"/>
+                <a16:creationId xmlns:a16="http://schemas.microsoft.com/office/drawing/2014/main" id="{F9893634-AC49-4881-8985-F1322D0AC977}"/>
               </a:ext>
             </a:extLst>
           </p:cNvPr>
@@ -2902,7 +2902,7 @@
           <p:cNvPr id="34" name="">
             <a:extLst xmlns:a="http://schemas.openxmlformats.org/drawingml/2006/main">
               <a:ext uri="{FF2B5EF4-FFF2-40B4-BE49-F238E27FC236}">
-                <a16:creationId xmlns:a16="http://schemas.microsoft.com/office/drawing/2014/main" id="{C069EBEB-DA78-4BEE-96CC-A7EE3919ACA0}"/>
+                <a16:creationId xmlns:a16="http://schemas.microsoft.com/office/drawing/2014/main" id="{683F40B5-EBA6-4FCD-8D39-AB6AFCC8B335}"/>
               </a:ext>
             </a:extLst>
           </p:cNvPr>
@@ -2933,7 +2933,7 @@
           <p:cNvPr id="35" name="">
             <a:extLst xmlns:a="http://schemas.openxmlformats.org/drawingml/2006/main">
               <a:ext uri="{FF2B5EF4-FFF2-40B4-BE49-F238E27FC236}">
-                <a16:creationId xmlns:a16="http://schemas.microsoft.com/office/drawing/2014/main" id="{F73080DF-F2D0-4706-92A0-2FFC994E51CB}"/>
+                <a16:creationId xmlns:a16="http://schemas.microsoft.com/office/drawing/2014/main" id="{F1432CF4-5B7D-4A1B-96EC-BFC73777A60D}"/>
               </a:ext>
             </a:extLst>
           </p:cNvPr>
@@ -2964,7 +2964,7 @@
           <p:cNvPr id="36" name="">
             <a:extLst xmlns:a="http://schemas.openxmlformats.org/drawingml/2006/main">
               <a:ext uri="{FF2B5EF4-FFF2-40B4-BE49-F238E27FC236}">
-                <a16:creationId xmlns:a16="http://schemas.microsoft.com/office/drawing/2014/main" id="{E4FB8C91-470B-4930-8E73-4C518572F589}"/>
+                <a16:creationId xmlns:a16="http://schemas.microsoft.com/office/drawing/2014/main" id="{F201A4F6-E2E4-44C6-896B-8A6DAFE48D70}"/>
               </a:ext>
             </a:extLst>
           </p:cNvPr>
@@ -2995,7 +2995,7 @@
           <p:cNvPr id="37" name="">
             <a:extLst xmlns:a="http://schemas.openxmlformats.org/drawingml/2006/main">
               <a:ext uri="{FF2B5EF4-FFF2-40B4-BE49-F238E27FC236}">
-                <a16:creationId xmlns:a16="http://schemas.microsoft.com/office/drawing/2014/main" id="{F5D60753-AA1B-4976-8718-F8124AE54A0F}"/>
+                <a16:creationId xmlns:a16="http://schemas.microsoft.com/office/drawing/2014/main" id="{BF6CC024-EF0A-4509-A5E1-B70EED23B52F}"/>
               </a:ext>
             </a:extLst>
           </p:cNvPr>
@@ -3026,7 +3026,7 @@
           <p:cNvPr id="38" name="">
             <a:extLst xmlns:a="http://schemas.openxmlformats.org/drawingml/2006/main">
               <a:ext uri="{FF2B5EF4-FFF2-40B4-BE49-F238E27FC236}">
-                <a16:creationId xmlns:a16="http://schemas.microsoft.com/office/drawing/2014/main" id="{070D6441-CA5F-4954-BA7F-C5FBD2C977E9}"/>
+                <a16:creationId xmlns:a16="http://schemas.microsoft.com/office/drawing/2014/main" id="{69C7986F-9DBA-42E7-AE0E-5125B1E43729}"/>
               </a:ext>
             </a:extLst>
           </p:cNvPr>
@@ -3057,7 +3057,7 @@
           <p:cNvPr id="39" name="">
             <a:extLst xmlns:a="http://schemas.openxmlformats.org/drawingml/2006/main">
               <a:ext uri="{FF2B5EF4-FFF2-40B4-BE49-F238E27FC236}">
-                <a16:creationId xmlns:a16="http://schemas.microsoft.com/office/drawing/2014/main" id="{614AE1F5-9D7C-4494-AEFA-7ABAC41C4199}"/>
+                <a16:creationId xmlns:a16="http://schemas.microsoft.com/office/drawing/2014/main" id="{58DB3DEE-0CAC-4298-B98F-04A8EE34A1AC}"/>
               </a:ext>
             </a:extLst>
           </p:cNvPr>
@@ -3088,7 +3088,7 @@
           <p:cNvPr id="40" name="">
             <a:extLst xmlns:a="http://schemas.openxmlformats.org/drawingml/2006/main">
               <a:ext uri="{FF2B5EF4-FFF2-40B4-BE49-F238E27FC236}">
-                <a16:creationId xmlns:a16="http://schemas.microsoft.com/office/drawing/2014/main" id="{AC7ABC4B-FB8F-4A50-BCCE-B2C2A5567ED5}"/>
+                <a16:creationId xmlns:a16="http://schemas.microsoft.com/office/drawing/2014/main" id="{6343C7CB-5B1A-4829-B61F-3DC16E7597FE}"/>
               </a:ext>
             </a:extLst>
           </p:cNvPr>
@@ -3119,7 +3119,7 @@
           <p:cNvPr id="41" name="">
             <a:extLst xmlns:a="http://schemas.openxmlformats.org/drawingml/2006/main">
               <a:ext uri="{FF2B5EF4-FFF2-40B4-BE49-F238E27FC236}">
-                <a16:creationId xmlns:a16="http://schemas.microsoft.com/office/drawing/2014/main" id="{46DF6FBD-9A92-4CA2-8FFC-BE173C047943}"/>
+                <a16:creationId xmlns:a16="http://schemas.microsoft.com/office/drawing/2014/main" id="{F2651F25-08DE-42F3-B037-D99888157421}"/>
               </a:ext>
             </a:extLst>
           </p:cNvPr>
@@ -3150,7 +3150,7 @@
           <p:cNvPr id="42" name="">
             <a:extLst xmlns:a="http://schemas.openxmlformats.org/drawingml/2006/main">
               <a:ext uri="{FF2B5EF4-FFF2-40B4-BE49-F238E27FC236}">
-                <a16:creationId xmlns:a16="http://schemas.microsoft.com/office/drawing/2014/main" id="{E0B7DC9E-48F6-46A2-B79B-7E5B2FB45899}"/>
+                <a16:creationId xmlns:a16="http://schemas.microsoft.com/office/drawing/2014/main" id="{C41DF738-8397-400D-9A7A-884E0FC61F59}"/>
               </a:ext>
             </a:extLst>
           </p:cNvPr>
@@ -3181,7 +3181,7 @@
           <p:cNvPr id="43" name="">
             <a:extLst xmlns:a="http://schemas.openxmlformats.org/drawingml/2006/main">
               <a:ext uri="{FF2B5EF4-FFF2-40B4-BE49-F238E27FC236}">
-                <a16:creationId xmlns:a16="http://schemas.microsoft.com/office/drawing/2014/main" id="{41E74F6B-D193-4614-9A23-302D4DBE9249}"/>
+                <a16:creationId xmlns:a16="http://schemas.microsoft.com/office/drawing/2014/main" id="{69784C8B-D1CF-41DF-93B8-859FA8475171}"/>
               </a:ext>
             </a:extLst>
           </p:cNvPr>
@@ -3212,7 +3212,7 @@
           <p:cNvPr id="44" name="">
             <a:extLst xmlns:a="http://schemas.openxmlformats.org/drawingml/2006/main">
               <a:ext uri="{FF2B5EF4-FFF2-40B4-BE49-F238E27FC236}">
-                <a16:creationId xmlns:a16="http://schemas.microsoft.com/office/drawing/2014/main" id="{4865D49D-3BD4-45FF-903F-6058D8BB3537}"/>
+                <a16:creationId xmlns:a16="http://schemas.microsoft.com/office/drawing/2014/main" id="{99AAD991-C50A-47FA-8B3E-C0651AB8D4B5}"/>
               </a:ext>
             </a:extLst>
           </p:cNvPr>
@@ -3243,7 +3243,7 @@
           <p:cNvPr id="45" name="">
             <a:extLst xmlns:a="http://schemas.openxmlformats.org/drawingml/2006/main">
               <a:ext uri="{FF2B5EF4-FFF2-40B4-BE49-F238E27FC236}">
-                <a16:creationId xmlns:a16="http://schemas.microsoft.com/office/drawing/2014/main" id="{D6BD3CEA-0B7A-4244-B735-A4A220B124EE}"/>
+                <a16:creationId xmlns:a16="http://schemas.microsoft.com/office/drawing/2014/main" id="{EBC777FB-383E-482B-B0FB-B8EB24AAEDCF}"/>
               </a:ext>
             </a:extLst>
           </p:cNvPr>
@@ -3274,7 +3274,7 @@
           <p:cNvPr id="46" name="">
             <a:extLst xmlns:a="http://schemas.openxmlformats.org/drawingml/2006/main">
               <a:ext uri="{FF2B5EF4-FFF2-40B4-BE49-F238E27FC236}">
-                <a16:creationId xmlns:a16="http://schemas.microsoft.com/office/drawing/2014/main" id="{D9B939C6-5D19-419D-8FE2-40A411007006}"/>
+                <a16:creationId xmlns:a16="http://schemas.microsoft.com/office/drawing/2014/main" id="{0EB83B4C-375C-49C2-83AF-70E3EB9A9C42}"/>
               </a:ext>
             </a:extLst>
           </p:cNvPr>
@@ -3305,7 +3305,7 @@
           <p:cNvPr id="47" name="">
             <a:extLst xmlns:a="http://schemas.openxmlformats.org/drawingml/2006/main">
               <a:ext uri="{FF2B5EF4-FFF2-40B4-BE49-F238E27FC236}">
-                <a16:creationId xmlns:a16="http://schemas.microsoft.com/office/drawing/2014/main" id="{CB202E56-87BE-4B20-88F1-0E572A3B19CA}"/>
+                <a16:creationId xmlns:a16="http://schemas.microsoft.com/office/drawing/2014/main" id="{8DF66233-73A0-4B42-AE74-D298D749F775}"/>
               </a:ext>
             </a:extLst>
           </p:cNvPr>
@@ -3336,7 +3336,7 @@
           <p:cNvPr id="48" name="">
             <a:extLst xmlns:a="http://schemas.openxmlformats.org/drawingml/2006/main">
               <a:ext uri="{FF2B5EF4-FFF2-40B4-BE49-F238E27FC236}">
-                <a16:creationId xmlns:a16="http://schemas.microsoft.com/office/drawing/2014/main" id="{1A86117C-1B7B-479E-B1E4-CE0EA244B4A9}"/>
+                <a16:creationId xmlns:a16="http://schemas.microsoft.com/office/drawing/2014/main" id="{2841A8B5-A77C-4EE0-90CD-F5CCEE15F6DB}"/>
               </a:ext>
             </a:extLst>
           </p:cNvPr>
@@ -3367,7 +3367,7 @@
           <p:cNvPr id="49" name="">
             <a:extLst xmlns:a="http://schemas.openxmlformats.org/drawingml/2006/main">
               <a:ext uri="{FF2B5EF4-FFF2-40B4-BE49-F238E27FC236}">
-                <a16:creationId xmlns:a16="http://schemas.microsoft.com/office/drawing/2014/main" id="{1C90BA7E-6E9E-4FA9-A41E-345A9736C777}"/>
+                <a16:creationId xmlns:a16="http://schemas.microsoft.com/office/drawing/2014/main" id="{BD8F2F25-74E1-45BC-B102-12CD598E8A33}"/>
               </a:ext>
             </a:extLst>
           </p:cNvPr>
@@ -3398,7 +3398,7 @@
           <p:cNvPr id="50" name="">
             <a:extLst xmlns:a="http://schemas.openxmlformats.org/drawingml/2006/main">
               <a:ext uri="{FF2B5EF4-FFF2-40B4-BE49-F238E27FC236}">
-                <a16:creationId xmlns:a16="http://schemas.microsoft.com/office/drawing/2014/main" id="{8B10169A-791C-41A7-81CC-6F2132A6BA58}"/>
+                <a16:creationId xmlns:a16="http://schemas.microsoft.com/office/drawing/2014/main" id="{51C02E8E-9045-41B0-8F93-C0A807115A6E}"/>
               </a:ext>
             </a:extLst>
           </p:cNvPr>
@@ -3429,7 +3429,7 @@
           <p:cNvPr id="51" name="">
             <a:extLst xmlns:a="http://schemas.openxmlformats.org/drawingml/2006/main">
               <a:ext uri="{FF2B5EF4-FFF2-40B4-BE49-F238E27FC236}">
-                <a16:creationId xmlns:a16="http://schemas.microsoft.com/office/drawing/2014/main" id="{EBE5AA9D-B3C2-48D9-9CC5-15046322D6BD}"/>
+                <a16:creationId xmlns:a16="http://schemas.microsoft.com/office/drawing/2014/main" id="{790EB3A7-EA56-4129-A7AC-BAE609FF21D4}"/>
               </a:ext>
             </a:extLst>
           </p:cNvPr>
@@ -3460,7 +3460,7 @@
           <p:cNvPr id="52" name="">
             <a:extLst xmlns:a="http://schemas.openxmlformats.org/drawingml/2006/main">
               <a:ext uri="{FF2B5EF4-FFF2-40B4-BE49-F238E27FC236}">
-                <a16:creationId xmlns:a16="http://schemas.microsoft.com/office/drawing/2014/main" id="{6B75B4CB-35B3-447D-92CE-8AC0C26D1ED8}"/>
+                <a16:creationId xmlns:a16="http://schemas.microsoft.com/office/drawing/2014/main" id="{866EFA73-DD59-44E1-BFD5-E3BDC0CAB06D}"/>
               </a:ext>
             </a:extLst>
           </p:cNvPr>
@@ -3491,7 +3491,7 @@
           <p:cNvPr id="53" name="">
             <a:extLst xmlns:a="http://schemas.openxmlformats.org/drawingml/2006/main">
               <a:ext uri="{FF2B5EF4-FFF2-40B4-BE49-F238E27FC236}">
-                <a16:creationId xmlns:a16="http://schemas.microsoft.com/office/drawing/2014/main" id="{927C0DD1-9F98-4152-9086-41BD29B6E554}"/>
+                <a16:creationId xmlns:a16="http://schemas.microsoft.com/office/drawing/2014/main" id="{AE9D1CC8-F60B-4006-9D68-920538016F65}"/>
               </a:ext>
             </a:extLst>
           </p:cNvPr>
@@ -3522,7 +3522,7 @@
           <p:cNvPr id="54" name="">
             <a:extLst xmlns:a="http://schemas.openxmlformats.org/drawingml/2006/main">
               <a:ext uri="{FF2B5EF4-FFF2-40B4-BE49-F238E27FC236}">
-                <a16:creationId xmlns:a16="http://schemas.microsoft.com/office/drawing/2014/main" id="{8DFDB96B-9A19-46A0-BF2C-1583EC5AE59E}"/>
+                <a16:creationId xmlns:a16="http://schemas.microsoft.com/office/drawing/2014/main" id="{85C2246F-9511-40E6-AF86-241463A31B56}"/>
               </a:ext>
             </a:extLst>
           </p:cNvPr>
@@ -3553,7 +3553,7 @@
           <p:cNvPr id="55" name="">
             <a:extLst xmlns:a="http://schemas.openxmlformats.org/drawingml/2006/main">
               <a:ext uri="{FF2B5EF4-FFF2-40B4-BE49-F238E27FC236}">
-                <a16:creationId xmlns:a16="http://schemas.microsoft.com/office/drawing/2014/main" id="{429B908B-6566-4138-AB5A-9C87A6B0DB94}"/>
+                <a16:creationId xmlns:a16="http://schemas.microsoft.com/office/drawing/2014/main" id="{C5845B35-7B89-4EF5-AF9B-E395E62B474E}"/>
               </a:ext>
             </a:extLst>
           </p:cNvPr>
@@ -3584,7 +3584,7 @@
           <p:cNvPr id="56" name="">
             <a:extLst xmlns:a="http://schemas.openxmlformats.org/drawingml/2006/main">
               <a:ext uri="{FF2B5EF4-FFF2-40B4-BE49-F238E27FC236}">
-                <a16:creationId xmlns:a16="http://schemas.microsoft.com/office/drawing/2014/main" id="{80B433C6-BF3B-475C-AF4C-0E0E01E8DF71}"/>
+                <a16:creationId xmlns:a16="http://schemas.microsoft.com/office/drawing/2014/main" id="{3678F9D2-03BD-4A5A-9128-285846B6A5CD}"/>
               </a:ext>
             </a:extLst>
           </p:cNvPr>
@@ -3615,7 +3615,7 @@
           <p:cNvPr id="57" name="">
             <a:extLst xmlns:a="http://schemas.openxmlformats.org/drawingml/2006/main">
               <a:ext uri="{FF2B5EF4-FFF2-40B4-BE49-F238E27FC236}">
-                <a16:creationId xmlns:a16="http://schemas.microsoft.com/office/drawing/2014/main" id="{360BE7DD-2A24-492F-8C1E-C58C94FA69D4}"/>
+                <a16:creationId xmlns:a16="http://schemas.microsoft.com/office/drawing/2014/main" id="{62BE7345-828C-4FE0-BA90-968B2733702F}"/>
               </a:ext>
             </a:extLst>
           </p:cNvPr>
@@ -3646,7 +3646,7 @@
           <p:cNvPr id="58" name="">
             <a:extLst xmlns:a="http://schemas.openxmlformats.org/drawingml/2006/main">
               <a:ext uri="{FF2B5EF4-FFF2-40B4-BE49-F238E27FC236}">
-                <a16:creationId xmlns:a16="http://schemas.microsoft.com/office/drawing/2014/main" id="{7F3EBBC0-D5E6-48E3-9885-8B825C4F37A2}"/>
+                <a16:creationId xmlns:a16="http://schemas.microsoft.com/office/drawing/2014/main" id="{7067CBD7-0435-4B42-86E0-1ACA7EE7F39F}"/>
               </a:ext>
             </a:extLst>
           </p:cNvPr>
@@ -3677,7 +3677,7 @@
           <p:cNvPr id="59" name="">
             <a:extLst xmlns:a="http://schemas.openxmlformats.org/drawingml/2006/main">
               <a:ext uri="{FF2B5EF4-FFF2-40B4-BE49-F238E27FC236}">
-                <a16:creationId xmlns:a16="http://schemas.microsoft.com/office/drawing/2014/main" id="{8280D031-A5A1-4FA9-8C3C-4477D3E06AEA}"/>
+                <a16:creationId xmlns:a16="http://schemas.microsoft.com/office/drawing/2014/main" id="{6BE01E61-D898-4C98-A220-56B6EC7B205E}"/>
               </a:ext>
             </a:extLst>
           </p:cNvPr>
@@ -3708,7 +3708,7 @@
           <p:cNvPr id="60" name="">
             <a:extLst xmlns:a="http://schemas.openxmlformats.org/drawingml/2006/main">
               <a:ext uri="{FF2B5EF4-FFF2-40B4-BE49-F238E27FC236}">
-                <a16:creationId xmlns:a16="http://schemas.microsoft.com/office/drawing/2014/main" id="{C951F324-3987-434F-AED1-14B2FB471031}"/>
+                <a16:creationId xmlns:a16="http://schemas.microsoft.com/office/drawing/2014/main" id="{E01EC8AD-5A9C-48F3-801C-0B2210041623}"/>
               </a:ext>
             </a:extLst>
           </p:cNvPr>
@@ -3739,7 +3739,7 @@
           <p:cNvPr id="61" name="">
             <a:extLst xmlns:a="http://schemas.openxmlformats.org/drawingml/2006/main">
               <a:ext uri="{FF2B5EF4-FFF2-40B4-BE49-F238E27FC236}">
-                <a16:creationId xmlns:a16="http://schemas.microsoft.com/office/drawing/2014/main" id="{3B0E78EA-FCE5-40D0-9DDE-CCE6603380FF}"/>
+                <a16:creationId xmlns:a16="http://schemas.microsoft.com/office/drawing/2014/main" id="{B11C20E4-4578-4367-93CA-4E64FCC76DCD}"/>
               </a:ext>
             </a:extLst>
           </p:cNvPr>
@@ -3770,7 +3770,7 @@
           <p:cNvPr id="62" name="">
             <a:extLst xmlns:a="http://schemas.openxmlformats.org/drawingml/2006/main">
               <a:ext uri="{FF2B5EF4-FFF2-40B4-BE49-F238E27FC236}">
-                <a16:creationId xmlns:a16="http://schemas.microsoft.com/office/drawing/2014/main" id="{2558F6DA-1C31-4E0B-957C-705B17ABAE4E}"/>
+                <a16:creationId xmlns:a16="http://schemas.microsoft.com/office/drawing/2014/main" id="{04138D31-F8BD-46C9-9115-38515E62358D}"/>
               </a:ext>
             </a:extLst>
           </p:cNvPr>
@@ -3801,7 +3801,7 @@
           <p:cNvPr id="63" name="">
             <a:extLst xmlns:a="http://schemas.openxmlformats.org/drawingml/2006/main">
               <a:ext uri="{FF2B5EF4-FFF2-40B4-BE49-F238E27FC236}">
-                <a16:creationId xmlns:a16="http://schemas.microsoft.com/office/drawing/2014/main" id="{8236B4BE-E5D9-416A-8CE9-AED6225B1595}"/>
+                <a16:creationId xmlns:a16="http://schemas.microsoft.com/office/drawing/2014/main" id="{48C647C5-E27E-4E36-9042-3685ED12521E}"/>
               </a:ext>
             </a:extLst>
           </p:cNvPr>
@@ -3832,7 +3832,7 @@
           <p:cNvPr id="64" name="">
             <a:extLst xmlns:a="http://schemas.openxmlformats.org/drawingml/2006/main">
               <a:ext uri="{FF2B5EF4-FFF2-40B4-BE49-F238E27FC236}">
-                <a16:creationId xmlns:a16="http://schemas.microsoft.com/office/drawing/2014/main" id="{01D90339-2FA8-4F2A-B75C-F4B653BCD652}"/>
+                <a16:creationId xmlns:a16="http://schemas.microsoft.com/office/drawing/2014/main" id="{4193F8D7-A846-40EB-B40C-6D463B4C82CA}"/>
               </a:ext>
             </a:extLst>
           </p:cNvPr>
@@ -3863,7 +3863,7 @@
           <p:cNvPr id="65" name="">
             <a:extLst xmlns:a="http://schemas.openxmlformats.org/drawingml/2006/main">
               <a:ext uri="{FF2B5EF4-FFF2-40B4-BE49-F238E27FC236}">
-                <a16:creationId xmlns:a16="http://schemas.microsoft.com/office/drawing/2014/main" id="{F52E9C81-4FAE-4D87-8A38-84200D35C8D8}"/>
+                <a16:creationId xmlns:a16="http://schemas.microsoft.com/office/drawing/2014/main" id="{72DA1ED7-3469-4414-9C64-99DDFA4600FB}"/>
               </a:ext>
             </a:extLst>
           </p:cNvPr>
@@ -3894,7 +3894,7 @@
           <p:cNvPr id="66" name="">
             <a:extLst xmlns:a="http://schemas.openxmlformats.org/drawingml/2006/main">
               <a:ext uri="{FF2B5EF4-FFF2-40B4-BE49-F238E27FC236}">
-                <a16:creationId xmlns:a16="http://schemas.microsoft.com/office/drawing/2014/main" id="{A3C03D50-7F29-4904-B8F2-66706778EB39}"/>
+                <a16:creationId xmlns:a16="http://schemas.microsoft.com/office/drawing/2014/main" id="{7C78A8E7-C3A8-451A-BD98-0FF028FBE2BC}"/>
               </a:ext>
             </a:extLst>
           </p:cNvPr>
@@ -3925,7 +3925,7 @@
           <p:cNvPr id="67" name="">
             <a:extLst xmlns:a="http://schemas.openxmlformats.org/drawingml/2006/main">
               <a:ext uri="{FF2B5EF4-FFF2-40B4-BE49-F238E27FC236}">
-                <a16:creationId xmlns:a16="http://schemas.microsoft.com/office/drawing/2014/main" id="{311FB72B-1158-4BCA-9598-02B8A75ADB10}"/>
+                <a16:creationId xmlns:a16="http://schemas.microsoft.com/office/drawing/2014/main" id="{41DDA0C7-273E-4547-B1CC-7A1F7C994CA7}"/>
               </a:ext>
             </a:extLst>
           </p:cNvPr>
@@ -3956,7 +3956,7 @@
           <p:cNvPr id="68" name="">
             <a:extLst xmlns:a="http://schemas.openxmlformats.org/drawingml/2006/main">
               <a:ext uri="{FF2B5EF4-FFF2-40B4-BE49-F238E27FC236}">
-                <a16:creationId xmlns:a16="http://schemas.microsoft.com/office/drawing/2014/main" id="{99D763F2-826E-4423-AA04-18CFDAB92468}"/>
+                <a16:creationId xmlns:a16="http://schemas.microsoft.com/office/drawing/2014/main" id="{16C2F520-D1A7-4ED8-9C2F-0985E747B957}"/>
               </a:ext>
             </a:extLst>
           </p:cNvPr>
@@ -3987,7 +3987,7 @@
           <p:cNvPr id="69" name="">
             <a:extLst xmlns:a="http://schemas.openxmlformats.org/drawingml/2006/main">
               <a:ext uri="{FF2B5EF4-FFF2-40B4-BE49-F238E27FC236}">
-                <a16:creationId xmlns:a16="http://schemas.microsoft.com/office/drawing/2014/main" id="{41D5B9EE-D742-4ADF-A5E1-D09FFB6BC2F1}"/>
+                <a16:creationId xmlns:a16="http://schemas.microsoft.com/office/drawing/2014/main" id="{BEEFA35C-D4C4-4207-B74F-D87D3793227E}"/>
               </a:ext>
             </a:extLst>
           </p:cNvPr>
@@ -4018,7 +4018,7 @@
           <p:cNvPr id="70" name="">
             <a:extLst xmlns:a="http://schemas.openxmlformats.org/drawingml/2006/main">
               <a:ext uri="{FF2B5EF4-FFF2-40B4-BE49-F238E27FC236}">
-                <a16:creationId xmlns:a16="http://schemas.microsoft.com/office/drawing/2014/main" id="{F52B6631-E0F4-4F85-9959-3BE6F1C621B2}"/>
+                <a16:creationId xmlns:a16="http://schemas.microsoft.com/office/drawing/2014/main" id="{C7200AD7-2CDD-40A1-A86D-30221AC860CD}"/>
               </a:ext>
             </a:extLst>
           </p:cNvPr>
@@ -4049,7 +4049,7 @@
           <p:cNvPr id="71" name="">
             <a:extLst xmlns:a="http://schemas.openxmlformats.org/drawingml/2006/main">
               <a:ext uri="{FF2B5EF4-FFF2-40B4-BE49-F238E27FC236}">
-                <a16:creationId xmlns:a16="http://schemas.microsoft.com/office/drawing/2014/main" id="{A1A18D26-6B3C-430B-9A61-3D55142FFC60}"/>
+                <a16:creationId xmlns:a16="http://schemas.microsoft.com/office/drawing/2014/main" id="{08717B62-511F-4615-BF8E-60B681A39F7B}"/>
               </a:ext>
             </a:extLst>
           </p:cNvPr>
@@ -4080,7 +4080,7 @@
           <p:cNvPr id="72" name="">
             <a:extLst xmlns:a="http://schemas.openxmlformats.org/drawingml/2006/main">
               <a:ext uri="{FF2B5EF4-FFF2-40B4-BE49-F238E27FC236}">
-                <a16:creationId xmlns:a16="http://schemas.microsoft.com/office/drawing/2014/main" id="{2B567EE2-526A-4CCF-B2B6-6FC2721D7ABB}"/>
+                <a16:creationId xmlns:a16="http://schemas.microsoft.com/office/drawing/2014/main" id="{86789E18-05C6-41FB-8F61-7A256138A243}"/>
               </a:ext>
             </a:extLst>
           </p:cNvPr>
@@ -4113,7 +4113,7 @@
           <p:cNvPr id="73" name="">
             <a:extLst xmlns:a="http://schemas.openxmlformats.org/drawingml/2006/main">
               <a:ext uri="{FF2B5EF4-FFF2-40B4-BE49-F238E27FC236}">
-                <a16:creationId xmlns:a16="http://schemas.microsoft.com/office/drawing/2014/main" id="{9A237FE7-27EF-4A02-A00B-ACD37EEA431B}"/>
+                <a16:creationId xmlns:a16="http://schemas.microsoft.com/office/drawing/2014/main" id="{3AAB9EA7-30BD-4E4B-8463-1FE28C7D4543}"/>
               </a:ext>
             </a:extLst>
           </p:cNvPr>
@@ -4144,7 +4144,7 @@
           <p:cNvPr id="74" name="">
             <a:extLst xmlns:a="http://schemas.openxmlformats.org/drawingml/2006/main">
               <a:ext uri="{FF2B5EF4-FFF2-40B4-BE49-F238E27FC236}">
-                <a16:creationId xmlns:a16="http://schemas.microsoft.com/office/drawing/2014/main" id="{01D93A48-7F5C-46CF-A8A1-9105CA22080E}"/>
+                <a16:creationId xmlns:a16="http://schemas.microsoft.com/office/drawing/2014/main" id="{8C36DF3C-17F9-40A3-9F8F-BD5CBAAAB5AF}"/>
               </a:ext>
             </a:extLst>
           </p:cNvPr>
@@ -4175,7 +4175,7 @@
           <p:cNvPr id="75" name="">
             <a:extLst xmlns:a="http://schemas.openxmlformats.org/drawingml/2006/main">
               <a:ext uri="{FF2B5EF4-FFF2-40B4-BE49-F238E27FC236}">
-                <a16:creationId xmlns:a16="http://schemas.microsoft.com/office/drawing/2014/main" id="{E5CB0742-8CC1-4847-B2DF-7E89E49642B4}"/>
+                <a16:creationId xmlns:a16="http://schemas.microsoft.com/office/drawing/2014/main" id="{C8FC6E22-05DF-4E55-8074-5D08E7D927F0}"/>
               </a:ext>
             </a:extLst>
           </p:cNvPr>
@@ -4206,7 +4206,7 @@
           <p:cNvPr id="76" name="">
             <a:extLst xmlns:a="http://schemas.openxmlformats.org/drawingml/2006/main">
               <a:ext uri="{FF2B5EF4-FFF2-40B4-BE49-F238E27FC236}">
-                <a16:creationId xmlns:a16="http://schemas.microsoft.com/office/drawing/2014/main" id="{3537FB86-35C5-41A6-A949-1521364A2279}"/>
+                <a16:creationId xmlns:a16="http://schemas.microsoft.com/office/drawing/2014/main" id="{C23CD450-2BA3-4B0A-AF2C-17D4CFCDA224}"/>
               </a:ext>
             </a:extLst>
           </p:cNvPr>
@@ -4237,7 +4237,7 @@
           <p:cNvPr id="77" name="">
             <a:extLst xmlns:a="http://schemas.openxmlformats.org/drawingml/2006/main">
               <a:ext uri="{FF2B5EF4-FFF2-40B4-BE49-F238E27FC236}">
-                <a16:creationId xmlns:a16="http://schemas.microsoft.com/office/drawing/2014/main" id="{A5ACC265-32F0-4F01-A47D-E0A8B8C5F10B}"/>
+                <a16:creationId xmlns:a16="http://schemas.microsoft.com/office/drawing/2014/main" id="{3D45EEB3-D003-4AA7-BA54-5FAA50DF2A90}"/>
               </a:ext>
             </a:extLst>
           </p:cNvPr>
@@ -4268,7 +4268,7 @@
           <p:cNvPr id="78" name="">
             <a:extLst xmlns:a="http://schemas.openxmlformats.org/drawingml/2006/main">
               <a:ext uri="{FF2B5EF4-FFF2-40B4-BE49-F238E27FC236}">
-                <a16:creationId xmlns:a16="http://schemas.microsoft.com/office/drawing/2014/main" id="{52D50E16-C629-4BD9-95F0-CDAE3927DDB9}"/>
+                <a16:creationId xmlns:a16="http://schemas.microsoft.com/office/drawing/2014/main" id="{6ADD8FDB-11B7-42E2-9B6E-67577B725BFE}"/>
               </a:ext>
             </a:extLst>
           </p:cNvPr>
@@ -4299,7 +4299,7 @@
           <p:cNvPr id="79" name="">
             <a:extLst xmlns:a="http://schemas.openxmlformats.org/drawingml/2006/main">
               <a:ext uri="{FF2B5EF4-FFF2-40B4-BE49-F238E27FC236}">
-                <a16:creationId xmlns:a16="http://schemas.microsoft.com/office/drawing/2014/main" id="{D5FE6F31-CC4D-4512-A153-7B1D45AF1E22}"/>
+                <a16:creationId xmlns:a16="http://schemas.microsoft.com/office/drawing/2014/main" id="{69EE6091-B305-4B0E-97D0-7CD7C6734DDF}"/>
               </a:ext>
             </a:extLst>
           </p:cNvPr>
@@ -4330,7 +4330,7 @@
           <p:cNvPr id="80" name="">
             <a:extLst xmlns:a="http://schemas.openxmlformats.org/drawingml/2006/main">
               <a:ext uri="{FF2B5EF4-FFF2-40B4-BE49-F238E27FC236}">
-                <a16:creationId xmlns:a16="http://schemas.microsoft.com/office/drawing/2014/main" id="{A68ABF38-4DE5-4B05-B3E6-C176743B4F15}"/>
+                <a16:creationId xmlns:a16="http://schemas.microsoft.com/office/drawing/2014/main" id="{76E40D7F-BF96-4B86-A523-CCE35658218A}"/>
               </a:ext>
             </a:extLst>
           </p:cNvPr>
@@ -4361,7 +4361,7 @@
           <p:cNvPr id="81" name="">
             <a:extLst xmlns:a="http://schemas.openxmlformats.org/drawingml/2006/main">
               <a:ext uri="{FF2B5EF4-FFF2-40B4-BE49-F238E27FC236}">
-                <a16:creationId xmlns:a16="http://schemas.microsoft.com/office/drawing/2014/main" id="{ABC7E907-54AC-471C-A5F3-75CA57205A57}"/>
+                <a16:creationId xmlns:a16="http://schemas.microsoft.com/office/drawing/2014/main" id="{0664D3E8-2937-4FBE-8E3B-2B2E344C3D8D}"/>
               </a:ext>
             </a:extLst>
           </p:cNvPr>
@@ -4392,7 +4392,7 @@
           <p:cNvPr id="82" name="">
             <a:extLst xmlns:a="http://schemas.openxmlformats.org/drawingml/2006/main">
               <a:ext uri="{FF2B5EF4-FFF2-40B4-BE49-F238E27FC236}">
-                <a16:creationId xmlns:a16="http://schemas.microsoft.com/office/drawing/2014/main" id="{9ED7E809-7B40-4CEF-B524-629DAA21479E}"/>
+                <a16:creationId xmlns:a16="http://schemas.microsoft.com/office/drawing/2014/main" id="{2D8D7D85-8DAC-41E0-873D-9A0E415F1B14}"/>
               </a:ext>
             </a:extLst>
           </p:cNvPr>
@@ -4423,7 +4423,7 @@
           <p:cNvPr id="83" name="">
             <a:extLst xmlns:a="http://schemas.openxmlformats.org/drawingml/2006/main">
               <a:ext uri="{FF2B5EF4-FFF2-40B4-BE49-F238E27FC236}">
-                <a16:creationId xmlns:a16="http://schemas.microsoft.com/office/drawing/2014/main" id="{49A58359-E40E-4071-BA24-4B830348215B}"/>
+                <a16:creationId xmlns:a16="http://schemas.microsoft.com/office/drawing/2014/main" id="{0007BF7E-54CA-48C9-AB12-B407AD9BD421}"/>
               </a:ext>
             </a:extLst>
           </p:cNvPr>
@@ -4454,7 +4454,7 @@
           <p:cNvPr id="84" name="">
             <a:extLst xmlns:a="http://schemas.openxmlformats.org/drawingml/2006/main">
               <a:ext uri="{FF2B5EF4-FFF2-40B4-BE49-F238E27FC236}">
-                <a16:creationId xmlns:a16="http://schemas.microsoft.com/office/drawing/2014/main" id="{2DEA6AE9-84D3-4FA1-B072-46C717BC3DC2}"/>
+                <a16:creationId xmlns:a16="http://schemas.microsoft.com/office/drawing/2014/main" id="{C54F278E-D2EF-4EDD-9DC5-EFBEC3003573}"/>
               </a:ext>
             </a:extLst>
           </p:cNvPr>
@@ -4485,7 +4485,7 @@
           <p:cNvPr id="85" name="">
             <a:extLst xmlns:a="http://schemas.openxmlformats.org/drawingml/2006/main">
               <a:ext uri="{FF2B5EF4-FFF2-40B4-BE49-F238E27FC236}">
-                <a16:creationId xmlns:a16="http://schemas.microsoft.com/office/drawing/2014/main" id="{FD76F55E-8C28-418D-838B-9D2C7F96722F}"/>
+                <a16:creationId xmlns:a16="http://schemas.microsoft.com/office/drawing/2014/main" id="{A1892A7E-F357-4CF3-AE30-4581689E0751}"/>
               </a:ext>
             </a:extLst>
           </p:cNvPr>
@@ -4516,7 +4516,7 @@
           <p:cNvPr id="86" name="">
             <a:extLst xmlns:a="http://schemas.openxmlformats.org/drawingml/2006/main">
               <a:ext uri="{FF2B5EF4-FFF2-40B4-BE49-F238E27FC236}">
-                <a16:creationId xmlns:a16="http://schemas.microsoft.com/office/drawing/2014/main" id="{E550EFC2-1623-4CA4-B310-542F353BE3B7}"/>
+                <a16:creationId xmlns:a16="http://schemas.microsoft.com/office/drawing/2014/main" id="{EA3F85E0-6395-4556-A6B3-08394D21F454}"/>
               </a:ext>
             </a:extLst>
           </p:cNvPr>
@@ -4547,7 +4547,7 @@
           <p:cNvPr id="87" name="">
             <a:extLst xmlns:a="http://schemas.openxmlformats.org/drawingml/2006/main">
               <a:ext uri="{FF2B5EF4-FFF2-40B4-BE49-F238E27FC236}">
-                <a16:creationId xmlns:a16="http://schemas.microsoft.com/office/drawing/2014/main" id="{706B6347-D2E1-4CD3-8F1C-68FE580D1202}"/>
+                <a16:creationId xmlns:a16="http://schemas.microsoft.com/office/drawing/2014/main" id="{FE356BC7-6A7F-4DA8-8B97-BC7F20389743}"/>
               </a:ext>
             </a:extLst>
           </p:cNvPr>
@@ -4578,7 +4578,7 @@
           <p:cNvPr id="88" name="">
             <a:extLst xmlns:a="http://schemas.openxmlformats.org/drawingml/2006/main">
               <a:ext uri="{FF2B5EF4-FFF2-40B4-BE49-F238E27FC236}">
-                <a16:creationId xmlns:a16="http://schemas.microsoft.com/office/drawing/2014/main" id="{B303FC14-5765-4DC5-8687-EA9B594E68DC}"/>
+                <a16:creationId xmlns:a16="http://schemas.microsoft.com/office/drawing/2014/main" id="{B8ED0B4C-79A6-458C-966C-05B94AB6FFB1}"/>
               </a:ext>
             </a:extLst>
           </p:cNvPr>
@@ -4609,7 +4609,7 @@
           <p:cNvPr id="89" name="">
             <a:extLst xmlns:a="http://schemas.openxmlformats.org/drawingml/2006/main">
               <a:ext uri="{FF2B5EF4-FFF2-40B4-BE49-F238E27FC236}">
-                <a16:creationId xmlns:a16="http://schemas.microsoft.com/office/drawing/2014/main" id="{6DAC180F-D169-4447-AF26-6F7C9A82F2B9}"/>
+                <a16:creationId xmlns:a16="http://schemas.microsoft.com/office/drawing/2014/main" id="{BA1FBEC7-B814-46AF-BB5C-0784A79C7C4C}"/>
               </a:ext>
             </a:extLst>
           </p:cNvPr>
@@ -4640,7 +4640,7 @@
           <p:cNvPr id="90" name="">
             <a:extLst xmlns:a="http://schemas.openxmlformats.org/drawingml/2006/main">
               <a:ext uri="{FF2B5EF4-FFF2-40B4-BE49-F238E27FC236}">
-                <a16:creationId xmlns:a16="http://schemas.microsoft.com/office/drawing/2014/main" id="{B5B789A4-DE40-45F5-B463-E2BAB91653EC}"/>
+                <a16:creationId xmlns:a16="http://schemas.microsoft.com/office/drawing/2014/main" id="{5440BAC8-C0D4-4D9E-B84A-E70E4ACBAFB0}"/>
               </a:ext>
             </a:extLst>
           </p:cNvPr>
@@ -4685,7 +4685,7 @@
           <p:cNvPr id="91" name="">
             <a:extLst xmlns:a="http://schemas.openxmlformats.org/drawingml/2006/main">
               <a:ext uri="{FF2B5EF4-FFF2-40B4-BE49-F238E27FC236}">
-                <a16:creationId xmlns:a16="http://schemas.microsoft.com/office/drawing/2014/main" id="{2C403946-4497-4A34-934C-B4F3105EE303}"/>
+                <a16:creationId xmlns:a16="http://schemas.microsoft.com/office/drawing/2014/main" id="{D6F5D07E-EDD4-4C76-B3E5-58999EE6EE3D}"/>
               </a:ext>
             </a:extLst>
           </p:cNvPr>
@@ -4716,7 +4716,7 @@
           <p:cNvPr id="92" name="">
             <a:extLst xmlns:a="http://schemas.openxmlformats.org/drawingml/2006/main">
               <a:ext uri="{FF2B5EF4-FFF2-40B4-BE49-F238E27FC236}">
-                <a16:creationId xmlns:a16="http://schemas.microsoft.com/office/drawing/2014/main" id="{C97BD8E1-11C5-42D1-9FF3-AD7BF28DDE50}"/>
+                <a16:creationId xmlns:a16="http://schemas.microsoft.com/office/drawing/2014/main" id="{6E7529F7-9FE8-4E25-82EB-F41C41624812}"/>
               </a:ext>
             </a:extLst>
           </p:cNvPr>
@@ -4761,7 +4761,7 @@
           <p:cNvPr id="93" name="">
             <a:extLst xmlns:a="http://schemas.openxmlformats.org/drawingml/2006/main">
               <a:ext uri="{FF2B5EF4-FFF2-40B4-BE49-F238E27FC236}">
-                <a16:creationId xmlns:a16="http://schemas.microsoft.com/office/drawing/2014/main" id="{1F35FA15-2373-44E4-B011-A08FCFDE769D}"/>
+                <a16:creationId xmlns:a16="http://schemas.microsoft.com/office/drawing/2014/main" id="{37550D80-491C-4736-B1DE-BBC9DBA5CFA6}"/>
               </a:ext>
             </a:extLst>
           </p:cNvPr>
@@ -4806,7 +4806,7 @@
           <p:cNvPr id="94" name="">
             <a:extLst xmlns:a="http://schemas.openxmlformats.org/drawingml/2006/main">
               <a:ext uri="{FF2B5EF4-FFF2-40B4-BE49-F238E27FC236}">
-                <a16:creationId xmlns:a16="http://schemas.microsoft.com/office/drawing/2014/main" id="{0FF67F26-D6E7-4489-A9DD-3287CA5EB165}"/>
+                <a16:creationId xmlns:a16="http://schemas.microsoft.com/office/drawing/2014/main" id="{41FF0CDA-0D63-46E3-83CE-F403C3979F9E}"/>
               </a:ext>
             </a:extLst>
           </p:cNvPr>
@@ -4837,7 +4837,7 @@
           <p:cNvPr id="95" name="">
             <a:extLst xmlns:a="http://schemas.openxmlformats.org/drawingml/2006/main">
               <a:ext uri="{FF2B5EF4-FFF2-40B4-BE49-F238E27FC236}">
-                <a16:creationId xmlns:a16="http://schemas.microsoft.com/office/drawing/2014/main" id="{CFC522EA-62C8-4EFF-B526-F41EFE7C8B98}"/>
+                <a16:creationId xmlns:a16="http://schemas.microsoft.com/office/drawing/2014/main" id="{A8527A73-9456-48A8-9B53-07712F1ACD79}"/>
               </a:ext>
             </a:extLst>
           </p:cNvPr>
@@ -4882,7 +4882,7 @@
           <p:cNvPr id="96" name="">
             <a:extLst xmlns:a="http://schemas.openxmlformats.org/drawingml/2006/main">
               <a:ext uri="{FF2B5EF4-FFF2-40B4-BE49-F238E27FC236}">
-                <a16:creationId xmlns:a16="http://schemas.microsoft.com/office/drawing/2014/main" id="{CB389523-AB74-4ADB-9BE1-79B91708EA9A}"/>
+                <a16:creationId xmlns:a16="http://schemas.microsoft.com/office/drawing/2014/main" id="{77A0839B-1ADB-4766-ADC4-BE77A1DE2B70}"/>
               </a:ext>
             </a:extLst>
           </p:cNvPr>
@@ -4927,7 +4927,7 @@
           <p:cNvPr id="97" name="">
             <a:extLst xmlns:a="http://schemas.openxmlformats.org/drawingml/2006/main">
               <a:ext uri="{FF2B5EF4-FFF2-40B4-BE49-F238E27FC236}">
-                <a16:creationId xmlns:a16="http://schemas.microsoft.com/office/drawing/2014/main" id="{1427BDB9-D40B-40C8-BF70-4989D59586C0}"/>
+                <a16:creationId xmlns:a16="http://schemas.microsoft.com/office/drawing/2014/main" id="{B91C9149-5AFF-43F5-9D5D-24A92E19C17E}"/>
               </a:ext>
             </a:extLst>
           </p:cNvPr>
@@ -4958,7 +4958,7 @@
           <p:cNvPr id="98" name="">
             <a:extLst xmlns:a="http://schemas.openxmlformats.org/drawingml/2006/main">
               <a:ext uri="{FF2B5EF4-FFF2-40B4-BE49-F238E27FC236}">
-                <a16:creationId xmlns:a16="http://schemas.microsoft.com/office/drawing/2014/main" id="{D2A13369-88C2-4108-B0E5-1DE656EDA50E}"/>
+                <a16:creationId xmlns:a16="http://schemas.microsoft.com/office/drawing/2014/main" id="{9943041A-5015-49A8-88B9-29C2F0A90C03}"/>
               </a:ext>
             </a:extLst>
           </p:cNvPr>
@@ -5003,7 +5003,7 @@
           <p:cNvPr id="99" name="">
             <a:extLst xmlns:a="http://schemas.openxmlformats.org/drawingml/2006/main">
               <a:ext uri="{FF2B5EF4-FFF2-40B4-BE49-F238E27FC236}">
-                <a16:creationId xmlns:a16="http://schemas.microsoft.com/office/drawing/2014/main" id="{FC8BBE6A-F7ED-4E52-8B24-B3C20D5EF29A}"/>
+                <a16:creationId xmlns:a16="http://schemas.microsoft.com/office/drawing/2014/main" id="{1C634A3F-C9E6-484D-A06D-2AD33337EDC5}"/>
               </a:ext>
             </a:extLst>
           </p:cNvPr>
@@ -5048,7 +5048,7 @@
           <p:cNvPr id="100" name="">
             <a:extLst xmlns:a="http://schemas.openxmlformats.org/drawingml/2006/main">
               <a:ext uri="{FF2B5EF4-FFF2-40B4-BE49-F238E27FC236}">
-                <a16:creationId xmlns:a16="http://schemas.microsoft.com/office/drawing/2014/main" id="{560DA25E-00B9-4342-8E75-062B7EE758AE}"/>
+                <a16:creationId xmlns:a16="http://schemas.microsoft.com/office/drawing/2014/main" id="{B3203F92-28DC-4894-BBEA-00EB994BAC98}"/>
               </a:ext>
             </a:extLst>
           </p:cNvPr>
@@ -5079,7 +5079,7 @@
           <p:cNvPr id="101" name="">
             <a:extLst xmlns:a="http://schemas.openxmlformats.org/drawingml/2006/main">
               <a:ext uri="{FF2B5EF4-FFF2-40B4-BE49-F238E27FC236}">
-                <a16:creationId xmlns:a16="http://schemas.microsoft.com/office/drawing/2014/main" id="{F15E3186-B13B-4E07-9AED-F848B748DE74}"/>
+                <a16:creationId xmlns:a16="http://schemas.microsoft.com/office/drawing/2014/main" id="{FF21FEF6-24C7-460C-8F96-8D778170CFEB}"/>
               </a:ext>
             </a:extLst>
           </p:cNvPr>
@@ -5124,7 +5124,7 @@
           <p:cNvPr id="102" name="">
             <a:extLst xmlns:a="http://schemas.openxmlformats.org/drawingml/2006/main">
               <a:ext uri="{FF2B5EF4-FFF2-40B4-BE49-F238E27FC236}">
-                <a16:creationId xmlns:a16="http://schemas.microsoft.com/office/drawing/2014/main" id="{D5A1C4BA-AC92-4569-B4F2-89F3C6C0E8D2}"/>
+                <a16:creationId xmlns:a16="http://schemas.microsoft.com/office/drawing/2014/main" id="{92DB3808-727F-4A5E-91ED-A34D3F1C72F0}"/>
               </a:ext>
             </a:extLst>
           </p:cNvPr>
@@ -5169,7 +5169,7 @@
           <p:cNvPr id="103" name="">
             <a:extLst xmlns:a="http://schemas.openxmlformats.org/drawingml/2006/main">
               <a:ext uri="{FF2B5EF4-FFF2-40B4-BE49-F238E27FC236}">
-                <a16:creationId xmlns:a16="http://schemas.microsoft.com/office/drawing/2014/main" id="{AEA3CFF9-A10D-4894-AF1C-D544F8647BED}"/>
+                <a16:creationId xmlns:a16="http://schemas.microsoft.com/office/drawing/2014/main" id="{53953B63-6062-4B50-BC36-C6024937B0B8}"/>
               </a:ext>
             </a:extLst>
           </p:cNvPr>
@@ -5214,7 +5214,7 @@
           <p:cNvPr id="104" name="">
             <a:extLst xmlns:a="http://schemas.openxmlformats.org/drawingml/2006/main">
               <a:ext uri="{FF2B5EF4-FFF2-40B4-BE49-F238E27FC236}">
-                <a16:creationId xmlns:a16="http://schemas.microsoft.com/office/drawing/2014/main" id="{A9C65E5F-6DF2-4B21-8E7A-E330A9261D19}"/>
+                <a16:creationId xmlns:a16="http://schemas.microsoft.com/office/drawing/2014/main" id="{B0381401-845A-488F-85C5-711F090CED12}"/>
               </a:ext>
             </a:extLst>
           </p:cNvPr>
@@ -5245,7 +5245,7 @@
           <p:cNvPr id="105" name="">
             <a:extLst xmlns:a="http://schemas.openxmlformats.org/drawingml/2006/main">
               <a:ext uri="{FF2B5EF4-FFF2-40B4-BE49-F238E27FC236}">
-                <a16:creationId xmlns:a16="http://schemas.microsoft.com/office/drawing/2014/main" id="{7DBDCBBD-9065-4CBB-80DA-0F32029ACC4D}"/>
+                <a16:creationId xmlns:a16="http://schemas.microsoft.com/office/drawing/2014/main" id="{E05464CA-15FC-4ACD-AB60-7C9255F3F7D4}"/>
               </a:ext>
             </a:extLst>
           </p:cNvPr>
@@ -5290,7 +5290,7 @@
           <p:cNvPr id="106" name="">
             <a:extLst xmlns:a="http://schemas.openxmlformats.org/drawingml/2006/main">
               <a:ext uri="{FF2B5EF4-FFF2-40B4-BE49-F238E27FC236}">
-                <a16:creationId xmlns:a16="http://schemas.microsoft.com/office/drawing/2014/main" id="{1C3C43BD-19D8-4AAB-A891-BB9671F71080}"/>
+                <a16:creationId xmlns:a16="http://schemas.microsoft.com/office/drawing/2014/main" id="{BF3370F2-58D9-45F4-BFC3-9EFD6F85FD36}"/>
               </a:ext>
             </a:extLst>
           </p:cNvPr>
@@ -5333,7 +5333,7 @@
     </p:spTree>
     <p:extLst>
       <p:ext uri="{BB962C8B-B14F-4D97-AF65-F5344CB8AC3E}">
-        <p14:creationId xmlns:p14="http://schemas.microsoft.com/office/powerpoint/2010/main" val="179584378"/>
+        <p14:creationId xmlns:p14="http://schemas.microsoft.com/office/powerpoint/2010/main" val="1389029246"/>
       </p:ext>
     </p:extLst>
   </p:cSld>
@@ -5357,7 +5357,7 @@
           <p:cNvPr id="51" name="">
             <a:extLst xmlns:a="http://schemas.openxmlformats.org/drawingml/2006/main">
               <a:ext uri="{FF2B5EF4-FFF2-40B4-BE49-F238E27FC236}">
-                <a16:creationId xmlns:a16="http://schemas.microsoft.com/office/drawing/2014/main" id="{8487CE21-69DE-42EE-BD8F-1C4C2FBB37B0}"/>
+                <a16:creationId xmlns:a16="http://schemas.microsoft.com/office/drawing/2014/main" id="{A93F6D70-82FB-45D2-B664-4305BA14A8E5}"/>
               </a:ext>
             </a:extLst>
           </p:cNvPr>
@@ -5388,7 +5388,7 @@
           <p:cNvPr id="2" name="">
             <a:extLst xmlns:a="http://schemas.openxmlformats.org/drawingml/2006/main">
               <a:ext uri="{FF2B5EF4-FFF2-40B4-BE49-F238E27FC236}">
-                <a16:creationId xmlns:a16="http://schemas.microsoft.com/office/drawing/2014/main" id="{7B3540B6-FBA0-4DB1-ADC9-3C4C52A675A1}"/>
+                <a16:creationId xmlns:a16="http://schemas.microsoft.com/office/drawing/2014/main" id="{7C0E6BEA-0988-4EA4-9755-0F5D61E887E0}"/>
               </a:ext>
             </a:extLst>
           </p:cNvPr>
@@ -5433,7 +5433,7 @@
           <p:cNvPr id="3" name="">
             <a:extLst xmlns:a="http://schemas.openxmlformats.org/drawingml/2006/main">
               <a:ext uri="{FF2B5EF4-FFF2-40B4-BE49-F238E27FC236}">
-                <a16:creationId xmlns:a16="http://schemas.microsoft.com/office/drawing/2014/main" id="{B7B6491B-CFFE-41A3-A355-DB63F98BAF1B}"/>
+                <a16:creationId xmlns:a16="http://schemas.microsoft.com/office/drawing/2014/main" id="{4F8C49A1-E1F3-4D5C-8A0D-9D7636668676}"/>
               </a:ext>
             </a:extLst>
           </p:cNvPr>
@@ -5478,7 +5478,7 @@
           <p:cNvPr id="4" name="">
             <a:extLst xmlns:a="http://schemas.openxmlformats.org/drawingml/2006/main">
               <a:ext uri="{FF2B5EF4-FFF2-40B4-BE49-F238E27FC236}">
-                <a16:creationId xmlns:a16="http://schemas.microsoft.com/office/drawing/2014/main" id="{3F4F74DD-02D2-4CB4-BEBB-B1D49EBE65A7}"/>
+                <a16:creationId xmlns:a16="http://schemas.microsoft.com/office/drawing/2014/main" id="{4D3F1769-0E28-423B-B69C-201AEF8C0319}"/>
               </a:ext>
             </a:extLst>
           </p:cNvPr>
@@ -5523,7 +5523,7 @@
           <p:cNvPr id="5" name="">
             <a:extLst xmlns:a="http://schemas.openxmlformats.org/drawingml/2006/main">
               <a:ext uri="{FF2B5EF4-FFF2-40B4-BE49-F238E27FC236}">
-                <a16:creationId xmlns:a16="http://schemas.microsoft.com/office/drawing/2014/main" id="{9AD77DCA-3969-4513-B958-BD005BBCD6AE}"/>
+                <a16:creationId xmlns:a16="http://schemas.microsoft.com/office/drawing/2014/main" id="{A21DAF7C-0910-45BB-953F-113ECFC25891}"/>
               </a:ext>
             </a:extLst>
           </p:cNvPr>
@@ -5554,7 +5554,7 @@
           <p:cNvPr id="6" name="">
             <a:extLst xmlns:a="http://schemas.openxmlformats.org/drawingml/2006/main">
               <a:ext uri="{FF2B5EF4-FFF2-40B4-BE49-F238E27FC236}">
-                <a16:creationId xmlns:a16="http://schemas.microsoft.com/office/drawing/2014/main" id="{FF268BB7-4E7D-4C7A-9D2D-DBC7EB872E22}"/>
+                <a16:creationId xmlns:a16="http://schemas.microsoft.com/office/drawing/2014/main" id="{4D80DE8C-C7BC-4B9A-B588-9E5F302E1592}"/>
               </a:ext>
             </a:extLst>
           </p:cNvPr>
@@ -5585,7 +5585,7 @@
           <p:cNvPr id="7" name="">
             <a:extLst xmlns:a="http://schemas.openxmlformats.org/drawingml/2006/main">
               <a:ext uri="{FF2B5EF4-FFF2-40B4-BE49-F238E27FC236}">
-                <a16:creationId xmlns:a16="http://schemas.microsoft.com/office/drawing/2014/main" id="{9369BEBC-43F3-461D-86B7-49D95ED5A55A}"/>
+                <a16:creationId xmlns:a16="http://schemas.microsoft.com/office/drawing/2014/main" id="{819EBFE1-3F22-4EEC-9094-DB56AE46B1A5}"/>
               </a:ext>
             </a:extLst>
           </p:cNvPr>
@@ -5630,7 +5630,7 @@
           <p:cNvPr id="8" name="">
             <a:extLst xmlns:a="http://schemas.openxmlformats.org/drawingml/2006/main">
               <a:ext uri="{FF2B5EF4-FFF2-40B4-BE49-F238E27FC236}">
-                <a16:creationId xmlns:a16="http://schemas.microsoft.com/office/drawing/2014/main" id="{4B10CC7F-B1B5-45F2-8F74-E53F015891CD}"/>
+                <a16:creationId xmlns:a16="http://schemas.microsoft.com/office/drawing/2014/main" id="{B1B1EDD4-065C-42DE-BE9D-5A63FEFDEC6A}"/>
               </a:ext>
             </a:extLst>
           </p:cNvPr>
@@ -5675,7 +5675,7 @@
           <p:cNvPr id="9" name="">
             <a:extLst xmlns:a="http://schemas.openxmlformats.org/drawingml/2006/main">
               <a:ext uri="{FF2B5EF4-FFF2-40B4-BE49-F238E27FC236}">
-                <a16:creationId xmlns:a16="http://schemas.microsoft.com/office/drawing/2014/main" id="{42A53752-7135-4523-BE2F-63339D59BEB5}"/>
+                <a16:creationId xmlns:a16="http://schemas.microsoft.com/office/drawing/2014/main" id="{8EAEC01E-A57F-454C-879D-9B2ADB387304}"/>
               </a:ext>
             </a:extLst>
           </p:cNvPr>
@@ -5706,7 +5706,7 @@
           <p:cNvPr id="10" name="">
             <a:extLst xmlns:a="http://schemas.openxmlformats.org/drawingml/2006/main">
               <a:ext uri="{FF2B5EF4-FFF2-40B4-BE49-F238E27FC236}">
-                <a16:creationId xmlns:a16="http://schemas.microsoft.com/office/drawing/2014/main" id="{666E63A3-C719-44CA-BE57-BE1B9AAADB2C}"/>
+                <a16:creationId xmlns:a16="http://schemas.microsoft.com/office/drawing/2014/main" id="{AA70F672-2040-468A-B521-2E665FC19C1E}"/>
               </a:ext>
             </a:extLst>
           </p:cNvPr>
@@ -5751,7 +5751,7 @@
           <p:cNvPr id="11" name="">
             <a:extLst xmlns:a="http://schemas.openxmlformats.org/drawingml/2006/main">
               <a:ext uri="{FF2B5EF4-FFF2-40B4-BE49-F238E27FC236}">
-                <a16:creationId xmlns:a16="http://schemas.microsoft.com/office/drawing/2014/main" id="{E7BB0F22-9C08-4335-85EE-BFEE6DCF673A}"/>
+                <a16:creationId xmlns:a16="http://schemas.microsoft.com/office/drawing/2014/main" id="{712B546B-06C6-4DC2-93B6-9804C64A2442}"/>
               </a:ext>
             </a:extLst>
           </p:cNvPr>
@@ -5796,7 +5796,7 @@
           <p:cNvPr id="12" name="">
             <a:extLst xmlns:a="http://schemas.openxmlformats.org/drawingml/2006/main">
               <a:ext uri="{FF2B5EF4-FFF2-40B4-BE49-F238E27FC236}">
-                <a16:creationId xmlns:a16="http://schemas.microsoft.com/office/drawing/2014/main" id="{5A0A764E-BEAE-4446-B5E3-456FBB326CCD}"/>
+                <a16:creationId xmlns:a16="http://schemas.microsoft.com/office/drawing/2014/main" id="{F994D578-CD39-4457-8DF5-161ED932A26D}"/>
               </a:ext>
             </a:extLst>
           </p:cNvPr>
@@ -5841,7 +5841,7 @@
           <p:cNvPr id="13" name="">
             <a:extLst xmlns:a="http://schemas.openxmlformats.org/drawingml/2006/main">
               <a:ext uri="{FF2B5EF4-FFF2-40B4-BE49-F238E27FC236}">
-                <a16:creationId xmlns:a16="http://schemas.microsoft.com/office/drawing/2014/main" id="{66221AE9-9867-424B-847D-C3EEC597A423}"/>
+                <a16:creationId xmlns:a16="http://schemas.microsoft.com/office/drawing/2014/main" id="{F44AE35E-9CF7-4D62-89C6-039ABD048D9F}"/>
               </a:ext>
             </a:extLst>
           </p:cNvPr>
@@ -5874,7 +5874,7 @@
           <p:cNvPr id="14" name="">
             <a:extLst xmlns:a="http://schemas.openxmlformats.org/drawingml/2006/main">
               <a:ext uri="{FF2B5EF4-FFF2-40B4-BE49-F238E27FC236}">
-                <a16:creationId xmlns:a16="http://schemas.microsoft.com/office/drawing/2014/main" id="{6C54A4D4-ED61-4706-89C5-9F098F3E8E69}"/>
+                <a16:creationId xmlns:a16="http://schemas.microsoft.com/office/drawing/2014/main" id="{98374104-D064-49BB-9ADD-B73DD015200F}"/>
               </a:ext>
             </a:extLst>
           </p:cNvPr>
@@ -5919,7 +5919,7 @@
           <p:cNvPr id="15" name="">
             <a:extLst xmlns:a="http://schemas.openxmlformats.org/drawingml/2006/main">
               <a:ext uri="{FF2B5EF4-FFF2-40B4-BE49-F238E27FC236}">
-                <a16:creationId xmlns:a16="http://schemas.microsoft.com/office/drawing/2014/main" id="{C87230BF-81A9-4593-A37E-35B519275D7C}"/>
+                <a16:creationId xmlns:a16="http://schemas.microsoft.com/office/drawing/2014/main" id="{B7FD2D07-0D31-45E2-964E-9170123FEDB1}"/>
               </a:ext>
             </a:extLst>
           </p:cNvPr>
@@ -5964,7 +5964,7 @@
           <p:cNvPr id="16" name="">
             <a:extLst xmlns:a="http://schemas.openxmlformats.org/drawingml/2006/main">
               <a:ext uri="{FF2B5EF4-FFF2-40B4-BE49-F238E27FC236}">
-                <a16:creationId xmlns:a16="http://schemas.microsoft.com/office/drawing/2014/main" id="{9992179F-4640-44C8-A8E9-8520F1E75050}"/>
+                <a16:creationId xmlns:a16="http://schemas.microsoft.com/office/drawing/2014/main" id="{5D69F2A6-6A24-4B3E-B7CA-318EC9423867}"/>
               </a:ext>
             </a:extLst>
           </p:cNvPr>
@@ -6009,7 +6009,7 @@
           <p:cNvPr id="17" name="">
             <a:extLst xmlns:a="http://schemas.openxmlformats.org/drawingml/2006/main">
               <a:ext uri="{FF2B5EF4-FFF2-40B4-BE49-F238E27FC236}">
-                <a16:creationId xmlns:a16="http://schemas.microsoft.com/office/drawing/2014/main" id="{C0F2D176-5ACA-460E-9264-39C2A044D470}"/>
+                <a16:creationId xmlns:a16="http://schemas.microsoft.com/office/drawing/2014/main" id="{60550E32-E947-4496-9430-989808980CA9}"/>
               </a:ext>
             </a:extLst>
           </p:cNvPr>
@@ -6042,7 +6042,7 @@
           <p:cNvPr id="18" name="">
             <a:extLst xmlns:a="http://schemas.openxmlformats.org/drawingml/2006/main">
               <a:ext uri="{FF2B5EF4-FFF2-40B4-BE49-F238E27FC236}">
-                <a16:creationId xmlns:a16="http://schemas.microsoft.com/office/drawing/2014/main" id="{59DD4C58-F08D-4BEC-B64C-1FBC4CA2A7AD}"/>
+                <a16:creationId xmlns:a16="http://schemas.microsoft.com/office/drawing/2014/main" id="{8B3F32D3-A200-4D2A-BE87-6A694075C938}"/>
               </a:ext>
             </a:extLst>
           </p:cNvPr>
@@ -6087,7 +6087,7 @@
           <p:cNvPr id="19" name="">
             <a:extLst xmlns:a="http://schemas.openxmlformats.org/drawingml/2006/main">
               <a:ext uri="{FF2B5EF4-FFF2-40B4-BE49-F238E27FC236}">
-                <a16:creationId xmlns:a16="http://schemas.microsoft.com/office/drawing/2014/main" id="{1C7A37A7-19D5-4A83-BBF0-CC0DB4AFD65C}"/>
+                <a16:creationId xmlns:a16="http://schemas.microsoft.com/office/drawing/2014/main" id="{EB5A206C-8A75-4398-A2F9-7BB8DA82B98C}"/>
               </a:ext>
             </a:extLst>
           </p:cNvPr>
@@ -6132,7 +6132,7 @@
           <p:cNvPr id="20" name="">
             <a:extLst xmlns:a="http://schemas.openxmlformats.org/drawingml/2006/main">
               <a:ext uri="{FF2B5EF4-FFF2-40B4-BE49-F238E27FC236}">
-                <a16:creationId xmlns:a16="http://schemas.microsoft.com/office/drawing/2014/main" id="{F6EFDDBA-05B7-41D2-83D5-E91139CDDB9C}"/>
+                <a16:creationId xmlns:a16="http://schemas.microsoft.com/office/drawing/2014/main" id="{C52FD997-24C5-4B78-9C61-64FB1200E101}"/>
               </a:ext>
             </a:extLst>
           </p:cNvPr>
@@ -6177,7 +6177,7 @@
           <p:cNvPr id="21" name="">
             <a:extLst xmlns:a="http://schemas.openxmlformats.org/drawingml/2006/main">
               <a:ext uri="{FF2B5EF4-FFF2-40B4-BE49-F238E27FC236}">
-                <a16:creationId xmlns:a16="http://schemas.microsoft.com/office/drawing/2014/main" id="{715E9D22-2A6D-4838-B53D-69C9F2E47C78}"/>
+                <a16:creationId xmlns:a16="http://schemas.microsoft.com/office/drawing/2014/main" id="{610231C3-E1BA-4063-8634-D1402E3D4F4C}"/>
               </a:ext>
             </a:extLst>
           </p:cNvPr>
@@ -6210,7 +6210,7 @@
           <p:cNvPr id="22" name="">
             <a:extLst xmlns:a="http://schemas.openxmlformats.org/drawingml/2006/main">
               <a:ext uri="{FF2B5EF4-FFF2-40B4-BE49-F238E27FC236}">
-                <a16:creationId xmlns:a16="http://schemas.microsoft.com/office/drawing/2014/main" id="{EFBADA57-A710-4463-AEF8-DF2708C21C1C}"/>
+                <a16:creationId xmlns:a16="http://schemas.microsoft.com/office/drawing/2014/main" id="{E5DC948C-55D4-4A73-95BA-EEBD0610C089}"/>
               </a:ext>
             </a:extLst>
           </p:cNvPr>
@@ -6255,7 +6255,7 @@
           <p:cNvPr id="23" name="">
             <a:extLst xmlns:a="http://schemas.openxmlformats.org/drawingml/2006/main">
               <a:ext uri="{FF2B5EF4-FFF2-40B4-BE49-F238E27FC236}">
-                <a16:creationId xmlns:a16="http://schemas.microsoft.com/office/drawing/2014/main" id="{566DAE42-3BC8-4986-9E2C-1DCE908543A0}"/>
+                <a16:creationId xmlns:a16="http://schemas.microsoft.com/office/drawing/2014/main" id="{EBD20D01-DE7D-45C3-8ABF-31EB8ED42CE6}"/>
               </a:ext>
             </a:extLst>
           </p:cNvPr>
@@ -6300,7 +6300,7 @@
           <p:cNvPr id="24" name="">
             <a:extLst xmlns:a="http://schemas.openxmlformats.org/drawingml/2006/main">
               <a:ext uri="{FF2B5EF4-FFF2-40B4-BE49-F238E27FC236}">
-                <a16:creationId xmlns:a16="http://schemas.microsoft.com/office/drawing/2014/main" id="{3FA66478-B5B2-491E-BA52-505A35C4FB6D}"/>
+                <a16:creationId xmlns:a16="http://schemas.microsoft.com/office/drawing/2014/main" id="{E5097226-6D3D-429D-AC80-72A8190F9506}"/>
               </a:ext>
             </a:extLst>
           </p:cNvPr>
@@ -6345,7 +6345,7 @@
           <p:cNvPr id="25" name="">
             <a:extLst xmlns:a="http://schemas.openxmlformats.org/drawingml/2006/main">
               <a:ext uri="{FF2B5EF4-FFF2-40B4-BE49-F238E27FC236}">
-                <a16:creationId xmlns:a16="http://schemas.microsoft.com/office/drawing/2014/main" id="{1D9E6EB6-3B75-44F3-9F4F-6B084875B5EB}"/>
+                <a16:creationId xmlns:a16="http://schemas.microsoft.com/office/drawing/2014/main" id="{4B07B5E5-F9A4-4AA8-B510-1EBE2F71F1DD}"/>
               </a:ext>
             </a:extLst>
           </p:cNvPr>
@@ -6378,7 +6378,7 @@
           <p:cNvPr id="26" name="">
             <a:extLst xmlns:a="http://schemas.openxmlformats.org/drawingml/2006/main">
               <a:ext uri="{FF2B5EF4-FFF2-40B4-BE49-F238E27FC236}">
-                <a16:creationId xmlns:a16="http://schemas.microsoft.com/office/drawing/2014/main" id="{1D523F9E-FD2F-47C7-B87D-670304CBA216}"/>
+                <a16:creationId xmlns:a16="http://schemas.microsoft.com/office/drawing/2014/main" id="{31B0CEFA-6DA4-4E2B-833F-9139C645DF0A}"/>
               </a:ext>
             </a:extLst>
           </p:cNvPr>
@@ -6423,7 +6423,7 @@
           <p:cNvPr id="27" name="">
             <a:extLst xmlns:a="http://schemas.openxmlformats.org/drawingml/2006/main">
               <a:ext uri="{FF2B5EF4-FFF2-40B4-BE49-F238E27FC236}">
-                <a16:creationId xmlns:a16="http://schemas.microsoft.com/office/drawing/2014/main" id="{E067AFFE-5089-41AD-ACC5-93A0A08B00EB}"/>
+                <a16:creationId xmlns:a16="http://schemas.microsoft.com/office/drawing/2014/main" id="{27CFC244-1B3B-4681-B236-12C9B4AB828D}"/>
               </a:ext>
             </a:extLst>
           </p:cNvPr>
@@ -6468,7 +6468,7 @@
           <p:cNvPr id="28" name="">
             <a:extLst xmlns:a="http://schemas.openxmlformats.org/drawingml/2006/main">
               <a:ext uri="{FF2B5EF4-FFF2-40B4-BE49-F238E27FC236}">
-                <a16:creationId xmlns:a16="http://schemas.microsoft.com/office/drawing/2014/main" id="{A8364D40-A107-40C6-81BA-17B52A79335D}"/>
+                <a16:creationId xmlns:a16="http://schemas.microsoft.com/office/drawing/2014/main" id="{605739BB-BB39-43B5-ABD3-E7697A33ACF4}"/>
               </a:ext>
             </a:extLst>
           </p:cNvPr>
@@ -6513,7 +6513,7 @@
           <p:cNvPr id="29" name="">
             <a:extLst xmlns:a="http://schemas.openxmlformats.org/drawingml/2006/main">
               <a:ext uri="{FF2B5EF4-FFF2-40B4-BE49-F238E27FC236}">
-                <a16:creationId xmlns:a16="http://schemas.microsoft.com/office/drawing/2014/main" id="{032DCDF8-F780-4DC3-B3C6-FB36A880F05A}"/>
+                <a16:creationId xmlns:a16="http://schemas.microsoft.com/office/drawing/2014/main" id="{81E2EB99-874B-4C2E-92D7-772AEEF6FE4C}"/>
               </a:ext>
             </a:extLst>
           </p:cNvPr>
@@ -6546,7 +6546,7 @@
           <p:cNvPr id="30" name="">
             <a:extLst xmlns:a="http://schemas.openxmlformats.org/drawingml/2006/main">
               <a:ext uri="{FF2B5EF4-FFF2-40B4-BE49-F238E27FC236}">
-                <a16:creationId xmlns:a16="http://schemas.microsoft.com/office/drawing/2014/main" id="{FDACF8AA-C076-4FD5-A3D7-048325B212D6}"/>
+                <a16:creationId xmlns:a16="http://schemas.microsoft.com/office/drawing/2014/main" id="{98495F5C-D44F-4CDA-B237-7CB307FA9EA3}"/>
               </a:ext>
             </a:extLst>
           </p:cNvPr>
@@ -6591,7 +6591,7 @@
           <p:cNvPr id="31" name="">
             <a:extLst xmlns:a="http://schemas.openxmlformats.org/drawingml/2006/main">
               <a:ext uri="{FF2B5EF4-FFF2-40B4-BE49-F238E27FC236}">
-                <a16:creationId xmlns:a16="http://schemas.microsoft.com/office/drawing/2014/main" id="{DFD299AA-6355-46BC-9437-0A1C5861C6B7}"/>
+                <a16:creationId xmlns:a16="http://schemas.microsoft.com/office/drawing/2014/main" id="{0933F186-D241-4E37-808B-52C21ED6B91E}"/>
               </a:ext>
             </a:extLst>
           </p:cNvPr>
@@ -6636,7 +6636,7 @@
           <p:cNvPr id="32" name="">
             <a:extLst xmlns:a="http://schemas.openxmlformats.org/drawingml/2006/main">
               <a:ext uri="{FF2B5EF4-FFF2-40B4-BE49-F238E27FC236}">
-                <a16:creationId xmlns:a16="http://schemas.microsoft.com/office/drawing/2014/main" id="{25AF22E9-B8F5-4DFA-A044-8DEC1F074B50}"/>
+                <a16:creationId xmlns:a16="http://schemas.microsoft.com/office/drawing/2014/main" id="{53484852-6FFB-42DC-A7EA-C9A77A802D96}"/>
               </a:ext>
             </a:extLst>
           </p:cNvPr>
@@ -6681,7 +6681,7 @@
           <p:cNvPr id="33" name="">
             <a:extLst xmlns:a="http://schemas.openxmlformats.org/drawingml/2006/main">
               <a:ext uri="{FF2B5EF4-FFF2-40B4-BE49-F238E27FC236}">
-                <a16:creationId xmlns:a16="http://schemas.microsoft.com/office/drawing/2014/main" id="{F6D6BF80-74F7-4743-BB69-84C12F65F1CF}"/>
+                <a16:creationId xmlns:a16="http://schemas.microsoft.com/office/drawing/2014/main" id="{8788EF40-DE24-485A-A692-9242F321612F}"/>
               </a:ext>
             </a:extLst>
           </p:cNvPr>
@@ -6714,7 +6714,7 @@
           <p:cNvPr id="34" name="">
             <a:extLst xmlns:a="http://schemas.openxmlformats.org/drawingml/2006/main">
               <a:ext uri="{FF2B5EF4-FFF2-40B4-BE49-F238E27FC236}">
-                <a16:creationId xmlns:a16="http://schemas.microsoft.com/office/drawing/2014/main" id="{90ED5A66-23CF-407B-8B1A-78B92F756344}"/>
+                <a16:creationId xmlns:a16="http://schemas.microsoft.com/office/drawing/2014/main" id="{68A7E54E-6DED-499F-9F5D-95655FB699B1}"/>
               </a:ext>
             </a:extLst>
           </p:cNvPr>
@@ -6759,7 +6759,7 @@
           <p:cNvPr id="35" name="">
             <a:extLst xmlns:a="http://schemas.openxmlformats.org/drawingml/2006/main">
               <a:ext uri="{FF2B5EF4-FFF2-40B4-BE49-F238E27FC236}">
-                <a16:creationId xmlns:a16="http://schemas.microsoft.com/office/drawing/2014/main" id="{6822B5F2-1278-4343-8373-C7BEEBBA266C}"/>
+                <a16:creationId xmlns:a16="http://schemas.microsoft.com/office/drawing/2014/main" id="{978F8E79-AEFA-4E1D-A648-18C721670EB2}"/>
               </a:ext>
             </a:extLst>
           </p:cNvPr>
@@ -6804,7 +6804,7 @@
           <p:cNvPr id="36" name="">
             <a:extLst xmlns:a="http://schemas.openxmlformats.org/drawingml/2006/main">
               <a:ext uri="{FF2B5EF4-FFF2-40B4-BE49-F238E27FC236}">
-                <a16:creationId xmlns:a16="http://schemas.microsoft.com/office/drawing/2014/main" id="{8DEB6BB9-43DB-418F-8225-E54062CD5DF5}"/>
+                <a16:creationId xmlns:a16="http://schemas.microsoft.com/office/drawing/2014/main" id="{18E54B7B-FAF3-4FC5-857E-174CDF9A3F98}"/>
               </a:ext>
             </a:extLst>
           </p:cNvPr>
@@ -6849,7 +6849,7 @@
           <p:cNvPr id="37" name="">
             <a:extLst xmlns:a="http://schemas.openxmlformats.org/drawingml/2006/main">
               <a:ext uri="{FF2B5EF4-FFF2-40B4-BE49-F238E27FC236}">
-                <a16:creationId xmlns:a16="http://schemas.microsoft.com/office/drawing/2014/main" id="{0BDDDA2C-A535-4E69-A2AB-9FBFA60B268A}"/>
+                <a16:creationId xmlns:a16="http://schemas.microsoft.com/office/drawing/2014/main" id="{D6AF6C5C-4F95-4436-846D-E1447D8DB634}"/>
               </a:ext>
             </a:extLst>
           </p:cNvPr>
@@ -6882,7 +6882,7 @@
           <p:cNvPr id="38" name="">
             <a:extLst xmlns:a="http://schemas.openxmlformats.org/drawingml/2006/main">
               <a:ext uri="{FF2B5EF4-FFF2-40B4-BE49-F238E27FC236}">
-                <a16:creationId xmlns:a16="http://schemas.microsoft.com/office/drawing/2014/main" id="{94A1B4DD-4A1C-47A1-AA85-4BA0819AF73B}"/>
+                <a16:creationId xmlns:a16="http://schemas.microsoft.com/office/drawing/2014/main" id="{189F2CEF-7C32-4BB0-BB91-69C1544AD3BD}"/>
               </a:ext>
             </a:extLst>
           </p:cNvPr>
@@ -6913,7 +6913,7 @@
           <p:cNvPr id="39" name="">
             <a:extLst xmlns:a="http://schemas.openxmlformats.org/drawingml/2006/main">
               <a:ext uri="{FF2B5EF4-FFF2-40B4-BE49-F238E27FC236}">
-                <a16:creationId xmlns:a16="http://schemas.microsoft.com/office/drawing/2014/main" id="{9A638FBA-EFE5-4561-AFE6-D2211281FACE}"/>
+                <a16:creationId xmlns:a16="http://schemas.microsoft.com/office/drawing/2014/main" id="{8545ED68-6F53-4A7E-BC0B-95A75845E005}"/>
               </a:ext>
             </a:extLst>
           </p:cNvPr>
@@ -6958,7 +6958,7 @@
           <p:cNvPr id="40" name="">
             <a:extLst xmlns:a="http://schemas.openxmlformats.org/drawingml/2006/main">
               <a:ext uri="{FF2B5EF4-FFF2-40B4-BE49-F238E27FC236}">
-                <a16:creationId xmlns:a16="http://schemas.microsoft.com/office/drawing/2014/main" id="{62F1BB5F-3469-42C9-97C7-AC0C5718BE1E}"/>
+                <a16:creationId xmlns:a16="http://schemas.microsoft.com/office/drawing/2014/main" id="{0032DEC5-4493-4A65-B168-DF8CFF460EAD}"/>
               </a:ext>
             </a:extLst>
           </p:cNvPr>
@@ -7003,7 +7003,7 @@
           <p:cNvPr id="41" name="">
             <a:extLst xmlns:a="http://schemas.openxmlformats.org/drawingml/2006/main">
               <a:ext uri="{FF2B5EF4-FFF2-40B4-BE49-F238E27FC236}">
-                <a16:creationId xmlns:a16="http://schemas.microsoft.com/office/drawing/2014/main" id="{5F9241F8-C1EF-4C02-BC1A-46C47DD830E3}"/>
+                <a16:creationId xmlns:a16="http://schemas.microsoft.com/office/drawing/2014/main" id="{7BB72B1B-2336-4892-90DE-9C18627E38F0}"/>
               </a:ext>
             </a:extLst>
           </p:cNvPr>
@@ -7048,7 +7048,7 @@
           <p:cNvPr id="42" name="">
             <a:extLst xmlns:a="http://schemas.openxmlformats.org/drawingml/2006/main">
               <a:ext uri="{FF2B5EF4-FFF2-40B4-BE49-F238E27FC236}">
-                <a16:creationId xmlns:a16="http://schemas.microsoft.com/office/drawing/2014/main" id="{A151F758-D7E7-4BCF-B950-5B034865C3BA}"/>
+                <a16:creationId xmlns:a16="http://schemas.microsoft.com/office/drawing/2014/main" id="{6A92C80B-EF88-41B3-A0E0-EB6E856F07E0}"/>
               </a:ext>
             </a:extLst>
           </p:cNvPr>
@@ -7081,7 +7081,7 @@
           <p:cNvPr id="43" name="">
             <a:extLst xmlns:a="http://schemas.openxmlformats.org/drawingml/2006/main">
               <a:ext uri="{FF2B5EF4-FFF2-40B4-BE49-F238E27FC236}">
-                <a16:creationId xmlns:a16="http://schemas.microsoft.com/office/drawing/2014/main" id="{4A3B33E3-848B-40C3-A776-77FF5C2DFEDA}"/>
+                <a16:creationId xmlns:a16="http://schemas.microsoft.com/office/drawing/2014/main" id="{84CAF3ED-34E2-49A5-869F-AC46FAB2ED4B}"/>
               </a:ext>
             </a:extLst>
           </p:cNvPr>
@@ -7126,7 +7126,7 @@
           <p:cNvPr id="44" name="">
             <a:extLst xmlns:a="http://schemas.openxmlformats.org/drawingml/2006/main">
               <a:ext uri="{FF2B5EF4-FFF2-40B4-BE49-F238E27FC236}">
-                <a16:creationId xmlns:a16="http://schemas.microsoft.com/office/drawing/2014/main" id="{D0544574-E42A-4DCF-B1DD-582489A3D7F7}"/>
+                <a16:creationId xmlns:a16="http://schemas.microsoft.com/office/drawing/2014/main" id="{9C9AFA72-7DAD-4690-B107-CA5B3FDB837A}"/>
               </a:ext>
             </a:extLst>
           </p:cNvPr>
@@ -7171,7 +7171,7 @@
           <p:cNvPr id="45" name="">
             <a:extLst xmlns:a="http://schemas.openxmlformats.org/drawingml/2006/main">
               <a:ext uri="{FF2B5EF4-FFF2-40B4-BE49-F238E27FC236}">
-                <a16:creationId xmlns:a16="http://schemas.microsoft.com/office/drawing/2014/main" id="{8C410BE7-3C7C-411A-A186-EE93B3D6ED22}"/>
+                <a16:creationId xmlns:a16="http://schemas.microsoft.com/office/drawing/2014/main" id="{4B0407BC-6830-485D-9D6E-4E3EC9D3B943}"/>
               </a:ext>
             </a:extLst>
           </p:cNvPr>
@@ -7216,7 +7216,7 @@
           <p:cNvPr id="46" name="">
             <a:extLst xmlns:a="http://schemas.openxmlformats.org/drawingml/2006/main">
               <a:ext uri="{FF2B5EF4-FFF2-40B4-BE49-F238E27FC236}">
-                <a16:creationId xmlns:a16="http://schemas.microsoft.com/office/drawing/2014/main" id="{6682DFDE-7B64-4120-B22C-17D8A6A0F979}"/>
+                <a16:creationId xmlns:a16="http://schemas.microsoft.com/office/drawing/2014/main" id="{31FCB9A4-CB02-4FBE-BAEA-B47D9C421B10}"/>
               </a:ext>
             </a:extLst>
           </p:cNvPr>
@@ -7249,7 +7249,7 @@
           <p:cNvPr id="47" name="">
             <a:extLst xmlns:a="http://schemas.openxmlformats.org/drawingml/2006/main">
               <a:ext uri="{FF2B5EF4-FFF2-40B4-BE49-F238E27FC236}">
-                <a16:creationId xmlns:a16="http://schemas.microsoft.com/office/drawing/2014/main" id="{292ACB92-4EF0-4777-899E-1E7B709AC99C}"/>
+                <a16:creationId xmlns:a16="http://schemas.microsoft.com/office/drawing/2014/main" id="{2F538160-1226-4AB6-8ECE-977B0B09ADAB}"/>
               </a:ext>
             </a:extLst>
           </p:cNvPr>
@@ -7294,7 +7294,7 @@
           <p:cNvPr id="48" name="">
             <a:extLst xmlns:a="http://schemas.openxmlformats.org/drawingml/2006/main">
               <a:ext uri="{FF2B5EF4-FFF2-40B4-BE49-F238E27FC236}">
-                <a16:creationId xmlns:a16="http://schemas.microsoft.com/office/drawing/2014/main" id="{251AB79D-46D1-4411-860B-AF1AFB854C7F}"/>
+                <a16:creationId xmlns:a16="http://schemas.microsoft.com/office/drawing/2014/main" id="{916495A7-FDB0-4F06-8650-6FC006E741CF}"/>
               </a:ext>
             </a:extLst>
           </p:cNvPr>
@@ -7339,7 +7339,7 @@
           <p:cNvPr id="49" name="">
             <a:extLst xmlns:a="http://schemas.openxmlformats.org/drawingml/2006/main">
               <a:ext uri="{FF2B5EF4-FFF2-40B4-BE49-F238E27FC236}">
-                <a16:creationId xmlns:a16="http://schemas.microsoft.com/office/drawing/2014/main" id="{5C4714BF-6FC1-4038-88DF-584065B45104}"/>
+                <a16:creationId xmlns:a16="http://schemas.microsoft.com/office/drawing/2014/main" id="{5D1D552C-96F8-49CC-AF50-3EDBFBA0747A}"/>
               </a:ext>
             </a:extLst>
           </p:cNvPr>
@@ -7384,7 +7384,7 @@
           <p:cNvPr id="50" name="">
             <a:extLst xmlns:a="http://schemas.openxmlformats.org/drawingml/2006/main">
               <a:ext uri="{FF2B5EF4-FFF2-40B4-BE49-F238E27FC236}">
-                <a16:creationId xmlns:a16="http://schemas.microsoft.com/office/drawing/2014/main" id="{8A5E502C-1FB9-4B9C-AAB7-520002011D3F}"/>
+                <a16:creationId xmlns:a16="http://schemas.microsoft.com/office/drawing/2014/main" id="{35C3937F-0F10-4A73-9080-0E291E7F1544}"/>
               </a:ext>
             </a:extLst>
           </p:cNvPr>
@@ -7427,7 +7427,7 @@
     </p:spTree>
     <p:extLst>
       <p:ext uri="{BB962C8B-B14F-4D97-AF65-F5344CB8AC3E}">
-        <p14:creationId xmlns:p14="http://schemas.microsoft.com/office/powerpoint/2010/main" val="2025288994"/>
+        <p14:creationId xmlns:p14="http://schemas.microsoft.com/office/powerpoint/2010/main" val="1417466702"/>
       </p:ext>
     </p:extLst>
   </p:cSld>
@@ -7451,7 +7451,7 @@
           <p:cNvPr id="39" name="">
             <a:extLst xmlns:a="http://schemas.openxmlformats.org/drawingml/2006/main">
               <a:ext uri="{FF2B5EF4-FFF2-40B4-BE49-F238E27FC236}">
-                <a16:creationId xmlns:a16="http://schemas.microsoft.com/office/drawing/2014/main" id="{934069F0-793F-456B-9D34-01898BD1B0B9}"/>
+                <a16:creationId xmlns:a16="http://schemas.microsoft.com/office/drawing/2014/main" id="{F0D1982A-812B-4FEE-8527-D88CBDA45BA1}"/>
               </a:ext>
             </a:extLst>
           </p:cNvPr>
@@ -7482,7 +7482,7 @@
           <p:cNvPr id="2" name="">
             <a:extLst xmlns:a="http://schemas.openxmlformats.org/drawingml/2006/main">
               <a:ext uri="{FF2B5EF4-FFF2-40B4-BE49-F238E27FC236}">
-                <a16:creationId xmlns:a16="http://schemas.microsoft.com/office/drawing/2014/main" id="{1CEE3242-2912-4037-A53A-46FFC401B4D8}"/>
+                <a16:creationId xmlns:a16="http://schemas.microsoft.com/office/drawing/2014/main" id="{EF2C4612-61D8-4070-AD2F-4E9158A3CFB4}"/>
               </a:ext>
             </a:extLst>
           </p:cNvPr>
@@ -7527,7 +7527,7 @@
           <p:cNvPr id="3" name="">
             <a:extLst xmlns:a="http://schemas.openxmlformats.org/drawingml/2006/main">
               <a:ext uri="{FF2B5EF4-FFF2-40B4-BE49-F238E27FC236}">
-                <a16:creationId xmlns:a16="http://schemas.microsoft.com/office/drawing/2014/main" id="{4C159BDF-EE1D-49F3-9481-E70FAD071FB7}"/>
+                <a16:creationId xmlns:a16="http://schemas.microsoft.com/office/drawing/2014/main" id="{3353BBBA-6F73-4814-BAA8-7F76A6A76A66}"/>
               </a:ext>
             </a:extLst>
           </p:cNvPr>
@@ -7572,7 +7572,7 @@
           <p:cNvPr id="4" name="">
             <a:extLst xmlns:a="http://schemas.openxmlformats.org/drawingml/2006/main">
               <a:ext uri="{FF2B5EF4-FFF2-40B4-BE49-F238E27FC236}">
-                <a16:creationId xmlns:a16="http://schemas.microsoft.com/office/drawing/2014/main" id="{A4138CB4-3805-45E8-98A4-760E8C811769}"/>
+                <a16:creationId xmlns:a16="http://schemas.microsoft.com/office/drawing/2014/main" id="{248A04C1-4ECB-4922-88F3-13315C8772C3}"/>
               </a:ext>
             </a:extLst>
           </p:cNvPr>
@@ -7617,7 +7617,7 @@
           <p:cNvPr id="5" name="">
             <a:extLst xmlns:a="http://schemas.openxmlformats.org/drawingml/2006/main">
               <a:ext uri="{FF2B5EF4-FFF2-40B4-BE49-F238E27FC236}">
-                <a16:creationId xmlns:a16="http://schemas.microsoft.com/office/drawing/2014/main" id="{379FA6AA-AEF7-46C5-A06F-81A4364C84F8}"/>
+                <a16:creationId xmlns:a16="http://schemas.microsoft.com/office/drawing/2014/main" id="{AB317F7D-90F2-487A-8732-42B67E0365BD}"/>
               </a:ext>
             </a:extLst>
           </p:cNvPr>
@@ -7648,7 +7648,7 @@
           <p:cNvPr id="6" name="">
             <a:extLst xmlns:a="http://schemas.openxmlformats.org/drawingml/2006/main">
               <a:ext uri="{FF2B5EF4-FFF2-40B4-BE49-F238E27FC236}">
-                <a16:creationId xmlns:a16="http://schemas.microsoft.com/office/drawing/2014/main" id="{4099D4EC-E44F-42CF-967D-24A49A167EE8}"/>
+                <a16:creationId xmlns:a16="http://schemas.microsoft.com/office/drawing/2014/main" id="{2F4A614A-7AEE-46B9-89E0-205BA9A6D866}"/>
               </a:ext>
             </a:extLst>
           </p:cNvPr>
@@ -7679,7 +7679,7 @@
           <p:cNvPr id="7" name="">
             <a:extLst xmlns:a="http://schemas.openxmlformats.org/drawingml/2006/main">
               <a:ext uri="{FF2B5EF4-FFF2-40B4-BE49-F238E27FC236}">
-                <a16:creationId xmlns:a16="http://schemas.microsoft.com/office/drawing/2014/main" id="{5CF61CD4-A375-41C8-BCFF-9EF509F61D90}"/>
+                <a16:creationId xmlns:a16="http://schemas.microsoft.com/office/drawing/2014/main" id="{554126CF-4E4F-4BAA-AA66-106A007D0813}"/>
               </a:ext>
             </a:extLst>
           </p:cNvPr>
@@ -7724,7 +7724,7 @@
           <p:cNvPr id="8" name="">
             <a:extLst xmlns:a="http://schemas.openxmlformats.org/drawingml/2006/main">
               <a:ext uri="{FF2B5EF4-FFF2-40B4-BE49-F238E27FC236}">
-                <a16:creationId xmlns:a16="http://schemas.microsoft.com/office/drawing/2014/main" id="{158E3B6B-3E57-49CE-8394-7BC4364335DE}"/>
+                <a16:creationId xmlns:a16="http://schemas.microsoft.com/office/drawing/2014/main" id="{F54396F1-86AE-4500-B0E9-D9FB49D33CCB}"/>
               </a:ext>
             </a:extLst>
           </p:cNvPr>
@@ -7769,7 +7769,7 @@
           <p:cNvPr id="9" name="">
             <a:extLst xmlns:a="http://schemas.openxmlformats.org/drawingml/2006/main">
               <a:ext uri="{FF2B5EF4-FFF2-40B4-BE49-F238E27FC236}">
-                <a16:creationId xmlns:a16="http://schemas.microsoft.com/office/drawing/2014/main" id="{45FE3CAB-2121-4BE2-8F95-323D98469AE2}"/>
+                <a16:creationId xmlns:a16="http://schemas.microsoft.com/office/drawing/2014/main" id="{DE8E48C5-7ED0-45DB-BBB0-038140AD2EF6}"/>
               </a:ext>
             </a:extLst>
           </p:cNvPr>
@@ -7804,7 +7804,7 @@
           <p:cNvPr id="10" name="">
             <a:extLst xmlns:a="http://schemas.openxmlformats.org/drawingml/2006/main">
               <a:ext uri="{FF2B5EF4-FFF2-40B4-BE49-F238E27FC236}">
-                <a16:creationId xmlns:a16="http://schemas.microsoft.com/office/drawing/2014/main" id="{F68D5495-14C3-4DDC-B4A4-4906A040A741}"/>
+                <a16:creationId xmlns:a16="http://schemas.microsoft.com/office/drawing/2014/main" id="{B72A195C-627D-44F5-8322-CF89955C1382}"/>
               </a:ext>
             </a:extLst>
           </p:cNvPr>
@@ -7849,7 +7849,7 @@
           <p:cNvPr id="11" name="">
             <a:extLst xmlns:a="http://schemas.openxmlformats.org/drawingml/2006/main">
               <a:ext uri="{FF2B5EF4-FFF2-40B4-BE49-F238E27FC236}">
-                <a16:creationId xmlns:a16="http://schemas.microsoft.com/office/drawing/2014/main" id="{FD597E17-ABA9-4821-B9DC-3A4EFAB8CAF6}"/>
+                <a16:creationId xmlns:a16="http://schemas.microsoft.com/office/drawing/2014/main" id="{48357FA1-2A79-4208-84A2-2C993F3ECA30}"/>
               </a:ext>
             </a:extLst>
           </p:cNvPr>
@@ -7894,7 +7894,7 @@
           <p:cNvPr id="12" name="">
             <a:extLst xmlns:a="http://schemas.openxmlformats.org/drawingml/2006/main">
               <a:ext uri="{FF2B5EF4-FFF2-40B4-BE49-F238E27FC236}">
-                <a16:creationId xmlns:a16="http://schemas.microsoft.com/office/drawing/2014/main" id="{423F9AEB-C93B-40D1-BF2D-BFA022B04802}"/>
+                <a16:creationId xmlns:a16="http://schemas.microsoft.com/office/drawing/2014/main" id="{FF4FA861-1E42-42D7-BD22-E39350814910}"/>
               </a:ext>
             </a:extLst>
           </p:cNvPr>
@@ -7939,7 +7939,7 @@
           <p:cNvPr id="13" name="">
             <a:extLst xmlns:a="http://schemas.openxmlformats.org/drawingml/2006/main">
               <a:ext uri="{FF2B5EF4-FFF2-40B4-BE49-F238E27FC236}">
-                <a16:creationId xmlns:a16="http://schemas.microsoft.com/office/drawing/2014/main" id="{223BFCF7-DE26-4210-895C-D5F14BF76728}"/>
+                <a16:creationId xmlns:a16="http://schemas.microsoft.com/office/drawing/2014/main" id="{15C3FA79-5BE6-4979-92C1-7C33EBD51F28}"/>
               </a:ext>
             </a:extLst>
           </p:cNvPr>
@@ -7974,7 +7974,7 @@
           <p:cNvPr id="14" name="">
             <a:extLst xmlns:a="http://schemas.openxmlformats.org/drawingml/2006/main">
               <a:ext uri="{FF2B5EF4-FFF2-40B4-BE49-F238E27FC236}">
-                <a16:creationId xmlns:a16="http://schemas.microsoft.com/office/drawing/2014/main" id="{17846102-95EE-4252-B4A7-221ACDFEC427}"/>
+                <a16:creationId xmlns:a16="http://schemas.microsoft.com/office/drawing/2014/main" id="{49F64BA7-DC99-4E5C-9D3A-0BFD4FFFD769}"/>
               </a:ext>
             </a:extLst>
           </p:cNvPr>
@@ -8019,7 +8019,7 @@
           <p:cNvPr id="15" name="">
             <a:extLst xmlns:a="http://schemas.openxmlformats.org/drawingml/2006/main">
               <a:ext uri="{FF2B5EF4-FFF2-40B4-BE49-F238E27FC236}">
-                <a16:creationId xmlns:a16="http://schemas.microsoft.com/office/drawing/2014/main" id="{7D4018AD-63F5-4336-9463-25BDC1EA2A0B}"/>
+                <a16:creationId xmlns:a16="http://schemas.microsoft.com/office/drawing/2014/main" id="{19BADC86-A2EC-47C7-A4AD-3338E9FBE9BF}"/>
               </a:ext>
             </a:extLst>
           </p:cNvPr>
@@ -8064,7 +8064,7 @@
           <p:cNvPr id="16" name="">
             <a:extLst xmlns:a="http://schemas.openxmlformats.org/drawingml/2006/main">
               <a:ext uri="{FF2B5EF4-FFF2-40B4-BE49-F238E27FC236}">
-                <a16:creationId xmlns:a16="http://schemas.microsoft.com/office/drawing/2014/main" id="{FAF7F852-2A50-4A65-8DC3-28AC0CE42BFB}"/>
+                <a16:creationId xmlns:a16="http://schemas.microsoft.com/office/drawing/2014/main" id="{D0B6F4D2-FB32-4ADF-BFD7-F81A2F415E04}"/>
               </a:ext>
             </a:extLst>
           </p:cNvPr>
@@ -8109,7 +8109,7 @@
           <p:cNvPr id="17" name="">
             <a:extLst xmlns:a="http://schemas.openxmlformats.org/drawingml/2006/main">
               <a:ext uri="{FF2B5EF4-FFF2-40B4-BE49-F238E27FC236}">
-                <a16:creationId xmlns:a16="http://schemas.microsoft.com/office/drawing/2014/main" id="{54A0CA18-440C-482C-9202-E4DD47DE0CB4}"/>
+                <a16:creationId xmlns:a16="http://schemas.microsoft.com/office/drawing/2014/main" id="{0C4A230C-3DAC-4EE9-BB27-AC3C806F283B}"/>
               </a:ext>
             </a:extLst>
           </p:cNvPr>
@@ -8144,7 +8144,7 @@
           <p:cNvPr id="18" name="">
             <a:extLst xmlns:a="http://schemas.openxmlformats.org/drawingml/2006/main">
               <a:ext uri="{FF2B5EF4-FFF2-40B4-BE49-F238E27FC236}">
-                <a16:creationId xmlns:a16="http://schemas.microsoft.com/office/drawing/2014/main" id="{43A3653E-8643-485E-A11B-93BD93DB1DCC}"/>
+                <a16:creationId xmlns:a16="http://schemas.microsoft.com/office/drawing/2014/main" id="{4D860C2F-C659-48BD-9232-36A0AA37BFE9}"/>
               </a:ext>
             </a:extLst>
           </p:cNvPr>
@@ -8189,7 +8189,7 @@
           <p:cNvPr id="19" name="">
             <a:extLst xmlns:a="http://schemas.openxmlformats.org/drawingml/2006/main">
               <a:ext uri="{FF2B5EF4-FFF2-40B4-BE49-F238E27FC236}">
-                <a16:creationId xmlns:a16="http://schemas.microsoft.com/office/drawing/2014/main" id="{3CA332D8-F1BE-42C7-A65A-A44E92F26643}"/>
+                <a16:creationId xmlns:a16="http://schemas.microsoft.com/office/drawing/2014/main" id="{7CBDDDBD-EFFC-4AC3-85F7-7966D14A05C0}"/>
               </a:ext>
             </a:extLst>
           </p:cNvPr>
@@ -8234,7 +8234,7 @@
           <p:cNvPr id="20" name="">
             <a:extLst xmlns:a="http://schemas.openxmlformats.org/drawingml/2006/main">
               <a:ext uri="{FF2B5EF4-FFF2-40B4-BE49-F238E27FC236}">
-                <a16:creationId xmlns:a16="http://schemas.microsoft.com/office/drawing/2014/main" id="{15E8744F-E8B8-4A7F-B697-EF99E97DAE3B}"/>
+                <a16:creationId xmlns:a16="http://schemas.microsoft.com/office/drawing/2014/main" id="{1460A2C2-E76C-4AEA-A0E0-280427FB68EB}"/>
               </a:ext>
             </a:extLst>
           </p:cNvPr>
@@ -8279,7 +8279,7 @@
           <p:cNvPr id="21" name="">
             <a:extLst xmlns:a="http://schemas.openxmlformats.org/drawingml/2006/main">
               <a:ext uri="{FF2B5EF4-FFF2-40B4-BE49-F238E27FC236}">
-                <a16:creationId xmlns:a16="http://schemas.microsoft.com/office/drawing/2014/main" id="{0B727499-CD48-4CEA-9B7F-1C8E59C8A43F}"/>
+                <a16:creationId xmlns:a16="http://schemas.microsoft.com/office/drawing/2014/main" id="{9A2144FF-D0F7-40F4-8C37-82229AB040A3}"/>
               </a:ext>
             </a:extLst>
           </p:cNvPr>
@@ -8314,7 +8314,7 @@
           <p:cNvPr id="22" name="">
             <a:extLst xmlns:a="http://schemas.openxmlformats.org/drawingml/2006/main">
               <a:ext uri="{FF2B5EF4-FFF2-40B4-BE49-F238E27FC236}">
-                <a16:creationId xmlns:a16="http://schemas.microsoft.com/office/drawing/2014/main" id="{45F0E12A-99CF-4DDD-88DF-C90A8D8FCEA3}"/>
+                <a16:creationId xmlns:a16="http://schemas.microsoft.com/office/drawing/2014/main" id="{094C1B54-485D-451D-AB8A-177C2A666D37}"/>
               </a:ext>
             </a:extLst>
           </p:cNvPr>
@@ -8359,7 +8359,7 @@
           <p:cNvPr id="23" name="">
             <a:extLst xmlns:a="http://schemas.openxmlformats.org/drawingml/2006/main">
               <a:ext uri="{FF2B5EF4-FFF2-40B4-BE49-F238E27FC236}">
-                <a16:creationId xmlns:a16="http://schemas.microsoft.com/office/drawing/2014/main" id="{9AAD623E-8589-414C-B9A5-F39218527636}"/>
+                <a16:creationId xmlns:a16="http://schemas.microsoft.com/office/drawing/2014/main" id="{AEADB845-FF77-42CC-81BD-4E1AF06B1CC5}"/>
               </a:ext>
             </a:extLst>
           </p:cNvPr>
@@ -8404,7 +8404,7 @@
           <p:cNvPr id="24" name="">
             <a:extLst xmlns:a="http://schemas.openxmlformats.org/drawingml/2006/main">
               <a:ext uri="{FF2B5EF4-FFF2-40B4-BE49-F238E27FC236}">
-                <a16:creationId xmlns:a16="http://schemas.microsoft.com/office/drawing/2014/main" id="{DBA525DA-EE4C-4B5F-A758-F5A878640B3D}"/>
+                <a16:creationId xmlns:a16="http://schemas.microsoft.com/office/drawing/2014/main" id="{6CA7F3F1-9589-40F2-9D31-513D82E8C63F}"/>
               </a:ext>
             </a:extLst>
           </p:cNvPr>
@@ -8449,7 +8449,7 @@
           <p:cNvPr id="25" name="">
             <a:extLst xmlns:a="http://schemas.openxmlformats.org/drawingml/2006/main">
               <a:ext uri="{FF2B5EF4-FFF2-40B4-BE49-F238E27FC236}">
-                <a16:creationId xmlns:a16="http://schemas.microsoft.com/office/drawing/2014/main" id="{2009DAA7-A032-4EDD-8F5C-51E849B770B8}"/>
+                <a16:creationId xmlns:a16="http://schemas.microsoft.com/office/drawing/2014/main" id="{8A4E77CF-A69B-4310-890C-A13B468A37D1}"/>
               </a:ext>
             </a:extLst>
           </p:cNvPr>
@@ -8484,7 +8484,7 @@
           <p:cNvPr id="26" name="">
             <a:extLst xmlns:a="http://schemas.openxmlformats.org/drawingml/2006/main">
               <a:ext uri="{FF2B5EF4-FFF2-40B4-BE49-F238E27FC236}">
-                <a16:creationId xmlns:a16="http://schemas.microsoft.com/office/drawing/2014/main" id="{19CB86B0-033C-4CE6-91C2-96AD3CB17DAB}"/>
+                <a16:creationId xmlns:a16="http://schemas.microsoft.com/office/drawing/2014/main" id="{5073E33C-B98C-4BF1-A833-A1FE84292DD1}"/>
               </a:ext>
             </a:extLst>
           </p:cNvPr>
@@ -8515,7 +8515,7 @@
           <p:cNvPr id="27" name="">
             <a:extLst xmlns:a="http://schemas.openxmlformats.org/drawingml/2006/main">
               <a:ext uri="{FF2B5EF4-FFF2-40B4-BE49-F238E27FC236}">
-                <a16:creationId xmlns:a16="http://schemas.microsoft.com/office/drawing/2014/main" id="{DC6BC2C0-DD15-4424-8027-F86839281565}"/>
+                <a16:creationId xmlns:a16="http://schemas.microsoft.com/office/drawing/2014/main" id="{7075179F-FD65-4485-B444-9E98F8D71B78}"/>
               </a:ext>
             </a:extLst>
           </p:cNvPr>
@@ -8560,7 +8560,7 @@
           <p:cNvPr id="28" name="">
             <a:extLst xmlns:a="http://schemas.openxmlformats.org/drawingml/2006/main">
               <a:ext uri="{FF2B5EF4-FFF2-40B4-BE49-F238E27FC236}">
-                <a16:creationId xmlns:a16="http://schemas.microsoft.com/office/drawing/2014/main" id="{3973006D-F3A5-4D5B-B7B1-0C77EB8AE6A4}"/>
+                <a16:creationId xmlns:a16="http://schemas.microsoft.com/office/drawing/2014/main" id="{BE668760-3E28-43FA-9D5A-2AA21A44375F}"/>
               </a:ext>
             </a:extLst>
           </p:cNvPr>
@@ -8605,7 +8605,7 @@
           <p:cNvPr id="29" name="">
             <a:extLst xmlns:a="http://schemas.openxmlformats.org/drawingml/2006/main">
               <a:ext uri="{FF2B5EF4-FFF2-40B4-BE49-F238E27FC236}">
-                <a16:creationId xmlns:a16="http://schemas.microsoft.com/office/drawing/2014/main" id="{9BC1DB2D-356D-480C-960A-93E995F9D7FE}"/>
+                <a16:creationId xmlns:a16="http://schemas.microsoft.com/office/drawing/2014/main" id="{809140D5-FCBF-4F48-A0A0-4997B4E6D2A4}"/>
               </a:ext>
             </a:extLst>
           </p:cNvPr>
@@ -8640,7 +8640,7 @@
           <p:cNvPr id="30" name="">
             <a:extLst xmlns:a="http://schemas.openxmlformats.org/drawingml/2006/main">
               <a:ext uri="{FF2B5EF4-FFF2-40B4-BE49-F238E27FC236}">
-                <a16:creationId xmlns:a16="http://schemas.microsoft.com/office/drawing/2014/main" id="{C594D6B4-AA05-49F4-A08E-2AFB5B20979D}"/>
+                <a16:creationId xmlns:a16="http://schemas.microsoft.com/office/drawing/2014/main" id="{E1707354-8DC8-408E-BF44-C2B89116ADDF}"/>
               </a:ext>
             </a:extLst>
           </p:cNvPr>
@@ -8671,7 +8671,7 @@
           <p:cNvPr id="31" name="">
             <a:extLst xmlns:a="http://schemas.openxmlformats.org/drawingml/2006/main">
               <a:ext uri="{FF2B5EF4-FFF2-40B4-BE49-F238E27FC236}">
-                <a16:creationId xmlns:a16="http://schemas.microsoft.com/office/drawing/2014/main" id="{B4A4FCB6-E1CA-4803-903D-E89EA5A71366}"/>
+                <a16:creationId xmlns:a16="http://schemas.microsoft.com/office/drawing/2014/main" id="{2E0AA3D3-8AD9-4245-A400-AA9AFDE3D749}"/>
               </a:ext>
             </a:extLst>
           </p:cNvPr>
@@ -8716,7 +8716,7 @@
           <p:cNvPr id="32" name="">
             <a:extLst xmlns:a="http://schemas.openxmlformats.org/drawingml/2006/main">
               <a:ext uri="{FF2B5EF4-FFF2-40B4-BE49-F238E27FC236}">
-                <a16:creationId xmlns:a16="http://schemas.microsoft.com/office/drawing/2014/main" id="{2D189CEA-6012-4CC7-ADD1-913BFB7F2B2B}"/>
+                <a16:creationId xmlns:a16="http://schemas.microsoft.com/office/drawing/2014/main" id="{A3D917CC-FC90-40DE-9429-CC8E6A78F40B}"/>
               </a:ext>
             </a:extLst>
           </p:cNvPr>
@@ -8761,7 +8761,7 @@
           <p:cNvPr id="33" name="">
             <a:extLst xmlns:a="http://schemas.openxmlformats.org/drawingml/2006/main">
               <a:ext uri="{FF2B5EF4-FFF2-40B4-BE49-F238E27FC236}">
-                <a16:creationId xmlns:a16="http://schemas.microsoft.com/office/drawing/2014/main" id="{D7009B84-77E7-49C3-A820-81E4CD013B19}"/>
+                <a16:creationId xmlns:a16="http://schemas.microsoft.com/office/drawing/2014/main" id="{77180551-5F14-4EAC-B6A1-22079C429E62}"/>
               </a:ext>
             </a:extLst>
           </p:cNvPr>
@@ -8796,7 +8796,7 @@
           <p:cNvPr id="34" name="">
             <a:extLst xmlns:a="http://schemas.openxmlformats.org/drawingml/2006/main">
               <a:ext uri="{FF2B5EF4-FFF2-40B4-BE49-F238E27FC236}">
-                <a16:creationId xmlns:a16="http://schemas.microsoft.com/office/drawing/2014/main" id="{A210D46D-009A-4C13-84BE-B698EB7CD389}"/>
+                <a16:creationId xmlns:a16="http://schemas.microsoft.com/office/drawing/2014/main" id="{33571EC0-3685-4BC7-B437-09AB4BA160DF}"/>
               </a:ext>
             </a:extLst>
           </p:cNvPr>
@@ -8827,7 +8827,7 @@
           <p:cNvPr id="35" name="">
             <a:extLst xmlns:a="http://schemas.openxmlformats.org/drawingml/2006/main">
               <a:ext uri="{FF2B5EF4-FFF2-40B4-BE49-F238E27FC236}">
-                <a16:creationId xmlns:a16="http://schemas.microsoft.com/office/drawing/2014/main" id="{B25095F1-3E83-4E25-96DC-39D04B72BDA8}"/>
+                <a16:creationId xmlns:a16="http://schemas.microsoft.com/office/drawing/2014/main" id="{EA1AC00C-2BEE-404E-AF87-1A047949563B}"/>
               </a:ext>
             </a:extLst>
           </p:cNvPr>
@@ -8872,7 +8872,7 @@
           <p:cNvPr id="36" name="">
             <a:extLst xmlns:a="http://schemas.openxmlformats.org/drawingml/2006/main">
               <a:ext uri="{FF2B5EF4-FFF2-40B4-BE49-F238E27FC236}">
-                <a16:creationId xmlns:a16="http://schemas.microsoft.com/office/drawing/2014/main" id="{F8DDF5FB-7177-4B70-95FD-84421266D080}"/>
+                <a16:creationId xmlns:a16="http://schemas.microsoft.com/office/drawing/2014/main" id="{7BB884C9-B825-4A7E-AB04-53E00671AAD8}"/>
               </a:ext>
             </a:extLst>
           </p:cNvPr>
@@ -8917,7 +8917,7 @@
           <p:cNvPr id="37" name="">
             <a:extLst xmlns:a="http://schemas.openxmlformats.org/drawingml/2006/main">
               <a:ext uri="{FF2B5EF4-FFF2-40B4-BE49-F238E27FC236}">
-                <a16:creationId xmlns:a16="http://schemas.microsoft.com/office/drawing/2014/main" id="{BFA79C0F-38B9-4774-AB71-1CE4A0A17C46}"/>
+                <a16:creationId xmlns:a16="http://schemas.microsoft.com/office/drawing/2014/main" id="{5A886208-1D8A-4E1F-8116-1BEAEF58D769}"/>
               </a:ext>
             </a:extLst>
           </p:cNvPr>
@@ -8962,7 +8962,7 @@
           <p:cNvPr id="38" name="">
             <a:extLst xmlns:a="http://schemas.openxmlformats.org/drawingml/2006/main">
               <a:ext uri="{FF2B5EF4-FFF2-40B4-BE49-F238E27FC236}">
-                <a16:creationId xmlns:a16="http://schemas.microsoft.com/office/drawing/2014/main" id="{DA38BADE-DC83-4237-9E26-AB7291013A0C}"/>
+                <a16:creationId xmlns:a16="http://schemas.microsoft.com/office/drawing/2014/main" id="{632826E7-8F18-4AF0-A9A8-E8D94DCFB036}"/>
               </a:ext>
             </a:extLst>
           </p:cNvPr>
@@ -9005,7 +9005,7 @@
     </p:spTree>
     <p:extLst>
       <p:ext uri="{BB962C8B-B14F-4D97-AF65-F5344CB8AC3E}">
-        <p14:creationId xmlns:p14="http://schemas.microsoft.com/office/powerpoint/2010/main" val="1398286171"/>
+        <p14:creationId xmlns:p14="http://schemas.microsoft.com/office/powerpoint/2010/main" val="871406349"/>
       </p:ext>
     </p:extLst>
   </p:cSld>
@@ -9029,7 +9029,7 @@
           <p:cNvPr id="24" name="">
             <a:extLst xmlns:a="http://schemas.openxmlformats.org/drawingml/2006/main">
               <a:ext uri="{FF2B5EF4-FFF2-40B4-BE49-F238E27FC236}">
-                <a16:creationId xmlns:a16="http://schemas.microsoft.com/office/drawing/2014/main" id="{D9B907F3-9823-41AF-95BF-B08CF8C45629}"/>
+                <a16:creationId xmlns:a16="http://schemas.microsoft.com/office/drawing/2014/main" id="{07445356-2A77-4E00-9775-1D70B6CD9180}"/>
               </a:ext>
             </a:extLst>
           </p:cNvPr>
@@ -9060,7 +9060,7 @@
           <p:cNvPr id="2" name="">
             <a:extLst xmlns:a="http://schemas.openxmlformats.org/drawingml/2006/main">
               <a:ext uri="{FF2B5EF4-FFF2-40B4-BE49-F238E27FC236}">
-                <a16:creationId xmlns:a16="http://schemas.microsoft.com/office/drawing/2014/main" id="{F489ED78-BE55-45D7-A6E2-FC7FD963D360}"/>
+                <a16:creationId xmlns:a16="http://schemas.microsoft.com/office/drawing/2014/main" id="{800A3923-CAB1-4BED-9C0F-0D70CE15A067}"/>
               </a:ext>
             </a:extLst>
           </p:cNvPr>
@@ -9091,7 +9091,7 @@
           <p:cNvPr id="3" name="">
             <a:extLst xmlns:a="http://schemas.openxmlformats.org/drawingml/2006/main">
               <a:ext uri="{FF2B5EF4-FFF2-40B4-BE49-F238E27FC236}">
-                <a16:creationId xmlns:a16="http://schemas.microsoft.com/office/drawing/2014/main" id="{A445DC3B-5260-4C0F-B5D9-5CF35DD72B33}"/>
+                <a16:creationId xmlns:a16="http://schemas.microsoft.com/office/drawing/2014/main" id="{C994D2CD-A823-4F9C-8611-4D67A377E835}"/>
               </a:ext>
             </a:extLst>
           </p:cNvPr>
@@ -9136,7 +9136,7 @@
           <p:cNvPr id="4" name="">
             <a:extLst xmlns:a="http://schemas.openxmlformats.org/drawingml/2006/main">
               <a:ext uri="{FF2B5EF4-FFF2-40B4-BE49-F238E27FC236}">
-                <a16:creationId xmlns:a16="http://schemas.microsoft.com/office/drawing/2014/main" id="{77256D5B-ACC9-4D58-BA16-EF16DB7CC334}"/>
+                <a16:creationId xmlns:a16="http://schemas.microsoft.com/office/drawing/2014/main" id="{4EB3BC3E-C1CD-431E-BD99-BFBA149869FA}"/>
               </a:ext>
             </a:extLst>
           </p:cNvPr>
@@ -9181,7 +9181,7 @@
           <p:cNvPr id="5" name="">
             <a:extLst xmlns:a="http://schemas.openxmlformats.org/drawingml/2006/main">
               <a:ext uri="{FF2B5EF4-FFF2-40B4-BE49-F238E27FC236}">
-                <a16:creationId xmlns:a16="http://schemas.microsoft.com/office/drawing/2014/main" id="{FB7067A6-4817-46EE-8774-CB55782B7CCB}"/>
+                <a16:creationId xmlns:a16="http://schemas.microsoft.com/office/drawing/2014/main" id="{9ADFF1BF-42CD-47FA-82D5-85470E209AA0}"/>
               </a:ext>
             </a:extLst>
           </p:cNvPr>
@@ -9212,7 +9212,7 @@
           <p:cNvPr id="6" name="">
             <a:extLst xmlns:a="http://schemas.openxmlformats.org/drawingml/2006/main">
               <a:ext uri="{FF2B5EF4-FFF2-40B4-BE49-F238E27FC236}">
-                <a16:creationId xmlns:a16="http://schemas.microsoft.com/office/drawing/2014/main" id="{9AE7677B-C9CF-4F3B-83F6-21A6F58B2E7A}"/>
+                <a16:creationId xmlns:a16="http://schemas.microsoft.com/office/drawing/2014/main" id="{1FE74933-38D2-4117-BAF7-826B1AA2864B}"/>
               </a:ext>
             </a:extLst>
           </p:cNvPr>
@@ -9257,7 +9257,7 @@
           <p:cNvPr id="7" name="">
             <a:extLst xmlns:a="http://schemas.openxmlformats.org/drawingml/2006/main">
               <a:ext uri="{FF2B5EF4-FFF2-40B4-BE49-F238E27FC236}">
-                <a16:creationId xmlns:a16="http://schemas.microsoft.com/office/drawing/2014/main" id="{FDA9EC0D-4561-4331-81E0-271F55B70957}"/>
+                <a16:creationId xmlns:a16="http://schemas.microsoft.com/office/drawing/2014/main" id="{48BB23ED-8A7B-43A1-B461-1C79EE5097A0}"/>
               </a:ext>
             </a:extLst>
           </p:cNvPr>
@@ -9302,7 +9302,7 @@
           <p:cNvPr id="8" name="">
             <a:extLst xmlns:a="http://schemas.openxmlformats.org/drawingml/2006/main">
               <a:ext uri="{FF2B5EF4-FFF2-40B4-BE49-F238E27FC236}">
-                <a16:creationId xmlns:a16="http://schemas.microsoft.com/office/drawing/2014/main" id="{EA10C8C7-C6F0-4353-B603-3FC1A61645B9}"/>
+                <a16:creationId xmlns:a16="http://schemas.microsoft.com/office/drawing/2014/main" id="{57A5DE74-8063-4E48-930B-DBF3EE34F001}"/>
               </a:ext>
             </a:extLst>
           </p:cNvPr>
@@ -9337,7 +9337,7 @@
           <p:cNvPr id="9" name="">
             <a:extLst xmlns:a="http://schemas.openxmlformats.org/drawingml/2006/main">
               <a:ext uri="{FF2B5EF4-FFF2-40B4-BE49-F238E27FC236}">
-                <a16:creationId xmlns:a16="http://schemas.microsoft.com/office/drawing/2014/main" id="{6C78D86E-F68E-404A-BA39-B0BE9CF5407E}"/>
+                <a16:creationId xmlns:a16="http://schemas.microsoft.com/office/drawing/2014/main" id="{2AFEB26F-792E-403F-8661-1D59BBE52627}"/>
               </a:ext>
             </a:extLst>
           </p:cNvPr>
@@ -9368,7 +9368,7 @@
           <p:cNvPr id="10" name="">
             <a:extLst xmlns:a="http://schemas.openxmlformats.org/drawingml/2006/main">
               <a:ext uri="{FF2B5EF4-FFF2-40B4-BE49-F238E27FC236}">
-                <a16:creationId xmlns:a16="http://schemas.microsoft.com/office/drawing/2014/main" id="{BD3F3EF1-4B37-4347-A9F0-FD1CE06D1866}"/>
+                <a16:creationId xmlns:a16="http://schemas.microsoft.com/office/drawing/2014/main" id="{B8FE69D4-0143-48CC-8EAF-9ACD437BA097}"/>
               </a:ext>
             </a:extLst>
           </p:cNvPr>
@@ -9413,7 +9413,7 @@
           <p:cNvPr id="11" name="">
             <a:extLst xmlns:a="http://schemas.openxmlformats.org/drawingml/2006/main">
               <a:ext uri="{FF2B5EF4-FFF2-40B4-BE49-F238E27FC236}">
-                <a16:creationId xmlns:a16="http://schemas.microsoft.com/office/drawing/2014/main" id="{34641C96-5F33-4D6A-AC5A-F1A15DA4B99D}"/>
+                <a16:creationId xmlns:a16="http://schemas.microsoft.com/office/drawing/2014/main" id="{46A6C6AC-CEC8-45C2-A136-291B3BE021AA}"/>
               </a:ext>
             </a:extLst>
           </p:cNvPr>
@@ -9458,7 +9458,7 @@
           <p:cNvPr id="12" name="">
             <a:extLst xmlns:a="http://schemas.openxmlformats.org/drawingml/2006/main">
               <a:ext uri="{FF2B5EF4-FFF2-40B4-BE49-F238E27FC236}">
-                <a16:creationId xmlns:a16="http://schemas.microsoft.com/office/drawing/2014/main" id="{6885998F-5FE2-48BD-8587-0855BD4ABB35}"/>
+                <a16:creationId xmlns:a16="http://schemas.microsoft.com/office/drawing/2014/main" id="{C0E527CB-0E72-43E8-993F-792AA419DD22}"/>
               </a:ext>
             </a:extLst>
           </p:cNvPr>
@@ -9493,7 +9493,7 @@
           <p:cNvPr id="13" name="">
             <a:extLst xmlns:a="http://schemas.openxmlformats.org/drawingml/2006/main">
               <a:ext uri="{FF2B5EF4-FFF2-40B4-BE49-F238E27FC236}">
-                <a16:creationId xmlns:a16="http://schemas.microsoft.com/office/drawing/2014/main" id="{3EF89972-6C13-4C20-9E9F-6447C9985FE0}"/>
+                <a16:creationId xmlns:a16="http://schemas.microsoft.com/office/drawing/2014/main" id="{31143D17-D6A2-4B2F-AAFC-2B11A077E816}"/>
               </a:ext>
             </a:extLst>
           </p:cNvPr>
@@ -9524,7 +9524,7 @@
           <p:cNvPr id="14" name="">
             <a:extLst xmlns:a="http://schemas.openxmlformats.org/drawingml/2006/main">
               <a:ext uri="{FF2B5EF4-FFF2-40B4-BE49-F238E27FC236}">
-                <a16:creationId xmlns:a16="http://schemas.microsoft.com/office/drawing/2014/main" id="{2A9997A3-5649-4F55-87E4-22DE52D8A6D3}"/>
+                <a16:creationId xmlns:a16="http://schemas.microsoft.com/office/drawing/2014/main" id="{F6D26DA9-8E69-40F4-96F5-76E7CE44AC5A}"/>
               </a:ext>
             </a:extLst>
           </p:cNvPr>
@@ -9569,7 +9569,7 @@
           <p:cNvPr id="15" name="">
             <a:extLst xmlns:a="http://schemas.openxmlformats.org/drawingml/2006/main">
               <a:ext uri="{FF2B5EF4-FFF2-40B4-BE49-F238E27FC236}">
-                <a16:creationId xmlns:a16="http://schemas.microsoft.com/office/drawing/2014/main" id="{A83A2C11-188E-443F-B707-E3A4223547D3}"/>
+                <a16:creationId xmlns:a16="http://schemas.microsoft.com/office/drawing/2014/main" id="{18617F98-30D0-4501-BB16-95899C964D41}"/>
               </a:ext>
             </a:extLst>
           </p:cNvPr>
@@ -9614,7 +9614,7 @@
           <p:cNvPr id="16" name="">
             <a:extLst xmlns:a="http://schemas.openxmlformats.org/drawingml/2006/main">
               <a:ext uri="{FF2B5EF4-FFF2-40B4-BE49-F238E27FC236}">
-                <a16:creationId xmlns:a16="http://schemas.microsoft.com/office/drawing/2014/main" id="{62F7011D-CEDD-4EB0-9EA1-266EA0E63DA2}"/>
+                <a16:creationId xmlns:a16="http://schemas.microsoft.com/office/drawing/2014/main" id="{CEFE6329-B6D0-4C6E-94CB-34E4CAD8F6BE}"/>
               </a:ext>
             </a:extLst>
           </p:cNvPr>
@@ -9649,7 +9649,7 @@
           <p:cNvPr id="17" name="">
             <a:extLst xmlns:a="http://schemas.openxmlformats.org/drawingml/2006/main">
               <a:ext uri="{FF2B5EF4-FFF2-40B4-BE49-F238E27FC236}">
-                <a16:creationId xmlns:a16="http://schemas.microsoft.com/office/drawing/2014/main" id="{6374EAE0-967B-4F1A-8F65-8F248A26F183}"/>
+                <a16:creationId xmlns:a16="http://schemas.microsoft.com/office/drawing/2014/main" id="{13A8A45D-1F13-423B-B19F-4F59BFAC8DA0}"/>
               </a:ext>
             </a:extLst>
           </p:cNvPr>
@@ -9680,7 +9680,7 @@
           <p:cNvPr id="18" name="">
             <a:extLst xmlns:a="http://schemas.openxmlformats.org/drawingml/2006/main">
               <a:ext uri="{FF2B5EF4-FFF2-40B4-BE49-F238E27FC236}">
-                <a16:creationId xmlns:a16="http://schemas.microsoft.com/office/drawing/2014/main" id="{2ECC58F4-C90C-4952-8139-230812D2FE3E}"/>
+                <a16:creationId xmlns:a16="http://schemas.microsoft.com/office/drawing/2014/main" id="{955EDA58-7CA1-45C6-A2B7-8C3511F860B8}"/>
               </a:ext>
             </a:extLst>
           </p:cNvPr>
@@ -9725,7 +9725,7 @@
           <p:cNvPr id="19" name="">
             <a:extLst xmlns:a="http://schemas.openxmlformats.org/drawingml/2006/main">
               <a:ext uri="{FF2B5EF4-FFF2-40B4-BE49-F238E27FC236}">
-                <a16:creationId xmlns:a16="http://schemas.microsoft.com/office/drawing/2014/main" id="{82A040A3-531B-45ED-AE68-1F6114D678AA}"/>
+                <a16:creationId xmlns:a16="http://schemas.microsoft.com/office/drawing/2014/main" id="{565203B1-625C-44A6-9338-E23013465A09}"/>
               </a:ext>
             </a:extLst>
           </p:cNvPr>
@@ -9770,7 +9770,7 @@
           <p:cNvPr id="20" name="">
             <a:extLst xmlns:a="http://schemas.openxmlformats.org/drawingml/2006/main">
               <a:ext uri="{FF2B5EF4-FFF2-40B4-BE49-F238E27FC236}">
-                <a16:creationId xmlns:a16="http://schemas.microsoft.com/office/drawing/2014/main" id="{3C014B81-90DD-4665-A1E0-BECBD0715881}"/>
+                <a16:creationId xmlns:a16="http://schemas.microsoft.com/office/drawing/2014/main" id="{9BF22CBB-0B2C-4FF2-BA93-DFB32C04DD54}"/>
               </a:ext>
             </a:extLst>
           </p:cNvPr>
@@ -9801,7 +9801,7 @@
           <p:cNvPr id="21" name="">
             <a:extLst xmlns:a="http://schemas.openxmlformats.org/drawingml/2006/main">
               <a:ext uri="{FF2B5EF4-FFF2-40B4-BE49-F238E27FC236}">
-                <a16:creationId xmlns:a16="http://schemas.microsoft.com/office/drawing/2014/main" id="{33C47323-AF55-4778-B59B-3817DC4B42BD}"/>
+                <a16:creationId xmlns:a16="http://schemas.microsoft.com/office/drawing/2014/main" id="{9675F2F2-885E-4EB1-8B3B-17EE19C9DA6D}"/>
               </a:ext>
             </a:extLst>
           </p:cNvPr>
@@ -9832,7 +9832,7 @@
           <p:cNvPr id="22" name="">
             <a:extLst xmlns:a="http://schemas.openxmlformats.org/drawingml/2006/main">
               <a:ext uri="{FF2B5EF4-FFF2-40B4-BE49-F238E27FC236}">
-                <a16:creationId xmlns:a16="http://schemas.microsoft.com/office/drawing/2014/main" id="{2A664881-534A-4F92-9438-E4BF083FEEEA}"/>
+                <a16:creationId xmlns:a16="http://schemas.microsoft.com/office/drawing/2014/main" id="{DD3FEE41-6954-4DE7-950B-9C33D7F34E25}"/>
               </a:ext>
             </a:extLst>
           </p:cNvPr>
@@ -9877,7 +9877,7 @@
           <p:cNvPr id="23" name="">
             <a:extLst xmlns:a="http://schemas.openxmlformats.org/drawingml/2006/main">
               <a:ext uri="{FF2B5EF4-FFF2-40B4-BE49-F238E27FC236}">
-                <a16:creationId xmlns:a16="http://schemas.microsoft.com/office/drawing/2014/main" id="{D46BE6DE-B987-4D4B-99A9-CA9E65D92EBB}"/>
+                <a16:creationId xmlns:a16="http://schemas.microsoft.com/office/drawing/2014/main" id="{2AB3F416-3F30-4797-B05B-3B4F57C9B92F}"/>
               </a:ext>
             </a:extLst>
           </p:cNvPr>
@@ -9920,7 +9920,7 @@
     </p:spTree>
     <p:extLst>
       <p:ext uri="{BB962C8B-B14F-4D97-AF65-F5344CB8AC3E}">
-        <p14:creationId xmlns:p14="http://schemas.microsoft.com/office/powerpoint/2010/main" val="2017598374"/>
+        <p14:creationId xmlns:p14="http://schemas.microsoft.com/office/powerpoint/2010/main" val="2067042360"/>
       </p:ext>
     </p:extLst>
   </p:cSld>
@@ -9944,7 +9944,7 @@
           <p:cNvPr id="41" name="">
             <a:extLst xmlns:a="http://schemas.openxmlformats.org/drawingml/2006/main">
               <a:ext uri="{FF2B5EF4-FFF2-40B4-BE49-F238E27FC236}">
-                <a16:creationId xmlns:a16="http://schemas.microsoft.com/office/drawing/2014/main" id="{0152A969-F975-410C-BDA8-B40DD1AA69CA}"/>
+                <a16:creationId xmlns:a16="http://schemas.microsoft.com/office/drawing/2014/main" id="{75DF8BD4-57BF-43A8-BE89-6896E521874F}"/>
               </a:ext>
             </a:extLst>
           </p:cNvPr>
@@ -9975,7 +9975,7 @@
           <p:cNvPr id="2" name="">
             <a:extLst xmlns:a="http://schemas.openxmlformats.org/drawingml/2006/main">
               <a:ext uri="{FF2B5EF4-FFF2-40B4-BE49-F238E27FC236}">
-                <a16:creationId xmlns:a16="http://schemas.microsoft.com/office/drawing/2014/main" id="{15F2980A-7E8E-4372-86B6-7B27D8CE4CB6}"/>
+                <a16:creationId xmlns:a16="http://schemas.microsoft.com/office/drawing/2014/main" id="{82966A2C-E8A5-41AA-B559-EDF10ECC24B5}"/>
               </a:ext>
             </a:extLst>
           </p:cNvPr>
@@ -10020,7 +10020,7 @@
           <p:cNvPr id="3" name="">
             <a:extLst xmlns:a="http://schemas.openxmlformats.org/drawingml/2006/main">
               <a:ext uri="{FF2B5EF4-FFF2-40B4-BE49-F238E27FC236}">
-                <a16:creationId xmlns:a16="http://schemas.microsoft.com/office/drawing/2014/main" id="{D67449CC-DC36-4348-82A2-942E8B323F8F}"/>
+                <a16:creationId xmlns:a16="http://schemas.microsoft.com/office/drawing/2014/main" id="{801ADD60-07CE-4DE8-AA05-9FF9CD0B7CDC}"/>
               </a:ext>
             </a:extLst>
           </p:cNvPr>
@@ -10065,7 +10065,7 @@
           <p:cNvPr id="4" name="">
             <a:extLst xmlns:a="http://schemas.openxmlformats.org/drawingml/2006/main">
               <a:ext uri="{FF2B5EF4-FFF2-40B4-BE49-F238E27FC236}">
-                <a16:creationId xmlns:a16="http://schemas.microsoft.com/office/drawing/2014/main" id="{5BB6B94B-FC60-4108-B36D-6D06A725BA61}"/>
+                <a16:creationId xmlns:a16="http://schemas.microsoft.com/office/drawing/2014/main" id="{3958A991-A63E-40F5-BAFB-C4469E6C9F74}"/>
               </a:ext>
             </a:extLst>
           </p:cNvPr>
@@ -10110,7 +10110,7 @@
           <p:cNvPr id="5" name="">
             <a:extLst xmlns:a="http://schemas.openxmlformats.org/drawingml/2006/main">
               <a:ext uri="{FF2B5EF4-FFF2-40B4-BE49-F238E27FC236}">
-                <a16:creationId xmlns:a16="http://schemas.microsoft.com/office/drawing/2014/main" id="{68AFC48E-8EBF-46E4-B107-AD8ECF764443}"/>
+                <a16:creationId xmlns:a16="http://schemas.microsoft.com/office/drawing/2014/main" id="{CDE4AE49-7FD6-4D03-B350-3EC75DA7EB44}"/>
               </a:ext>
             </a:extLst>
           </p:cNvPr>
@@ -10141,7 +10141,7 @@
           <p:cNvPr id="6" name="">
             <a:extLst xmlns:a="http://schemas.openxmlformats.org/drawingml/2006/main">
               <a:ext uri="{FF2B5EF4-FFF2-40B4-BE49-F238E27FC236}">
-                <a16:creationId xmlns:a16="http://schemas.microsoft.com/office/drawing/2014/main" id="{C7942114-9E36-471A-A8BB-164827F431C5}"/>
+                <a16:creationId xmlns:a16="http://schemas.microsoft.com/office/drawing/2014/main" id="{BD1E9B0A-1FF5-469C-A1E3-C969145EA105}"/>
               </a:ext>
             </a:extLst>
           </p:cNvPr>
@@ -10172,7 +10172,7 @@
           <p:cNvPr id="7" name="">
             <a:extLst xmlns:a="http://schemas.openxmlformats.org/drawingml/2006/main">
               <a:ext uri="{FF2B5EF4-FFF2-40B4-BE49-F238E27FC236}">
-                <a16:creationId xmlns:a16="http://schemas.microsoft.com/office/drawing/2014/main" id="{9AB1B248-0ABB-444D-9F35-C8F19E9EE815}"/>
+                <a16:creationId xmlns:a16="http://schemas.microsoft.com/office/drawing/2014/main" id="{1742ADF2-1A1D-495C-94A7-B5A8A4F5EB5A}"/>
               </a:ext>
             </a:extLst>
           </p:cNvPr>
@@ -10217,7 +10217,7 @@
           <p:cNvPr id="8" name="">
             <a:extLst xmlns:a="http://schemas.openxmlformats.org/drawingml/2006/main">
               <a:ext uri="{FF2B5EF4-FFF2-40B4-BE49-F238E27FC236}">
-                <a16:creationId xmlns:a16="http://schemas.microsoft.com/office/drawing/2014/main" id="{64550D9D-FE64-40B1-A9DD-01E61B4CFB43}"/>
+                <a16:creationId xmlns:a16="http://schemas.microsoft.com/office/drawing/2014/main" id="{504AA65A-DA80-4CEC-8E61-184E59E47047}"/>
               </a:ext>
             </a:extLst>
           </p:cNvPr>
@@ -10262,7 +10262,7 @@
           <p:cNvPr id="9" name="">
             <a:extLst xmlns:a="http://schemas.openxmlformats.org/drawingml/2006/main">
               <a:ext uri="{FF2B5EF4-FFF2-40B4-BE49-F238E27FC236}">
-                <a16:creationId xmlns:a16="http://schemas.microsoft.com/office/drawing/2014/main" id="{328646D1-C82D-4CFE-9E35-AF91C2E49F49}"/>
+                <a16:creationId xmlns:a16="http://schemas.microsoft.com/office/drawing/2014/main" id="{7BB95DA9-A081-40AD-8752-F2D49C21193D}"/>
               </a:ext>
             </a:extLst>
           </p:cNvPr>
@@ -10297,7 +10297,7 @@
           <p:cNvPr id="10" name="">
             <a:extLst xmlns:a="http://schemas.openxmlformats.org/drawingml/2006/main">
               <a:ext uri="{FF2B5EF4-FFF2-40B4-BE49-F238E27FC236}">
-                <a16:creationId xmlns:a16="http://schemas.microsoft.com/office/drawing/2014/main" id="{9159D016-36A0-45A9-A6ED-0E38D0397648}"/>
+                <a16:creationId xmlns:a16="http://schemas.microsoft.com/office/drawing/2014/main" id="{E945B6B7-0569-4C93-93BC-5A1FF8096320}"/>
               </a:ext>
             </a:extLst>
           </p:cNvPr>
@@ -10342,7 +10342,7 @@
           <p:cNvPr id="11" name="">
             <a:extLst xmlns:a="http://schemas.openxmlformats.org/drawingml/2006/main">
               <a:ext uri="{FF2B5EF4-FFF2-40B4-BE49-F238E27FC236}">
-                <a16:creationId xmlns:a16="http://schemas.microsoft.com/office/drawing/2014/main" id="{83BE6454-3D3D-482F-98BA-482BFEED0F43}"/>
+                <a16:creationId xmlns:a16="http://schemas.microsoft.com/office/drawing/2014/main" id="{B47E0C9F-EFA9-4EA9-9904-2E00A0980898}"/>
               </a:ext>
             </a:extLst>
           </p:cNvPr>
@@ -10387,7 +10387,7 @@
           <p:cNvPr id="12" name="">
             <a:extLst xmlns:a="http://schemas.openxmlformats.org/drawingml/2006/main">
               <a:ext uri="{FF2B5EF4-FFF2-40B4-BE49-F238E27FC236}">
-                <a16:creationId xmlns:a16="http://schemas.microsoft.com/office/drawing/2014/main" id="{57E63AF6-D543-4E49-81B6-282D9053D9A9}"/>
+                <a16:creationId xmlns:a16="http://schemas.microsoft.com/office/drawing/2014/main" id="{160D77D0-6088-4164-A2AF-A0AAFC280A6B}"/>
               </a:ext>
             </a:extLst>
           </p:cNvPr>
@@ -10432,7 +10432,7 @@
           <p:cNvPr id="13" name="">
             <a:extLst xmlns:a="http://schemas.openxmlformats.org/drawingml/2006/main">
               <a:ext uri="{FF2B5EF4-FFF2-40B4-BE49-F238E27FC236}">
-                <a16:creationId xmlns:a16="http://schemas.microsoft.com/office/drawing/2014/main" id="{9EA07F68-BE88-4C27-B48D-07453475BE5C}"/>
+                <a16:creationId xmlns:a16="http://schemas.microsoft.com/office/drawing/2014/main" id="{BD58A5F3-E140-4146-92BC-BEEC6DB35334}"/>
               </a:ext>
             </a:extLst>
           </p:cNvPr>
@@ -10467,7 +10467,7 @@
           <p:cNvPr id="14" name="">
             <a:extLst xmlns:a="http://schemas.openxmlformats.org/drawingml/2006/main">
               <a:ext uri="{FF2B5EF4-FFF2-40B4-BE49-F238E27FC236}">
-                <a16:creationId xmlns:a16="http://schemas.microsoft.com/office/drawing/2014/main" id="{08BF92BB-2E73-42C8-A187-F7EA459C9F97}"/>
+                <a16:creationId xmlns:a16="http://schemas.microsoft.com/office/drawing/2014/main" id="{25F73718-F4DD-4AA5-95F1-AEC7619A2528}"/>
               </a:ext>
             </a:extLst>
           </p:cNvPr>
@@ -10512,7 +10512,7 @@
           <p:cNvPr id="15" name="">
             <a:extLst xmlns:a="http://schemas.openxmlformats.org/drawingml/2006/main">
               <a:ext uri="{FF2B5EF4-FFF2-40B4-BE49-F238E27FC236}">
-                <a16:creationId xmlns:a16="http://schemas.microsoft.com/office/drawing/2014/main" id="{D1A4BA9F-DFF6-4A9D-95AA-C48D23FF5750}"/>
+                <a16:creationId xmlns:a16="http://schemas.microsoft.com/office/drawing/2014/main" id="{D99ADCAC-F4FD-4C2D-96F1-EB7C2580CD80}"/>
               </a:ext>
             </a:extLst>
           </p:cNvPr>
@@ -10557,7 +10557,7 @@
           <p:cNvPr id="16" name="">
             <a:extLst xmlns:a="http://schemas.openxmlformats.org/drawingml/2006/main">
               <a:ext uri="{FF2B5EF4-FFF2-40B4-BE49-F238E27FC236}">
-                <a16:creationId xmlns:a16="http://schemas.microsoft.com/office/drawing/2014/main" id="{F584C6DE-7A45-4D79-A57B-EBEE437C4E55}"/>
+                <a16:creationId xmlns:a16="http://schemas.microsoft.com/office/drawing/2014/main" id="{6FCEC388-C56F-45C9-9388-2898942B649F}"/>
               </a:ext>
             </a:extLst>
           </p:cNvPr>
@@ -10602,7 +10602,7 @@
           <p:cNvPr id="17" name="">
             <a:extLst xmlns:a="http://schemas.openxmlformats.org/drawingml/2006/main">
               <a:ext uri="{FF2B5EF4-FFF2-40B4-BE49-F238E27FC236}">
-                <a16:creationId xmlns:a16="http://schemas.microsoft.com/office/drawing/2014/main" id="{04C6150E-F412-49D7-A909-8C8C2D42F316}"/>
+                <a16:creationId xmlns:a16="http://schemas.microsoft.com/office/drawing/2014/main" id="{643E548E-3841-4D0F-BF5A-C2D748881636}"/>
               </a:ext>
             </a:extLst>
           </p:cNvPr>
@@ -10637,7 +10637,7 @@
           <p:cNvPr id="18" name="">
             <a:extLst xmlns:a="http://schemas.openxmlformats.org/drawingml/2006/main">
               <a:ext uri="{FF2B5EF4-FFF2-40B4-BE49-F238E27FC236}">
-                <a16:creationId xmlns:a16="http://schemas.microsoft.com/office/drawing/2014/main" id="{3CAFD4D0-E791-4669-A7EB-C7CADCF43D84}"/>
+                <a16:creationId xmlns:a16="http://schemas.microsoft.com/office/drawing/2014/main" id="{E9F9E818-A92E-4245-B089-4FF23BABDFE8}"/>
               </a:ext>
             </a:extLst>
           </p:cNvPr>
@@ -10682,7 +10682,7 @@
           <p:cNvPr id="19" name="">
             <a:extLst xmlns:a="http://schemas.openxmlformats.org/drawingml/2006/main">
               <a:ext uri="{FF2B5EF4-FFF2-40B4-BE49-F238E27FC236}">
-                <a16:creationId xmlns:a16="http://schemas.microsoft.com/office/drawing/2014/main" id="{A48BD690-29FB-44DF-B638-C55B12A839A1}"/>
+                <a16:creationId xmlns:a16="http://schemas.microsoft.com/office/drawing/2014/main" id="{E77CFA8C-7A8A-4C72-9F85-A25217CC8AD9}"/>
               </a:ext>
             </a:extLst>
           </p:cNvPr>
@@ -10727,7 +10727,7 @@
           <p:cNvPr id="20" name="">
             <a:extLst xmlns:a="http://schemas.openxmlformats.org/drawingml/2006/main">
               <a:ext uri="{FF2B5EF4-FFF2-40B4-BE49-F238E27FC236}">
-                <a16:creationId xmlns:a16="http://schemas.microsoft.com/office/drawing/2014/main" id="{0339144A-E18A-4F69-83D0-F2AD89D25BC6}"/>
+                <a16:creationId xmlns:a16="http://schemas.microsoft.com/office/drawing/2014/main" id="{8A47B68D-CCD9-4CA3-B9D8-F17155491F76}"/>
               </a:ext>
             </a:extLst>
           </p:cNvPr>
@@ -10772,7 +10772,7 @@
           <p:cNvPr id="21" name="">
             <a:extLst xmlns:a="http://schemas.openxmlformats.org/drawingml/2006/main">
               <a:ext uri="{FF2B5EF4-FFF2-40B4-BE49-F238E27FC236}">
-                <a16:creationId xmlns:a16="http://schemas.microsoft.com/office/drawing/2014/main" id="{A2435E23-3787-4D44-8956-23D884AE2ABE}"/>
+                <a16:creationId xmlns:a16="http://schemas.microsoft.com/office/drawing/2014/main" id="{E3306085-8B35-4D2F-AED6-6FD34C0BF770}"/>
               </a:ext>
             </a:extLst>
           </p:cNvPr>
@@ -10807,7 +10807,7 @@
           <p:cNvPr id="22" name="">
             <a:extLst xmlns:a="http://schemas.openxmlformats.org/drawingml/2006/main">
               <a:ext uri="{FF2B5EF4-FFF2-40B4-BE49-F238E27FC236}">
-                <a16:creationId xmlns:a16="http://schemas.microsoft.com/office/drawing/2014/main" id="{0C20FCB3-F051-4821-A553-391C72B37477}"/>
+                <a16:creationId xmlns:a16="http://schemas.microsoft.com/office/drawing/2014/main" id="{A8FC6AC1-35C3-479C-B5CA-8E89A6C50D51}"/>
               </a:ext>
             </a:extLst>
           </p:cNvPr>
@@ -10852,7 +10852,7 @@
           <p:cNvPr id="23" name="">
             <a:extLst xmlns:a="http://schemas.openxmlformats.org/drawingml/2006/main">
               <a:ext uri="{FF2B5EF4-FFF2-40B4-BE49-F238E27FC236}">
-                <a16:creationId xmlns:a16="http://schemas.microsoft.com/office/drawing/2014/main" id="{C353B959-0AA5-4AEC-91F2-6CC31E931ECF}"/>
+                <a16:creationId xmlns:a16="http://schemas.microsoft.com/office/drawing/2014/main" id="{899B9218-BC63-427E-8F8F-295FF0B85FC0}"/>
               </a:ext>
             </a:extLst>
           </p:cNvPr>
@@ -10897,7 +10897,7 @@
           <p:cNvPr id="24" name="">
             <a:extLst xmlns:a="http://schemas.openxmlformats.org/drawingml/2006/main">
               <a:ext uri="{FF2B5EF4-FFF2-40B4-BE49-F238E27FC236}">
-                <a16:creationId xmlns:a16="http://schemas.microsoft.com/office/drawing/2014/main" id="{762B4E5A-9BD5-42F3-9E57-3097518B96F4}"/>
+                <a16:creationId xmlns:a16="http://schemas.microsoft.com/office/drawing/2014/main" id="{F41B0131-29CF-4368-8747-9D65847917FF}"/>
               </a:ext>
             </a:extLst>
           </p:cNvPr>
@@ -10942,7 +10942,7 @@
           <p:cNvPr id="25" name="">
             <a:extLst xmlns:a="http://schemas.openxmlformats.org/drawingml/2006/main">
               <a:ext uri="{FF2B5EF4-FFF2-40B4-BE49-F238E27FC236}">
-                <a16:creationId xmlns:a16="http://schemas.microsoft.com/office/drawing/2014/main" id="{FBE0B0F0-F155-45F3-A194-2BE137845C65}"/>
+                <a16:creationId xmlns:a16="http://schemas.microsoft.com/office/drawing/2014/main" id="{FD876273-56E8-4BEC-94EF-E3A154A21D88}"/>
               </a:ext>
             </a:extLst>
           </p:cNvPr>
@@ -10973,7 +10973,7 @@
           <p:cNvPr id="26" name="">
             <a:extLst xmlns:a="http://schemas.openxmlformats.org/drawingml/2006/main">
               <a:ext uri="{FF2B5EF4-FFF2-40B4-BE49-F238E27FC236}">
-                <a16:creationId xmlns:a16="http://schemas.microsoft.com/office/drawing/2014/main" id="{CFBE26DD-9456-4C08-ACE2-BEE19C85B914}"/>
+                <a16:creationId xmlns:a16="http://schemas.microsoft.com/office/drawing/2014/main" id="{4A257F02-A522-4501-95AD-85C18C7CB584}"/>
               </a:ext>
             </a:extLst>
           </p:cNvPr>
@@ -11004,7 +11004,7 @@
           <p:cNvPr id="27" name="">
             <a:extLst xmlns:a="http://schemas.openxmlformats.org/drawingml/2006/main">
               <a:ext uri="{FF2B5EF4-FFF2-40B4-BE49-F238E27FC236}">
-                <a16:creationId xmlns:a16="http://schemas.microsoft.com/office/drawing/2014/main" id="{B70E5D2D-FE11-4626-AB21-2FE88ECE2663}"/>
+                <a16:creationId xmlns:a16="http://schemas.microsoft.com/office/drawing/2014/main" id="{ABD1B618-E576-4DD5-AEB0-00729AEE1430}"/>
               </a:ext>
             </a:extLst>
           </p:cNvPr>
@@ -11049,7 +11049,7 @@
           <p:cNvPr id="28" name="">
             <a:extLst xmlns:a="http://schemas.openxmlformats.org/drawingml/2006/main">
               <a:ext uri="{FF2B5EF4-FFF2-40B4-BE49-F238E27FC236}">
-                <a16:creationId xmlns:a16="http://schemas.microsoft.com/office/drawing/2014/main" id="{95A7654C-1DF0-4966-A0A6-8842C171B2DD}"/>
+                <a16:creationId xmlns:a16="http://schemas.microsoft.com/office/drawing/2014/main" id="{42EC8618-BB8F-4E07-B281-B9AE580B9781}"/>
               </a:ext>
             </a:extLst>
           </p:cNvPr>
@@ -11084,7 +11084,7 @@
           <p:cNvPr id="29" name="">
             <a:extLst xmlns:a="http://schemas.openxmlformats.org/drawingml/2006/main">
               <a:ext uri="{FF2B5EF4-FFF2-40B4-BE49-F238E27FC236}">
-                <a16:creationId xmlns:a16="http://schemas.microsoft.com/office/drawing/2014/main" id="{181FA902-2633-47FE-8687-113AD8CA637B}"/>
+                <a16:creationId xmlns:a16="http://schemas.microsoft.com/office/drawing/2014/main" id="{A68E0D6B-A093-41F2-8D73-55291D22FC73}"/>
               </a:ext>
             </a:extLst>
           </p:cNvPr>
@@ -11115,7 +11115,7 @@
           <p:cNvPr id="30" name="">
             <a:extLst xmlns:a="http://schemas.openxmlformats.org/drawingml/2006/main">
               <a:ext uri="{FF2B5EF4-FFF2-40B4-BE49-F238E27FC236}">
-                <a16:creationId xmlns:a16="http://schemas.microsoft.com/office/drawing/2014/main" id="{5A8C08D1-CE75-48EB-80B5-4B35E3192856}"/>
+                <a16:creationId xmlns:a16="http://schemas.microsoft.com/office/drawing/2014/main" id="{2EDC69A9-2387-4BFA-9D4F-A6BFB0D1F82F}"/>
               </a:ext>
             </a:extLst>
           </p:cNvPr>
@@ -11160,7 +11160,7 @@
           <p:cNvPr id="31" name="">
             <a:extLst xmlns:a="http://schemas.openxmlformats.org/drawingml/2006/main">
               <a:ext uri="{FF2B5EF4-FFF2-40B4-BE49-F238E27FC236}">
-                <a16:creationId xmlns:a16="http://schemas.microsoft.com/office/drawing/2014/main" id="{8ADDD9AD-BC6B-480B-B8B7-133E7536F25D}"/>
+                <a16:creationId xmlns:a16="http://schemas.microsoft.com/office/drawing/2014/main" id="{11BBFB4F-AE40-488D-825B-71F1AABD80EB}"/>
               </a:ext>
             </a:extLst>
           </p:cNvPr>
@@ -11205,7 +11205,7 @@
           <p:cNvPr id="32" name="">
             <a:extLst xmlns:a="http://schemas.openxmlformats.org/drawingml/2006/main">
               <a:ext uri="{FF2B5EF4-FFF2-40B4-BE49-F238E27FC236}">
-                <a16:creationId xmlns:a16="http://schemas.microsoft.com/office/drawing/2014/main" id="{74B4EB7E-9585-4A65-B257-02789A1336B5}"/>
+                <a16:creationId xmlns:a16="http://schemas.microsoft.com/office/drawing/2014/main" id="{F22F385E-0EC9-49B4-BF0C-7CFA754649D3}"/>
               </a:ext>
             </a:extLst>
           </p:cNvPr>
@@ -11240,7 +11240,7 @@
           <p:cNvPr id="33" name="">
             <a:extLst xmlns:a="http://schemas.openxmlformats.org/drawingml/2006/main">
               <a:ext uri="{FF2B5EF4-FFF2-40B4-BE49-F238E27FC236}">
-                <a16:creationId xmlns:a16="http://schemas.microsoft.com/office/drawing/2014/main" id="{1A2551E3-AED0-4173-88E3-8AB53EF42193}"/>
+                <a16:creationId xmlns:a16="http://schemas.microsoft.com/office/drawing/2014/main" id="{8B9CFE94-786C-438F-9479-706D3592C51F}"/>
               </a:ext>
             </a:extLst>
           </p:cNvPr>
@@ -11271,7 +11271,7 @@
           <p:cNvPr id="34" name="">
             <a:extLst xmlns:a="http://schemas.openxmlformats.org/drawingml/2006/main">
               <a:ext uri="{FF2B5EF4-FFF2-40B4-BE49-F238E27FC236}">
-                <a16:creationId xmlns:a16="http://schemas.microsoft.com/office/drawing/2014/main" id="{D2B8470C-92C2-4080-B0F0-4E626E41CC86}"/>
+                <a16:creationId xmlns:a16="http://schemas.microsoft.com/office/drawing/2014/main" id="{4CD82D27-A501-4C08-AC77-4DD332611EE1}"/>
               </a:ext>
             </a:extLst>
           </p:cNvPr>
@@ -11316,7 +11316,7 @@
           <p:cNvPr id="35" name="">
             <a:extLst xmlns:a="http://schemas.openxmlformats.org/drawingml/2006/main">
               <a:ext uri="{FF2B5EF4-FFF2-40B4-BE49-F238E27FC236}">
-                <a16:creationId xmlns:a16="http://schemas.microsoft.com/office/drawing/2014/main" id="{0B0D3D2E-5408-467E-8197-8CAF4F43AA8B}"/>
+                <a16:creationId xmlns:a16="http://schemas.microsoft.com/office/drawing/2014/main" id="{B072A84B-2AF7-4C54-A6D0-F43B218D5346}"/>
               </a:ext>
             </a:extLst>
           </p:cNvPr>
@@ -11361,7 +11361,7 @@
           <p:cNvPr id="36" name="">
             <a:extLst xmlns:a="http://schemas.openxmlformats.org/drawingml/2006/main">
               <a:ext uri="{FF2B5EF4-FFF2-40B4-BE49-F238E27FC236}">
-                <a16:creationId xmlns:a16="http://schemas.microsoft.com/office/drawing/2014/main" id="{34F5742B-76C9-4D52-B941-A13FEDE9B28F}"/>
+                <a16:creationId xmlns:a16="http://schemas.microsoft.com/office/drawing/2014/main" id="{4276A185-0050-4B23-B6AC-74B427D452EA}"/>
               </a:ext>
             </a:extLst>
           </p:cNvPr>
@@ -11396,7 +11396,7 @@
           <p:cNvPr id="37" name="">
             <a:extLst xmlns:a="http://schemas.openxmlformats.org/drawingml/2006/main">
               <a:ext uri="{FF2B5EF4-FFF2-40B4-BE49-F238E27FC236}">
-                <a16:creationId xmlns:a16="http://schemas.microsoft.com/office/drawing/2014/main" id="{D637FE19-5AEC-45CA-AC34-2C06C576A205}"/>
+                <a16:creationId xmlns:a16="http://schemas.microsoft.com/office/drawing/2014/main" id="{A0A8C8CF-32C5-42C2-A0A2-B78037AAADF0}"/>
               </a:ext>
             </a:extLst>
           </p:cNvPr>
@@ -11427,7 +11427,7 @@
           <p:cNvPr id="38" name="">
             <a:extLst xmlns:a="http://schemas.openxmlformats.org/drawingml/2006/main">
               <a:ext uri="{FF2B5EF4-FFF2-40B4-BE49-F238E27FC236}">
-                <a16:creationId xmlns:a16="http://schemas.microsoft.com/office/drawing/2014/main" id="{93BD1587-DC86-47AB-9C89-AD1CA1907F42}"/>
+                <a16:creationId xmlns:a16="http://schemas.microsoft.com/office/drawing/2014/main" id="{9D93E0D3-4DD5-47BB-831B-75F0ED703E3D}"/>
               </a:ext>
             </a:extLst>
           </p:cNvPr>
@@ -11472,7 +11472,7 @@
           <p:cNvPr id="39" name="">
             <a:extLst xmlns:a="http://schemas.openxmlformats.org/drawingml/2006/main">
               <a:ext uri="{FF2B5EF4-FFF2-40B4-BE49-F238E27FC236}">
-                <a16:creationId xmlns:a16="http://schemas.microsoft.com/office/drawing/2014/main" id="{B174E5BB-FFF4-4476-8529-B68A1BE575A0}"/>
+                <a16:creationId xmlns:a16="http://schemas.microsoft.com/office/drawing/2014/main" id="{2607C8DB-42D5-4B3A-95BD-0F6C93ADC0BD}"/>
               </a:ext>
             </a:extLst>
           </p:cNvPr>
@@ -11517,7 +11517,7 @@
           <p:cNvPr id="40" name="">
             <a:extLst xmlns:a="http://schemas.openxmlformats.org/drawingml/2006/main">
               <a:ext uri="{FF2B5EF4-FFF2-40B4-BE49-F238E27FC236}">
-                <a16:creationId xmlns:a16="http://schemas.microsoft.com/office/drawing/2014/main" id="{289657AB-8F82-478A-9A27-5D0937968B27}"/>
+                <a16:creationId xmlns:a16="http://schemas.microsoft.com/office/drawing/2014/main" id="{693C275B-97E9-4BCF-A79F-10404AFDF51D}"/>
               </a:ext>
             </a:extLst>
           </p:cNvPr>
@@ -11560,7 +11560,7 @@
     </p:spTree>
     <p:extLst>
       <p:ext uri="{BB962C8B-B14F-4D97-AF65-F5344CB8AC3E}">
-        <p14:creationId xmlns:p14="http://schemas.microsoft.com/office/powerpoint/2010/main" val="1656212760"/>
+        <p14:creationId xmlns:p14="http://schemas.microsoft.com/office/powerpoint/2010/main" val="564885866"/>
       </p:ext>
     </p:extLst>
   </p:cSld>
@@ -11584,7 +11584,7 @@
           <p:cNvPr id="46" name="">
             <a:extLst xmlns:a="http://schemas.openxmlformats.org/drawingml/2006/main">
               <a:ext uri="{FF2B5EF4-FFF2-40B4-BE49-F238E27FC236}">
-                <a16:creationId xmlns:a16="http://schemas.microsoft.com/office/drawing/2014/main" id="{6611F228-957B-4ABB-89DF-F2F10CC9FABB}"/>
+                <a16:creationId xmlns:a16="http://schemas.microsoft.com/office/drawing/2014/main" id="{CF886F3E-85AB-40FF-B22B-9BF775218E98}"/>
               </a:ext>
             </a:extLst>
           </p:cNvPr>
@@ -11615,7 +11615,7 @@
           <p:cNvPr id="2" name="">
             <a:extLst xmlns:a="http://schemas.openxmlformats.org/drawingml/2006/main">
               <a:ext uri="{FF2B5EF4-FFF2-40B4-BE49-F238E27FC236}">
-                <a16:creationId xmlns:a16="http://schemas.microsoft.com/office/drawing/2014/main" id="{CC759471-F0C0-42F2-94A5-BF59A2197125}"/>
+                <a16:creationId xmlns:a16="http://schemas.microsoft.com/office/drawing/2014/main" id="{4E2F5EFE-CB77-45E0-B4A9-8F647DD9725F}"/>
               </a:ext>
             </a:extLst>
           </p:cNvPr>
@@ -11660,7 +11660,7 @@
           <p:cNvPr id="3" name="">
             <a:extLst xmlns:a="http://schemas.openxmlformats.org/drawingml/2006/main">
               <a:ext uri="{FF2B5EF4-FFF2-40B4-BE49-F238E27FC236}">
-                <a16:creationId xmlns:a16="http://schemas.microsoft.com/office/drawing/2014/main" id="{E509F8E4-BBCF-4424-8CE8-3047DF17D530}"/>
+                <a16:creationId xmlns:a16="http://schemas.microsoft.com/office/drawing/2014/main" id="{45661ED5-28B7-4B56-80E7-4544203F0734}"/>
               </a:ext>
             </a:extLst>
           </p:cNvPr>
@@ -11705,7 +11705,7 @@
           <p:cNvPr id="4" name="">
             <a:extLst xmlns:a="http://schemas.openxmlformats.org/drawingml/2006/main">
               <a:ext uri="{FF2B5EF4-FFF2-40B4-BE49-F238E27FC236}">
-                <a16:creationId xmlns:a16="http://schemas.microsoft.com/office/drawing/2014/main" id="{27EF21B9-78D8-46E3-94EF-B1C7FB2A2A08}"/>
+                <a16:creationId xmlns:a16="http://schemas.microsoft.com/office/drawing/2014/main" id="{D34A5100-C10B-4175-A23E-5F794577EA8E}"/>
               </a:ext>
             </a:extLst>
           </p:cNvPr>
@@ -11750,7 +11750,7 @@
           <p:cNvPr id="5" name="">
             <a:extLst xmlns:a="http://schemas.openxmlformats.org/drawingml/2006/main">
               <a:ext uri="{FF2B5EF4-FFF2-40B4-BE49-F238E27FC236}">
-                <a16:creationId xmlns:a16="http://schemas.microsoft.com/office/drawing/2014/main" id="{42C3E941-EAB3-420F-92EF-7B72FDBFC282}"/>
+                <a16:creationId xmlns:a16="http://schemas.microsoft.com/office/drawing/2014/main" id="{4DE40B5D-EE70-4517-BAC7-ACCCA0F5EDC1}"/>
               </a:ext>
             </a:extLst>
           </p:cNvPr>
@@ -11781,7 +11781,7 @@
           <p:cNvPr id="6" name="">
             <a:extLst xmlns:a="http://schemas.openxmlformats.org/drawingml/2006/main">
               <a:ext uri="{FF2B5EF4-FFF2-40B4-BE49-F238E27FC236}">
-                <a16:creationId xmlns:a16="http://schemas.microsoft.com/office/drawing/2014/main" id="{EFB370B7-5AB4-4064-B9B7-19ABBC295D61}"/>
+                <a16:creationId xmlns:a16="http://schemas.microsoft.com/office/drawing/2014/main" id="{841C9554-A47E-4A8F-837C-3A685A8CEA13}"/>
               </a:ext>
             </a:extLst>
           </p:cNvPr>
@@ -11812,7 +11812,7 @@
           <p:cNvPr id="7" name="">
             <a:extLst xmlns:a="http://schemas.openxmlformats.org/drawingml/2006/main">
               <a:ext uri="{FF2B5EF4-FFF2-40B4-BE49-F238E27FC236}">
-                <a16:creationId xmlns:a16="http://schemas.microsoft.com/office/drawing/2014/main" id="{5890359F-3876-4175-8D6F-D292AB89517E}"/>
+                <a16:creationId xmlns:a16="http://schemas.microsoft.com/office/drawing/2014/main" id="{637FED59-BFAD-49DE-9DD0-929C869F48E0}"/>
               </a:ext>
             </a:extLst>
           </p:cNvPr>
@@ -11857,7 +11857,7 @@
           <p:cNvPr id="8" name="">
             <a:extLst xmlns:a="http://schemas.openxmlformats.org/drawingml/2006/main">
               <a:ext uri="{FF2B5EF4-FFF2-40B4-BE49-F238E27FC236}">
-                <a16:creationId xmlns:a16="http://schemas.microsoft.com/office/drawing/2014/main" id="{BD5062EA-1F72-4731-9FE2-1DB99E266084}"/>
+                <a16:creationId xmlns:a16="http://schemas.microsoft.com/office/drawing/2014/main" id="{776D4AE8-98EE-4DEF-83B7-3DECF5E7DEDC}"/>
               </a:ext>
             </a:extLst>
           </p:cNvPr>
@@ -11902,7 +11902,7 @@
           <p:cNvPr id="9" name="">
             <a:extLst xmlns:a="http://schemas.openxmlformats.org/drawingml/2006/main">
               <a:ext uri="{FF2B5EF4-FFF2-40B4-BE49-F238E27FC236}">
-                <a16:creationId xmlns:a16="http://schemas.microsoft.com/office/drawing/2014/main" id="{1D50F31E-463A-4F48-8724-3544EEFE2514}"/>
+                <a16:creationId xmlns:a16="http://schemas.microsoft.com/office/drawing/2014/main" id="{819CB212-7D09-4F1B-8888-E052DC666A7F}"/>
               </a:ext>
             </a:extLst>
           </p:cNvPr>
@@ -11937,7 +11937,7 @@
           <p:cNvPr id="10" name="">
             <a:extLst xmlns:a="http://schemas.openxmlformats.org/drawingml/2006/main">
               <a:ext uri="{FF2B5EF4-FFF2-40B4-BE49-F238E27FC236}">
-                <a16:creationId xmlns:a16="http://schemas.microsoft.com/office/drawing/2014/main" id="{6D410810-3FAD-41F4-9D08-6D4BBDF9778E}"/>
+                <a16:creationId xmlns:a16="http://schemas.microsoft.com/office/drawing/2014/main" id="{D961D68A-E55C-42D0-A730-57E1B9BBFB77}"/>
               </a:ext>
             </a:extLst>
           </p:cNvPr>
@@ -11968,7 +11968,7 @@
           <p:cNvPr id="11" name="">
             <a:extLst xmlns:a="http://schemas.openxmlformats.org/drawingml/2006/main">
               <a:ext uri="{FF2B5EF4-FFF2-40B4-BE49-F238E27FC236}">
-                <a16:creationId xmlns:a16="http://schemas.microsoft.com/office/drawing/2014/main" id="{1D918437-79E2-4D36-9675-EEAFD0EA972F}"/>
+                <a16:creationId xmlns:a16="http://schemas.microsoft.com/office/drawing/2014/main" id="{EA5806B8-7B84-4660-ABE1-674BBABFBDCF}"/>
               </a:ext>
             </a:extLst>
           </p:cNvPr>
@@ -12013,7 +12013,7 @@
           <p:cNvPr id="12" name="">
             <a:extLst xmlns:a="http://schemas.openxmlformats.org/drawingml/2006/main">
               <a:ext uri="{FF2B5EF4-FFF2-40B4-BE49-F238E27FC236}">
-                <a16:creationId xmlns:a16="http://schemas.microsoft.com/office/drawing/2014/main" id="{81AC4743-8F93-40FF-A532-6CDB24BC8A33}"/>
+                <a16:creationId xmlns:a16="http://schemas.microsoft.com/office/drawing/2014/main" id="{C98523C0-498F-4D58-8C09-A8495BFB173A}"/>
               </a:ext>
             </a:extLst>
           </p:cNvPr>
@@ -12058,7 +12058,7 @@
           <p:cNvPr id="13" name="">
             <a:extLst xmlns:a="http://schemas.openxmlformats.org/drawingml/2006/main">
               <a:ext uri="{FF2B5EF4-FFF2-40B4-BE49-F238E27FC236}">
-                <a16:creationId xmlns:a16="http://schemas.microsoft.com/office/drawing/2014/main" id="{70423C17-0603-47A7-A17B-0B92720174CE}"/>
+                <a16:creationId xmlns:a16="http://schemas.microsoft.com/office/drawing/2014/main" id="{5353AF05-4389-4FA7-9579-F2CD870376B6}"/>
               </a:ext>
             </a:extLst>
           </p:cNvPr>
@@ -12093,7 +12093,7 @@
           <p:cNvPr id="14" name="">
             <a:extLst xmlns:a="http://schemas.openxmlformats.org/drawingml/2006/main">
               <a:ext uri="{FF2B5EF4-FFF2-40B4-BE49-F238E27FC236}">
-                <a16:creationId xmlns:a16="http://schemas.microsoft.com/office/drawing/2014/main" id="{AACF003B-DB8D-40EB-AAAC-0F0D6D3C1515}"/>
+                <a16:creationId xmlns:a16="http://schemas.microsoft.com/office/drawing/2014/main" id="{692AAD96-FC38-4AAE-A1AD-7F03DCAEFB21}"/>
               </a:ext>
             </a:extLst>
           </p:cNvPr>
@@ -12124,7 +12124,7 @@
           <p:cNvPr id="15" name="">
             <a:extLst xmlns:a="http://schemas.openxmlformats.org/drawingml/2006/main">
               <a:ext uri="{FF2B5EF4-FFF2-40B4-BE49-F238E27FC236}">
-                <a16:creationId xmlns:a16="http://schemas.microsoft.com/office/drawing/2014/main" id="{5B7A2034-C675-4869-8138-ABCCC97C57C5}"/>
+                <a16:creationId xmlns:a16="http://schemas.microsoft.com/office/drawing/2014/main" id="{493E8D0A-65D5-47B2-88FA-6B019611DD77}"/>
               </a:ext>
             </a:extLst>
           </p:cNvPr>
@@ -12169,7 +12169,7 @@
           <p:cNvPr id="16" name="">
             <a:extLst xmlns:a="http://schemas.openxmlformats.org/drawingml/2006/main">
               <a:ext uri="{FF2B5EF4-FFF2-40B4-BE49-F238E27FC236}">
-                <a16:creationId xmlns:a16="http://schemas.microsoft.com/office/drawing/2014/main" id="{91BD7261-CB22-45F2-9F21-2CEA021000EE}"/>
+                <a16:creationId xmlns:a16="http://schemas.microsoft.com/office/drawing/2014/main" id="{A9A19AA0-2298-4585-8B85-225EF1F9C700}"/>
               </a:ext>
             </a:extLst>
           </p:cNvPr>
@@ -12214,7 +12214,7 @@
           <p:cNvPr id="17" name="">
             <a:extLst xmlns:a="http://schemas.openxmlformats.org/drawingml/2006/main">
               <a:ext uri="{FF2B5EF4-FFF2-40B4-BE49-F238E27FC236}">
-                <a16:creationId xmlns:a16="http://schemas.microsoft.com/office/drawing/2014/main" id="{B56DAA6C-0B57-4BC3-80D1-F678A4A738D3}"/>
+                <a16:creationId xmlns:a16="http://schemas.microsoft.com/office/drawing/2014/main" id="{C899A7B7-188D-4B6B-AA1B-FE3DCF766401}"/>
               </a:ext>
             </a:extLst>
           </p:cNvPr>
@@ -12249,7 +12249,7 @@
           <p:cNvPr id="18" name="">
             <a:extLst xmlns:a="http://schemas.openxmlformats.org/drawingml/2006/main">
               <a:ext uri="{FF2B5EF4-FFF2-40B4-BE49-F238E27FC236}">
-                <a16:creationId xmlns:a16="http://schemas.microsoft.com/office/drawing/2014/main" id="{1C9F7068-A779-43F5-B412-A8A9FE996263}"/>
+                <a16:creationId xmlns:a16="http://schemas.microsoft.com/office/drawing/2014/main" id="{A79B725D-3E8C-4386-BCFE-3A2E89744FE2}"/>
               </a:ext>
             </a:extLst>
           </p:cNvPr>
@@ -12280,7 +12280,7 @@
           <p:cNvPr id="19" name="">
             <a:extLst xmlns:a="http://schemas.openxmlformats.org/drawingml/2006/main">
               <a:ext uri="{FF2B5EF4-FFF2-40B4-BE49-F238E27FC236}">
-                <a16:creationId xmlns:a16="http://schemas.microsoft.com/office/drawing/2014/main" id="{AC969393-0B5B-44A0-AA6E-C65A40D9C5E5}"/>
+                <a16:creationId xmlns:a16="http://schemas.microsoft.com/office/drawing/2014/main" id="{A92B30A0-0950-4F9B-9C11-87856E1158D1}"/>
               </a:ext>
             </a:extLst>
           </p:cNvPr>
@@ -12325,7 +12325,7 @@
           <p:cNvPr id="20" name="">
             <a:extLst xmlns:a="http://schemas.openxmlformats.org/drawingml/2006/main">
               <a:ext uri="{FF2B5EF4-FFF2-40B4-BE49-F238E27FC236}">
-                <a16:creationId xmlns:a16="http://schemas.microsoft.com/office/drawing/2014/main" id="{5D761A34-4914-4C13-8D81-7BBF3C849DDB}"/>
+                <a16:creationId xmlns:a16="http://schemas.microsoft.com/office/drawing/2014/main" id="{CFED6129-DC2E-42BB-B18A-7411DB9D537F}"/>
               </a:ext>
             </a:extLst>
           </p:cNvPr>
@@ -12370,7 +12370,7 @@
           <p:cNvPr id="21" name="">
             <a:extLst xmlns:a="http://schemas.openxmlformats.org/drawingml/2006/main">
               <a:ext uri="{FF2B5EF4-FFF2-40B4-BE49-F238E27FC236}">
-                <a16:creationId xmlns:a16="http://schemas.microsoft.com/office/drawing/2014/main" id="{FB6328FD-E796-431F-8198-7F8647E7B274}"/>
+                <a16:creationId xmlns:a16="http://schemas.microsoft.com/office/drawing/2014/main" id="{988C1C9A-0D39-45BC-A2ED-9C41B2D97D71}"/>
               </a:ext>
             </a:extLst>
           </p:cNvPr>
@@ -12405,7 +12405,7 @@
           <p:cNvPr id="22" name="">
             <a:extLst xmlns:a="http://schemas.openxmlformats.org/drawingml/2006/main">
               <a:ext uri="{FF2B5EF4-FFF2-40B4-BE49-F238E27FC236}">
-                <a16:creationId xmlns:a16="http://schemas.microsoft.com/office/drawing/2014/main" id="{061EE9A5-1CB1-4004-86F2-5A8A1B31905F}"/>
+                <a16:creationId xmlns:a16="http://schemas.microsoft.com/office/drawing/2014/main" id="{7FB8BFD8-E57C-4445-B276-BA56844AF171}"/>
               </a:ext>
             </a:extLst>
           </p:cNvPr>
@@ -12436,7 +12436,7 @@
           <p:cNvPr id="23" name="">
             <a:extLst xmlns:a="http://schemas.openxmlformats.org/drawingml/2006/main">
               <a:ext uri="{FF2B5EF4-FFF2-40B4-BE49-F238E27FC236}">
-                <a16:creationId xmlns:a16="http://schemas.microsoft.com/office/drawing/2014/main" id="{DB55D870-8644-4CC5-B37F-99E217B2951F}"/>
+                <a16:creationId xmlns:a16="http://schemas.microsoft.com/office/drawing/2014/main" id="{08982A26-34F1-4492-924D-E6A599D817E6}"/>
               </a:ext>
             </a:extLst>
           </p:cNvPr>
@@ -12481,7 +12481,7 @@
           <p:cNvPr id="24" name="">
             <a:extLst xmlns:a="http://schemas.openxmlformats.org/drawingml/2006/main">
               <a:ext uri="{FF2B5EF4-FFF2-40B4-BE49-F238E27FC236}">
-                <a16:creationId xmlns:a16="http://schemas.microsoft.com/office/drawing/2014/main" id="{675E70C2-24E0-4202-9BDD-FDCECC5F8C57}"/>
+                <a16:creationId xmlns:a16="http://schemas.microsoft.com/office/drawing/2014/main" id="{8936FAAB-E36C-4123-8E95-C197F3D3EB3B}"/>
               </a:ext>
             </a:extLst>
           </p:cNvPr>
@@ -12526,7 +12526,7 @@
           <p:cNvPr id="25" name="">
             <a:extLst xmlns:a="http://schemas.openxmlformats.org/drawingml/2006/main">
               <a:ext uri="{FF2B5EF4-FFF2-40B4-BE49-F238E27FC236}">
-                <a16:creationId xmlns:a16="http://schemas.microsoft.com/office/drawing/2014/main" id="{C2D55A15-682B-473B-A110-E26C372C39E0}"/>
+                <a16:creationId xmlns:a16="http://schemas.microsoft.com/office/drawing/2014/main" id="{7C150BC4-0E04-4054-AEFC-25D120608506}"/>
               </a:ext>
             </a:extLst>
           </p:cNvPr>
@@ -12561,7 +12561,7 @@
           <p:cNvPr id="26" name="">
             <a:extLst xmlns:a="http://schemas.openxmlformats.org/drawingml/2006/main">
               <a:ext uri="{FF2B5EF4-FFF2-40B4-BE49-F238E27FC236}">
-                <a16:creationId xmlns:a16="http://schemas.microsoft.com/office/drawing/2014/main" id="{1DFE4B1A-0538-44DC-936A-A8E4D1052079}"/>
+                <a16:creationId xmlns:a16="http://schemas.microsoft.com/office/drawing/2014/main" id="{0FBB3837-96B1-4863-9E84-9C3481537C69}"/>
               </a:ext>
             </a:extLst>
           </p:cNvPr>
@@ -12592,7 +12592,7 @@
           <p:cNvPr id="27" name="">
             <a:extLst xmlns:a="http://schemas.openxmlformats.org/drawingml/2006/main">
               <a:ext uri="{FF2B5EF4-FFF2-40B4-BE49-F238E27FC236}">
-                <a16:creationId xmlns:a16="http://schemas.microsoft.com/office/drawing/2014/main" id="{5DDBC179-163E-4151-A17C-7D845DEB8EAA}"/>
+                <a16:creationId xmlns:a16="http://schemas.microsoft.com/office/drawing/2014/main" id="{2C16BE44-8A64-45E4-AA9E-01D6BA75D25F}"/>
               </a:ext>
             </a:extLst>
           </p:cNvPr>
@@ -12637,7 +12637,7 @@
           <p:cNvPr id="28" name="">
             <a:extLst xmlns:a="http://schemas.openxmlformats.org/drawingml/2006/main">
               <a:ext uri="{FF2B5EF4-FFF2-40B4-BE49-F238E27FC236}">
-                <a16:creationId xmlns:a16="http://schemas.microsoft.com/office/drawing/2014/main" id="{19A6BF99-7C94-4CC9-9937-13314F5F461B}"/>
+                <a16:creationId xmlns:a16="http://schemas.microsoft.com/office/drawing/2014/main" id="{FC31F47F-3A61-4793-8B78-EC381B551A98}"/>
               </a:ext>
             </a:extLst>
           </p:cNvPr>
@@ -12682,7 +12682,7 @@
           <p:cNvPr id="29" name="">
             <a:extLst xmlns:a="http://schemas.openxmlformats.org/drawingml/2006/main">
               <a:ext uri="{FF2B5EF4-FFF2-40B4-BE49-F238E27FC236}">
-                <a16:creationId xmlns:a16="http://schemas.microsoft.com/office/drawing/2014/main" id="{700A1923-3440-4907-A296-843F5DDFAAC9}"/>
+                <a16:creationId xmlns:a16="http://schemas.microsoft.com/office/drawing/2014/main" id="{CBA58046-73BC-4C5E-BD91-0FC09CDE36FE}"/>
               </a:ext>
             </a:extLst>
           </p:cNvPr>
@@ -12717,7 +12717,7 @@
           <p:cNvPr id="30" name="">
             <a:extLst xmlns:a="http://schemas.openxmlformats.org/drawingml/2006/main">
               <a:ext uri="{FF2B5EF4-FFF2-40B4-BE49-F238E27FC236}">
-                <a16:creationId xmlns:a16="http://schemas.microsoft.com/office/drawing/2014/main" id="{AF8CB500-04FF-46B6-842F-78950E6C8CBB}"/>
+                <a16:creationId xmlns:a16="http://schemas.microsoft.com/office/drawing/2014/main" id="{B8AFFD65-794D-4E85-AF12-620CD5DECAA3}"/>
               </a:ext>
             </a:extLst>
           </p:cNvPr>
@@ -12748,7 +12748,7 @@
           <p:cNvPr id="31" name="">
             <a:extLst xmlns:a="http://schemas.openxmlformats.org/drawingml/2006/main">
               <a:ext uri="{FF2B5EF4-FFF2-40B4-BE49-F238E27FC236}">
-                <a16:creationId xmlns:a16="http://schemas.microsoft.com/office/drawing/2014/main" id="{6107829A-17BB-4FBE-849A-FF6467AC924C}"/>
+                <a16:creationId xmlns:a16="http://schemas.microsoft.com/office/drawing/2014/main" id="{27B6094F-3EC7-4744-B6D5-C1DC37BC8B3D}"/>
               </a:ext>
             </a:extLst>
           </p:cNvPr>
@@ -12793,7 +12793,7 @@
           <p:cNvPr id="32" name="">
             <a:extLst xmlns:a="http://schemas.openxmlformats.org/drawingml/2006/main">
               <a:ext uri="{FF2B5EF4-FFF2-40B4-BE49-F238E27FC236}">
-                <a16:creationId xmlns:a16="http://schemas.microsoft.com/office/drawing/2014/main" id="{EEC467A6-E0EA-439A-9F8F-449B9FD73EA4}"/>
+                <a16:creationId xmlns:a16="http://schemas.microsoft.com/office/drawing/2014/main" id="{6533A4DF-962D-49CE-A6DD-323505F82EB7}"/>
               </a:ext>
             </a:extLst>
           </p:cNvPr>
@@ -12838,7 +12838,7 @@
           <p:cNvPr id="33" name="">
             <a:extLst xmlns:a="http://schemas.openxmlformats.org/drawingml/2006/main">
               <a:ext uri="{FF2B5EF4-FFF2-40B4-BE49-F238E27FC236}">
-                <a16:creationId xmlns:a16="http://schemas.microsoft.com/office/drawing/2014/main" id="{3026B696-2D65-4E47-B3FA-BB2DB6D08F0E}"/>
+                <a16:creationId xmlns:a16="http://schemas.microsoft.com/office/drawing/2014/main" id="{FF046DE0-16BA-427A-AF97-DF81E8009D98}"/>
               </a:ext>
             </a:extLst>
           </p:cNvPr>
@@ -12873,7 +12873,7 @@
           <p:cNvPr id="34" name="">
             <a:extLst xmlns:a="http://schemas.openxmlformats.org/drawingml/2006/main">
               <a:ext uri="{FF2B5EF4-FFF2-40B4-BE49-F238E27FC236}">
-                <a16:creationId xmlns:a16="http://schemas.microsoft.com/office/drawing/2014/main" id="{103F67BF-5B24-4AE1-A6DA-0F8AEBEB5B04}"/>
+                <a16:creationId xmlns:a16="http://schemas.microsoft.com/office/drawing/2014/main" id="{087E848F-FD89-45D8-A116-3E4C4E5FCDAE}"/>
               </a:ext>
             </a:extLst>
           </p:cNvPr>
@@ -12904,7 +12904,7 @@
           <p:cNvPr id="35" name="">
             <a:extLst xmlns:a="http://schemas.openxmlformats.org/drawingml/2006/main">
               <a:ext uri="{FF2B5EF4-FFF2-40B4-BE49-F238E27FC236}">
-                <a16:creationId xmlns:a16="http://schemas.microsoft.com/office/drawing/2014/main" id="{CD2E3C14-F1C4-4548-BBB9-11F1ADA8D5D7}"/>
+                <a16:creationId xmlns:a16="http://schemas.microsoft.com/office/drawing/2014/main" id="{FB752471-6D01-4274-94E2-1054CA2A7CC2}"/>
               </a:ext>
             </a:extLst>
           </p:cNvPr>
@@ -12949,7 +12949,7 @@
           <p:cNvPr id="36" name="">
             <a:extLst xmlns:a="http://schemas.openxmlformats.org/drawingml/2006/main">
               <a:ext uri="{FF2B5EF4-FFF2-40B4-BE49-F238E27FC236}">
-                <a16:creationId xmlns:a16="http://schemas.microsoft.com/office/drawing/2014/main" id="{E7D34F1F-5D95-4789-A553-4259B4C9EAB1}"/>
+                <a16:creationId xmlns:a16="http://schemas.microsoft.com/office/drawing/2014/main" id="{B85EF3A4-B0E2-4E22-8495-DC136D1F7547}"/>
               </a:ext>
             </a:extLst>
           </p:cNvPr>
@@ -12994,7 +12994,7 @@
           <p:cNvPr id="37" name="">
             <a:extLst xmlns:a="http://schemas.openxmlformats.org/drawingml/2006/main">
               <a:ext uri="{FF2B5EF4-FFF2-40B4-BE49-F238E27FC236}">
-                <a16:creationId xmlns:a16="http://schemas.microsoft.com/office/drawing/2014/main" id="{C8A7B450-40BF-4C05-BDD4-CB7F10E93EDA}"/>
+                <a16:creationId xmlns:a16="http://schemas.microsoft.com/office/drawing/2014/main" id="{0BA1EB67-6EC5-4104-AB0A-12D860F6428D}"/>
               </a:ext>
             </a:extLst>
           </p:cNvPr>
@@ -13029,7 +13029,7 @@
           <p:cNvPr id="38" name="">
             <a:extLst xmlns:a="http://schemas.openxmlformats.org/drawingml/2006/main">
               <a:ext uri="{FF2B5EF4-FFF2-40B4-BE49-F238E27FC236}">
-                <a16:creationId xmlns:a16="http://schemas.microsoft.com/office/drawing/2014/main" id="{6E922070-CA47-433B-A5A7-8E1E4E6EF0E6}"/>
+                <a16:creationId xmlns:a16="http://schemas.microsoft.com/office/drawing/2014/main" id="{84A8FA81-9E24-410F-9944-9F27E2C7A3CF}"/>
               </a:ext>
             </a:extLst>
           </p:cNvPr>
@@ -13060,7 +13060,7 @@
           <p:cNvPr id="39" name="">
             <a:extLst xmlns:a="http://schemas.openxmlformats.org/drawingml/2006/main">
               <a:ext uri="{FF2B5EF4-FFF2-40B4-BE49-F238E27FC236}">
-                <a16:creationId xmlns:a16="http://schemas.microsoft.com/office/drawing/2014/main" id="{5F9DDE5A-570C-4C6C-8518-22D8FBAE171A}"/>
+                <a16:creationId xmlns:a16="http://schemas.microsoft.com/office/drawing/2014/main" id="{31F1EB69-9A84-4B7A-BD14-F464F5452B14}"/>
               </a:ext>
             </a:extLst>
           </p:cNvPr>
@@ -13105,7 +13105,7 @@
           <p:cNvPr id="40" name="">
             <a:extLst xmlns:a="http://schemas.openxmlformats.org/drawingml/2006/main">
               <a:ext uri="{FF2B5EF4-FFF2-40B4-BE49-F238E27FC236}">
-                <a16:creationId xmlns:a16="http://schemas.microsoft.com/office/drawing/2014/main" id="{C652D107-0892-4722-8CEE-925C1D9E3A56}"/>
+                <a16:creationId xmlns:a16="http://schemas.microsoft.com/office/drawing/2014/main" id="{41EBBD1E-20B3-4458-931E-514A6BAEEB47}"/>
               </a:ext>
             </a:extLst>
           </p:cNvPr>
@@ -13150,7 +13150,7 @@
           <p:cNvPr id="41" name="">
             <a:extLst xmlns:a="http://schemas.openxmlformats.org/drawingml/2006/main">
               <a:ext uri="{FF2B5EF4-FFF2-40B4-BE49-F238E27FC236}">
-                <a16:creationId xmlns:a16="http://schemas.microsoft.com/office/drawing/2014/main" id="{CBF5DA01-9287-437D-986D-5D0413D9CC53}"/>
+                <a16:creationId xmlns:a16="http://schemas.microsoft.com/office/drawing/2014/main" id="{E645AE03-DC13-4FB8-A660-F77480B23299}"/>
               </a:ext>
             </a:extLst>
           </p:cNvPr>
@@ -13185,7 +13185,7 @@
           <p:cNvPr id="42" name="">
             <a:extLst xmlns:a="http://schemas.openxmlformats.org/drawingml/2006/main">
               <a:ext uri="{FF2B5EF4-FFF2-40B4-BE49-F238E27FC236}">
-                <a16:creationId xmlns:a16="http://schemas.microsoft.com/office/drawing/2014/main" id="{9A8B2C0D-4B70-4C5D-AFE7-C38F6FD4D991}"/>
+                <a16:creationId xmlns:a16="http://schemas.microsoft.com/office/drawing/2014/main" id="{A781D57F-C5C3-429F-BBFF-8A5FAF13EB50}"/>
               </a:ext>
             </a:extLst>
           </p:cNvPr>
@@ -13216,7 +13216,7 @@
           <p:cNvPr id="43" name="">
             <a:extLst xmlns:a="http://schemas.openxmlformats.org/drawingml/2006/main">
               <a:ext uri="{FF2B5EF4-FFF2-40B4-BE49-F238E27FC236}">
-                <a16:creationId xmlns:a16="http://schemas.microsoft.com/office/drawing/2014/main" id="{21F96F2E-A03E-4BCD-ABA2-9F4B6B3CC3BB}"/>
+                <a16:creationId xmlns:a16="http://schemas.microsoft.com/office/drawing/2014/main" id="{45C645A7-4DE9-44CD-944C-4CCE9B1ED39B}"/>
               </a:ext>
             </a:extLst>
           </p:cNvPr>
@@ -13261,7 +13261,7 @@
           <p:cNvPr id="44" name="">
             <a:extLst xmlns:a="http://schemas.openxmlformats.org/drawingml/2006/main">
               <a:ext uri="{FF2B5EF4-FFF2-40B4-BE49-F238E27FC236}">
-                <a16:creationId xmlns:a16="http://schemas.microsoft.com/office/drawing/2014/main" id="{2E744341-678D-40EE-A4BB-A8CB25CCEA01}"/>
+                <a16:creationId xmlns:a16="http://schemas.microsoft.com/office/drawing/2014/main" id="{BC64E9F2-885A-44C5-9B2C-C9EDC012A5D5}"/>
               </a:ext>
             </a:extLst>
           </p:cNvPr>
@@ -13306,7 +13306,7 @@
           <p:cNvPr id="45" name="">
             <a:extLst xmlns:a="http://schemas.openxmlformats.org/drawingml/2006/main">
               <a:ext uri="{FF2B5EF4-FFF2-40B4-BE49-F238E27FC236}">
-                <a16:creationId xmlns:a16="http://schemas.microsoft.com/office/drawing/2014/main" id="{FD75837B-AD18-4D23-BFFA-20DF02B12FCC}"/>
+                <a16:creationId xmlns:a16="http://schemas.microsoft.com/office/drawing/2014/main" id="{CAA7DBD2-7E2B-401B-BAEE-76E95E553772}"/>
               </a:ext>
             </a:extLst>
           </p:cNvPr>
@@ -13349,7 +13349,7 @@
     </p:spTree>
     <p:extLst>
       <p:ext uri="{BB962C8B-B14F-4D97-AF65-F5344CB8AC3E}">
-        <p14:creationId xmlns:p14="http://schemas.microsoft.com/office/powerpoint/2010/main" val="264689359"/>
+        <p14:creationId xmlns:p14="http://schemas.microsoft.com/office/powerpoint/2010/main" val="2105748252"/>
       </p:ext>
     </p:extLst>
   </p:cSld>
@@ -13373,7 +13373,7 @@
           <p:cNvPr id="104" name="">
             <a:extLst xmlns:a="http://schemas.openxmlformats.org/drawingml/2006/main">
               <a:ext uri="{FF2B5EF4-FFF2-40B4-BE49-F238E27FC236}">
-                <a16:creationId xmlns:a16="http://schemas.microsoft.com/office/drawing/2014/main" id="{B5E43E1E-7B1B-40E9-901E-C8B54BC52DDB}"/>
+                <a16:creationId xmlns:a16="http://schemas.microsoft.com/office/drawing/2014/main" id="{C4F3F52C-AF45-48A5-9C17-5B10727DF69D}"/>
               </a:ext>
             </a:extLst>
           </p:cNvPr>
@@ -13404,7 +13404,7 @@
           <p:cNvPr id="2" name="">
             <a:extLst xmlns:a="http://schemas.openxmlformats.org/drawingml/2006/main">
               <a:ext uri="{FF2B5EF4-FFF2-40B4-BE49-F238E27FC236}">
-                <a16:creationId xmlns:a16="http://schemas.microsoft.com/office/drawing/2014/main" id="{EBE9854C-033D-48AE-BDD3-7246CC220F3C}"/>
+                <a16:creationId xmlns:a16="http://schemas.microsoft.com/office/drawing/2014/main" id="{D7C1AE88-4F20-4695-A46B-9FFE89B6C91A}"/>
               </a:ext>
             </a:extLst>
           </p:cNvPr>
@@ -13449,7 +13449,7 @@
           <p:cNvPr id="3" name="">
             <a:extLst xmlns:a="http://schemas.openxmlformats.org/drawingml/2006/main">
               <a:ext uri="{FF2B5EF4-FFF2-40B4-BE49-F238E27FC236}">
-                <a16:creationId xmlns:a16="http://schemas.microsoft.com/office/drawing/2014/main" id="{E1CCABEA-A19C-405E-BB72-072C3C8CA759}"/>
+                <a16:creationId xmlns:a16="http://schemas.microsoft.com/office/drawing/2014/main" id="{4B372AD4-D3DF-493A-9712-C5910B1A9B5C}"/>
               </a:ext>
             </a:extLst>
           </p:cNvPr>
@@ -13494,7 +13494,7 @@
           <p:cNvPr id="4" name="">
             <a:extLst xmlns:a="http://schemas.openxmlformats.org/drawingml/2006/main">
               <a:ext uri="{FF2B5EF4-FFF2-40B4-BE49-F238E27FC236}">
-                <a16:creationId xmlns:a16="http://schemas.microsoft.com/office/drawing/2014/main" id="{D49AA38A-F10B-4500-8420-2D16BA254F7E}"/>
+                <a16:creationId xmlns:a16="http://schemas.microsoft.com/office/drawing/2014/main" id="{BA603124-4069-4612-8985-BC70BCEFB977}"/>
               </a:ext>
             </a:extLst>
           </p:cNvPr>
@@ -13539,7 +13539,7 @@
           <p:cNvPr id="5" name="">
             <a:extLst xmlns:a="http://schemas.openxmlformats.org/drawingml/2006/main">
               <a:ext uri="{FF2B5EF4-FFF2-40B4-BE49-F238E27FC236}">
-                <a16:creationId xmlns:a16="http://schemas.microsoft.com/office/drawing/2014/main" id="{2AA17F65-CFE3-4896-9E1E-6A71A536B273}"/>
+                <a16:creationId xmlns:a16="http://schemas.microsoft.com/office/drawing/2014/main" id="{00B0EFBD-610D-413E-9ACC-33EF1778FD6F}"/>
               </a:ext>
             </a:extLst>
           </p:cNvPr>
@@ -13570,7 +13570,7 @@
           <p:cNvPr id="6" name="">
             <a:extLst xmlns:a="http://schemas.openxmlformats.org/drawingml/2006/main">
               <a:ext uri="{FF2B5EF4-FFF2-40B4-BE49-F238E27FC236}">
-                <a16:creationId xmlns:a16="http://schemas.microsoft.com/office/drawing/2014/main" id="{1F612CBE-D6C5-4810-8608-D163AB72BB68}"/>
+                <a16:creationId xmlns:a16="http://schemas.microsoft.com/office/drawing/2014/main" id="{850640DC-41CD-4D43-B99E-8BEBA5B8E0A9}"/>
               </a:ext>
             </a:extLst>
           </p:cNvPr>
@@ -13601,7 +13601,7 @@
           <p:cNvPr id="7" name="">
             <a:extLst xmlns:a="http://schemas.openxmlformats.org/drawingml/2006/main">
               <a:ext uri="{FF2B5EF4-FFF2-40B4-BE49-F238E27FC236}">
-                <a16:creationId xmlns:a16="http://schemas.microsoft.com/office/drawing/2014/main" id="{D54C4C57-876D-483C-98D2-62375A0B90E1}"/>
+                <a16:creationId xmlns:a16="http://schemas.microsoft.com/office/drawing/2014/main" id="{C57DD786-5542-4EBB-B84D-BDDDCC03BC44}"/>
               </a:ext>
             </a:extLst>
           </p:cNvPr>
@@ -13646,7 +13646,7 @@
           <p:cNvPr id="8" name="">
             <a:extLst xmlns:a="http://schemas.openxmlformats.org/drawingml/2006/main">
               <a:ext uri="{FF2B5EF4-FFF2-40B4-BE49-F238E27FC236}">
-                <a16:creationId xmlns:a16="http://schemas.microsoft.com/office/drawing/2014/main" id="{BCF7A367-D1C6-41F7-B9C8-E90C09D526EB}"/>
+                <a16:creationId xmlns:a16="http://schemas.microsoft.com/office/drawing/2014/main" id="{96C11DCC-CF15-4C6F-BC07-2A1C9E09A92C}"/>
               </a:ext>
             </a:extLst>
           </p:cNvPr>
@@ -13691,7 +13691,7 @@
           <p:cNvPr id="9" name="">
             <a:extLst xmlns:a="http://schemas.openxmlformats.org/drawingml/2006/main">
               <a:ext uri="{FF2B5EF4-FFF2-40B4-BE49-F238E27FC236}">
-                <a16:creationId xmlns:a16="http://schemas.microsoft.com/office/drawing/2014/main" id="{4572EE80-20D2-44D1-9F30-14F32F9610B4}"/>
+                <a16:creationId xmlns:a16="http://schemas.microsoft.com/office/drawing/2014/main" id="{F245FB21-47B3-4ED8-B7D9-75BC020E8CFC}"/>
               </a:ext>
             </a:extLst>
           </p:cNvPr>
@@ -13722,7 +13722,7 @@
           <p:cNvPr id="10" name="">
             <a:extLst xmlns:a="http://schemas.openxmlformats.org/drawingml/2006/main">
               <a:ext uri="{FF2B5EF4-FFF2-40B4-BE49-F238E27FC236}">
-                <a16:creationId xmlns:a16="http://schemas.microsoft.com/office/drawing/2014/main" id="{12F0D0F5-8495-4772-9E83-E2EC3B905BAA}"/>
+                <a16:creationId xmlns:a16="http://schemas.microsoft.com/office/drawing/2014/main" id="{BFAC8F0C-E5D5-4FAE-87EE-626E0B27A102}"/>
               </a:ext>
             </a:extLst>
           </p:cNvPr>
@@ -13767,7 +13767,7 @@
           <p:cNvPr id="11" name="">
             <a:extLst xmlns:a="http://schemas.openxmlformats.org/drawingml/2006/main">
               <a:ext uri="{FF2B5EF4-FFF2-40B4-BE49-F238E27FC236}">
-                <a16:creationId xmlns:a16="http://schemas.microsoft.com/office/drawing/2014/main" id="{105F51D0-ECDE-4F6E-BF99-17C355D9999F}"/>
+                <a16:creationId xmlns:a16="http://schemas.microsoft.com/office/drawing/2014/main" id="{A2CCC1F2-372E-4381-B1CA-7F68762BC10A}"/>
               </a:ext>
             </a:extLst>
           </p:cNvPr>
@@ -13812,7 +13812,7 @@
           <p:cNvPr id="12" name="">
             <a:extLst xmlns:a="http://schemas.openxmlformats.org/drawingml/2006/main">
               <a:ext uri="{FF2B5EF4-FFF2-40B4-BE49-F238E27FC236}">
-                <a16:creationId xmlns:a16="http://schemas.microsoft.com/office/drawing/2014/main" id="{85FA5456-E5AB-445B-AEAE-DA7DDAE944AE}"/>
+                <a16:creationId xmlns:a16="http://schemas.microsoft.com/office/drawing/2014/main" id="{604EA348-F8E5-4AB4-A88F-CACCA04E21E7}"/>
               </a:ext>
             </a:extLst>
           </p:cNvPr>
@@ -13857,7 +13857,7 @@
           <p:cNvPr id="13" name="">
             <a:extLst xmlns:a="http://schemas.openxmlformats.org/drawingml/2006/main">
               <a:ext uri="{FF2B5EF4-FFF2-40B4-BE49-F238E27FC236}">
-                <a16:creationId xmlns:a16="http://schemas.microsoft.com/office/drawing/2014/main" id="{491F730E-B52A-4F3F-B66C-D79D6B337A4A}"/>
+                <a16:creationId xmlns:a16="http://schemas.microsoft.com/office/drawing/2014/main" id="{A08DC2CB-A823-4FBB-9AAD-C3052CCC7023}"/>
               </a:ext>
             </a:extLst>
           </p:cNvPr>
@@ -13890,7 +13890,7 @@
           <p:cNvPr id="14" name="">
             <a:extLst xmlns:a="http://schemas.openxmlformats.org/drawingml/2006/main">
               <a:ext uri="{FF2B5EF4-FFF2-40B4-BE49-F238E27FC236}">
-                <a16:creationId xmlns:a16="http://schemas.microsoft.com/office/drawing/2014/main" id="{AA669AC4-6051-4C6B-B1A0-893178CAF6D9}"/>
+                <a16:creationId xmlns:a16="http://schemas.microsoft.com/office/drawing/2014/main" id="{8FF33D99-B72A-40AA-9306-73C541B7DBAB}"/>
               </a:ext>
             </a:extLst>
           </p:cNvPr>
@@ -13935,7 +13935,7 @@
           <p:cNvPr id="15" name="">
             <a:extLst xmlns:a="http://schemas.openxmlformats.org/drawingml/2006/main">
               <a:ext uri="{FF2B5EF4-FFF2-40B4-BE49-F238E27FC236}">
-                <a16:creationId xmlns:a16="http://schemas.microsoft.com/office/drawing/2014/main" id="{32593130-D17F-4B95-B034-7813CD3CC284}"/>
+                <a16:creationId xmlns:a16="http://schemas.microsoft.com/office/drawing/2014/main" id="{3E7465D8-83FF-41CD-B2E2-51967909B159}"/>
               </a:ext>
             </a:extLst>
           </p:cNvPr>
@@ -13980,7 +13980,7 @@
           <p:cNvPr id="16" name="">
             <a:extLst xmlns:a="http://schemas.openxmlformats.org/drawingml/2006/main">
               <a:ext uri="{FF2B5EF4-FFF2-40B4-BE49-F238E27FC236}">
-                <a16:creationId xmlns:a16="http://schemas.microsoft.com/office/drawing/2014/main" id="{E3B6F5C3-161F-46C8-AD81-9C7672BF2E8E}"/>
+                <a16:creationId xmlns:a16="http://schemas.microsoft.com/office/drawing/2014/main" id="{6D1DB19A-D344-4E22-80C6-35A88B609B2D}"/>
               </a:ext>
             </a:extLst>
           </p:cNvPr>
@@ -14025,7 +14025,7 @@
           <p:cNvPr id="17" name="">
             <a:extLst xmlns:a="http://schemas.openxmlformats.org/drawingml/2006/main">
               <a:ext uri="{FF2B5EF4-FFF2-40B4-BE49-F238E27FC236}">
-                <a16:creationId xmlns:a16="http://schemas.microsoft.com/office/drawing/2014/main" id="{37CF1C8D-D58B-4BCD-BF5E-0FF43F5961FB}"/>
+                <a16:creationId xmlns:a16="http://schemas.microsoft.com/office/drawing/2014/main" id="{F7C74D7E-C360-4641-8DF1-C0D6D429744E}"/>
               </a:ext>
             </a:extLst>
           </p:cNvPr>
@@ -14058,7 +14058,7 @@
           <p:cNvPr id="18" name="">
             <a:extLst xmlns:a="http://schemas.openxmlformats.org/drawingml/2006/main">
               <a:ext uri="{FF2B5EF4-FFF2-40B4-BE49-F238E27FC236}">
-                <a16:creationId xmlns:a16="http://schemas.microsoft.com/office/drawing/2014/main" id="{7EBF12C2-D9C1-4BCD-BBA3-83FCB757DC84}"/>
+                <a16:creationId xmlns:a16="http://schemas.microsoft.com/office/drawing/2014/main" id="{5E806B55-C41B-4E69-B6CC-D74A2BA1FDA6}"/>
               </a:ext>
             </a:extLst>
           </p:cNvPr>
@@ -14103,7 +14103,7 @@
           <p:cNvPr id="19" name="">
             <a:extLst xmlns:a="http://schemas.openxmlformats.org/drawingml/2006/main">
               <a:ext uri="{FF2B5EF4-FFF2-40B4-BE49-F238E27FC236}">
-                <a16:creationId xmlns:a16="http://schemas.microsoft.com/office/drawing/2014/main" id="{3987DAA9-2F24-4054-932F-968D6D518C2D}"/>
+                <a16:creationId xmlns:a16="http://schemas.microsoft.com/office/drawing/2014/main" id="{D9913DA5-3D0E-4E52-89C0-6253A48D8C16}"/>
               </a:ext>
             </a:extLst>
           </p:cNvPr>
@@ -14148,7 +14148,7 @@
           <p:cNvPr id="20" name="">
             <a:extLst xmlns:a="http://schemas.openxmlformats.org/drawingml/2006/main">
               <a:ext uri="{FF2B5EF4-FFF2-40B4-BE49-F238E27FC236}">
-                <a16:creationId xmlns:a16="http://schemas.microsoft.com/office/drawing/2014/main" id="{D04041A4-E942-48FE-A764-B4D7A4581E26}"/>
+                <a16:creationId xmlns:a16="http://schemas.microsoft.com/office/drawing/2014/main" id="{0365B044-A7AC-44EB-B6AB-01ED7B6AAFE7}"/>
               </a:ext>
             </a:extLst>
           </p:cNvPr>
@@ -14193,7 +14193,7 @@
           <p:cNvPr id="21" name="">
             <a:extLst xmlns:a="http://schemas.openxmlformats.org/drawingml/2006/main">
               <a:ext uri="{FF2B5EF4-FFF2-40B4-BE49-F238E27FC236}">
-                <a16:creationId xmlns:a16="http://schemas.microsoft.com/office/drawing/2014/main" id="{E2DA2FF9-BCFC-46BD-BACF-7E86ADD51CF5}"/>
+                <a16:creationId xmlns:a16="http://schemas.microsoft.com/office/drawing/2014/main" id="{600DBAF0-B2E2-4AD8-B0B8-C831A90DF935}"/>
               </a:ext>
             </a:extLst>
           </p:cNvPr>
@@ -14226,7 +14226,7 @@
           <p:cNvPr id="22" name="">
             <a:extLst xmlns:a="http://schemas.openxmlformats.org/drawingml/2006/main">
               <a:ext uri="{FF2B5EF4-FFF2-40B4-BE49-F238E27FC236}">
-                <a16:creationId xmlns:a16="http://schemas.microsoft.com/office/drawing/2014/main" id="{3B899032-D6C9-472E-A5D0-56A9E3BEE3B8}"/>
+                <a16:creationId xmlns:a16="http://schemas.microsoft.com/office/drawing/2014/main" id="{1A6A955B-7724-4B7E-8BE2-9614CC4C26CE}"/>
               </a:ext>
             </a:extLst>
           </p:cNvPr>
@@ -14271,7 +14271,7 @@
           <p:cNvPr id="23" name="">
             <a:extLst xmlns:a="http://schemas.openxmlformats.org/drawingml/2006/main">
               <a:ext uri="{FF2B5EF4-FFF2-40B4-BE49-F238E27FC236}">
-                <a16:creationId xmlns:a16="http://schemas.microsoft.com/office/drawing/2014/main" id="{DB403602-BDD7-4EC8-9021-1B0F9E760C5E}"/>
+                <a16:creationId xmlns:a16="http://schemas.microsoft.com/office/drawing/2014/main" id="{14B5841A-9010-4401-96B4-7A6EAE6BCC08}"/>
               </a:ext>
             </a:extLst>
           </p:cNvPr>
@@ -14316,7 +14316,7 @@
           <p:cNvPr id="24" name="">
             <a:extLst xmlns:a="http://schemas.openxmlformats.org/drawingml/2006/main">
               <a:ext uri="{FF2B5EF4-FFF2-40B4-BE49-F238E27FC236}">
-                <a16:creationId xmlns:a16="http://schemas.microsoft.com/office/drawing/2014/main" id="{F7007677-C97D-4E1B-B174-AB7D1C90BB47}"/>
+                <a16:creationId xmlns:a16="http://schemas.microsoft.com/office/drawing/2014/main" id="{F9FD0AD1-4C06-4EBA-A432-18EDF9C2A682}"/>
               </a:ext>
             </a:extLst>
           </p:cNvPr>
@@ -14361,7 +14361,7 @@
           <p:cNvPr id="25" name="">
             <a:extLst xmlns:a="http://schemas.openxmlformats.org/drawingml/2006/main">
               <a:ext uri="{FF2B5EF4-FFF2-40B4-BE49-F238E27FC236}">
-                <a16:creationId xmlns:a16="http://schemas.microsoft.com/office/drawing/2014/main" id="{D63D447E-E6F4-41DA-8AD0-BE4ED4BC7081}"/>
+                <a16:creationId xmlns:a16="http://schemas.microsoft.com/office/drawing/2014/main" id="{9BB5D517-B8FA-450E-9C92-A669DB252723}"/>
               </a:ext>
             </a:extLst>
           </p:cNvPr>
@@ -14394,7 +14394,7 @@
           <p:cNvPr id="26" name="">
             <a:extLst xmlns:a="http://schemas.openxmlformats.org/drawingml/2006/main">
               <a:ext uri="{FF2B5EF4-FFF2-40B4-BE49-F238E27FC236}">
-                <a16:creationId xmlns:a16="http://schemas.microsoft.com/office/drawing/2014/main" id="{F1B5DD3F-BF3F-4D0C-9034-FE202C23E142}"/>
+                <a16:creationId xmlns:a16="http://schemas.microsoft.com/office/drawing/2014/main" id="{FDCD8C19-36A9-4679-B32F-A85A7CCE8D29}"/>
               </a:ext>
             </a:extLst>
           </p:cNvPr>
@@ -14439,7 +14439,7 @@
           <p:cNvPr id="27" name="">
             <a:extLst xmlns:a="http://schemas.openxmlformats.org/drawingml/2006/main">
               <a:ext uri="{FF2B5EF4-FFF2-40B4-BE49-F238E27FC236}">
-                <a16:creationId xmlns:a16="http://schemas.microsoft.com/office/drawing/2014/main" id="{A5B273EF-0FE3-4C5E-93B5-A15DB19382E8}"/>
+                <a16:creationId xmlns:a16="http://schemas.microsoft.com/office/drawing/2014/main" id="{30DB35D8-8412-4FCD-9258-826DB0B6B654}"/>
               </a:ext>
             </a:extLst>
           </p:cNvPr>
@@ -14484,7 +14484,7 @@
           <p:cNvPr id="28" name="">
             <a:extLst xmlns:a="http://schemas.openxmlformats.org/drawingml/2006/main">
               <a:ext uri="{FF2B5EF4-FFF2-40B4-BE49-F238E27FC236}">
-                <a16:creationId xmlns:a16="http://schemas.microsoft.com/office/drawing/2014/main" id="{4F6E985B-FA88-49C6-AEEB-117EA831BD4D}"/>
+                <a16:creationId xmlns:a16="http://schemas.microsoft.com/office/drawing/2014/main" id="{1217333E-C3FC-4737-BEA2-FD7D7237A86B}"/>
               </a:ext>
             </a:extLst>
           </p:cNvPr>
@@ -14529,7 +14529,7 @@
           <p:cNvPr id="29" name="">
             <a:extLst xmlns:a="http://schemas.openxmlformats.org/drawingml/2006/main">
               <a:ext uri="{FF2B5EF4-FFF2-40B4-BE49-F238E27FC236}">
-                <a16:creationId xmlns:a16="http://schemas.microsoft.com/office/drawing/2014/main" id="{00D8CFE2-3C8A-44C1-99CC-295089855363}"/>
+                <a16:creationId xmlns:a16="http://schemas.microsoft.com/office/drawing/2014/main" id="{B6E68FD2-0AB5-4064-AA3E-EA9D1378898A}"/>
               </a:ext>
             </a:extLst>
           </p:cNvPr>
@@ -14562,7 +14562,7 @@
           <p:cNvPr id="30" name="">
             <a:extLst xmlns:a="http://schemas.openxmlformats.org/drawingml/2006/main">
               <a:ext uri="{FF2B5EF4-FFF2-40B4-BE49-F238E27FC236}">
-                <a16:creationId xmlns:a16="http://schemas.microsoft.com/office/drawing/2014/main" id="{53AF8749-DF69-4C64-BA83-FC9B2DC7F51B}"/>
+                <a16:creationId xmlns:a16="http://schemas.microsoft.com/office/drawing/2014/main" id="{B5ACFBD3-11A8-497B-90FE-7C843973CD14}"/>
               </a:ext>
             </a:extLst>
           </p:cNvPr>
@@ -14607,7 +14607,7 @@
           <p:cNvPr id="31" name="">
             <a:extLst xmlns:a="http://schemas.openxmlformats.org/drawingml/2006/main">
               <a:ext uri="{FF2B5EF4-FFF2-40B4-BE49-F238E27FC236}">
-                <a16:creationId xmlns:a16="http://schemas.microsoft.com/office/drawing/2014/main" id="{D0B11B03-A66F-4A12-B2AC-7A83E7186440}"/>
+                <a16:creationId xmlns:a16="http://schemas.microsoft.com/office/drawing/2014/main" id="{FF8170A2-E9DD-4D84-9ED3-E21E28C8F120}"/>
               </a:ext>
             </a:extLst>
           </p:cNvPr>
@@ -14652,7 +14652,7 @@
           <p:cNvPr id="32" name="">
             <a:extLst xmlns:a="http://schemas.openxmlformats.org/drawingml/2006/main">
               <a:ext uri="{FF2B5EF4-FFF2-40B4-BE49-F238E27FC236}">
-                <a16:creationId xmlns:a16="http://schemas.microsoft.com/office/drawing/2014/main" id="{6DAC9E47-85C1-43F0-920F-A1DCC3E12592}"/>
+                <a16:creationId xmlns:a16="http://schemas.microsoft.com/office/drawing/2014/main" id="{AE7F4471-D87D-4FAE-961C-E268F1F2C830}"/>
               </a:ext>
             </a:extLst>
           </p:cNvPr>
@@ -14697,7 +14697,7 @@
           <p:cNvPr id="33" name="">
             <a:extLst xmlns:a="http://schemas.openxmlformats.org/drawingml/2006/main">
               <a:ext uri="{FF2B5EF4-FFF2-40B4-BE49-F238E27FC236}">
-                <a16:creationId xmlns:a16="http://schemas.microsoft.com/office/drawing/2014/main" id="{12EB46EA-4546-4652-A99E-5598676812AD}"/>
+                <a16:creationId xmlns:a16="http://schemas.microsoft.com/office/drawing/2014/main" id="{D79257EF-E1AF-4CFB-9B49-C8BE2182C03E}"/>
               </a:ext>
             </a:extLst>
           </p:cNvPr>
@@ -14730,7 +14730,7 @@
           <p:cNvPr id="34" name="">
             <a:extLst xmlns:a="http://schemas.openxmlformats.org/drawingml/2006/main">
               <a:ext uri="{FF2B5EF4-FFF2-40B4-BE49-F238E27FC236}">
-                <a16:creationId xmlns:a16="http://schemas.microsoft.com/office/drawing/2014/main" id="{44FA3964-3476-49A3-B25F-1A2F4F2E2B9F}"/>
+                <a16:creationId xmlns:a16="http://schemas.microsoft.com/office/drawing/2014/main" id="{B5C3877C-9732-468B-98DA-A329D2B98A5E}"/>
               </a:ext>
             </a:extLst>
           </p:cNvPr>
@@ -14775,7 +14775,7 @@
           <p:cNvPr id="35" name="">
             <a:extLst xmlns:a="http://schemas.openxmlformats.org/drawingml/2006/main">
               <a:ext uri="{FF2B5EF4-FFF2-40B4-BE49-F238E27FC236}">
-                <a16:creationId xmlns:a16="http://schemas.microsoft.com/office/drawing/2014/main" id="{42A6A67C-4E17-49D2-ADE1-3B83BE0B8580}"/>
+                <a16:creationId xmlns:a16="http://schemas.microsoft.com/office/drawing/2014/main" id="{0551EA8A-162D-4367-B6AD-7605BFD60155}"/>
               </a:ext>
             </a:extLst>
           </p:cNvPr>
@@ -14820,7 +14820,7 @@
           <p:cNvPr id="36" name="">
             <a:extLst xmlns:a="http://schemas.openxmlformats.org/drawingml/2006/main">
               <a:ext uri="{FF2B5EF4-FFF2-40B4-BE49-F238E27FC236}">
-                <a16:creationId xmlns:a16="http://schemas.microsoft.com/office/drawing/2014/main" id="{49482375-CFB2-40A7-86BE-FCF6F2D5B547}"/>
+                <a16:creationId xmlns:a16="http://schemas.microsoft.com/office/drawing/2014/main" id="{3F0F4E05-B332-4987-834C-D52D5CB762F4}"/>
               </a:ext>
             </a:extLst>
           </p:cNvPr>
@@ -14865,7 +14865,7 @@
           <p:cNvPr id="37" name="">
             <a:extLst xmlns:a="http://schemas.openxmlformats.org/drawingml/2006/main">
               <a:ext uri="{FF2B5EF4-FFF2-40B4-BE49-F238E27FC236}">
-                <a16:creationId xmlns:a16="http://schemas.microsoft.com/office/drawing/2014/main" id="{17150544-7545-489E-BCDE-091FA8557470}"/>
+                <a16:creationId xmlns:a16="http://schemas.microsoft.com/office/drawing/2014/main" id="{81391340-6159-498A-A1F1-FCAF5658C340}"/>
               </a:ext>
             </a:extLst>
           </p:cNvPr>
@@ -14898,7 +14898,7 @@
           <p:cNvPr id="38" name="">
             <a:extLst xmlns:a="http://schemas.openxmlformats.org/drawingml/2006/main">
               <a:ext uri="{FF2B5EF4-FFF2-40B4-BE49-F238E27FC236}">
-                <a16:creationId xmlns:a16="http://schemas.microsoft.com/office/drawing/2014/main" id="{B4828819-DF5D-4F4F-ABFA-D8F08DB190E5}"/>
+                <a16:creationId xmlns:a16="http://schemas.microsoft.com/office/drawing/2014/main" id="{1DF7CBBA-DE57-40C1-9827-212DCC44AD16}"/>
               </a:ext>
             </a:extLst>
           </p:cNvPr>
@@ -14943,7 +14943,7 @@
           <p:cNvPr id="39" name="">
             <a:extLst xmlns:a="http://schemas.openxmlformats.org/drawingml/2006/main">
               <a:ext uri="{FF2B5EF4-FFF2-40B4-BE49-F238E27FC236}">
-                <a16:creationId xmlns:a16="http://schemas.microsoft.com/office/drawing/2014/main" id="{61DE4B57-0E6A-424D-9270-77DE57ACD82A}"/>
+                <a16:creationId xmlns:a16="http://schemas.microsoft.com/office/drawing/2014/main" id="{8C72552F-50D2-473D-8117-D5D2BB82AD36}"/>
               </a:ext>
             </a:extLst>
           </p:cNvPr>
@@ -14988,7 +14988,7 @@
           <p:cNvPr id="40" name="">
             <a:extLst xmlns:a="http://schemas.openxmlformats.org/drawingml/2006/main">
               <a:ext uri="{FF2B5EF4-FFF2-40B4-BE49-F238E27FC236}">
-                <a16:creationId xmlns:a16="http://schemas.microsoft.com/office/drawing/2014/main" id="{7B959A7A-9AF6-4626-A384-0D6292A7F134}"/>
+                <a16:creationId xmlns:a16="http://schemas.microsoft.com/office/drawing/2014/main" id="{48F3238E-15CE-4E3A-9260-AA5C9A489758}"/>
               </a:ext>
             </a:extLst>
           </p:cNvPr>
@@ -15033,7 +15033,7 @@
           <p:cNvPr id="41" name="">
             <a:extLst xmlns:a="http://schemas.openxmlformats.org/drawingml/2006/main">
               <a:ext uri="{FF2B5EF4-FFF2-40B4-BE49-F238E27FC236}">
-                <a16:creationId xmlns:a16="http://schemas.microsoft.com/office/drawing/2014/main" id="{5D0CAB72-FCDE-43F0-830A-86BBEE666537}"/>
+                <a16:creationId xmlns:a16="http://schemas.microsoft.com/office/drawing/2014/main" id="{B94182EC-3BF0-4C3F-8628-63785BEE8F01}"/>
               </a:ext>
             </a:extLst>
           </p:cNvPr>
@@ -15066,7 +15066,7 @@
           <p:cNvPr id="42" name="">
             <a:extLst xmlns:a="http://schemas.openxmlformats.org/drawingml/2006/main">
               <a:ext uri="{FF2B5EF4-FFF2-40B4-BE49-F238E27FC236}">
-                <a16:creationId xmlns:a16="http://schemas.microsoft.com/office/drawing/2014/main" id="{9F313844-E3FD-4F24-B66F-9DD8B52666B2}"/>
+                <a16:creationId xmlns:a16="http://schemas.microsoft.com/office/drawing/2014/main" id="{913F51F8-E09E-4002-B793-018BFF7809AD}"/>
               </a:ext>
             </a:extLst>
           </p:cNvPr>
@@ -15097,7 +15097,7 @@
           <p:cNvPr id="43" name="">
             <a:extLst xmlns:a="http://schemas.openxmlformats.org/drawingml/2006/main">
               <a:ext uri="{FF2B5EF4-FFF2-40B4-BE49-F238E27FC236}">
-                <a16:creationId xmlns:a16="http://schemas.microsoft.com/office/drawing/2014/main" id="{97DA5E73-4405-4236-AE0B-535F8F72FCBB}"/>
+                <a16:creationId xmlns:a16="http://schemas.microsoft.com/office/drawing/2014/main" id="{0B4AD6F4-8F67-42F3-8262-CBA947DB6707}"/>
               </a:ext>
             </a:extLst>
           </p:cNvPr>
@@ -15142,7 +15142,7 @@
           <p:cNvPr id="44" name="">
             <a:extLst xmlns:a="http://schemas.openxmlformats.org/drawingml/2006/main">
               <a:ext uri="{FF2B5EF4-FFF2-40B4-BE49-F238E27FC236}">
-                <a16:creationId xmlns:a16="http://schemas.microsoft.com/office/drawing/2014/main" id="{FF3CDA65-8C53-4836-8B33-8D34A7ED467F}"/>
+                <a16:creationId xmlns:a16="http://schemas.microsoft.com/office/drawing/2014/main" id="{B85A76E1-2FBF-44A2-8155-F3466A714D30}"/>
               </a:ext>
             </a:extLst>
           </p:cNvPr>
@@ -15187,7 +15187,7 @@
           <p:cNvPr id="45" name="">
             <a:extLst xmlns:a="http://schemas.openxmlformats.org/drawingml/2006/main">
               <a:ext uri="{FF2B5EF4-FFF2-40B4-BE49-F238E27FC236}">
-                <a16:creationId xmlns:a16="http://schemas.microsoft.com/office/drawing/2014/main" id="{4B4FE3C4-AB99-497E-839D-74745858CC20}"/>
+                <a16:creationId xmlns:a16="http://schemas.microsoft.com/office/drawing/2014/main" id="{B302948C-1A93-4095-9F29-78031D6D3F74}"/>
               </a:ext>
             </a:extLst>
           </p:cNvPr>
@@ -15232,7 +15232,7 @@
           <p:cNvPr id="46" name="">
             <a:extLst xmlns:a="http://schemas.openxmlformats.org/drawingml/2006/main">
               <a:ext uri="{FF2B5EF4-FFF2-40B4-BE49-F238E27FC236}">
-                <a16:creationId xmlns:a16="http://schemas.microsoft.com/office/drawing/2014/main" id="{F0DF3989-5656-4461-BCEC-C9167A9A895F}"/>
+                <a16:creationId xmlns:a16="http://schemas.microsoft.com/office/drawing/2014/main" id="{FA039020-75A5-4E2A-A59F-86FAB0B5FFD7}"/>
               </a:ext>
             </a:extLst>
           </p:cNvPr>
@@ -15265,7 +15265,7 @@
           <p:cNvPr id="47" name="">
             <a:extLst xmlns:a="http://schemas.openxmlformats.org/drawingml/2006/main">
               <a:ext uri="{FF2B5EF4-FFF2-40B4-BE49-F238E27FC236}">
-                <a16:creationId xmlns:a16="http://schemas.microsoft.com/office/drawing/2014/main" id="{A9A8A5DF-4F16-4903-947B-FAAAE114B4A8}"/>
+                <a16:creationId xmlns:a16="http://schemas.microsoft.com/office/drawing/2014/main" id="{DE2F7589-0E70-430D-B548-991BE2A9BBDC}"/>
               </a:ext>
             </a:extLst>
           </p:cNvPr>
@@ -15310,7 +15310,7 @@
           <p:cNvPr id="48" name="">
             <a:extLst xmlns:a="http://schemas.openxmlformats.org/drawingml/2006/main">
               <a:ext uri="{FF2B5EF4-FFF2-40B4-BE49-F238E27FC236}">
-                <a16:creationId xmlns:a16="http://schemas.microsoft.com/office/drawing/2014/main" id="{FD287D4E-E546-48FE-97F4-48686B137E44}"/>
+                <a16:creationId xmlns:a16="http://schemas.microsoft.com/office/drawing/2014/main" id="{C56DD886-6430-408D-9C3B-03494FF92540}"/>
               </a:ext>
             </a:extLst>
           </p:cNvPr>
@@ -15355,7 +15355,7 @@
           <p:cNvPr id="49" name="">
             <a:extLst xmlns:a="http://schemas.openxmlformats.org/drawingml/2006/main">
               <a:ext uri="{FF2B5EF4-FFF2-40B4-BE49-F238E27FC236}">
-                <a16:creationId xmlns:a16="http://schemas.microsoft.com/office/drawing/2014/main" id="{619F93BB-39E1-4AF0-B541-24014E626BB3}"/>
+                <a16:creationId xmlns:a16="http://schemas.microsoft.com/office/drawing/2014/main" id="{8FDD59F5-39BB-4323-BB38-88029F3D769F}"/>
               </a:ext>
             </a:extLst>
           </p:cNvPr>
@@ -15400,7 +15400,7 @@
           <p:cNvPr id="50" name="">
             <a:extLst xmlns:a="http://schemas.openxmlformats.org/drawingml/2006/main">
               <a:ext uri="{FF2B5EF4-FFF2-40B4-BE49-F238E27FC236}">
-                <a16:creationId xmlns:a16="http://schemas.microsoft.com/office/drawing/2014/main" id="{1C6F6702-BFA2-4E95-BA78-158A842F846F}"/>
+                <a16:creationId xmlns:a16="http://schemas.microsoft.com/office/drawing/2014/main" id="{263E1610-98A9-4F98-B9DF-A3D77910E30D}"/>
               </a:ext>
             </a:extLst>
           </p:cNvPr>
@@ -15433,7 +15433,7 @@
           <p:cNvPr id="51" name="">
             <a:extLst xmlns:a="http://schemas.openxmlformats.org/drawingml/2006/main">
               <a:ext uri="{FF2B5EF4-FFF2-40B4-BE49-F238E27FC236}">
-                <a16:creationId xmlns:a16="http://schemas.microsoft.com/office/drawing/2014/main" id="{1F55C406-CDB8-4AD3-A042-8C487FAF1DE5}"/>
+                <a16:creationId xmlns:a16="http://schemas.microsoft.com/office/drawing/2014/main" id="{630A3E95-9261-4FCC-BAE3-604B14548FA5}"/>
               </a:ext>
             </a:extLst>
           </p:cNvPr>
@@ -15478,7 +15478,7 @@
           <p:cNvPr id="52" name="">
             <a:extLst xmlns:a="http://schemas.openxmlformats.org/drawingml/2006/main">
               <a:ext uri="{FF2B5EF4-FFF2-40B4-BE49-F238E27FC236}">
-                <a16:creationId xmlns:a16="http://schemas.microsoft.com/office/drawing/2014/main" id="{AB5926D4-1575-4EB6-9524-9872F45E9412}"/>
+                <a16:creationId xmlns:a16="http://schemas.microsoft.com/office/drawing/2014/main" id="{F35E5C1E-F40F-4FF8-88C8-8F39369BC704}"/>
               </a:ext>
             </a:extLst>
           </p:cNvPr>
@@ -15523,7 +15523,7 @@
           <p:cNvPr id="53" name="">
             <a:extLst xmlns:a="http://schemas.openxmlformats.org/drawingml/2006/main">
               <a:ext uri="{FF2B5EF4-FFF2-40B4-BE49-F238E27FC236}">
-                <a16:creationId xmlns:a16="http://schemas.microsoft.com/office/drawing/2014/main" id="{2403B193-644B-4AF9-B86D-AF6D600DA247}"/>
+                <a16:creationId xmlns:a16="http://schemas.microsoft.com/office/drawing/2014/main" id="{4CD5DC14-CBD2-4FC1-92A9-68A452627DC2}"/>
               </a:ext>
             </a:extLst>
           </p:cNvPr>
@@ -15568,7 +15568,7 @@
           <p:cNvPr id="54" name="">
             <a:extLst xmlns:a="http://schemas.openxmlformats.org/drawingml/2006/main">
               <a:ext uri="{FF2B5EF4-FFF2-40B4-BE49-F238E27FC236}">
-                <a16:creationId xmlns:a16="http://schemas.microsoft.com/office/drawing/2014/main" id="{4A3C7C1B-0883-4AC8-A7ED-C0DAA0BCA46E}"/>
+                <a16:creationId xmlns:a16="http://schemas.microsoft.com/office/drawing/2014/main" id="{430E2E66-144B-4EFB-9A46-970D5C3AA923}"/>
               </a:ext>
             </a:extLst>
           </p:cNvPr>
@@ -15601,7 +15601,7 @@
           <p:cNvPr id="55" name="">
             <a:extLst xmlns:a="http://schemas.openxmlformats.org/drawingml/2006/main">
               <a:ext uri="{FF2B5EF4-FFF2-40B4-BE49-F238E27FC236}">
-                <a16:creationId xmlns:a16="http://schemas.microsoft.com/office/drawing/2014/main" id="{755AB46D-4C25-4424-93D1-6FC03B8B740A}"/>
+                <a16:creationId xmlns:a16="http://schemas.microsoft.com/office/drawing/2014/main" id="{DF9C2802-AFE9-482F-B65D-68F41F63D963}"/>
               </a:ext>
             </a:extLst>
           </p:cNvPr>
@@ -15646,7 +15646,7 @@
           <p:cNvPr id="56" name="">
             <a:extLst xmlns:a="http://schemas.openxmlformats.org/drawingml/2006/main">
               <a:ext uri="{FF2B5EF4-FFF2-40B4-BE49-F238E27FC236}">
-                <a16:creationId xmlns:a16="http://schemas.microsoft.com/office/drawing/2014/main" id="{B4D62407-5DE4-4D92-A957-1ACA8DCD729B}"/>
+                <a16:creationId xmlns:a16="http://schemas.microsoft.com/office/drawing/2014/main" id="{D6E210EE-CF06-4F20-AE97-904B7A5B9A53}"/>
               </a:ext>
             </a:extLst>
           </p:cNvPr>
@@ -15691,7 +15691,7 @@
           <p:cNvPr id="57" name="">
             <a:extLst xmlns:a="http://schemas.openxmlformats.org/drawingml/2006/main">
               <a:ext uri="{FF2B5EF4-FFF2-40B4-BE49-F238E27FC236}">
-                <a16:creationId xmlns:a16="http://schemas.microsoft.com/office/drawing/2014/main" id="{73FF8763-925A-45CF-9D94-751544E31140}"/>
+                <a16:creationId xmlns:a16="http://schemas.microsoft.com/office/drawing/2014/main" id="{C54FE9AE-3981-4B04-AFC1-FD3DE25FF70B}"/>
               </a:ext>
             </a:extLst>
           </p:cNvPr>
@@ -15736,7 +15736,7 @@
           <p:cNvPr id="58" name="">
             <a:extLst xmlns:a="http://schemas.openxmlformats.org/drawingml/2006/main">
               <a:ext uri="{FF2B5EF4-FFF2-40B4-BE49-F238E27FC236}">
-                <a16:creationId xmlns:a16="http://schemas.microsoft.com/office/drawing/2014/main" id="{1716FABC-708E-4344-8CC9-304A475EBF6E}"/>
+                <a16:creationId xmlns:a16="http://schemas.microsoft.com/office/drawing/2014/main" id="{2DB0DC91-B3D4-41FE-BBE1-FA4B83C6C723}"/>
               </a:ext>
             </a:extLst>
           </p:cNvPr>
@@ -15781,7 +15781,7 @@
           <p:cNvPr id="59" name="">
             <a:extLst xmlns:a="http://schemas.openxmlformats.org/drawingml/2006/main">
               <a:ext uri="{FF2B5EF4-FFF2-40B4-BE49-F238E27FC236}">
-                <a16:creationId xmlns:a16="http://schemas.microsoft.com/office/drawing/2014/main" id="{17F3E227-52E1-4F36-B022-42ACFC92B72C}"/>
+                <a16:creationId xmlns:a16="http://schemas.microsoft.com/office/drawing/2014/main" id="{E7CEBF5D-417F-4CAA-8BAF-ABF7BAF8F363}"/>
               </a:ext>
             </a:extLst>
           </p:cNvPr>
@@ -15826,7 +15826,7 @@
           <p:cNvPr id="60" name="">
             <a:extLst xmlns:a="http://schemas.openxmlformats.org/drawingml/2006/main">
               <a:ext uri="{FF2B5EF4-FFF2-40B4-BE49-F238E27FC236}">
-                <a16:creationId xmlns:a16="http://schemas.microsoft.com/office/drawing/2014/main" id="{A9201F43-2D06-4FAF-ACB5-D39A00F7FC44}"/>
+                <a16:creationId xmlns:a16="http://schemas.microsoft.com/office/drawing/2014/main" id="{A580A859-D40C-40F1-ABCD-707B6B9EB647}"/>
               </a:ext>
             </a:extLst>
           </p:cNvPr>
@@ -15857,7 +15857,7 @@
           <p:cNvPr id="61" name="">
             <a:extLst xmlns:a="http://schemas.openxmlformats.org/drawingml/2006/main">
               <a:ext uri="{FF2B5EF4-FFF2-40B4-BE49-F238E27FC236}">
-                <a16:creationId xmlns:a16="http://schemas.microsoft.com/office/drawing/2014/main" id="{C47ADE44-1D94-4057-B5E5-F2664638DBFA}"/>
+                <a16:creationId xmlns:a16="http://schemas.microsoft.com/office/drawing/2014/main" id="{DF9CBC03-823A-4239-987D-367C3AA0A71D}"/>
               </a:ext>
             </a:extLst>
           </p:cNvPr>
@@ -15888,7 +15888,7 @@
           <p:cNvPr id="62" name="">
             <a:extLst xmlns:a="http://schemas.openxmlformats.org/drawingml/2006/main">
               <a:ext uri="{FF2B5EF4-FFF2-40B4-BE49-F238E27FC236}">
-                <a16:creationId xmlns:a16="http://schemas.microsoft.com/office/drawing/2014/main" id="{2F5909A8-B28B-488E-825B-FE99D24FEC89}"/>
+                <a16:creationId xmlns:a16="http://schemas.microsoft.com/office/drawing/2014/main" id="{83981B3F-0649-4D81-8634-0F3AACE14F0B}"/>
               </a:ext>
             </a:extLst>
           </p:cNvPr>
@@ -15933,7 +15933,7 @@
           <p:cNvPr id="63" name="">
             <a:extLst xmlns:a="http://schemas.openxmlformats.org/drawingml/2006/main">
               <a:ext uri="{FF2B5EF4-FFF2-40B4-BE49-F238E27FC236}">
-                <a16:creationId xmlns:a16="http://schemas.microsoft.com/office/drawing/2014/main" id="{3482704B-E0DC-4A22-989E-B51CA4718F15}"/>
+                <a16:creationId xmlns:a16="http://schemas.microsoft.com/office/drawing/2014/main" id="{B9E374CD-2305-4FC8-BB6B-2A787BE90FB8}"/>
               </a:ext>
             </a:extLst>
           </p:cNvPr>
@@ -15978,7 +15978,7 @@
           <p:cNvPr id="64" name="">
             <a:extLst xmlns:a="http://schemas.openxmlformats.org/drawingml/2006/main">
               <a:ext uri="{FF2B5EF4-FFF2-40B4-BE49-F238E27FC236}">
-                <a16:creationId xmlns:a16="http://schemas.microsoft.com/office/drawing/2014/main" id="{722A95C7-1943-47E5-BE5F-0A61B27557B1}"/>
+                <a16:creationId xmlns:a16="http://schemas.microsoft.com/office/drawing/2014/main" id="{E6793EAF-E46A-48C4-8214-BAA1D5564245}"/>
               </a:ext>
             </a:extLst>
           </p:cNvPr>
@@ -16009,7 +16009,7 @@
           <p:cNvPr id="65" name="">
             <a:extLst xmlns:a="http://schemas.openxmlformats.org/drawingml/2006/main">
               <a:ext uri="{FF2B5EF4-FFF2-40B4-BE49-F238E27FC236}">
-                <a16:creationId xmlns:a16="http://schemas.microsoft.com/office/drawing/2014/main" id="{960E73F1-705C-4042-8CC2-13F6DBE61137}"/>
+                <a16:creationId xmlns:a16="http://schemas.microsoft.com/office/drawing/2014/main" id="{E2FFC097-A356-4743-9632-B3D333E5BD64}"/>
               </a:ext>
             </a:extLst>
           </p:cNvPr>
@@ -16040,7 +16040,7 @@
           <p:cNvPr id="66" name="">
             <a:extLst xmlns:a="http://schemas.openxmlformats.org/drawingml/2006/main">
               <a:ext uri="{FF2B5EF4-FFF2-40B4-BE49-F238E27FC236}">
-                <a16:creationId xmlns:a16="http://schemas.microsoft.com/office/drawing/2014/main" id="{FF243750-6B59-4916-B062-481A3CA3C920}"/>
+                <a16:creationId xmlns:a16="http://schemas.microsoft.com/office/drawing/2014/main" id="{90EFFAB1-3A46-45E4-8DC1-B870A0671A5A}"/>
               </a:ext>
             </a:extLst>
           </p:cNvPr>
@@ -16085,7 +16085,7 @@
           <p:cNvPr id="67" name="">
             <a:extLst xmlns:a="http://schemas.openxmlformats.org/drawingml/2006/main">
               <a:ext uri="{FF2B5EF4-FFF2-40B4-BE49-F238E27FC236}">
-                <a16:creationId xmlns:a16="http://schemas.microsoft.com/office/drawing/2014/main" id="{16F1D591-3661-43DC-B048-DDC600620BDD}"/>
+                <a16:creationId xmlns:a16="http://schemas.microsoft.com/office/drawing/2014/main" id="{85FEB215-F2E8-4CC3-8FB0-8B3C9582E279}"/>
               </a:ext>
             </a:extLst>
           </p:cNvPr>
@@ -16130,7 +16130,7 @@
           <p:cNvPr id="68" name="">
             <a:extLst xmlns:a="http://schemas.openxmlformats.org/drawingml/2006/main">
               <a:ext uri="{FF2B5EF4-FFF2-40B4-BE49-F238E27FC236}">
-                <a16:creationId xmlns:a16="http://schemas.microsoft.com/office/drawing/2014/main" id="{9F12D601-DD6F-4012-97B4-669D64BFC9B4}"/>
+                <a16:creationId xmlns:a16="http://schemas.microsoft.com/office/drawing/2014/main" id="{E42CD68A-AC52-498F-8434-F75BBA1464D2}"/>
               </a:ext>
             </a:extLst>
           </p:cNvPr>
@@ -16161,7 +16161,7 @@
           <p:cNvPr id="69" name="">
             <a:extLst xmlns:a="http://schemas.openxmlformats.org/drawingml/2006/main">
               <a:ext uri="{FF2B5EF4-FFF2-40B4-BE49-F238E27FC236}">
-                <a16:creationId xmlns:a16="http://schemas.microsoft.com/office/drawing/2014/main" id="{A65556AF-1F8D-44BA-A3A3-AC2EEA7D5FC4}"/>
+                <a16:creationId xmlns:a16="http://schemas.microsoft.com/office/drawing/2014/main" id="{F578E778-7E28-475D-A840-2AC255792916}"/>
               </a:ext>
             </a:extLst>
           </p:cNvPr>
@@ -16192,7 +16192,7 @@
           <p:cNvPr id="70" name="">
             <a:extLst xmlns:a="http://schemas.openxmlformats.org/drawingml/2006/main">
               <a:ext uri="{FF2B5EF4-FFF2-40B4-BE49-F238E27FC236}">
-                <a16:creationId xmlns:a16="http://schemas.microsoft.com/office/drawing/2014/main" id="{D654C211-A7BC-4426-9A37-B9AD212DCC3B}"/>
+                <a16:creationId xmlns:a16="http://schemas.microsoft.com/office/drawing/2014/main" id="{9FD7538E-7BDF-4666-B477-77B7818AD4E5}"/>
               </a:ext>
             </a:extLst>
           </p:cNvPr>
@@ -16237,7 +16237,7 @@
           <p:cNvPr id="71" name="">
             <a:extLst xmlns:a="http://schemas.openxmlformats.org/drawingml/2006/main">
               <a:ext uri="{FF2B5EF4-FFF2-40B4-BE49-F238E27FC236}">
-                <a16:creationId xmlns:a16="http://schemas.microsoft.com/office/drawing/2014/main" id="{EDCF4A58-390F-41D4-B9F4-ECE170E4D21C}"/>
+                <a16:creationId xmlns:a16="http://schemas.microsoft.com/office/drawing/2014/main" id="{B7213F7C-7CA7-4F21-B279-F0BA54C0DBFF}"/>
               </a:ext>
             </a:extLst>
           </p:cNvPr>
@@ -16282,7 +16282,7 @@
           <p:cNvPr id="72" name="">
             <a:extLst xmlns:a="http://schemas.openxmlformats.org/drawingml/2006/main">
               <a:ext uri="{FF2B5EF4-FFF2-40B4-BE49-F238E27FC236}">
-                <a16:creationId xmlns:a16="http://schemas.microsoft.com/office/drawing/2014/main" id="{A6B102A3-2C10-4033-9140-B672C587525C}"/>
+                <a16:creationId xmlns:a16="http://schemas.microsoft.com/office/drawing/2014/main" id="{A374A5AD-0D59-4955-8CF3-3C34CBF25AEF}"/>
               </a:ext>
             </a:extLst>
           </p:cNvPr>
@@ -16313,7 +16313,7 @@
           <p:cNvPr id="73" name="">
             <a:extLst xmlns:a="http://schemas.openxmlformats.org/drawingml/2006/main">
               <a:ext uri="{FF2B5EF4-FFF2-40B4-BE49-F238E27FC236}">
-                <a16:creationId xmlns:a16="http://schemas.microsoft.com/office/drawing/2014/main" id="{DCD8FE21-64EA-488B-B7F0-1C1F5BA3F39C}"/>
+                <a16:creationId xmlns:a16="http://schemas.microsoft.com/office/drawing/2014/main" id="{6C858009-21F1-491D-9AFD-0F1206EB5FF1}"/>
               </a:ext>
             </a:extLst>
           </p:cNvPr>
@@ -16344,7 +16344,7 @@
           <p:cNvPr id="74" name="">
             <a:extLst xmlns:a="http://schemas.openxmlformats.org/drawingml/2006/main">
               <a:ext uri="{FF2B5EF4-FFF2-40B4-BE49-F238E27FC236}">
-                <a16:creationId xmlns:a16="http://schemas.microsoft.com/office/drawing/2014/main" id="{D4837CC3-52AA-4FC8-A8BE-7A47211D612B}"/>
+                <a16:creationId xmlns:a16="http://schemas.microsoft.com/office/drawing/2014/main" id="{FA0230FD-406A-4CA3-96DE-5932A6DBB371}"/>
               </a:ext>
             </a:extLst>
           </p:cNvPr>
@@ -16389,7 +16389,7 @@
           <p:cNvPr id="75" name="">
             <a:extLst xmlns:a="http://schemas.openxmlformats.org/drawingml/2006/main">
               <a:ext uri="{FF2B5EF4-FFF2-40B4-BE49-F238E27FC236}">
-                <a16:creationId xmlns:a16="http://schemas.microsoft.com/office/drawing/2014/main" id="{22791CCA-95DF-43DC-8898-8E4C28294976}"/>
+                <a16:creationId xmlns:a16="http://schemas.microsoft.com/office/drawing/2014/main" id="{7C64F305-4D2D-4301-9324-5014E691826B}"/>
               </a:ext>
             </a:extLst>
           </p:cNvPr>
@@ -16434,7 +16434,7 @@
           <p:cNvPr id="76" name="">
             <a:extLst xmlns:a="http://schemas.openxmlformats.org/drawingml/2006/main">
               <a:ext uri="{FF2B5EF4-FFF2-40B4-BE49-F238E27FC236}">
-                <a16:creationId xmlns:a16="http://schemas.microsoft.com/office/drawing/2014/main" id="{5BE02584-FFEF-4615-A07D-B5116B5723A7}"/>
+                <a16:creationId xmlns:a16="http://schemas.microsoft.com/office/drawing/2014/main" id="{ABA48AFF-0734-42AC-8DA2-083E700E9CDA}"/>
               </a:ext>
             </a:extLst>
           </p:cNvPr>
@@ -16465,7 +16465,7 @@
           <p:cNvPr id="77" name="">
             <a:extLst xmlns:a="http://schemas.openxmlformats.org/drawingml/2006/main">
               <a:ext uri="{FF2B5EF4-FFF2-40B4-BE49-F238E27FC236}">
-                <a16:creationId xmlns:a16="http://schemas.microsoft.com/office/drawing/2014/main" id="{D789E9B1-4C24-4625-8166-10FA9B2EED9C}"/>
+                <a16:creationId xmlns:a16="http://schemas.microsoft.com/office/drawing/2014/main" id="{E9973F42-791D-4A94-AD74-F218AAD7CF96}"/>
               </a:ext>
             </a:extLst>
           </p:cNvPr>
@@ -16496,7 +16496,7 @@
           <p:cNvPr id="78" name="">
             <a:extLst xmlns:a="http://schemas.openxmlformats.org/drawingml/2006/main">
               <a:ext uri="{FF2B5EF4-FFF2-40B4-BE49-F238E27FC236}">
-                <a16:creationId xmlns:a16="http://schemas.microsoft.com/office/drawing/2014/main" id="{F4841301-4843-4F76-A622-3CF430A96EB4}"/>
+                <a16:creationId xmlns:a16="http://schemas.microsoft.com/office/drawing/2014/main" id="{238F275A-A4D0-4E3D-A6A7-F5C845FE163C}"/>
               </a:ext>
             </a:extLst>
           </p:cNvPr>
@@ -16541,7 +16541,7 @@
           <p:cNvPr id="79" name="">
             <a:extLst xmlns:a="http://schemas.openxmlformats.org/drawingml/2006/main">
               <a:ext uri="{FF2B5EF4-FFF2-40B4-BE49-F238E27FC236}">
-                <a16:creationId xmlns:a16="http://schemas.microsoft.com/office/drawing/2014/main" id="{596A92FF-F211-4FA9-9CD2-C6406D18F0D7}"/>
+                <a16:creationId xmlns:a16="http://schemas.microsoft.com/office/drawing/2014/main" id="{4D93E9E9-2134-4D5B-A696-96A863270D28}"/>
               </a:ext>
             </a:extLst>
           </p:cNvPr>
@@ -16586,7 +16586,7 @@
           <p:cNvPr id="80" name="">
             <a:extLst xmlns:a="http://schemas.openxmlformats.org/drawingml/2006/main">
               <a:ext uri="{FF2B5EF4-FFF2-40B4-BE49-F238E27FC236}">
-                <a16:creationId xmlns:a16="http://schemas.microsoft.com/office/drawing/2014/main" id="{2B277FE5-76E0-422F-A696-33FBFE55330E}"/>
+                <a16:creationId xmlns:a16="http://schemas.microsoft.com/office/drawing/2014/main" id="{B982FA15-3EB0-451E-B61F-1D24ECD60A66}"/>
               </a:ext>
             </a:extLst>
           </p:cNvPr>
@@ -16617,7 +16617,7 @@
           <p:cNvPr id="81" name="">
             <a:extLst xmlns:a="http://schemas.openxmlformats.org/drawingml/2006/main">
               <a:ext uri="{FF2B5EF4-FFF2-40B4-BE49-F238E27FC236}">
-                <a16:creationId xmlns:a16="http://schemas.microsoft.com/office/drawing/2014/main" id="{02B0CF72-0A3F-4FEE-BB77-0C16A290AC80}"/>
+                <a16:creationId xmlns:a16="http://schemas.microsoft.com/office/drawing/2014/main" id="{ED59AC57-8F9A-4540-B448-992A6F2B171E}"/>
               </a:ext>
             </a:extLst>
           </p:cNvPr>
@@ -16648,7 +16648,7 @@
           <p:cNvPr id="82" name="">
             <a:extLst xmlns:a="http://schemas.openxmlformats.org/drawingml/2006/main">
               <a:ext uri="{FF2B5EF4-FFF2-40B4-BE49-F238E27FC236}">
-                <a16:creationId xmlns:a16="http://schemas.microsoft.com/office/drawing/2014/main" id="{C6508D46-A8F7-4CCC-9AA1-D5B3F7268BEE}"/>
+                <a16:creationId xmlns:a16="http://schemas.microsoft.com/office/drawing/2014/main" id="{BDEC344B-7B6F-431B-B1D4-6C7CCBD4467E}"/>
               </a:ext>
             </a:extLst>
           </p:cNvPr>
@@ -16693,7 +16693,7 @@
           <p:cNvPr id="83" name="">
             <a:extLst xmlns:a="http://schemas.openxmlformats.org/drawingml/2006/main">
               <a:ext uri="{FF2B5EF4-FFF2-40B4-BE49-F238E27FC236}">
-                <a16:creationId xmlns:a16="http://schemas.microsoft.com/office/drawing/2014/main" id="{573214F0-9E44-49E4-8252-5D79DAFCE02D}"/>
+                <a16:creationId xmlns:a16="http://schemas.microsoft.com/office/drawing/2014/main" id="{B016768C-E657-4398-85D6-EB6EE9DAA5D0}"/>
               </a:ext>
             </a:extLst>
           </p:cNvPr>
@@ -16738,7 +16738,7 @@
           <p:cNvPr id="84" name="">
             <a:extLst xmlns:a="http://schemas.openxmlformats.org/drawingml/2006/main">
               <a:ext uri="{FF2B5EF4-FFF2-40B4-BE49-F238E27FC236}">
-                <a16:creationId xmlns:a16="http://schemas.microsoft.com/office/drawing/2014/main" id="{4BB657C4-A5B0-431B-89AE-B6F349F97E2D}"/>
+                <a16:creationId xmlns:a16="http://schemas.microsoft.com/office/drawing/2014/main" id="{004DA2E3-E469-46BA-B55F-78B097078DD1}"/>
               </a:ext>
             </a:extLst>
           </p:cNvPr>
@@ -16769,7 +16769,7 @@
           <p:cNvPr id="85" name="">
             <a:extLst xmlns:a="http://schemas.openxmlformats.org/drawingml/2006/main">
               <a:ext uri="{FF2B5EF4-FFF2-40B4-BE49-F238E27FC236}">
-                <a16:creationId xmlns:a16="http://schemas.microsoft.com/office/drawing/2014/main" id="{B1807D2F-315D-4B80-8697-67FEA5FD1981}"/>
+                <a16:creationId xmlns:a16="http://schemas.microsoft.com/office/drawing/2014/main" id="{8D1BA3B8-17CA-4748-83E8-AF360E092C3F}"/>
               </a:ext>
             </a:extLst>
           </p:cNvPr>
@@ -16800,7 +16800,7 @@
           <p:cNvPr id="86" name="">
             <a:extLst xmlns:a="http://schemas.openxmlformats.org/drawingml/2006/main">
               <a:ext uri="{FF2B5EF4-FFF2-40B4-BE49-F238E27FC236}">
-                <a16:creationId xmlns:a16="http://schemas.microsoft.com/office/drawing/2014/main" id="{41453642-5B05-4180-BDE9-710173B9BB00}"/>
+                <a16:creationId xmlns:a16="http://schemas.microsoft.com/office/drawing/2014/main" id="{9A3822C1-5988-46DD-928B-4C79861332E2}"/>
               </a:ext>
             </a:extLst>
           </p:cNvPr>
@@ -16845,7 +16845,7 @@
           <p:cNvPr id="87" name="">
             <a:extLst xmlns:a="http://schemas.openxmlformats.org/drawingml/2006/main">
               <a:ext uri="{FF2B5EF4-FFF2-40B4-BE49-F238E27FC236}">
-                <a16:creationId xmlns:a16="http://schemas.microsoft.com/office/drawing/2014/main" id="{9BBE9550-B2EB-43FB-9A1D-8716D74AE822}"/>
+                <a16:creationId xmlns:a16="http://schemas.microsoft.com/office/drawing/2014/main" id="{52A24860-C454-403E-9F60-B75F16EF64FC}"/>
               </a:ext>
             </a:extLst>
           </p:cNvPr>
@@ -16890,7 +16890,7 @@
           <p:cNvPr id="88" name="">
             <a:extLst xmlns:a="http://schemas.openxmlformats.org/drawingml/2006/main">
               <a:ext uri="{FF2B5EF4-FFF2-40B4-BE49-F238E27FC236}">
-                <a16:creationId xmlns:a16="http://schemas.microsoft.com/office/drawing/2014/main" id="{8DD01892-FF43-4D31-9410-D8B7AD98C094}"/>
+                <a16:creationId xmlns:a16="http://schemas.microsoft.com/office/drawing/2014/main" id="{8F91D33D-622F-41D4-9903-1F99C3F06F8C}"/>
               </a:ext>
             </a:extLst>
           </p:cNvPr>
@@ -16921,7 +16921,7 @@
           <p:cNvPr id="89" name="">
             <a:extLst xmlns:a="http://schemas.openxmlformats.org/drawingml/2006/main">
               <a:ext uri="{FF2B5EF4-FFF2-40B4-BE49-F238E27FC236}">
-                <a16:creationId xmlns:a16="http://schemas.microsoft.com/office/drawing/2014/main" id="{7E9B4DDF-F20B-4FB9-BD72-3DAAD8600D61}"/>
+                <a16:creationId xmlns:a16="http://schemas.microsoft.com/office/drawing/2014/main" id="{4532A0B7-086F-4E2D-B279-D804532B6E41}"/>
               </a:ext>
             </a:extLst>
           </p:cNvPr>
@@ -16952,7 +16952,7 @@
           <p:cNvPr id="90" name="">
             <a:extLst xmlns:a="http://schemas.openxmlformats.org/drawingml/2006/main">
               <a:ext uri="{FF2B5EF4-FFF2-40B4-BE49-F238E27FC236}">
-                <a16:creationId xmlns:a16="http://schemas.microsoft.com/office/drawing/2014/main" id="{8C2CA546-5D2E-4791-A16A-48FA79911B62}"/>
+                <a16:creationId xmlns:a16="http://schemas.microsoft.com/office/drawing/2014/main" id="{EB0990C4-3325-4B0C-A197-53C4AAD4B56B}"/>
               </a:ext>
             </a:extLst>
           </p:cNvPr>
@@ -16997,7 +16997,7 @@
           <p:cNvPr id="91" name="">
             <a:extLst xmlns:a="http://schemas.openxmlformats.org/drawingml/2006/main">
               <a:ext uri="{FF2B5EF4-FFF2-40B4-BE49-F238E27FC236}">
-                <a16:creationId xmlns:a16="http://schemas.microsoft.com/office/drawing/2014/main" id="{EC53944E-47D4-4EAA-9544-666D4D101B79}"/>
+                <a16:creationId xmlns:a16="http://schemas.microsoft.com/office/drawing/2014/main" id="{1CF2C7B2-BC68-4E6B-B918-8B218DEF847B}"/>
               </a:ext>
             </a:extLst>
           </p:cNvPr>
@@ -17042,7 +17042,7 @@
           <p:cNvPr id="92" name="">
             <a:extLst xmlns:a="http://schemas.openxmlformats.org/drawingml/2006/main">
               <a:ext uri="{FF2B5EF4-FFF2-40B4-BE49-F238E27FC236}">
-                <a16:creationId xmlns:a16="http://schemas.microsoft.com/office/drawing/2014/main" id="{1E626781-5CD0-40C6-804E-54091E78B786}"/>
+                <a16:creationId xmlns:a16="http://schemas.microsoft.com/office/drawing/2014/main" id="{55B4A2FA-1205-4657-A705-255C4F10926D}"/>
               </a:ext>
             </a:extLst>
           </p:cNvPr>
@@ -17073,7 +17073,7 @@
           <p:cNvPr id="93" name="">
             <a:extLst xmlns:a="http://schemas.openxmlformats.org/drawingml/2006/main">
               <a:ext uri="{FF2B5EF4-FFF2-40B4-BE49-F238E27FC236}">
-                <a16:creationId xmlns:a16="http://schemas.microsoft.com/office/drawing/2014/main" id="{87C85703-133B-41BA-9D3C-A928A8C34ED2}"/>
+                <a16:creationId xmlns:a16="http://schemas.microsoft.com/office/drawing/2014/main" id="{7E6B5896-C8DC-4317-8B00-D4D28EFC6A4F}"/>
               </a:ext>
             </a:extLst>
           </p:cNvPr>
@@ -17104,7 +17104,7 @@
           <p:cNvPr id="94" name="">
             <a:extLst xmlns:a="http://schemas.openxmlformats.org/drawingml/2006/main">
               <a:ext uri="{FF2B5EF4-FFF2-40B4-BE49-F238E27FC236}">
-                <a16:creationId xmlns:a16="http://schemas.microsoft.com/office/drawing/2014/main" id="{B1A39DAB-2BC6-4FCF-BDD7-E7742E05DE7F}"/>
+                <a16:creationId xmlns:a16="http://schemas.microsoft.com/office/drawing/2014/main" id="{468E4A88-9B39-4887-B07D-3005DBCD6F4E}"/>
               </a:ext>
             </a:extLst>
           </p:cNvPr>
@@ -17149,7 +17149,7 @@
           <p:cNvPr id="95" name="">
             <a:extLst xmlns:a="http://schemas.openxmlformats.org/drawingml/2006/main">
               <a:ext uri="{FF2B5EF4-FFF2-40B4-BE49-F238E27FC236}">
-                <a16:creationId xmlns:a16="http://schemas.microsoft.com/office/drawing/2014/main" id="{04001F8E-E530-48B5-8730-C6D4C0186661}"/>
+                <a16:creationId xmlns:a16="http://schemas.microsoft.com/office/drawing/2014/main" id="{BE114227-83A8-4859-89B3-B4F19555B4D7}"/>
               </a:ext>
             </a:extLst>
           </p:cNvPr>
@@ -17194,7 +17194,7 @@
           <p:cNvPr id="96" name="">
             <a:extLst xmlns:a="http://schemas.openxmlformats.org/drawingml/2006/main">
               <a:ext uri="{FF2B5EF4-FFF2-40B4-BE49-F238E27FC236}">
-                <a16:creationId xmlns:a16="http://schemas.microsoft.com/office/drawing/2014/main" id="{6B557851-EF01-4447-9636-2FB7F1E2BBB5}"/>
+                <a16:creationId xmlns:a16="http://schemas.microsoft.com/office/drawing/2014/main" id="{ECE92092-F464-4414-95F9-BD0B72032F47}"/>
               </a:ext>
             </a:extLst>
           </p:cNvPr>
@@ -17225,7 +17225,7 @@
           <p:cNvPr id="97" name="">
             <a:extLst xmlns:a="http://schemas.openxmlformats.org/drawingml/2006/main">
               <a:ext uri="{FF2B5EF4-FFF2-40B4-BE49-F238E27FC236}">
-                <a16:creationId xmlns:a16="http://schemas.microsoft.com/office/drawing/2014/main" id="{271517C0-E9E7-426D-BBAB-408B28606AAA}"/>
+                <a16:creationId xmlns:a16="http://schemas.microsoft.com/office/drawing/2014/main" id="{11E17C3B-55AA-44A1-9E87-93350312BBEF}"/>
               </a:ext>
             </a:extLst>
           </p:cNvPr>
@@ -17256,7 +17256,7 @@
           <p:cNvPr id="98" name="">
             <a:extLst xmlns:a="http://schemas.openxmlformats.org/drawingml/2006/main">
               <a:ext uri="{FF2B5EF4-FFF2-40B4-BE49-F238E27FC236}">
-                <a16:creationId xmlns:a16="http://schemas.microsoft.com/office/drawing/2014/main" id="{F3CE2502-6B34-4269-AB4E-62397C4235B1}"/>
+                <a16:creationId xmlns:a16="http://schemas.microsoft.com/office/drawing/2014/main" id="{8E070B34-9DCD-4E28-89A7-EC3B7B9EA978}"/>
               </a:ext>
             </a:extLst>
           </p:cNvPr>
@@ -17301,7 +17301,7 @@
           <p:cNvPr id="99" name="">
             <a:extLst xmlns:a="http://schemas.openxmlformats.org/drawingml/2006/main">
               <a:ext uri="{FF2B5EF4-FFF2-40B4-BE49-F238E27FC236}">
-                <a16:creationId xmlns:a16="http://schemas.microsoft.com/office/drawing/2014/main" id="{2504FCD7-9259-462A-9626-2E84B86E764C}"/>
+                <a16:creationId xmlns:a16="http://schemas.microsoft.com/office/drawing/2014/main" id="{3BDD5ADA-2B3D-4748-845E-E3F566191AEB}"/>
               </a:ext>
             </a:extLst>
           </p:cNvPr>
@@ -17346,7 +17346,7 @@
           <p:cNvPr id="100" name="">
             <a:extLst xmlns:a="http://schemas.openxmlformats.org/drawingml/2006/main">
               <a:ext uri="{FF2B5EF4-FFF2-40B4-BE49-F238E27FC236}">
-                <a16:creationId xmlns:a16="http://schemas.microsoft.com/office/drawing/2014/main" id="{9552FBD8-5CDF-4C87-8083-4081AC9DF7BC}"/>
+                <a16:creationId xmlns:a16="http://schemas.microsoft.com/office/drawing/2014/main" id="{C1920DA3-9C88-4972-BBE9-5B0C52FDF779}"/>
               </a:ext>
             </a:extLst>
           </p:cNvPr>
@@ -17377,7 +17377,7 @@
           <p:cNvPr id="101" name="">
             <a:extLst xmlns:a="http://schemas.openxmlformats.org/drawingml/2006/main">
               <a:ext uri="{FF2B5EF4-FFF2-40B4-BE49-F238E27FC236}">
-                <a16:creationId xmlns:a16="http://schemas.microsoft.com/office/drawing/2014/main" id="{E554D306-32D0-4913-95C0-818CB19EE8DA}"/>
+                <a16:creationId xmlns:a16="http://schemas.microsoft.com/office/drawing/2014/main" id="{3BDEF293-E541-46EC-9D1A-8FDE4F2504BE}"/>
               </a:ext>
             </a:extLst>
           </p:cNvPr>
@@ -17408,7 +17408,7 @@
           <p:cNvPr id="102" name="">
             <a:extLst xmlns:a="http://schemas.openxmlformats.org/drawingml/2006/main">
               <a:ext uri="{FF2B5EF4-FFF2-40B4-BE49-F238E27FC236}">
-                <a16:creationId xmlns:a16="http://schemas.microsoft.com/office/drawing/2014/main" id="{624B1BAD-29B8-4EE5-AAF9-23C178A983E8}"/>
+                <a16:creationId xmlns:a16="http://schemas.microsoft.com/office/drawing/2014/main" id="{D289A8DB-5C8F-48EC-9EB8-801BD53B10E8}"/>
               </a:ext>
             </a:extLst>
           </p:cNvPr>
@@ -17453,7 +17453,7 @@
           <p:cNvPr id="103" name="">
             <a:extLst xmlns:a="http://schemas.openxmlformats.org/drawingml/2006/main">
               <a:ext uri="{FF2B5EF4-FFF2-40B4-BE49-F238E27FC236}">
-                <a16:creationId xmlns:a16="http://schemas.microsoft.com/office/drawing/2014/main" id="{5C91920C-1725-480E-BE04-2AB3C04CFCC2}"/>
+                <a16:creationId xmlns:a16="http://schemas.microsoft.com/office/drawing/2014/main" id="{CEB17D45-B81F-4154-8827-D6D2A362A487}"/>
               </a:ext>
             </a:extLst>
           </p:cNvPr>
@@ -17496,7 +17496,7 @@
     </p:spTree>
     <p:extLst>
       <p:ext uri="{BB962C8B-B14F-4D97-AF65-F5344CB8AC3E}">
-        <p14:creationId xmlns:p14="http://schemas.microsoft.com/office/powerpoint/2010/main" val="56732636"/>
+        <p14:creationId xmlns:p14="http://schemas.microsoft.com/office/powerpoint/2010/main" val="1794351980"/>
       </p:ext>
     </p:extLst>
   </p:cSld>
@@ -17520,7 +17520,7 @@
           <p:cNvPr id="94" name="">
             <a:extLst xmlns:a="http://schemas.openxmlformats.org/drawingml/2006/main">
               <a:ext uri="{FF2B5EF4-FFF2-40B4-BE49-F238E27FC236}">
-                <a16:creationId xmlns:a16="http://schemas.microsoft.com/office/drawing/2014/main" id="{9CA7FCA3-FCC9-4B09-BD14-6E93E82E2C02}"/>
+                <a16:creationId xmlns:a16="http://schemas.microsoft.com/office/drawing/2014/main" id="{DC5753AE-9145-45C6-8429-A122BC49ED98}"/>
               </a:ext>
             </a:extLst>
           </p:cNvPr>
@@ -17551,7 +17551,7 @@
           <p:cNvPr id="2" name="">
             <a:extLst xmlns:a="http://schemas.openxmlformats.org/drawingml/2006/main">
               <a:ext uri="{FF2B5EF4-FFF2-40B4-BE49-F238E27FC236}">
-                <a16:creationId xmlns:a16="http://schemas.microsoft.com/office/drawing/2014/main" id="{7F28CBB4-8088-42F1-888E-86C7207410A7}"/>
+                <a16:creationId xmlns:a16="http://schemas.microsoft.com/office/drawing/2014/main" id="{9FB73B15-F469-4ED9-9FD6-12DC9BE29855}"/>
               </a:ext>
             </a:extLst>
           </p:cNvPr>
@@ -17596,7 +17596,7 @@
           <p:cNvPr id="3" name="">
             <a:extLst xmlns:a="http://schemas.openxmlformats.org/drawingml/2006/main">
               <a:ext uri="{FF2B5EF4-FFF2-40B4-BE49-F238E27FC236}">
-                <a16:creationId xmlns:a16="http://schemas.microsoft.com/office/drawing/2014/main" id="{6D729BDB-7256-4D56-921D-6683D02C65EB}"/>
+                <a16:creationId xmlns:a16="http://schemas.microsoft.com/office/drawing/2014/main" id="{E4BD873F-A343-489D-B33C-E8ACC80795CF}"/>
               </a:ext>
             </a:extLst>
           </p:cNvPr>
@@ -17641,7 +17641,7 @@
           <p:cNvPr id="4" name="">
             <a:extLst xmlns:a="http://schemas.openxmlformats.org/drawingml/2006/main">
               <a:ext uri="{FF2B5EF4-FFF2-40B4-BE49-F238E27FC236}">
-                <a16:creationId xmlns:a16="http://schemas.microsoft.com/office/drawing/2014/main" id="{167FF356-25F9-4263-93D6-07DB1386552B}"/>
+                <a16:creationId xmlns:a16="http://schemas.microsoft.com/office/drawing/2014/main" id="{03DD7D31-847C-4020-A2DF-AEE8B41E0AF8}"/>
               </a:ext>
             </a:extLst>
           </p:cNvPr>
@@ -17686,7 +17686,7 @@
           <p:cNvPr id="5" name="">
             <a:extLst xmlns:a="http://schemas.openxmlformats.org/drawingml/2006/main">
               <a:ext uri="{FF2B5EF4-FFF2-40B4-BE49-F238E27FC236}">
-                <a16:creationId xmlns:a16="http://schemas.microsoft.com/office/drawing/2014/main" id="{032B41E4-5324-4981-A04E-68CD747786C6}"/>
+                <a16:creationId xmlns:a16="http://schemas.microsoft.com/office/drawing/2014/main" id="{4AE9F0CB-FB04-4760-825F-BF94AE278E6B}"/>
               </a:ext>
             </a:extLst>
           </p:cNvPr>
@@ -17717,7 +17717,7 @@
           <p:cNvPr id="6" name="">
             <a:extLst xmlns:a="http://schemas.openxmlformats.org/drawingml/2006/main">
               <a:ext uri="{FF2B5EF4-FFF2-40B4-BE49-F238E27FC236}">
-                <a16:creationId xmlns:a16="http://schemas.microsoft.com/office/drawing/2014/main" id="{334A41EF-ECB2-46D4-9A4F-E344D90A0261}"/>
+                <a16:creationId xmlns:a16="http://schemas.microsoft.com/office/drawing/2014/main" id="{3A2568F0-5B33-4C1E-95E7-9A47E8397C3C}"/>
               </a:ext>
             </a:extLst>
           </p:cNvPr>
@@ -17748,7 +17748,7 @@
           <p:cNvPr id="7" name="">
             <a:extLst xmlns:a="http://schemas.openxmlformats.org/drawingml/2006/main">
               <a:ext uri="{FF2B5EF4-FFF2-40B4-BE49-F238E27FC236}">
-                <a16:creationId xmlns:a16="http://schemas.microsoft.com/office/drawing/2014/main" id="{DF3770AC-39F5-41EA-9CF0-674FC4D08AC0}"/>
+                <a16:creationId xmlns:a16="http://schemas.microsoft.com/office/drawing/2014/main" id="{5E46EC9C-9AC6-4BFF-9EDB-2E6DF097B171}"/>
               </a:ext>
             </a:extLst>
           </p:cNvPr>
@@ -17793,7 +17793,7 @@
           <p:cNvPr id="8" name="">
             <a:extLst xmlns:a="http://schemas.openxmlformats.org/drawingml/2006/main">
               <a:ext uri="{FF2B5EF4-FFF2-40B4-BE49-F238E27FC236}">
-                <a16:creationId xmlns:a16="http://schemas.microsoft.com/office/drawing/2014/main" id="{BB812A16-FD71-485A-910C-5F67C6043ECC}"/>
+                <a16:creationId xmlns:a16="http://schemas.microsoft.com/office/drawing/2014/main" id="{29B78115-F20B-4B98-90B3-2FC1579C296D}"/>
               </a:ext>
             </a:extLst>
           </p:cNvPr>
@@ -17838,7 +17838,7 @@
           <p:cNvPr id="9" name="">
             <a:extLst xmlns:a="http://schemas.openxmlformats.org/drawingml/2006/main">
               <a:ext uri="{FF2B5EF4-FFF2-40B4-BE49-F238E27FC236}">
-                <a16:creationId xmlns:a16="http://schemas.microsoft.com/office/drawing/2014/main" id="{C50686ED-ACB4-4FF5-9856-360471FAE4FA}"/>
+                <a16:creationId xmlns:a16="http://schemas.microsoft.com/office/drawing/2014/main" id="{82F0A7B4-A351-4D89-A367-EC83B651F1FC}"/>
               </a:ext>
             </a:extLst>
           </p:cNvPr>
@@ -17871,7 +17871,7 @@
           <p:cNvPr id="10" name="">
             <a:extLst xmlns:a="http://schemas.openxmlformats.org/drawingml/2006/main">
               <a:ext uri="{FF2B5EF4-FFF2-40B4-BE49-F238E27FC236}">
-                <a16:creationId xmlns:a16="http://schemas.microsoft.com/office/drawing/2014/main" id="{8046FDD4-F5FB-41F5-A4C4-B607FD84DE97}"/>
+                <a16:creationId xmlns:a16="http://schemas.microsoft.com/office/drawing/2014/main" id="{B720A707-6770-43A6-AC59-94B91D19EADF}"/>
               </a:ext>
             </a:extLst>
           </p:cNvPr>
@@ -17902,7 +17902,7 @@
           <p:cNvPr id="11" name="">
             <a:extLst xmlns:a="http://schemas.openxmlformats.org/drawingml/2006/main">
               <a:ext uri="{FF2B5EF4-FFF2-40B4-BE49-F238E27FC236}">
-                <a16:creationId xmlns:a16="http://schemas.microsoft.com/office/drawing/2014/main" id="{BE3594B0-7A3F-4D4E-A95F-0B8DCB882D05}"/>
+                <a16:creationId xmlns:a16="http://schemas.microsoft.com/office/drawing/2014/main" id="{9D5AD712-790B-494A-B1B0-B375A35B0F39}"/>
               </a:ext>
             </a:extLst>
           </p:cNvPr>
@@ -17933,7 +17933,7 @@
           <p:cNvPr id="12" name="">
             <a:extLst xmlns:a="http://schemas.openxmlformats.org/drawingml/2006/main">
               <a:ext uri="{FF2B5EF4-FFF2-40B4-BE49-F238E27FC236}">
-                <a16:creationId xmlns:a16="http://schemas.microsoft.com/office/drawing/2014/main" id="{62B814CD-E559-4F7B-ABBA-552A137DB857}"/>
+                <a16:creationId xmlns:a16="http://schemas.microsoft.com/office/drawing/2014/main" id="{7B55C0CE-10E0-4372-8648-68211F62B55E}"/>
               </a:ext>
             </a:extLst>
           </p:cNvPr>
@@ -17964,7 +17964,7 @@
           <p:cNvPr id="13" name="">
             <a:extLst xmlns:a="http://schemas.openxmlformats.org/drawingml/2006/main">
               <a:ext uri="{FF2B5EF4-FFF2-40B4-BE49-F238E27FC236}">
-                <a16:creationId xmlns:a16="http://schemas.microsoft.com/office/drawing/2014/main" id="{89BB4E3A-241B-4104-AF05-65C259047456}"/>
+                <a16:creationId xmlns:a16="http://schemas.microsoft.com/office/drawing/2014/main" id="{972A33BA-75C7-4C18-9D45-97E7FCF7B0B5}"/>
               </a:ext>
             </a:extLst>
           </p:cNvPr>
@@ -17995,7 +17995,7 @@
           <p:cNvPr id="14" name="">
             <a:extLst xmlns:a="http://schemas.openxmlformats.org/drawingml/2006/main">
               <a:ext uri="{FF2B5EF4-FFF2-40B4-BE49-F238E27FC236}">
-                <a16:creationId xmlns:a16="http://schemas.microsoft.com/office/drawing/2014/main" id="{5F5FD759-D95E-4AEB-AFE2-90080223727D}"/>
+                <a16:creationId xmlns:a16="http://schemas.microsoft.com/office/drawing/2014/main" id="{373A1374-5F17-4DED-B906-C6406AE825D4}"/>
               </a:ext>
             </a:extLst>
           </p:cNvPr>
@@ -18026,7 +18026,7 @@
           <p:cNvPr id="15" name="">
             <a:extLst xmlns:a="http://schemas.openxmlformats.org/drawingml/2006/main">
               <a:ext uri="{FF2B5EF4-FFF2-40B4-BE49-F238E27FC236}">
-                <a16:creationId xmlns:a16="http://schemas.microsoft.com/office/drawing/2014/main" id="{CBDA33BD-EE60-4B43-BB70-677558E27287}"/>
+                <a16:creationId xmlns:a16="http://schemas.microsoft.com/office/drawing/2014/main" id="{536EF162-BDB9-45BE-BBF9-CC7B135C04BB}"/>
               </a:ext>
             </a:extLst>
           </p:cNvPr>
@@ -18057,7 +18057,7 @@
           <p:cNvPr id="16" name="">
             <a:extLst xmlns:a="http://schemas.openxmlformats.org/drawingml/2006/main">
               <a:ext uri="{FF2B5EF4-FFF2-40B4-BE49-F238E27FC236}">
-                <a16:creationId xmlns:a16="http://schemas.microsoft.com/office/drawing/2014/main" id="{39C054E2-8BE2-4A47-9624-5908FAE91CB3}"/>
+                <a16:creationId xmlns:a16="http://schemas.microsoft.com/office/drawing/2014/main" id="{815DAD70-829D-42C5-BE1B-D4B6EA31480F}"/>
               </a:ext>
             </a:extLst>
           </p:cNvPr>
@@ -18088,7 +18088,7 @@
           <p:cNvPr id="17" name="">
             <a:extLst xmlns:a="http://schemas.openxmlformats.org/drawingml/2006/main">
               <a:ext uri="{FF2B5EF4-FFF2-40B4-BE49-F238E27FC236}">
-                <a16:creationId xmlns:a16="http://schemas.microsoft.com/office/drawing/2014/main" id="{B0EA7856-6668-40E9-BB5B-B7FE5984F756}"/>
+                <a16:creationId xmlns:a16="http://schemas.microsoft.com/office/drawing/2014/main" id="{69D8B79E-4033-4C2A-B3C4-93D5764C1935}"/>
               </a:ext>
             </a:extLst>
           </p:cNvPr>
@@ -18119,7 +18119,7 @@
           <p:cNvPr id="18" name="">
             <a:extLst xmlns:a="http://schemas.openxmlformats.org/drawingml/2006/main">
               <a:ext uri="{FF2B5EF4-FFF2-40B4-BE49-F238E27FC236}">
-                <a16:creationId xmlns:a16="http://schemas.microsoft.com/office/drawing/2014/main" id="{33EB317E-6A42-4D26-BE5F-490B08A9A02B}"/>
+                <a16:creationId xmlns:a16="http://schemas.microsoft.com/office/drawing/2014/main" id="{D6F82EE3-37FA-42F4-9249-7041AE4C2239}"/>
               </a:ext>
             </a:extLst>
           </p:cNvPr>
@@ -18150,7 +18150,7 @@
           <p:cNvPr id="19" name="">
             <a:extLst xmlns:a="http://schemas.openxmlformats.org/drawingml/2006/main">
               <a:ext uri="{FF2B5EF4-FFF2-40B4-BE49-F238E27FC236}">
-                <a16:creationId xmlns:a16="http://schemas.microsoft.com/office/drawing/2014/main" id="{5A0C7B46-B6B6-4276-A25F-2468417E5692}"/>
+                <a16:creationId xmlns:a16="http://schemas.microsoft.com/office/drawing/2014/main" id="{A99E05AC-D063-4450-BE48-FF8BDAFFABC8}"/>
               </a:ext>
             </a:extLst>
           </p:cNvPr>
@@ -18181,7 +18181,7 @@
           <p:cNvPr id="20" name="">
             <a:extLst xmlns:a="http://schemas.openxmlformats.org/drawingml/2006/main">
               <a:ext uri="{FF2B5EF4-FFF2-40B4-BE49-F238E27FC236}">
-                <a16:creationId xmlns:a16="http://schemas.microsoft.com/office/drawing/2014/main" id="{D3262D55-F146-4452-B11D-26F1851FAA38}"/>
+                <a16:creationId xmlns:a16="http://schemas.microsoft.com/office/drawing/2014/main" id="{A505FFB1-9E71-4771-9276-BAD2FC3AAEA6}"/>
               </a:ext>
             </a:extLst>
           </p:cNvPr>
@@ -18212,7 +18212,7 @@
           <p:cNvPr id="21" name="">
             <a:extLst xmlns:a="http://schemas.openxmlformats.org/drawingml/2006/main">
               <a:ext uri="{FF2B5EF4-FFF2-40B4-BE49-F238E27FC236}">
-                <a16:creationId xmlns:a16="http://schemas.microsoft.com/office/drawing/2014/main" id="{64C937E6-67F8-4498-A4A0-916DB687A5E1}"/>
+                <a16:creationId xmlns:a16="http://schemas.microsoft.com/office/drawing/2014/main" id="{11AAB04E-E45E-44F0-ABDF-CECDCE0192E6}"/>
               </a:ext>
             </a:extLst>
           </p:cNvPr>
@@ -18243,7 +18243,7 @@
           <p:cNvPr id="22" name="">
             <a:extLst xmlns:a="http://schemas.openxmlformats.org/drawingml/2006/main">
               <a:ext uri="{FF2B5EF4-FFF2-40B4-BE49-F238E27FC236}">
-                <a16:creationId xmlns:a16="http://schemas.microsoft.com/office/drawing/2014/main" id="{04AC72B6-F77A-4A0D-B6BA-33F0939843F1}"/>
+                <a16:creationId xmlns:a16="http://schemas.microsoft.com/office/drawing/2014/main" id="{6EF2CD29-5699-4B12-8829-70FE07B66F68}"/>
               </a:ext>
             </a:extLst>
           </p:cNvPr>
@@ -18274,7 +18274,7 @@
           <p:cNvPr id="23" name="">
             <a:extLst xmlns:a="http://schemas.openxmlformats.org/drawingml/2006/main">
               <a:ext uri="{FF2B5EF4-FFF2-40B4-BE49-F238E27FC236}">
-                <a16:creationId xmlns:a16="http://schemas.microsoft.com/office/drawing/2014/main" id="{0A687933-71F6-4DC8-AA5D-1814C4D2BF6D}"/>
+                <a16:creationId xmlns:a16="http://schemas.microsoft.com/office/drawing/2014/main" id="{1AFF7497-CDB0-4095-86DB-75CC06EBAAC3}"/>
               </a:ext>
             </a:extLst>
           </p:cNvPr>
@@ -18305,7 +18305,7 @@
           <p:cNvPr id="24" name="">
             <a:extLst xmlns:a="http://schemas.openxmlformats.org/drawingml/2006/main">
               <a:ext uri="{FF2B5EF4-FFF2-40B4-BE49-F238E27FC236}">
-                <a16:creationId xmlns:a16="http://schemas.microsoft.com/office/drawing/2014/main" id="{3122393C-9CAF-42C8-83AD-1BBCFDFCB00B}"/>
+                <a16:creationId xmlns:a16="http://schemas.microsoft.com/office/drawing/2014/main" id="{6E42AECF-2E4E-4D2A-9BB3-99AE9D9E1B28}"/>
               </a:ext>
             </a:extLst>
           </p:cNvPr>
@@ -18336,7 +18336,7 @@
           <p:cNvPr id="25" name="">
             <a:extLst xmlns:a="http://schemas.openxmlformats.org/drawingml/2006/main">
               <a:ext uri="{FF2B5EF4-FFF2-40B4-BE49-F238E27FC236}">
-                <a16:creationId xmlns:a16="http://schemas.microsoft.com/office/drawing/2014/main" id="{627CDB10-DAB4-4740-98ED-2A16F096A78E}"/>
+                <a16:creationId xmlns:a16="http://schemas.microsoft.com/office/drawing/2014/main" id="{B9713ECE-FA6A-4571-AFD5-3002F4E52038}"/>
               </a:ext>
             </a:extLst>
           </p:cNvPr>
@@ -18367,7 +18367,7 @@
           <p:cNvPr id="26" name="">
             <a:extLst xmlns:a="http://schemas.openxmlformats.org/drawingml/2006/main">
               <a:ext uri="{FF2B5EF4-FFF2-40B4-BE49-F238E27FC236}">
-                <a16:creationId xmlns:a16="http://schemas.microsoft.com/office/drawing/2014/main" id="{079A75BE-B4F5-4EBD-B08A-14D0F444202A}"/>
+                <a16:creationId xmlns:a16="http://schemas.microsoft.com/office/drawing/2014/main" id="{5A616139-3D32-44BA-88C1-83E9AA297701}"/>
               </a:ext>
             </a:extLst>
           </p:cNvPr>
@@ -18398,7 +18398,7 @@
           <p:cNvPr id="27" name="">
             <a:extLst xmlns:a="http://schemas.openxmlformats.org/drawingml/2006/main">
               <a:ext uri="{FF2B5EF4-FFF2-40B4-BE49-F238E27FC236}">
-                <a16:creationId xmlns:a16="http://schemas.microsoft.com/office/drawing/2014/main" id="{343F23BF-8B29-4E5A-A7AC-7EC3AE28129A}"/>
+                <a16:creationId xmlns:a16="http://schemas.microsoft.com/office/drawing/2014/main" id="{18B18347-B067-40BA-A00F-25D6F6F696F0}"/>
               </a:ext>
             </a:extLst>
           </p:cNvPr>
@@ -18429,7 +18429,7 @@
           <p:cNvPr id="28" name="">
             <a:extLst xmlns:a="http://schemas.openxmlformats.org/drawingml/2006/main">
               <a:ext uri="{FF2B5EF4-FFF2-40B4-BE49-F238E27FC236}">
-                <a16:creationId xmlns:a16="http://schemas.microsoft.com/office/drawing/2014/main" id="{789086B9-8FE5-4FB8-BA22-0FA23A3ED120}"/>
+                <a16:creationId xmlns:a16="http://schemas.microsoft.com/office/drawing/2014/main" id="{DBD777DF-23F6-4B34-A2D0-C7AB1A83EDA9}"/>
               </a:ext>
             </a:extLst>
           </p:cNvPr>
@@ -18460,7 +18460,7 @@
           <p:cNvPr id="29" name="">
             <a:extLst xmlns:a="http://schemas.openxmlformats.org/drawingml/2006/main">
               <a:ext uri="{FF2B5EF4-FFF2-40B4-BE49-F238E27FC236}">
-                <a16:creationId xmlns:a16="http://schemas.microsoft.com/office/drawing/2014/main" id="{54DD33CB-AC61-45F8-833E-63EA6DBDD882}"/>
+                <a16:creationId xmlns:a16="http://schemas.microsoft.com/office/drawing/2014/main" id="{BE531D25-4FFA-46C7-8DC6-F4ED786AD50F}"/>
               </a:ext>
             </a:extLst>
           </p:cNvPr>
@@ -18491,7 +18491,7 @@
           <p:cNvPr id="30" name="">
             <a:extLst xmlns:a="http://schemas.openxmlformats.org/drawingml/2006/main">
               <a:ext uri="{FF2B5EF4-FFF2-40B4-BE49-F238E27FC236}">
-                <a16:creationId xmlns:a16="http://schemas.microsoft.com/office/drawing/2014/main" id="{95C0FC32-5CC5-4B95-ADA7-5A24F73DA041}"/>
+                <a16:creationId xmlns:a16="http://schemas.microsoft.com/office/drawing/2014/main" id="{AD3FD839-EF18-47F5-BB2A-C73BAD0F9C6E}"/>
               </a:ext>
             </a:extLst>
           </p:cNvPr>
@@ -18522,7 +18522,7 @@
           <p:cNvPr id="31" name="">
             <a:extLst xmlns:a="http://schemas.openxmlformats.org/drawingml/2006/main">
               <a:ext uri="{FF2B5EF4-FFF2-40B4-BE49-F238E27FC236}">
-                <a16:creationId xmlns:a16="http://schemas.microsoft.com/office/drawing/2014/main" id="{9648BF2B-5D11-4FE6-A370-48D2941242C9}"/>
+                <a16:creationId xmlns:a16="http://schemas.microsoft.com/office/drawing/2014/main" id="{F671D344-5856-4CBD-94D2-5158A154059E}"/>
               </a:ext>
             </a:extLst>
           </p:cNvPr>
@@ -18553,7 +18553,7 @@
           <p:cNvPr id="32" name="">
             <a:extLst xmlns:a="http://schemas.openxmlformats.org/drawingml/2006/main">
               <a:ext uri="{FF2B5EF4-FFF2-40B4-BE49-F238E27FC236}">
-                <a16:creationId xmlns:a16="http://schemas.microsoft.com/office/drawing/2014/main" id="{04AB1B72-8F7F-4A3F-BE3E-BF63ABAD94F7}"/>
+                <a16:creationId xmlns:a16="http://schemas.microsoft.com/office/drawing/2014/main" id="{BF4AB8B1-69F1-43C6-9370-F07B172481EE}"/>
               </a:ext>
             </a:extLst>
           </p:cNvPr>
@@ -18584,7 +18584,7 @@
           <p:cNvPr id="33" name="">
             <a:extLst xmlns:a="http://schemas.openxmlformats.org/drawingml/2006/main">
               <a:ext uri="{FF2B5EF4-FFF2-40B4-BE49-F238E27FC236}">
-                <a16:creationId xmlns:a16="http://schemas.microsoft.com/office/drawing/2014/main" id="{2D3ACE6B-4F51-48A9-B718-C721A3A2E11D}"/>
+                <a16:creationId xmlns:a16="http://schemas.microsoft.com/office/drawing/2014/main" id="{1810FE6B-2613-4DA2-B4C4-2A6C065B13DD}"/>
               </a:ext>
             </a:extLst>
           </p:cNvPr>
@@ -18615,7 +18615,7 @@
           <p:cNvPr id="34" name="">
             <a:extLst xmlns:a="http://schemas.openxmlformats.org/drawingml/2006/main">
               <a:ext uri="{FF2B5EF4-FFF2-40B4-BE49-F238E27FC236}">
-                <a16:creationId xmlns:a16="http://schemas.microsoft.com/office/drawing/2014/main" id="{7ABC5E64-0A01-4986-A63C-C6AD7AA60BB3}"/>
+                <a16:creationId xmlns:a16="http://schemas.microsoft.com/office/drawing/2014/main" id="{42E03BE3-8414-429B-9927-F4584E40644D}"/>
               </a:ext>
             </a:extLst>
           </p:cNvPr>
@@ -18646,7 +18646,7 @@
           <p:cNvPr id="35" name="">
             <a:extLst xmlns:a="http://schemas.openxmlformats.org/drawingml/2006/main">
               <a:ext uri="{FF2B5EF4-FFF2-40B4-BE49-F238E27FC236}">
-                <a16:creationId xmlns:a16="http://schemas.microsoft.com/office/drawing/2014/main" id="{33B62EFA-585F-4B24-A4B1-0BF5308E3A9E}"/>
+                <a16:creationId xmlns:a16="http://schemas.microsoft.com/office/drawing/2014/main" id="{78907941-7F2B-4C3D-82F3-D2390DFA689A}"/>
               </a:ext>
             </a:extLst>
           </p:cNvPr>
@@ -18677,7 +18677,7 @@
           <p:cNvPr id="36" name="">
             <a:extLst xmlns:a="http://schemas.openxmlformats.org/drawingml/2006/main">
               <a:ext uri="{FF2B5EF4-FFF2-40B4-BE49-F238E27FC236}">
-                <a16:creationId xmlns:a16="http://schemas.microsoft.com/office/drawing/2014/main" id="{67CD0F4B-8D4D-40EC-8A67-6CBC13EAECD5}"/>
+                <a16:creationId xmlns:a16="http://schemas.microsoft.com/office/drawing/2014/main" id="{CC26CDFC-8A20-4D76-B415-268942EE52FF}"/>
               </a:ext>
             </a:extLst>
           </p:cNvPr>
@@ -18708,7 +18708,7 @@
           <p:cNvPr id="37" name="">
             <a:extLst xmlns:a="http://schemas.openxmlformats.org/drawingml/2006/main">
               <a:ext uri="{FF2B5EF4-FFF2-40B4-BE49-F238E27FC236}">
-                <a16:creationId xmlns:a16="http://schemas.microsoft.com/office/drawing/2014/main" id="{8D85A2A4-F98D-4AB0-91A8-C16BE1976875}"/>
+                <a16:creationId xmlns:a16="http://schemas.microsoft.com/office/drawing/2014/main" id="{AC0FA203-FC95-41B2-99F6-702966AC0A6E}"/>
               </a:ext>
             </a:extLst>
           </p:cNvPr>
@@ -18739,7 +18739,7 @@
           <p:cNvPr id="38" name="">
             <a:extLst xmlns:a="http://schemas.openxmlformats.org/drawingml/2006/main">
               <a:ext uri="{FF2B5EF4-FFF2-40B4-BE49-F238E27FC236}">
-                <a16:creationId xmlns:a16="http://schemas.microsoft.com/office/drawing/2014/main" id="{4A609787-6324-4D83-8EF4-6C1298E40EB9}"/>
+                <a16:creationId xmlns:a16="http://schemas.microsoft.com/office/drawing/2014/main" id="{7ABFD889-94CC-4C74-BDA2-1F918D5913E0}"/>
               </a:ext>
             </a:extLst>
           </p:cNvPr>
@@ -18770,7 +18770,7 @@
           <p:cNvPr id="39" name="">
             <a:extLst xmlns:a="http://schemas.openxmlformats.org/drawingml/2006/main">
               <a:ext uri="{FF2B5EF4-FFF2-40B4-BE49-F238E27FC236}">
-                <a16:creationId xmlns:a16="http://schemas.microsoft.com/office/drawing/2014/main" id="{7E912789-E600-443A-9A2E-788E042A4C00}"/>
+                <a16:creationId xmlns:a16="http://schemas.microsoft.com/office/drawing/2014/main" id="{D5678CFF-5D50-4CE2-B039-C30720356FE8}"/>
               </a:ext>
             </a:extLst>
           </p:cNvPr>
@@ -18801,7 +18801,7 @@
           <p:cNvPr id="40" name="">
             <a:extLst xmlns:a="http://schemas.openxmlformats.org/drawingml/2006/main">
               <a:ext uri="{FF2B5EF4-FFF2-40B4-BE49-F238E27FC236}">
-                <a16:creationId xmlns:a16="http://schemas.microsoft.com/office/drawing/2014/main" id="{6ED3B78F-4213-4FB3-8C43-3BBC8CB0306E}"/>
+                <a16:creationId xmlns:a16="http://schemas.microsoft.com/office/drawing/2014/main" id="{C0E127BC-A12B-4BC2-98C0-E9C9202DCA65}"/>
               </a:ext>
             </a:extLst>
           </p:cNvPr>
@@ -18832,7 +18832,7 @@
           <p:cNvPr id="41" name="">
             <a:extLst xmlns:a="http://schemas.openxmlformats.org/drawingml/2006/main">
               <a:ext uri="{FF2B5EF4-FFF2-40B4-BE49-F238E27FC236}">
-                <a16:creationId xmlns:a16="http://schemas.microsoft.com/office/drawing/2014/main" id="{3062FCDE-5306-479C-952C-36F0D097E728}"/>
+                <a16:creationId xmlns:a16="http://schemas.microsoft.com/office/drawing/2014/main" id="{F711C95C-86F3-4420-B5D1-57D1400C42A2}"/>
               </a:ext>
             </a:extLst>
           </p:cNvPr>
@@ -18863,7 +18863,7 @@
           <p:cNvPr id="42" name="">
             <a:extLst xmlns:a="http://schemas.openxmlformats.org/drawingml/2006/main">
               <a:ext uri="{FF2B5EF4-FFF2-40B4-BE49-F238E27FC236}">
-                <a16:creationId xmlns:a16="http://schemas.microsoft.com/office/drawing/2014/main" id="{4BE5FC6C-47B6-46C9-BCFE-4B1414C45C5C}"/>
+                <a16:creationId xmlns:a16="http://schemas.microsoft.com/office/drawing/2014/main" id="{CBABE4A9-AE69-43D8-A190-BDE46780DBF9}"/>
               </a:ext>
             </a:extLst>
           </p:cNvPr>
@@ -18894,7 +18894,7 @@
           <p:cNvPr id="43" name="">
             <a:extLst xmlns:a="http://schemas.openxmlformats.org/drawingml/2006/main">
               <a:ext uri="{FF2B5EF4-FFF2-40B4-BE49-F238E27FC236}">
-                <a16:creationId xmlns:a16="http://schemas.microsoft.com/office/drawing/2014/main" id="{85E01E99-A5D0-4D57-B621-4DA7F88DA1BC}"/>
+                <a16:creationId xmlns:a16="http://schemas.microsoft.com/office/drawing/2014/main" id="{60EB2A2C-FEAB-4E64-AB0C-B948DA6A189D}"/>
               </a:ext>
             </a:extLst>
           </p:cNvPr>
@@ -18925,7 +18925,7 @@
           <p:cNvPr id="44" name="">
             <a:extLst xmlns:a="http://schemas.openxmlformats.org/drawingml/2006/main">
               <a:ext uri="{FF2B5EF4-FFF2-40B4-BE49-F238E27FC236}">
-                <a16:creationId xmlns:a16="http://schemas.microsoft.com/office/drawing/2014/main" id="{78072318-0DFB-4F54-9986-BEA874603B99}"/>
+                <a16:creationId xmlns:a16="http://schemas.microsoft.com/office/drawing/2014/main" id="{204D1B04-D7F8-4279-90F1-55F6022EF482}"/>
               </a:ext>
             </a:extLst>
           </p:cNvPr>
@@ -18956,7 +18956,7 @@
           <p:cNvPr id="45" name="">
             <a:extLst xmlns:a="http://schemas.openxmlformats.org/drawingml/2006/main">
               <a:ext uri="{FF2B5EF4-FFF2-40B4-BE49-F238E27FC236}">
-                <a16:creationId xmlns:a16="http://schemas.microsoft.com/office/drawing/2014/main" id="{136C9F33-9777-4A50-BB6E-23FEB2679289}"/>
+                <a16:creationId xmlns:a16="http://schemas.microsoft.com/office/drawing/2014/main" id="{EE8C4324-BB6B-43FD-8FE9-EAAB11CF9010}"/>
               </a:ext>
             </a:extLst>
           </p:cNvPr>
@@ -18987,7 +18987,7 @@
           <p:cNvPr id="46" name="">
             <a:extLst xmlns:a="http://schemas.openxmlformats.org/drawingml/2006/main">
               <a:ext uri="{FF2B5EF4-FFF2-40B4-BE49-F238E27FC236}">
-                <a16:creationId xmlns:a16="http://schemas.microsoft.com/office/drawing/2014/main" id="{FCD299A5-950A-46CC-9DE6-BBF7FEE42E64}"/>
+                <a16:creationId xmlns:a16="http://schemas.microsoft.com/office/drawing/2014/main" id="{108DECC0-AB22-4AD1-83CB-6EA53D1F5EAF}"/>
               </a:ext>
             </a:extLst>
           </p:cNvPr>
@@ -19018,7 +19018,7 @@
           <p:cNvPr id="47" name="">
             <a:extLst xmlns:a="http://schemas.openxmlformats.org/drawingml/2006/main">
               <a:ext uri="{FF2B5EF4-FFF2-40B4-BE49-F238E27FC236}">
-                <a16:creationId xmlns:a16="http://schemas.microsoft.com/office/drawing/2014/main" id="{4D0816E6-CF18-43ED-9DF6-F40937A9F96F}"/>
+                <a16:creationId xmlns:a16="http://schemas.microsoft.com/office/drawing/2014/main" id="{DEE0202D-B01D-4AA9-AB1B-E46C07DD557D}"/>
               </a:ext>
             </a:extLst>
           </p:cNvPr>
@@ -19049,7 +19049,7 @@
           <p:cNvPr id="48" name="">
             <a:extLst xmlns:a="http://schemas.openxmlformats.org/drawingml/2006/main">
               <a:ext uri="{FF2B5EF4-FFF2-40B4-BE49-F238E27FC236}">
-                <a16:creationId xmlns:a16="http://schemas.microsoft.com/office/drawing/2014/main" id="{EF35C9F3-EDB0-4D4D-B0E5-149FFFC58029}"/>
+                <a16:creationId xmlns:a16="http://schemas.microsoft.com/office/drawing/2014/main" id="{D5635DC9-7920-4EF9-8519-9E112AE8AEDB}"/>
               </a:ext>
             </a:extLst>
           </p:cNvPr>
@@ -19080,7 +19080,7 @@
           <p:cNvPr id="49" name="">
             <a:extLst xmlns:a="http://schemas.openxmlformats.org/drawingml/2006/main">
               <a:ext uri="{FF2B5EF4-FFF2-40B4-BE49-F238E27FC236}">
-                <a16:creationId xmlns:a16="http://schemas.microsoft.com/office/drawing/2014/main" id="{9E9D8CA2-C4AB-4E45-97A5-83D3D6110E9E}"/>
+                <a16:creationId xmlns:a16="http://schemas.microsoft.com/office/drawing/2014/main" id="{A2223F86-81EF-4B2E-AF39-C00D80AC5AF1}"/>
               </a:ext>
             </a:extLst>
           </p:cNvPr>
@@ -19111,7 +19111,7 @@
           <p:cNvPr id="50" name="">
             <a:extLst xmlns:a="http://schemas.openxmlformats.org/drawingml/2006/main">
               <a:ext uri="{FF2B5EF4-FFF2-40B4-BE49-F238E27FC236}">
-                <a16:creationId xmlns:a16="http://schemas.microsoft.com/office/drawing/2014/main" id="{861FC003-1DAA-48E7-BF9E-C8768677BCC4}"/>
+                <a16:creationId xmlns:a16="http://schemas.microsoft.com/office/drawing/2014/main" id="{4F6133ED-0E5E-4B78-8456-AB8F2C90A843}"/>
               </a:ext>
             </a:extLst>
           </p:cNvPr>
@@ -19142,7 +19142,7 @@
           <p:cNvPr id="51" name="">
             <a:extLst xmlns:a="http://schemas.openxmlformats.org/drawingml/2006/main">
               <a:ext uri="{FF2B5EF4-FFF2-40B4-BE49-F238E27FC236}">
-                <a16:creationId xmlns:a16="http://schemas.microsoft.com/office/drawing/2014/main" id="{25E87EE7-0DA7-4194-912F-164A429E2B8E}"/>
+                <a16:creationId xmlns:a16="http://schemas.microsoft.com/office/drawing/2014/main" id="{010B70D2-C5E2-4F4E-8D14-5424C5718800}"/>
               </a:ext>
             </a:extLst>
           </p:cNvPr>
@@ -19173,7 +19173,7 @@
           <p:cNvPr id="52" name="">
             <a:extLst xmlns:a="http://schemas.openxmlformats.org/drawingml/2006/main">
               <a:ext uri="{FF2B5EF4-FFF2-40B4-BE49-F238E27FC236}">
-                <a16:creationId xmlns:a16="http://schemas.microsoft.com/office/drawing/2014/main" id="{7350CADE-8E9F-4E3B-9274-0C8C048FC56D}"/>
+                <a16:creationId xmlns:a16="http://schemas.microsoft.com/office/drawing/2014/main" id="{73B2E7E0-85FF-473E-9EA1-872FF265A20A}"/>
               </a:ext>
             </a:extLst>
           </p:cNvPr>
@@ -19204,7 +19204,7 @@
           <p:cNvPr id="53" name="">
             <a:extLst xmlns:a="http://schemas.openxmlformats.org/drawingml/2006/main">
               <a:ext uri="{FF2B5EF4-FFF2-40B4-BE49-F238E27FC236}">
-                <a16:creationId xmlns:a16="http://schemas.microsoft.com/office/drawing/2014/main" id="{EE7FD415-83FB-40ED-8CF5-F9C6EDAA0976}"/>
+                <a16:creationId xmlns:a16="http://schemas.microsoft.com/office/drawing/2014/main" id="{CB5763A5-81BE-458F-8E05-00ED5AAE8DD9}"/>
               </a:ext>
             </a:extLst>
           </p:cNvPr>
@@ -19235,7 +19235,7 @@
           <p:cNvPr id="54" name="">
             <a:extLst xmlns:a="http://schemas.openxmlformats.org/drawingml/2006/main">
               <a:ext uri="{FF2B5EF4-FFF2-40B4-BE49-F238E27FC236}">
-                <a16:creationId xmlns:a16="http://schemas.microsoft.com/office/drawing/2014/main" id="{755E3442-91DE-4A13-8577-912F5A191C9D}"/>
+                <a16:creationId xmlns:a16="http://schemas.microsoft.com/office/drawing/2014/main" id="{BDFF07EF-878E-4A3A-8423-4BBE6AD10869}"/>
               </a:ext>
             </a:extLst>
           </p:cNvPr>
@@ -19266,7 +19266,7 @@
           <p:cNvPr id="55" name="">
             <a:extLst xmlns:a="http://schemas.openxmlformats.org/drawingml/2006/main">
               <a:ext uri="{FF2B5EF4-FFF2-40B4-BE49-F238E27FC236}">
-                <a16:creationId xmlns:a16="http://schemas.microsoft.com/office/drawing/2014/main" id="{8DF25E93-72B2-4C04-961E-6015B4A55D69}"/>
+                <a16:creationId xmlns:a16="http://schemas.microsoft.com/office/drawing/2014/main" id="{1E22DF6C-1795-4984-8325-8EB8D5E75CE2}"/>
               </a:ext>
             </a:extLst>
           </p:cNvPr>
@@ -19297,7 +19297,7 @@
           <p:cNvPr id="56" name="">
             <a:extLst xmlns:a="http://schemas.openxmlformats.org/drawingml/2006/main">
               <a:ext uri="{FF2B5EF4-FFF2-40B4-BE49-F238E27FC236}">
-                <a16:creationId xmlns:a16="http://schemas.microsoft.com/office/drawing/2014/main" id="{BAEB67DB-FD1C-4AEB-BD89-A404841AE306}"/>
+                <a16:creationId xmlns:a16="http://schemas.microsoft.com/office/drawing/2014/main" id="{3E5BC582-8DA1-4A26-AEBE-74E4F5CEB2FB}"/>
               </a:ext>
             </a:extLst>
           </p:cNvPr>
@@ -19328,7 +19328,7 @@
           <p:cNvPr id="57" name="">
             <a:extLst xmlns:a="http://schemas.openxmlformats.org/drawingml/2006/main">
               <a:ext uri="{FF2B5EF4-FFF2-40B4-BE49-F238E27FC236}">
-                <a16:creationId xmlns:a16="http://schemas.microsoft.com/office/drawing/2014/main" id="{74536DD9-7701-41C1-B7DF-6075EE4646EA}"/>
+                <a16:creationId xmlns:a16="http://schemas.microsoft.com/office/drawing/2014/main" id="{409B06F1-7BE9-49D7-A8CB-762A92756D8D}"/>
               </a:ext>
             </a:extLst>
           </p:cNvPr>
@@ -19359,7 +19359,7 @@
           <p:cNvPr id="58" name="">
             <a:extLst xmlns:a="http://schemas.openxmlformats.org/drawingml/2006/main">
               <a:ext uri="{FF2B5EF4-FFF2-40B4-BE49-F238E27FC236}">
-                <a16:creationId xmlns:a16="http://schemas.microsoft.com/office/drawing/2014/main" id="{4F686A91-B26B-4C00-B9A4-C0906AAC0F2C}"/>
+                <a16:creationId xmlns:a16="http://schemas.microsoft.com/office/drawing/2014/main" id="{0B74609E-27E4-4C55-8562-8C6EED73B4DC}"/>
               </a:ext>
             </a:extLst>
           </p:cNvPr>
@@ -19390,7 +19390,7 @@
           <p:cNvPr id="59" name="">
             <a:extLst xmlns:a="http://schemas.openxmlformats.org/drawingml/2006/main">
               <a:ext uri="{FF2B5EF4-FFF2-40B4-BE49-F238E27FC236}">
-                <a16:creationId xmlns:a16="http://schemas.microsoft.com/office/drawing/2014/main" id="{4AC70781-11BC-406F-90F7-9E512611EE69}"/>
+                <a16:creationId xmlns:a16="http://schemas.microsoft.com/office/drawing/2014/main" id="{E7EE4F68-6791-4437-A8C9-4AC5B22CB7CF}"/>
               </a:ext>
             </a:extLst>
           </p:cNvPr>
@@ -19421,7 +19421,7 @@
           <p:cNvPr id="60" name="">
             <a:extLst xmlns:a="http://schemas.openxmlformats.org/drawingml/2006/main">
               <a:ext uri="{FF2B5EF4-FFF2-40B4-BE49-F238E27FC236}">
-                <a16:creationId xmlns:a16="http://schemas.microsoft.com/office/drawing/2014/main" id="{6D12F3A2-0C06-4F28-981F-22283E2D9670}"/>
+                <a16:creationId xmlns:a16="http://schemas.microsoft.com/office/drawing/2014/main" id="{0D32B360-9609-4F2C-8FC8-6288625E45DD}"/>
               </a:ext>
             </a:extLst>
           </p:cNvPr>
@@ -19452,7 +19452,7 @@
           <p:cNvPr id="61" name="">
             <a:extLst xmlns:a="http://schemas.openxmlformats.org/drawingml/2006/main">
               <a:ext uri="{FF2B5EF4-FFF2-40B4-BE49-F238E27FC236}">
-                <a16:creationId xmlns:a16="http://schemas.microsoft.com/office/drawing/2014/main" id="{1F02F7BA-032B-49AF-98CA-4892BAA29B7A}"/>
+                <a16:creationId xmlns:a16="http://schemas.microsoft.com/office/drawing/2014/main" id="{245031C5-F4E1-4595-BB19-9927E1E27F11}"/>
               </a:ext>
             </a:extLst>
           </p:cNvPr>
@@ -19483,7 +19483,7 @@
           <p:cNvPr id="62" name="">
             <a:extLst xmlns:a="http://schemas.openxmlformats.org/drawingml/2006/main">
               <a:ext uri="{FF2B5EF4-FFF2-40B4-BE49-F238E27FC236}">
-                <a16:creationId xmlns:a16="http://schemas.microsoft.com/office/drawing/2014/main" id="{9A43B911-8115-4F88-9B0E-2D74E93E4291}"/>
+                <a16:creationId xmlns:a16="http://schemas.microsoft.com/office/drawing/2014/main" id="{4A65CF45-CED8-4345-AF65-125304AE83DB}"/>
               </a:ext>
             </a:extLst>
           </p:cNvPr>
@@ -19514,7 +19514,7 @@
           <p:cNvPr id="63" name="">
             <a:extLst xmlns:a="http://schemas.openxmlformats.org/drawingml/2006/main">
               <a:ext uri="{FF2B5EF4-FFF2-40B4-BE49-F238E27FC236}">
-                <a16:creationId xmlns:a16="http://schemas.microsoft.com/office/drawing/2014/main" id="{3E2871DA-3764-4553-B66A-DA10352D7967}"/>
+                <a16:creationId xmlns:a16="http://schemas.microsoft.com/office/drawing/2014/main" id="{257FAC01-10E0-4783-AE0E-28E54A2F6867}"/>
               </a:ext>
             </a:extLst>
           </p:cNvPr>
@@ -19545,7 +19545,7 @@
           <p:cNvPr id="64" name="">
             <a:extLst xmlns:a="http://schemas.openxmlformats.org/drawingml/2006/main">
               <a:ext uri="{FF2B5EF4-FFF2-40B4-BE49-F238E27FC236}">
-                <a16:creationId xmlns:a16="http://schemas.microsoft.com/office/drawing/2014/main" id="{33C0C042-9488-49CD-8853-1D68E9A7FA32}"/>
+                <a16:creationId xmlns:a16="http://schemas.microsoft.com/office/drawing/2014/main" id="{9C9F7C66-644F-4D51-BE7A-B35122875592}"/>
               </a:ext>
             </a:extLst>
           </p:cNvPr>
@@ -19576,7 +19576,7 @@
           <p:cNvPr id="65" name="">
             <a:extLst xmlns:a="http://schemas.openxmlformats.org/drawingml/2006/main">
               <a:ext uri="{FF2B5EF4-FFF2-40B4-BE49-F238E27FC236}">
-                <a16:creationId xmlns:a16="http://schemas.microsoft.com/office/drawing/2014/main" id="{DB74BD12-A1DC-4848-8A84-3CC849D5714C}"/>
+                <a16:creationId xmlns:a16="http://schemas.microsoft.com/office/drawing/2014/main" id="{DA632C18-F8FE-4204-8F93-6E6C98E81B6E}"/>
               </a:ext>
             </a:extLst>
           </p:cNvPr>
@@ -19607,7 +19607,7 @@
           <p:cNvPr id="66" name="">
             <a:extLst xmlns:a="http://schemas.openxmlformats.org/drawingml/2006/main">
               <a:ext uri="{FF2B5EF4-FFF2-40B4-BE49-F238E27FC236}">
-                <a16:creationId xmlns:a16="http://schemas.microsoft.com/office/drawing/2014/main" id="{613B5DA1-A517-4331-8ADC-ECB19F713119}"/>
+                <a16:creationId xmlns:a16="http://schemas.microsoft.com/office/drawing/2014/main" id="{704DB24B-FC69-4C69-9D0F-188E8A7D53D0}"/>
               </a:ext>
             </a:extLst>
           </p:cNvPr>
@@ -19638,7 +19638,7 @@
           <p:cNvPr id="67" name="">
             <a:extLst xmlns:a="http://schemas.openxmlformats.org/drawingml/2006/main">
               <a:ext uri="{FF2B5EF4-FFF2-40B4-BE49-F238E27FC236}">
-                <a16:creationId xmlns:a16="http://schemas.microsoft.com/office/drawing/2014/main" id="{0F85B14A-65F0-4293-837C-A02E6230E4C6}"/>
+                <a16:creationId xmlns:a16="http://schemas.microsoft.com/office/drawing/2014/main" id="{90A0F18A-2351-4B5C-833D-071ABC1055E9}"/>
               </a:ext>
             </a:extLst>
           </p:cNvPr>
@@ -19669,7 +19669,7 @@
           <p:cNvPr id="68" name="">
             <a:extLst xmlns:a="http://schemas.openxmlformats.org/drawingml/2006/main">
               <a:ext uri="{FF2B5EF4-FFF2-40B4-BE49-F238E27FC236}">
-                <a16:creationId xmlns:a16="http://schemas.microsoft.com/office/drawing/2014/main" id="{A1DA11FA-E4CD-46E6-8CB7-F2892C95F560}"/>
+                <a16:creationId xmlns:a16="http://schemas.microsoft.com/office/drawing/2014/main" id="{AEA80438-703D-40E1-9B96-709CB1156C6E}"/>
               </a:ext>
             </a:extLst>
           </p:cNvPr>
@@ -19700,7 +19700,7 @@
           <p:cNvPr id="69" name="">
             <a:extLst xmlns:a="http://schemas.openxmlformats.org/drawingml/2006/main">
               <a:ext uri="{FF2B5EF4-FFF2-40B4-BE49-F238E27FC236}">
-                <a16:creationId xmlns:a16="http://schemas.microsoft.com/office/drawing/2014/main" id="{75E56DCF-2329-4CF7-A897-00913B1FF944}"/>
+                <a16:creationId xmlns:a16="http://schemas.microsoft.com/office/drawing/2014/main" id="{9942825F-E44C-4781-84C7-928B48B74D3B}"/>
               </a:ext>
             </a:extLst>
           </p:cNvPr>
@@ -19731,7 +19731,7 @@
           <p:cNvPr id="70" name="">
             <a:extLst xmlns:a="http://schemas.openxmlformats.org/drawingml/2006/main">
               <a:ext uri="{FF2B5EF4-FFF2-40B4-BE49-F238E27FC236}">
-                <a16:creationId xmlns:a16="http://schemas.microsoft.com/office/drawing/2014/main" id="{14733D1B-6172-41E6-A1CA-01C0B72058E2}"/>
+                <a16:creationId xmlns:a16="http://schemas.microsoft.com/office/drawing/2014/main" id="{A2BB6717-DA8C-45CA-B7C8-727A1827BA6B}"/>
               </a:ext>
             </a:extLst>
           </p:cNvPr>
@@ -19762,7 +19762,7 @@
           <p:cNvPr id="71" name="">
             <a:extLst xmlns:a="http://schemas.openxmlformats.org/drawingml/2006/main">
               <a:ext uri="{FF2B5EF4-FFF2-40B4-BE49-F238E27FC236}">
-                <a16:creationId xmlns:a16="http://schemas.microsoft.com/office/drawing/2014/main" id="{91545CAB-B1AF-4561-8C7C-26F4FB8CF4DA}"/>
+                <a16:creationId xmlns:a16="http://schemas.microsoft.com/office/drawing/2014/main" id="{6E6D1E0B-84F1-4851-B9B7-749CC30AE645}"/>
               </a:ext>
             </a:extLst>
           </p:cNvPr>
@@ -19793,7 +19793,7 @@
           <p:cNvPr id="72" name="">
             <a:extLst xmlns:a="http://schemas.openxmlformats.org/drawingml/2006/main">
               <a:ext uri="{FF2B5EF4-FFF2-40B4-BE49-F238E27FC236}">
-                <a16:creationId xmlns:a16="http://schemas.microsoft.com/office/drawing/2014/main" id="{CB3CD706-53DC-470C-AEB9-BE11EF70CAFE}"/>
+                <a16:creationId xmlns:a16="http://schemas.microsoft.com/office/drawing/2014/main" id="{E943AB3F-204B-4A5C-82C5-CEEB14348E12}"/>
               </a:ext>
             </a:extLst>
           </p:cNvPr>
@@ -19824,7 +19824,7 @@
           <p:cNvPr id="73" name="">
             <a:extLst xmlns:a="http://schemas.openxmlformats.org/drawingml/2006/main">
               <a:ext uri="{FF2B5EF4-FFF2-40B4-BE49-F238E27FC236}">
-                <a16:creationId xmlns:a16="http://schemas.microsoft.com/office/drawing/2014/main" id="{DB2493B0-4E3C-478B-8031-75A246C0ECED}"/>
+                <a16:creationId xmlns:a16="http://schemas.microsoft.com/office/drawing/2014/main" id="{FDD5C0EF-6F09-4013-9CCD-3A0A76991E58}"/>
               </a:ext>
             </a:extLst>
           </p:cNvPr>
@@ -19855,7 +19855,7 @@
           <p:cNvPr id="74" name="">
             <a:extLst xmlns:a="http://schemas.openxmlformats.org/drawingml/2006/main">
               <a:ext uri="{FF2B5EF4-FFF2-40B4-BE49-F238E27FC236}">
-                <a16:creationId xmlns:a16="http://schemas.microsoft.com/office/drawing/2014/main" id="{4529A102-1A66-4C97-8F7A-FD4339D95255}"/>
+                <a16:creationId xmlns:a16="http://schemas.microsoft.com/office/drawing/2014/main" id="{323F0143-ABAA-4490-A328-2A40203C5226}"/>
               </a:ext>
             </a:extLst>
           </p:cNvPr>
@@ -19886,7 +19886,7 @@
           <p:cNvPr id="75" name="">
             <a:extLst xmlns:a="http://schemas.openxmlformats.org/drawingml/2006/main">
               <a:ext uri="{FF2B5EF4-FFF2-40B4-BE49-F238E27FC236}">
-                <a16:creationId xmlns:a16="http://schemas.microsoft.com/office/drawing/2014/main" id="{D21F39D2-0FDD-4317-90C6-7BF7CF532B73}"/>
+                <a16:creationId xmlns:a16="http://schemas.microsoft.com/office/drawing/2014/main" id="{6AA80604-22EB-4497-BAE0-F7763EEA38BB}"/>
               </a:ext>
             </a:extLst>
           </p:cNvPr>
@@ -19931,7 +19931,7 @@
           <p:cNvPr id="76" name="">
             <a:extLst xmlns:a="http://schemas.openxmlformats.org/drawingml/2006/main">
               <a:ext uri="{FF2B5EF4-FFF2-40B4-BE49-F238E27FC236}">
-                <a16:creationId xmlns:a16="http://schemas.microsoft.com/office/drawing/2014/main" id="{93C70588-6B68-4D0D-A283-FC37B01DF331}"/>
+                <a16:creationId xmlns:a16="http://schemas.microsoft.com/office/drawing/2014/main" id="{7F48CA3E-487E-4CD5-8AED-EE428C18CE64}"/>
               </a:ext>
             </a:extLst>
           </p:cNvPr>
@@ -19976,7 +19976,7 @@
           <p:cNvPr id="77" name="">
             <a:extLst xmlns:a="http://schemas.openxmlformats.org/drawingml/2006/main">
               <a:ext uri="{FF2B5EF4-FFF2-40B4-BE49-F238E27FC236}">
-                <a16:creationId xmlns:a16="http://schemas.microsoft.com/office/drawing/2014/main" id="{D914DFFC-CE4C-4AED-8097-AA26AEA23C9F}"/>
+                <a16:creationId xmlns:a16="http://schemas.microsoft.com/office/drawing/2014/main" id="{B279ACF2-6E07-4565-9D27-35793F260AF0}"/>
               </a:ext>
             </a:extLst>
           </p:cNvPr>
@@ -20009,7 +20009,7 @@
           <p:cNvPr id="78" name="">
             <a:extLst xmlns:a="http://schemas.openxmlformats.org/drawingml/2006/main">
               <a:ext uri="{FF2B5EF4-FFF2-40B4-BE49-F238E27FC236}">
-                <a16:creationId xmlns:a16="http://schemas.microsoft.com/office/drawing/2014/main" id="{826E81BF-CA40-45B2-89F2-1CA7150CC4B0}"/>
+                <a16:creationId xmlns:a16="http://schemas.microsoft.com/office/drawing/2014/main" id="{7EE6378D-C51E-4608-A49C-2BDCFF93F4CC}"/>
               </a:ext>
             </a:extLst>
           </p:cNvPr>
@@ -20040,7 +20040,7 @@
           <p:cNvPr id="79" name="">
             <a:extLst xmlns:a="http://schemas.openxmlformats.org/drawingml/2006/main">
               <a:ext uri="{FF2B5EF4-FFF2-40B4-BE49-F238E27FC236}">
-                <a16:creationId xmlns:a16="http://schemas.microsoft.com/office/drawing/2014/main" id="{CAE60FDF-2FC3-41A4-B37C-0846C8DA933A}"/>
+                <a16:creationId xmlns:a16="http://schemas.microsoft.com/office/drawing/2014/main" id="{A9B7B0F8-618A-4B72-A609-9D32C67C7B8B}"/>
               </a:ext>
             </a:extLst>
           </p:cNvPr>
@@ -20085,7 +20085,7 @@
           <p:cNvPr id="80" name="">
             <a:extLst xmlns:a="http://schemas.openxmlformats.org/drawingml/2006/main">
               <a:ext uri="{FF2B5EF4-FFF2-40B4-BE49-F238E27FC236}">
-                <a16:creationId xmlns:a16="http://schemas.microsoft.com/office/drawing/2014/main" id="{8CB4C814-B17E-4DA5-9745-8BCB9ADA6945}"/>
+                <a16:creationId xmlns:a16="http://schemas.microsoft.com/office/drawing/2014/main" id="{5C507F82-B3E4-4B80-9EE0-9CC528E71B5B}"/>
               </a:ext>
             </a:extLst>
           </p:cNvPr>
@@ -20145,7 +20145,7 @@
           <p:cNvPr id="81" name="">
             <a:extLst xmlns:a="http://schemas.openxmlformats.org/drawingml/2006/main">
               <a:ext uri="{FF2B5EF4-FFF2-40B4-BE49-F238E27FC236}">
-                <a16:creationId xmlns:a16="http://schemas.microsoft.com/office/drawing/2014/main" id="{4E658B29-47F6-4001-9FF5-B6F3D5D4BB79}"/>
+                <a16:creationId xmlns:a16="http://schemas.microsoft.com/office/drawing/2014/main" id="{F2199CE0-3AED-42D3-8416-A43B9BFEE974}"/>
               </a:ext>
             </a:extLst>
           </p:cNvPr>
@@ -20178,7 +20178,7 @@
           <p:cNvPr id="82" name="">
             <a:extLst xmlns:a="http://schemas.openxmlformats.org/drawingml/2006/main">
               <a:ext uri="{FF2B5EF4-FFF2-40B4-BE49-F238E27FC236}">
-                <a16:creationId xmlns:a16="http://schemas.microsoft.com/office/drawing/2014/main" id="{D3F6B546-E2AD-425B-A9DD-85D0920362F5}"/>
+                <a16:creationId xmlns:a16="http://schemas.microsoft.com/office/drawing/2014/main" id="{F659789A-04F5-4A0A-9DE8-8CCD18F8DB02}"/>
               </a:ext>
             </a:extLst>
           </p:cNvPr>
@@ -20209,7 +20209,7 @@
           <p:cNvPr id="83" name="">
             <a:extLst xmlns:a="http://schemas.openxmlformats.org/drawingml/2006/main">
               <a:ext uri="{FF2B5EF4-FFF2-40B4-BE49-F238E27FC236}">
-                <a16:creationId xmlns:a16="http://schemas.microsoft.com/office/drawing/2014/main" id="{0C540338-4E41-4E69-A1A9-CC93C0F43CE7}"/>
+                <a16:creationId xmlns:a16="http://schemas.microsoft.com/office/drawing/2014/main" id="{BB7902EB-09DD-4B80-940F-B5AA70EE4153}"/>
               </a:ext>
             </a:extLst>
           </p:cNvPr>
@@ -20254,7 +20254,7 @@
           <p:cNvPr id="84" name="">
             <a:extLst xmlns:a="http://schemas.openxmlformats.org/drawingml/2006/main">
               <a:ext uri="{FF2B5EF4-FFF2-40B4-BE49-F238E27FC236}">
-                <a16:creationId xmlns:a16="http://schemas.microsoft.com/office/drawing/2014/main" id="{135E3B15-1C63-4B09-B764-C44A00D3C617}"/>
+                <a16:creationId xmlns:a16="http://schemas.microsoft.com/office/drawing/2014/main" id="{067F1F24-D8F7-4151-AB80-EB77ACCB0231}"/>
               </a:ext>
             </a:extLst>
           </p:cNvPr>
@@ -20344,7 +20344,7 @@
           <p:cNvPr id="85" name="">
             <a:extLst xmlns:a="http://schemas.openxmlformats.org/drawingml/2006/main">
               <a:ext uri="{FF2B5EF4-FFF2-40B4-BE49-F238E27FC236}">
-                <a16:creationId xmlns:a16="http://schemas.microsoft.com/office/drawing/2014/main" id="{C13851A3-5502-4A5A-B606-FD0B0BE2FF22}"/>
+                <a16:creationId xmlns:a16="http://schemas.microsoft.com/office/drawing/2014/main" id="{031E7C72-3774-4B63-B98F-2AA38D490DD8}"/>
               </a:ext>
             </a:extLst>
           </p:cNvPr>
@@ -20377,7 +20377,7 @@
           <p:cNvPr id="86" name="">
             <a:extLst xmlns:a="http://schemas.openxmlformats.org/drawingml/2006/main">
               <a:ext uri="{FF2B5EF4-FFF2-40B4-BE49-F238E27FC236}">
-                <a16:creationId xmlns:a16="http://schemas.microsoft.com/office/drawing/2014/main" id="{D6EE604B-04BE-42B6-9CB4-3E3A0D8E0593}"/>
+                <a16:creationId xmlns:a16="http://schemas.microsoft.com/office/drawing/2014/main" id="{10B163F1-C872-4FE5-A6C4-4299EF16B4C3}"/>
               </a:ext>
             </a:extLst>
           </p:cNvPr>
@@ -20408,7 +20408,7 @@
           <p:cNvPr id="87" name="">
             <a:extLst xmlns:a="http://schemas.openxmlformats.org/drawingml/2006/main">
               <a:ext uri="{FF2B5EF4-FFF2-40B4-BE49-F238E27FC236}">
-                <a16:creationId xmlns:a16="http://schemas.microsoft.com/office/drawing/2014/main" id="{84C13861-2B6E-4E2D-97FD-5DFA2A227BC2}"/>
+                <a16:creationId xmlns:a16="http://schemas.microsoft.com/office/drawing/2014/main" id="{7EF81607-ECF6-4D77-8BBC-CFB31AECEA39}"/>
               </a:ext>
             </a:extLst>
           </p:cNvPr>
@@ -20453,7 +20453,7 @@
           <p:cNvPr id="88" name="">
             <a:extLst xmlns:a="http://schemas.openxmlformats.org/drawingml/2006/main">
               <a:ext uri="{FF2B5EF4-FFF2-40B4-BE49-F238E27FC236}">
-                <a16:creationId xmlns:a16="http://schemas.microsoft.com/office/drawing/2014/main" id="{69BE62A2-812B-4C2A-B8E1-7E97C2ECAF8D}"/>
+                <a16:creationId xmlns:a16="http://schemas.microsoft.com/office/drawing/2014/main" id="{F7EE503C-CEE4-47C4-B2DA-85E02993E84C}"/>
               </a:ext>
             </a:extLst>
           </p:cNvPr>
@@ -20528,7 +20528,7 @@
           <p:cNvPr id="89" name="">
             <a:extLst xmlns:a="http://schemas.openxmlformats.org/drawingml/2006/main">
               <a:ext uri="{FF2B5EF4-FFF2-40B4-BE49-F238E27FC236}">
-                <a16:creationId xmlns:a16="http://schemas.microsoft.com/office/drawing/2014/main" id="{A7BF1CCA-847D-4764-A262-5CCFA2BB48E2}"/>
+                <a16:creationId xmlns:a16="http://schemas.microsoft.com/office/drawing/2014/main" id="{7C1A6CF9-C042-47E4-9ABD-0832BA17E22D}"/>
               </a:ext>
             </a:extLst>
           </p:cNvPr>
@@ -20561,7 +20561,7 @@
           <p:cNvPr id="90" name="">
             <a:extLst xmlns:a="http://schemas.openxmlformats.org/drawingml/2006/main">
               <a:ext uri="{FF2B5EF4-FFF2-40B4-BE49-F238E27FC236}">
-                <a16:creationId xmlns:a16="http://schemas.microsoft.com/office/drawing/2014/main" id="{B9BDEFB1-40EE-4E1D-A445-48387B0FC2C3}"/>
+                <a16:creationId xmlns:a16="http://schemas.microsoft.com/office/drawing/2014/main" id="{5249C449-A263-4099-B085-E054BB33542F}"/>
               </a:ext>
             </a:extLst>
           </p:cNvPr>
@@ -20592,7 +20592,7 @@
           <p:cNvPr id="91" name="">
             <a:extLst xmlns:a="http://schemas.openxmlformats.org/drawingml/2006/main">
               <a:ext uri="{FF2B5EF4-FFF2-40B4-BE49-F238E27FC236}">
-                <a16:creationId xmlns:a16="http://schemas.microsoft.com/office/drawing/2014/main" id="{29F667E2-DFF3-4AE9-B78C-B2995CBF024F}"/>
+                <a16:creationId xmlns:a16="http://schemas.microsoft.com/office/drawing/2014/main" id="{6DD7F747-BD92-4CA6-BAC3-99C69E64DFBD}"/>
               </a:ext>
             </a:extLst>
           </p:cNvPr>
@@ -20637,7 +20637,7 @@
           <p:cNvPr id="92" name="">
             <a:extLst xmlns:a="http://schemas.openxmlformats.org/drawingml/2006/main">
               <a:ext uri="{FF2B5EF4-FFF2-40B4-BE49-F238E27FC236}">
-                <a16:creationId xmlns:a16="http://schemas.microsoft.com/office/drawing/2014/main" id="{77FB3839-F116-4B46-B5A8-B7A8BFDE7E10}"/>
+                <a16:creationId xmlns:a16="http://schemas.microsoft.com/office/drawing/2014/main" id="{E8BCA825-C689-4AD3-A9E9-F9947F8947F1}"/>
               </a:ext>
             </a:extLst>
           </p:cNvPr>
@@ -20682,7 +20682,7 @@
           <p:cNvPr id="93" name="">
             <a:extLst xmlns:a="http://schemas.openxmlformats.org/drawingml/2006/main">
               <a:ext uri="{FF2B5EF4-FFF2-40B4-BE49-F238E27FC236}">
-                <a16:creationId xmlns:a16="http://schemas.microsoft.com/office/drawing/2014/main" id="{7B818482-D398-462B-A948-42F26F0F1382}"/>
+                <a16:creationId xmlns:a16="http://schemas.microsoft.com/office/drawing/2014/main" id="{61D3BFF8-BC4A-43CD-9590-5F1A2C593135}"/>
               </a:ext>
             </a:extLst>
           </p:cNvPr>
@@ -20725,7 +20725,7 @@
     </p:spTree>
     <p:extLst>
       <p:ext uri="{BB962C8B-B14F-4D97-AF65-F5344CB8AC3E}">
-        <p14:creationId xmlns:p14="http://schemas.microsoft.com/office/powerpoint/2010/main" val="181758476"/>
+        <p14:creationId xmlns:p14="http://schemas.microsoft.com/office/powerpoint/2010/main" val="1229574331"/>
       </p:ext>
     </p:extLst>
   </p:cSld>
@@ -20749,7 +20749,7 @@
           <p:cNvPr id="92" name="">
             <a:extLst xmlns:a="http://schemas.openxmlformats.org/drawingml/2006/main">
               <a:ext uri="{FF2B5EF4-FFF2-40B4-BE49-F238E27FC236}">
-                <a16:creationId xmlns:a16="http://schemas.microsoft.com/office/drawing/2014/main" id="{E6BE815D-6ED9-4AA4-A805-9F5DEC3013AD}"/>
+                <a16:creationId xmlns:a16="http://schemas.microsoft.com/office/drawing/2014/main" id="{4494CA01-60D3-4F14-A083-A0A767E80ACF}"/>
               </a:ext>
             </a:extLst>
           </p:cNvPr>
@@ -20780,7 +20780,7 @@
           <p:cNvPr id="2" name="">
             <a:extLst xmlns:a="http://schemas.openxmlformats.org/drawingml/2006/main">
               <a:ext uri="{FF2B5EF4-FFF2-40B4-BE49-F238E27FC236}">
-                <a16:creationId xmlns:a16="http://schemas.microsoft.com/office/drawing/2014/main" id="{98C43CBF-4615-4AC7-AFD7-1CAAE5923BBB}"/>
+                <a16:creationId xmlns:a16="http://schemas.microsoft.com/office/drawing/2014/main" id="{6A2CE4BC-7AC1-4994-88DC-C85D5D634023}"/>
               </a:ext>
             </a:extLst>
           </p:cNvPr>
@@ -20825,7 +20825,7 @@
           <p:cNvPr id="3" name="">
             <a:extLst xmlns:a="http://schemas.openxmlformats.org/drawingml/2006/main">
               <a:ext uri="{FF2B5EF4-FFF2-40B4-BE49-F238E27FC236}">
-                <a16:creationId xmlns:a16="http://schemas.microsoft.com/office/drawing/2014/main" id="{DCA5B08E-9211-4323-AA2C-BBE05DD600C1}"/>
+                <a16:creationId xmlns:a16="http://schemas.microsoft.com/office/drawing/2014/main" id="{779F74E4-91C5-4BB1-A837-B4DCEFF803F3}"/>
               </a:ext>
             </a:extLst>
           </p:cNvPr>
@@ -20870,7 +20870,7 @@
           <p:cNvPr id="4" name="">
             <a:extLst xmlns:a="http://schemas.openxmlformats.org/drawingml/2006/main">
               <a:ext uri="{FF2B5EF4-FFF2-40B4-BE49-F238E27FC236}">
-                <a16:creationId xmlns:a16="http://schemas.microsoft.com/office/drawing/2014/main" id="{A4B8F3F0-F9D5-4A6B-B5AE-20E3791AB65C}"/>
+                <a16:creationId xmlns:a16="http://schemas.microsoft.com/office/drawing/2014/main" id="{B9AF0A1A-AA0D-4620-87BD-385BB20CCEB8}"/>
               </a:ext>
             </a:extLst>
           </p:cNvPr>
@@ -20915,7 +20915,7 @@
           <p:cNvPr id="5" name="">
             <a:extLst xmlns:a="http://schemas.openxmlformats.org/drawingml/2006/main">
               <a:ext uri="{FF2B5EF4-FFF2-40B4-BE49-F238E27FC236}">
-                <a16:creationId xmlns:a16="http://schemas.microsoft.com/office/drawing/2014/main" id="{66A68ADE-B034-488A-90EC-C88838914230}"/>
+                <a16:creationId xmlns:a16="http://schemas.microsoft.com/office/drawing/2014/main" id="{65AC0CCB-9190-4961-8381-7F866387751B}"/>
               </a:ext>
             </a:extLst>
           </p:cNvPr>
@@ -20946,7 +20946,7 @@
           <p:cNvPr id="6" name="">
             <a:extLst xmlns:a="http://schemas.openxmlformats.org/drawingml/2006/main">
               <a:ext uri="{FF2B5EF4-FFF2-40B4-BE49-F238E27FC236}">
-                <a16:creationId xmlns:a16="http://schemas.microsoft.com/office/drawing/2014/main" id="{562270D5-2697-4CDF-BDF4-B68277CC6FC1}"/>
+                <a16:creationId xmlns:a16="http://schemas.microsoft.com/office/drawing/2014/main" id="{558EC280-C6E8-4689-B81F-E0E0DCE56120}"/>
               </a:ext>
             </a:extLst>
           </p:cNvPr>
@@ -20977,7 +20977,7 @@
           <p:cNvPr id="7" name="">
             <a:extLst xmlns:a="http://schemas.openxmlformats.org/drawingml/2006/main">
               <a:ext uri="{FF2B5EF4-FFF2-40B4-BE49-F238E27FC236}">
-                <a16:creationId xmlns:a16="http://schemas.microsoft.com/office/drawing/2014/main" id="{219789A8-0816-4AC0-923D-06098114112B}"/>
+                <a16:creationId xmlns:a16="http://schemas.microsoft.com/office/drawing/2014/main" id="{28F8AFA0-8F68-4205-A82D-82E2ACD88A9D}"/>
               </a:ext>
             </a:extLst>
           </p:cNvPr>
@@ -21022,7 +21022,7 @@
           <p:cNvPr id="8" name="">
             <a:extLst xmlns:a="http://schemas.openxmlformats.org/drawingml/2006/main">
               <a:ext uri="{FF2B5EF4-FFF2-40B4-BE49-F238E27FC236}">
-                <a16:creationId xmlns:a16="http://schemas.microsoft.com/office/drawing/2014/main" id="{93D7EF3E-8AD4-4487-94EC-0FC3E7A086B0}"/>
+                <a16:creationId xmlns:a16="http://schemas.microsoft.com/office/drawing/2014/main" id="{3F985621-EA03-4417-8949-593ED94D52F6}"/>
               </a:ext>
             </a:extLst>
           </p:cNvPr>
@@ -21067,7 +21067,7 @@
           <p:cNvPr id="9" name="">
             <a:extLst xmlns:a="http://schemas.openxmlformats.org/drawingml/2006/main">
               <a:ext uri="{FF2B5EF4-FFF2-40B4-BE49-F238E27FC236}">
-                <a16:creationId xmlns:a16="http://schemas.microsoft.com/office/drawing/2014/main" id="{90BA715A-D333-485C-83EB-3476599C1A5F}"/>
+                <a16:creationId xmlns:a16="http://schemas.microsoft.com/office/drawing/2014/main" id="{8F94C95B-7192-4D4A-9666-18E77710F0C1}"/>
               </a:ext>
             </a:extLst>
           </p:cNvPr>
@@ -21098,7 +21098,7 @@
           <p:cNvPr id="10" name="">
             <a:extLst xmlns:a="http://schemas.openxmlformats.org/drawingml/2006/main">
               <a:ext uri="{FF2B5EF4-FFF2-40B4-BE49-F238E27FC236}">
-                <a16:creationId xmlns:a16="http://schemas.microsoft.com/office/drawing/2014/main" id="{B79AD486-B9F2-4F52-BA5B-4BAF841B9BE4}"/>
+                <a16:creationId xmlns:a16="http://schemas.microsoft.com/office/drawing/2014/main" id="{26B270CE-8AE9-47DC-9A48-C51223EA5DCB}"/>
               </a:ext>
             </a:extLst>
           </p:cNvPr>
@@ -21143,7 +21143,7 @@
           <p:cNvPr id="11" name="">
             <a:extLst xmlns:a="http://schemas.openxmlformats.org/drawingml/2006/main">
               <a:ext uri="{FF2B5EF4-FFF2-40B4-BE49-F238E27FC236}">
-                <a16:creationId xmlns:a16="http://schemas.microsoft.com/office/drawing/2014/main" id="{210091AE-FCE8-425B-8CCA-883E9DA000E2}"/>
+                <a16:creationId xmlns:a16="http://schemas.microsoft.com/office/drawing/2014/main" id="{24FAB92B-ED7C-4443-8FD9-E089576CB6D2}"/>
               </a:ext>
             </a:extLst>
           </p:cNvPr>
@@ -21188,7 +21188,7 @@
           <p:cNvPr id="12" name="">
             <a:extLst xmlns:a="http://schemas.openxmlformats.org/drawingml/2006/main">
               <a:ext uri="{FF2B5EF4-FFF2-40B4-BE49-F238E27FC236}">
-                <a16:creationId xmlns:a16="http://schemas.microsoft.com/office/drawing/2014/main" id="{3A1E9A4D-7CFF-4C74-8729-6A37A06898AF}"/>
+                <a16:creationId xmlns:a16="http://schemas.microsoft.com/office/drawing/2014/main" id="{A0DCE004-0A2C-461A-B848-B646FE2E514E}"/>
               </a:ext>
             </a:extLst>
           </p:cNvPr>
@@ -21233,7 +21233,7 @@
           <p:cNvPr id="13" name="">
             <a:extLst xmlns:a="http://schemas.openxmlformats.org/drawingml/2006/main">
               <a:ext uri="{FF2B5EF4-FFF2-40B4-BE49-F238E27FC236}">
-                <a16:creationId xmlns:a16="http://schemas.microsoft.com/office/drawing/2014/main" id="{BB62AB7E-4115-4B42-B980-7D23BA5716E0}"/>
+                <a16:creationId xmlns:a16="http://schemas.microsoft.com/office/drawing/2014/main" id="{8D518B3C-690C-43DC-83EE-99E968C4963D}"/>
               </a:ext>
             </a:extLst>
           </p:cNvPr>
@@ -21278,7 +21278,7 @@
           <p:cNvPr id="14" name="">
             <a:extLst xmlns:a="http://schemas.openxmlformats.org/drawingml/2006/main">
               <a:ext uri="{FF2B5EF4-FFF2-40B4-BE49-F238E27FC236}">
-                <a16:creationId xmlns:a16="http://schemas.microsoft.com/office/drawing/2014/main" id="{F7B12017-B465-4BCA-A4DB-46A03F95BA83}"/>
+                <a16:creationId xmlns:a16="http://schemas.microsoft.com/office/drawing/2014/main" id="{7CD60589-C3C2-4135-B592-C2C4F1839C31}"/>
               </a:ext>
             </a:extLst>
           </p:cNvPr>
@@ -21323,7 +21323,7 @@
           <p:cNvPr id="15" name="">
             <a:extLst xmlns:a="http://schemas.openxmlformats.org/drawingml/2006/main">
               <a:ext uri="{FF2B5EF4-FFF2-40B4-BE49-F238E27FC236}">
-                <a16:creationId xmlns:a16="http://schemas.microsoft.com/office/drawing/2014/main" id="{EA6659BD-7E07-431C-A3E7-FE268C7A504B}"/>
+                <a16:creationId xmlns:a16="http://schemas.microsoft.com/office/drawing/2014/main" id="{B7B3576F-B1A9-48DA-9421-336A0775E1D2}"/>
               </a:ext>
             </a:extLst>
           </p:cNvPr>
@@ -21368,7 +21368,7 @@
           <p:cNvPr id="16" name="">
             <a:extLst xmlns:a="http://schemas.openxmlformats.org/drawingml/2006/main">
               <a:ext uri="{FF2B5EF4-FFF2-40B4-BE49-F238E27FC236}">
-                <a16:creationId xmlns:a16="http://schemas.microsoft.com/office/drawing/2014/main" id="{E2C4D1F8-74DB-4469-93DF-846923973A77}"/>
+                <a16:creationId xmlns:a16="http://schemas.microsoft.com/office/drawing/2014/main" id="{E96E1F9A-0CAA-48E8-8DAC-063DEE0407B2}"/>
               </a:ext>
             </a:extLst>
           </p:cNvPr>
@@ -21413,7 +21413,7 @@
           <p:cNvPr id="17" name="">
             <a:extLst xmlns:a="http://schemas.openxmlformats.org/drawingml/2006/main">
               <a:ext uri="{FF2B5EF4-FFF2-40B4-BE49-F238E27FC236}">
-                <a16:creationId xmlns:a16="http://schemas.microsoft.com/office/drawing/2014/main" id="{61BEF2DB-DBF1-428F-8BA3-640F458894F1}"/>
+                <a16:creationId xmlns:a16="http://schemas.microsoft.com/office/drawing/2014/main" id="{B1897C6E-1B7D-4A9A-ABD5-BC1ECBA83887}"/>
               </a:ext>
             </a:extLst>
           </p:cNvPr>
@@ -21446,7 +21446,7 @@
           <p:cNvPr id="18" name="">
             <a:extLst xmlns:a="http://schemas.openxmlformats.org/drawingml/2006/main">
               <a:ext uri="{FF2B5EF4-FFF2-40B4-BE49-F238E27FC236}">
-                <a16:creationId xmlns:a16="http://schemas.microsoft.com/office/drawing/2014/main" id="{B79C26F5-191A-4112-8C36-7A0834474271}"/>
+                <a16:creationId xmlns:a16="http://schemas.microsoft.com/office/drawing/2014/main" id="{E71DF773-AE68-49A3-B4BE-9BDD8D59F1E3}"/>
               </a:ext>
             </a:extLst>
           </p:cNvPr>
@@ -21491,7 +21491,7 @@
           <p:cNvPr id="19" name="">
             <a:extLst xmlns:a="http://schemas.openxmlformats.org/drawingml/2006/main">
               <a:ext uri="{FF2B5EF4-FFF2-40B4-BE49-F238E27FC236}">
-                <a16:creationId xmlns:a16="http://schemas.microsoft.com/office/drawing/2014/main" id="{0F522235-FBE2-4B3B-A837-D69B86E2F778}"/>
+                <a16:creationId xmlns:a16="http://schemas.microsoft.com/office/drawing/2014/main" id="{0F491695-8C7F-4E8E-8048-D5E9E6E39460}"/>
               </a:ext>
             </a:extLst>
           </p:cNvPr>
@@ -21536,7 +21536,7 @@
           <p:cNvPr id="20" name="">
             <a:extLst xmlns:a="http://schemas.openxmlformats.org/drawingml/2006/main">
               <a:ext uri="{FF2B5EF4-FFF2-40B4-BE49-F238E27FC236}">
-                <a16:creationId xmlns:a16="http://schemas.microsoft.com/office/drawing/2014/main" id="{03D6341B-A0BD-4DAF-B275-FF00F1C35F38}"/>
+                <a16:creationId xmlns:a16="http://schemas.microsoft.com/office/drawing/2014/main" id="{29B526EF-5B4D-4184-B719-46AB0A0207C2}"/>
               </a:ext>
             </a:extLst>
           </p:cNvPr>
@@ -21581,7 +21581,7 @@
           <p:cNvPr id="21" name="">
             <a:extLst xmlns:a="http://schemas.openxmlformats.org/drawingml/2006/main">
               <a:ext uri="{FF2B5EF4-FFF2-40B4-BE49-F238E27FC236}">
-                <a16:creationId xmlns:a16="http://schemas.microsoft.com/office/drawing/2014/main" id="{1777C67D-D82C-454C-A151-81D131665A19}"/>
+                <a16:creationId xmlns:a16="http://schemas.microsoft.com/office/drawing/2014/main" id="{8B79ADCC-CC0A-4518-844D-1D62E564AE74}"/>
               </a:ext>
             </a:extLst>
           </p:cNvPr>
@@ -21626,7 +21626,7 @@
           <p:cNvPr id="22" name="">
             <a:extLst xmlns:a="http://schemas.openxmlformats.org/drawingml/2006/main">
               <a:ext uri="{FF2B5EF4-FFF2-40B4-BE49-F238E27FC236}">
-                <a16:creationId xmlns:a16="http://schemas.microsoft.com/office/drawing/2014/main" id="{13184588-7B47-4E5A-B0DC-1597C4973D84}"/>
+                <a16:creationId xmlns:a16="http://schemas.microsoft.com/office/drawing/2014/main" id="{D39CA3B9-9857-4BED-8C4B-E8E7FFA026E0}"/>
               </a:ext>
             </a:extLst>
           </p:cNvPr>
@@ -21671,7 +21671,7 @@
           <p:cNvPr id="23" name="">
             <a:extLst xmlns:a="http://schemas.openxmlformats.org/drawingml/2006/main">
               <a:ext uri="{FF2B5EF4-FFF2-40B4-BE49-F238E27FC236}">
-                <a16:creationId xmlns:a16="http://schemas.microsoft.com/office/drawing/2014/main" id="{D4FCCA7E-29BE-473B-B0C1-8D4D6236D768}"/>
+                <a16:creationId xmlns:a16="http://schemas.microsoft.com/office/drawing/2014/main" id="{650815E9-9456-4832-9379-F9E1C5305231}"/>
               </a:ext>
             </a:extLst>
           </p:cNvPr>
@@ -21716,7 +21716,7 @@
           <p:cNvPr id="24" name="">
             <a:extLst xmlns:a="http://schemas.openxmlformats.org/drawingml/2006/main">
               <a:ext uri="{FF2B5EF4-FFF2-40B4-BE49-F238E27FC236}">
-                <a16:creationId xmlns:a16="http://schemas.microsoft.com/office/drawing/2014/main" id="{6BD72710-D2FA-44BF-8B6D-21EA43C20A65}"/>
+                <a16:creationId xmlns:a16="http://schemas.microsoft.com/office/drawing/2014/main" id="{16A791EB-D0DB-4016-B999-CF09B617C5E8}"/>
               </a:ext>
             </a:extLst>
           </p:cNvPr>
@@ -21761,7 +21761,7 @@
           <p:cNvPr id="25" name="">
             <a:extLst xmlns:a="http://schemas.openxmlformats.org/drawingml/2006/main">
               <a:ext uri="{FF2B5EF4-FFF2-40B4-BE49-F238E27FC236}">
-                <a16:creationId xmlns:a16="http://schemas.microsoft.com/office/drawing/2014/main" id="{0AE0B9B1-F449-4903-91D7-33471C7C1168}"/>
+                <a16:creationId xmlns:a16="http://schemas.microsoft.com/office/drawing/2014/main" id="{50CE8222-8D68-4757-A4BB-B70B8C67F9C0}"/>
               </a:ext>
             </a:extLst>
           </p:cNvPr>
@@ -21794,7 +21794,7 @@
           <p:cNvPr id="26" name="">
             <a:extLst xmlns:a="http://schemas.openxmlformats.org/drawingml/2006/main">
               <a:ext uri="{FF2B5EF4-FFF2-40B4-BE49-F238E27FC236}">
-                <a16:creationId xmlns:a16="http://schemas.microsoft.com/office/drawing/2014/main" id="{B89805C8-445C-4598-8ECE-35CEB716B647}"/>
+                <a16:creationId xmlns:a16="http://schemas.microsoft.com/office/drawing/2014/main" id="{DD8AC47F-B7C2-40BA-87CB-B60C4CE05BE6}"/>
               </a:ext>
             </a:extLst>
           </p:cNvPr>
@@ -21839,7 +21839,7 @@
           <p:cNvPr id="27" name="">
             <a:extLst xmlns:a="http://schemas.openxmlformats.org/drawingml/2006/main">
               <a:ext uri="{FF2B5EF4-FFF2-40B4-BE49-F238E27FC236}">
-                <a16:creationId xmlns:a16="http://schemas.microsoft.com/office/drawing/2014/main" id="{84BBE005-2071-40C8-AF0C-A8ED3E330BC0}"/>
+                <a16:creationId xmlns:a16="http://schemas.microsoft.com/office/drawing/2014/main" id="{AA1A5A45-BD54-4923-93F6-362C10C341A0}"/>
               </a:ext>
             </a:extLst>
           </p:cNvPr>
@@ -21884,7 +21884,7 @@
           <p:cNvPr id="28" name="">
             <a:extLst xmlns:a="http://schemas.openxmlformats.org/drawingml/2006/main">
               <a:ext uri="{FF2B5EF4-FFF2-40B4-BE49-F238E27FC236}">
-                <a16:creationId xmlns:a16="http://schemas.microsoft.com/office/drawing/2014/main" id="{80A4DA50-DFEC-4A16-A5B9-66E8F6CDA018}"/>
+                <a16:creationId xmlns:a16="http://schemas.microsoft.com/office/drawing/2014/main" id="{39DBCA3A-821B-4840-9FE8-BA119B5DE60D}"/>
               </a:ext>
             </a:extLst>
           </p:cNvPr>
@@ -21929,7 +21929,7 @@
           <p:cNvPr id="29" name="">
             <a:extLst xmlns:a="http://schemas.openxmlformats.org/drawingml/2006/main">
               <a:ext uri="{FF2B5EF4-FFF2-40B4-BE49-F238E27FC236}">
-                <a16:creationId xmlns:a16="http://schemas.microsoft.com/office/drawing/2014/main" id="{C9D45B82-B9A5-40DD-96EC-61E6D269EB66}"/>
+                <a16:creationId xmlns:a16="http://schemas.microsoft.com/office/drawing/2014/main" id="{445BF08E-A011-4BB0-A872-C29A1260A6B1}"/>
               </a:ext>
             </a:extLst>
           </p:cNvPr>
@@ -21974,7 +21974,7 @@
           <p:cNvPr id="30" name="">
             <a:extLst xmlns:a="http://schemas.openxmlformats.org/drawingml/2006/main">
               <a:ext uri="{FF2B5EF4-FFF2-40B4-BE49-F238E27FC236}">
-                <a16:creationId xmlns:a16="http://schemas.microsoft.com/office/drawing/2014/main" id="{4A47D4B6-7275-439D-873E-093E069EC2CA}"/>
+                <a16:creationId xmlns:a16="http://schemas.microsoft.com/office/drawing/2014/main" id="{295F3F30-F60C-484B-8484-CE270D9E01BD}"/>
               </a:ext>
             </a:extLst>
           </p:cNvPr>
@@ -22019,7 +22019,7 @@
           <p:cNvPr id="31" name="">
             <a:extLst xmlns:a="http://schemas.openxmlformats.org/drawingml/2006/main">
               <a:ext uri="{FF2B5EF4-FFF2-40B4-BE49-F238E27FC236}">
-                <a16:creationId xmlns:a16="http://schemas.microsoft.com/office/drawing/2014/main" id="{2AE8CE74-C8AD-49E8-8D07-B3C4B354C4E5}"/>
+                <a16:creationId xmlns:a16="http://schemas.microsoft.com/office/drawing/2014/main" id="{9E84FB56-6CCE-443E-8B81-1ACD6238F4BB}"/>
               </a:ext>
             </a:extLst>
           </p:cNvPr>
@@ -22064,7 +22064,7 @@
           <p:cNvPr id="32" name="">
             <a:extLst xmlns:a="http://schemas.openxmlformats.org/drawingml/2006/main">
               <a:ext uri="{FF2B5EF4-FFF2-40B4-BE49-F238E27FC236}">
-                <a16:creationId xmlns:a16="http://schemas.microsoft.com/office/drawing/2014/main" id="{C4AED1F5-BF15-491A-80A6-45C38FF3EB18}"/>
+                <a16:creationId xmlns:a16="http://schemas.microsoft.com/office/drawing/2014/main" id="{147A4AFC-00E7-4EDB-BB35-0017E7B40E45}"/>
               </a:ext>
             </a:extLst>
           </p:cNvPr>
@@ -22109,7 +22109,7 @@
           <p:cNvPr id="33" name="">
             <a:extLst xmlns:a="http://schemas.openxmlformats.org/drawingml/2006/main">
               <a:ext uri="{FF2B5EF4-FFF2-40B4-BE49-F238E27FC236}">
-                <a16:creationId xmlns:a16="http://schemas.microsoft.com/office/drawing/2014/main" id="{558054D5-C0EF-4323-9523-F37372EAFCCD}"/>
+                <a16:creationId xmlns:a16="http://schemas.microsoft.com/office/drawing/2014/main" id="{00A74223-DCAD-4CB9-BA31-0B638F8CC251}"/>
               </a:ext>
             </a:extLst>
           </p:cNvPr>
@@ -22142,7 +22142,7 @@
           <p:cNvPr id="34" name="">
             <a:extLst xmlns:a="http://schemas.openxmlformats.org/drawingml/2006/main">
               <a:ext uri="{FF2B5EF4-FFF2-40B4-BE49-F238E27FC236}">
-                <a16:creationId xmlns:a16="http://schemas.microsoft.com/office/drawing/2014/main" id="{BE115F59-ABEB-427A-8C04-77EF8C5E998E}"/>
+                <a16:creationId xmlns:a16="http://schemas.microsoft.com/office/drawing/2014/main" id="{BABA2798-0C49-402F-9730-B504C2FEB920}"/>
               </a:ext>
             </a:extLst>
           </p:cNvPr>
@@ -22187,7 +22187,7 @@
           <p:cNvPr id="35" name="">
             <a:extLst xmlns:a="http://schemas.openxmlformats.org/drawingml/2006/main">
               <a:ext uri="{FF2B5EF4-FFF2-40B4-BE49-F238E27FC236}">
-                <a16:creationId xmlns:a16="http://schemas.microsoft.com/office/drawing/2014/main" id="{1BBB58EB-553C-4EDA-8F9C-65B1D78D5B06}"/>
+                <a16:creationId xmlns:a16="http://schemas.microsoft.com/office/drawing/2014/main" id="{947F2BC9-39ED-441B-944F-5A7620E097BC}"/>
               </a:ext>
             </a:extLst>
           </p:cNvPr>
@@ -22232,7 +22232,7 @@
           <p:cNvPr id="36" name="">
             <a:extLst xmlns:a="http://schemas.openxmlformats.org/drawingml/2006/main">
               <a:ext uri="{FF2B5EF4-FFF2-40B4-BE49-F238E27FC236}">
-                <a16:creationId xmlns:a16="http://schemas.microsoft.com/office/drawing/2014/main" id="{1FC23F7D-7122-47D1-97AB-D8529031D2BB}"/>
+                <a16:creationId xmlns:a16="http://schemas.microsoft.com/office/drawing/2014/main" id="{25B226FE-1EDE-49FC-9F15-3EC09BC2B535}"/>
               </a:ext>
             </a:extLst>
           </p:cNvPr>
@@ -22277,7 +22277,7 @@
           <p:cNvPr id="37" name="">
             <a:extLst xmlns:a="http://schemas.openxmlformats.org/drawingml/2006/main">
               <a:ext uri="{FF2B5EF4-FFF2-40B4-BE49-F238E27FC236}">
-                <a16:creationId xmlns:a16="http://schemas.microsoft.com/office/drawing/2014/main" id="{D1AC91A8-D842-400E-9138-871D829FAD91}"/>
+                <a16:creationId xmlns:a16="http://schemas.microsoft.com/office/drawing/2014/main" id="{5D7A8EF5-2039-4394-8C7E-43E7512C240E}"/>
               </a:ext>
             </a:extLst>
           </p:cNvPr>
@@ -22322,7 +22322,7 @@
           <p:cNvPr id="38" name="">
             <a:extLst xmlns:a="http://schemas.openxmlformats.org/drawingml/2006/main">
               <a:ext uri="{FF2B5EF4-FFF2-40B4-BE49-F238E27FC236}">
-                <a16:creationId xmlns:a16="http://schemas.microsoft.com/office/drawing/2014/main" id="{A6906A80-1240-4B8D-A4B0-65C555CDF99B}"/>
+                <a16:creationId xmlns:a16="http://schemas.microsoft.com/office/drawing/2014/main" id="{091DF7EB-28CC-4F94-88AB-AE367AACA91A}"/>
               </a:ext>
             </a:extLst>
           </p:cNvPr>
@@ -22367,7 +22367,7 @@
           <p:cNvPr id="39" name="">
             <a:extLst xmlns:a="http://schemas.openxmlformats.org/drawingml/2006/main">
               <a:ext uri="{FF2B5EF4-FFF2-40B4-BE49-F238E27FC236}">
-                <a16:creationId xmlns:a16="http://schemas.microsoft.com/office/drawing/2014/main" id="{23DB735D-B8A9-4CD5-B6B9-B4ADEF55AE32}"/>
+                <a16:creationId xmlns:a16="http://schemas.microsoft.com/office/drawing/2014/main" id="{EC9637EB-AF9D-4FAD-B2D7-D3CCC7313E9F}"/>
               </a:ext>
             </a:extLst>
           </p:cNvPr>
@@ -22412,7 +22412,7 @@
           <p:cNvPr id="40" name="">
             <a:extLst xmlns:a="http://schemas.openxmlformats.org/drawingml/2006/main">
               <a:ext uri="{FF2B5EF4-FFF2-40B4-BE49-F238E27FC236}">
-                <a16:creationId xmlns:a16="http://schemas.microsoft.com/office/drawing/2014/main" id="{43086D05-6133-4E5F-915E-9E920C80F25A}"/>
+                <a16:creationId xmlns:a16="http://schemas.microsoft.com/office/drawing/2014/main" id="{51FE7BD9-B61E-491C-877E-80BEC6DB1E13}"/>
               </a:ext>
             </a:extLst>
           </p:cNvPr>
@@ -22457,7 +22457,7 @@
           <p:cNvPr id="41" name="">
             <a:extLst xmlns:a="http://schemas.openxmlformats.org/drawingml/2006/main">
               <a:ext uri="{FF2B5EF4-FFF2-40B4-BE49-F238E27FC236}">
-                <a16:creationId xmlns:a16="http://schemas.microsoft.com/office/drawing/2014/main" id="{94F2D3A9-116D-4AFB-A8F2-068B8D59BEEC}"/>
+                <a16:creationId xmlns:a16="http://schemas.microsoft.com/office/drawing/2014/main" id="{E5733DEA-D6F8-4714-A17F-7403F7FFD120}"/>
               </a:ext>
             </a:extLst>
           </p:cNvPr>
@@ -22490,7 +22490,7 @@
           <p:cNvPr id="42" name="">
             <a:extLst xmlns:a="http://schemas.openxmlformats.org/drawingml/2006/main">
               <a:ext uri="{FF2B5EF4-FFF2-40B4-BE49-F238E27FC236}">
-                <a16:creationId xmlns:a16="http://schemas.microsoft.com/office/drawing/2014/main" id="{C96E3DD9-E060-4FE0-A04D-61A16A1FEA88}"/>
+                <a16:creationId xmlns:a16="http://schemas.microsoft.com/office/drawing/2014/main" id="{4D702B5D-C1CD-478A-881E-00A7BDF70ADC}"/>
               </a:ext>
             </a:extLst>
           </p:cNvPr>
@@ -22535,7 +22535,7 @@
           <p:cNvPr id="43" name="">
             <a:extLst xmlns:a="http://schemas.openxmlformats.org/drawingml/2006/main">
               <a:ext uri="{FF2B5EF4-FFF2-40B4-BE49-F238E27FC236}">
-                <a16:creationId xmlns:a16="http://schemas.microsoft.com/office/drawing/2014/main" id="{E0C373BE-6C81-4903-A2B9-E835A0591B94}"/>
+                <a16:creationId xmlns:a16="http://schemas.microsoft.com/office/drawing/2014/main" id="{CA34E971-5198-48E8-8F3D-9BD26F1C140A}"/>
               </a:ext>
             </a:extLst>
           </p:cNvPr>
@@ -22580,7 +22580,7 @@
           <p:cNvPr id="44" name="">
             <a:extLst xmlns:a="http://schemas.openxmlformats.org/drawingml/2006/main">
               <a:ext uri="{FF2B5EF4-FFF2-40B4-BE49-F238E27FC236}">
-                <a16:creationId xmlns:a16="http://schemas.microsoft.com/office/drawing/2014/main" id="{BEE90ECF-8AFE-43AC-907D-1B83BC210576}"/>
+                <a16:creationId xmlns:a16="http://schemas.microsoft.com/office/drawing/2014/main" id="{B70C5FD3-E96F-4416-AC6C-4914CF0E2C43}"/>
               </a:ext>
             </a:extLst>
           </p:cNvPr>
@@ -22625,7 +22625,7 @@
           <p:cNvPr id="45" name="">
             <a:extLst xmlns:a="http://schemas.openxmlformats.org/drawingml/2006/main">
               <a:ext uri="{FF2B5EF4-FFF2-40B4-BE49-F238E27FC236}">
-                <a16:creationId xmlns:a16="http://schemas.microsoft.com/office/drawing/2014/main" id="{408AAACC-71AA-4528-A5C1-ED1809B78EFA}"/>
+                <a16:creationId xmlns:a16="http://schemas.microsoft.com/office/drawing/2014/main" id="{5A1337C2-6250-4DBC-B39C-D5C444531B57}"/>
               </a:ext>
             </a:extLst>
           </p:cNvPr>
@@ -22670,7 +22670,7 @@
           <p:cNvPr id="46" name="">
             <a:extLst xmlns:a="http://schemas.openxmlformats.org/drawingml/2006/main">
               <a:ext uri="{FF2B5EF4-FFF2-40B4-BE49-F238E27FC236}">
-                <a16:creationId xmlns:a16="http://schemas.microsoft.com/office/drawing/2014/main" id="{F76E5647-C4E8-4BC9-850A-3ACC9E8FA2B3}"/>
+                <a16:creationId xmlns:a16="http://schemas.microsoft.com/office/drawing/2014/main" id="{AF1102B6-753D-47E1-AE93-0AB5C5834C69}"/>
               </a:ext>
             </a:extLst>
           </p:cNvPr>
@@ -22715,7 +22715,7 @@
           <p:cNvPr id="47" name="">
             <a:extLst xmlns:a="http://schemas.openxmlformats.org/drawingml/2006/main">
               <a:ext uri="{FF2B5EF4-FFF2-40B4-BE49-F238E27FC236}">
-                <a16:creationId xmlns:a16="http://schemas.microsoft.com/office/drawing/2014/main" id="{DF17682C-8287-4871-B482-D8F429FFB565}"/>
+                <a16:creationId xmlns:a16="http://schemas.microsoft.com/office/drawing/2014/main" id="{B5AE2149-3E9A-48C8-BDF9-E9CF3E13F12B}"/>
               </a:ext>
             </a:extLst>
           </p:cNvPr>
@@ -22760,7 +22760,7 @@
           <p:cNvPr id="48" name="">
             <a:extLst xmlns:a="http://schemas.openxmlformats.org/drawingml/2006/main">
               <a:ext uri="{FF2B5EF4-FFF2-40B4-BE49-F238E27FC236}">
-                <a16:creationId xmlns:a16="http://schemas.microsoft.com/office/drawing/2014/main" id="{7A296EF4-C487-414E-A1ED-A22C5C1BEDB0}"/>
+                <a16:creationId xmlns:a16="http://schemas.microsoft.com/office/drawing/2014/main" id="{5B041B08-770D-4592-B436-2C7913F39AB8}"/>
               </a:ext>
             </a:extLst>
           </p:cNvPr>
@@ -22805,7 +22805,7 @@
           <p:cNvPr id="49" name="">
             <a:extLst xmlns:a="http://schemas.openxmlformats.org/drawingml/2006/main">
               <a:ext uri="{FF2B5EF4-FFF2-40B4-BE49-F238E27FC236}">
-                <a16:creationId xmlns:a16="http://schemas.microsoft.com/office/drawing/2014/main" id="{25431237-2610-49FF-8B06-F93C60302F5C}"/>
+                <a16:creationId xmlns:a16="http://schemas.microsoft.com/office/drawing/2014/main" id="{23455310-4851-4FD0-8F9F-FA3E91629794}"/>
               </a:ext>
             </a:extLst>
           </p:cNvPr>
@@ -22838,7 +22838,7 @@
           <p:cNvPr id="50" name="">
             <a:extLst xmlns:a="http://schemas.openxmlformats.org/drawingml/2006/main">
               <a:ext uri="{FF2B5EF4-FFF2-40B4-BE49-F238E27FC236}">
-                <a16:creationId xmlns:a16="http://schemas.microsoft.com/office/drawing/2014/main" id="{67AD562E-F8E9-4DDD-B338-99F9BC849B76}"/>
+                <a16:creationId xmlns:a16="http://schemas.microsoft.com/office/drawing/2014/main" id="{7A7D1DBA-86C1-47D4-A941-14F12CEE87C6}"/>
               </a:ext>
             </a:extLst>
           </p:cNvPr>
@@ -22883,7 +22883,7 @@
           <p:cNvPr id="51" name="">
             <a:extLst xmlns:a="http://schemas.openxmlformats.org/drawingml/2006/main">
               <a:ext uri="{FF2B5EF4-FFF2-40B4-BE49-F238E27FC236}">
-                <a16:creationId xmlns:a16="http://schemas.microsoft.com/office/drawing/2014/main" id="{9589F0F6-BB95-4ABB-BD85-24DFCB952C75}"/>
+                <a16:creationId xmlns:a16="http://schemas.microsoft.com/office/drawing/2014/main" id="{7EAD9C16-5C6D-474F-B7F1-21BE31B5D4B8}"/>
               </a:ext>
             </a:extLst>
           </p:cNvPr>
@@ -22928,7 +22928,7 @@
           <p:cNvPr id="52" name="">
             <a:extLst xmlns:a="http://schemas.openxmlformats.org/drawingml/2006/main">
               <a:ext uri="{FF2B5EF4-FFF2-40B4-BE49-F238E27FC236}">
-                <a16:creationId xmlns:a16="http://schemas.microsoft.com/office/drawing/2014/main" id="{006BCF45-9C46-4691-8D1C-F7D0C777DC10}"/>
+                <a16:creationId xmlns:a16="http://schemas.microsoft.com/office/drawing/2014/main" id="{40066BFA-872E-4142-A334-81CAD1E14E93}"/>
               </a:ext>
             </a:extLst>
           </p:cNvPr>
@@ -22973,7 +22973,7 @@
           <p:cNvPr id="53" name="">
             <a:extLst xmlns:a="http://schemas.openxmlformats.org/drawingml/2006/main">
               <a:ext uri="{FF2B5EF4-FFF2-40B4-BE49-F238E27FC236}">
-                <a16:creationId xmlns:a16="http://schemas.microsoft.com/office/drawing/2014/main" id="{3C750AE2-B063-41A9-BF0B-741013F8BFA9}"/>
+                <a16:creationId xmlns:a16="http://schemas.microsoft.com/office/drawing/2014/main" id="{E8380787-7A86-4A74-B6CB-D008031849A3}"/>
               </a:ext>
             </a:extLst>
           </p:cNvPr>
@@ -23018,7 +23018,7 @@
           <p:cNvPr id="54" name="">
             <a:extLst xmlns:a="http://schemas.openxmlformats.org/drawingml/2006/main">
               <a:ext uri="{FF2B5EF4-FFF2-40B4-BE49-F238E27FC236}">
-                <a16:creationId xmlns:a16="http://schemas.microsoft.com/office/drawing/2014/main" id="{5CF02408-FCF5-4664-A8C0-8A90C5A3FD27}"/>
+                <a16:creationId xmlns:a16="http://schemas.microsoft.com/office/drawing/2014/main" id="{367B747D-BC2C-4ED3-89D3-1DBA337BD686}"/>
               </a:ext>
             </a:extLst>
           </p:cNvPr>
@@ -23063,7 +23063,7 @@
           <p:cNvPr id="55" name="">
             <a:extLst xmlns:a="http://schemas.openxmlformats.org/drawingml/2006/main">
               <a:ext uri="{FF2B5EF4-FFF2-40B4-BE49-F238E27FC236}">
-                <a16:creationId xmlns:a16="http://schemas.microsoft.com/office/drawing/2014/main" id="{7678A339-16B4-4C89-8CA8-5F988FC74660}"/>
+                <a16:creationId xmlns:a16="http://schemas.microsoft.com/office/drawing/2014/main" id="{CDEE27B9-6A1E-4AF9-BAAB-CE1E7DD8F88C}"/>
               </a:ext>
             </a:extLst>
           </p:cNvPr>
@@ -23108,7 +23108,7 @@
           <p:cNvPr id="56" name="">
             <a:extLst xmlns:a="http://schemas.openxmlformats.org/drawingml/2006/main">
               <a:ext uri="{FF2B5EF4-FFF2-40B4-BE49-F238E27FC236}">
-                <a16:creationId xmlns:a16="http://schemas.microsoft.com/office/drawing/2014/main" id="{2563C753-42A9-4A23-B23C-33807A68F287}"/>
+                <a16:creationId xmlns:a16="http://schemas.microsoft.com/office/drawing/2014/main" id="{C72C5A97-C4B5-4ED4-8C3F-D21DFD2E3060}"/>
               </a:ext>
             </a:extLst>
           </p:cNvPr>
@@ -23153,7 +23153,7 @@
           <p:cNvPr id="57" name="">
             <a:extLst xmlns:a="http://schemas.openxmlformats.org/drawingml/2006/main">
               <a:ext uri="{FF2B5EF4-FFF2-40B4-BE49-F238E27FC236}">
-                <a16:creationId xmlns:a16="http://schemas.microsoft.com/office/drawing/2014/main" id="{FACF9C44-B3AD-41E7-A0ED-09F16BF75705}"/>
+                <a16:creationId xmlns:a16="http://schemas.microsoft.com/office/drawing/2014/main" id="{FA7C37E7-1DBF-42D0-8CAD-ADE77DBFE14E}"/>
               </a:ext>
             </a:extLst>
           </p:cNvPr>
@@ -23184,7 +23184,7 @@
           <p:cNvPr id="58" name="">
             <a:extLst xmlns:a="http://schemas.openxmlformats.org/drawingml/2006/main">
               <a:ext uri="{FF2B5EF4-FFF2-40B4-BE49-F238E27FC236}">
-                <a16:creationId xmlns:a16="http://schemas.microsoft.com/office/drawing/2014/main" id="{FB0ABA93-DF41-4CA1-8020-1511BB4C20C4}"/>
+                <a16:creationId xmlns:a16="http://schemas.microsoft.com/office/drawing/2014/main" id="{6E834A5F-7775-4F30-A1B3-997C366A8595}"/>
               </a:ext>
             </a:extLst>
           </p:cNvPr>
@@ -23229,7 +23229,7 @@
           <p:cNvPr id="59" name="">
             <a:extLst xmlns:a="http://schemas.openxmlformats.org/drawingml/2006/main">
               <a:ext uri="{FF2B5EF4-FFF2-40B4-BE49-F238E27FC236}">
-                <a16:creationId xmlns:a16="http://schemas.microsoft.com/office/drawing/2014/main" id="{B4F00504-B553-4822-881A-84FBBA478A5D}"/>
+                <a16:creationId xmlns:a16="http://schemas.microsoft.com/office/drawing/2014/main" id="{2B3EE5F1-B1E4-4C85-B544-C9192E51ABC4}"/>
               </a:ext>
             </a:extLst>
           </p:cNvPr>
@@ -23274,7 +23274,7 @@
           <p:cNvPr id="60" name="">
             <a:extLst xmlns:a="http://schemas.openxmlformats.org/drawingml/2006/main">
               <a:ext uri="{FF2B5EF4-FFF2-40B4-BE49-F238E27FC236}">
-                <a16:creationId xmlns:a16="http://schemas.microsoft.com/office/drawing/2014/main" id="{E7C96FFE-B07A-4EB5-9438-69D3D9852833}"/>
+                <a16:creationId xmlns:a16="http://schemas.microsoft.com/office/drawing/2014/main" id="{F191ADD1-AD73-48A5-A7F2-45B29EB7B704}"/>
               </a:ext>
             </a:extLst>
           </p:cNvPr>
@@ -23319,7 +23319,7 @@
           <p:cNvPr id="61" name="">
             <a:extLst xmlns:a="http://schemas.openxmlformats.org/drawingml/2006/main">
               <a:ext uri="{FF2B5EF4-FFF2-40B4-BE49-F238E27FC236}">
-                <a16:creationId xmlns:a16="http://schemas.microsoft.com/office/drawing/2014/main" id="{B6AFE1F7-3D08-4D54-96E4-4EE60DBD60CB}"/>
+                <a16:creationId xmlns:a16="http://schemas.microsoft.com/office/drawing/2014/main" id="{121436A8-34E6-4E8C-9CEA-FC0D8F65ED06}"/>
               </a:ext>
             </a:extLst>
           </p:cNvPr>
@@ -23364,7 +23364,7 @@
           <p:cNvPr id="62" name="">
             <a:extLst xmlns:a="http://schemas.openxmlformats.org/drawingml/2006/main">
               <a:ext uri="{FF2B5EF4-FFF2-40B4-BE49-F238E27FC236}">
-                <a16:creationId xmlns:a16="http://schemas.microsoft.com/office/drawing/2014/main" id="{5EF2C39A-AAAF-49E7-8C51-1A1878B5C0BA}"/>
+                <a16:creationId xmlns:a16="http://schemas.microsoft.com/office/drawing/2014/main" id="{81D02DBD-7FA5-4F02-B96C-8394DCC7A653}"/>
               </a:ext>
             </a:extLst>
           </p:cNvPr>
@@ -23397,7 +23397,7 @@
           <p:cNvPr id="63" name="">
             <a:extLst xmlns:a="http://schemas.openxmlformats.org/drawingml/2006/main">
               <a:ext uri="{FF2B5EF4-FFF2-40B4-BE49-F238E27FC236}">
-                <a16:creationId xmlns:a16="http://schemas.microsoft.com/office/drawing/2014/main" id="{26AC92A4-51CC-4B9E-A1FE-1E7B7400B9F4}"/>
+                <a16:creationId xmlns:a16="http://schemas.microsoft.com/office/drawing/2014/main" id="{E08D0E51-3F7D-44EC-88AE-372156017D3D}"/>
               </a:ext>
             </a:extLst>
           </p:cNvPr>
@@ -23442,7 +23442,7 @@
           <p:cNvPr id="64" name="">
             <a:extLst xmlns:a="http://schemas.openxmlformats.org/drawingml/2006/main">
               <a:ext uri="{FF2B5EF4-FFF2-40B4-BE49-F238E27FC236}">
-                <a16:creationId xmlns:a16="http://schemas.microsoft.com/office/drawing/2014/main" id="{78962B6B-9B61-4DBA-B548-AF7CF18584AD}"/>
+                <a16:creationId xmlns:a16="http://schemas.microsoft.com/office/drawing/2014/main" id="{75DB29F3-587E-41E0-AA2B-096818954ED2}"/>
               </a:ext>
             </a:extLst>
           </p:cNvPr>
@@ -23487,7 +23487,7 @@
           <p:cNvPr id="65" name="">
             <a:extLst xmlns:a="http://schemas.openxmlformats.org/drawingml/2006/main">
               <a:ext uri="{FF2B5EF4-FFF2-40B4-BE49-F238E27FC236}">
-                <a16:creationId xmlns:a16="http://schemas.microsoft.com/office/drawing/2014/main" id="{BCA94372-249A-4794-BCD4-E98F235890A1}"/>
+                <a16:creationId xmlns:a16="http://schemas.microsoft.com/office/drawing/2014/main" id="{A9B6863F-F64D-4103-B14C-F94ECAF1AD94}"/>
               </a:ext>
             </a:extLst>
           </p:cNvPr>
@@ -23532,7 +23532,7 @@
           <p:cNvPr id="66" name="">
             <a:extLst xmlns:a="http://schemas.openxmlformats.org/drawingml/2006/main">
               <a:ext uri="{FF2B5EF4-FFF2-40B4-BE49-F238E27FC236}">
-                <a16:creationId xmlns:a16="http://schemas.microsoft.com/office/drawing/2014/main" id="{D32BC147-053F-46C0-AA97-DC21A9C35CE9}"/>
+                <a16:creationId xmlns:a16="http://schemas.microsoft.com/office/drawing/2014/main" id="{AF551DFE-0F0B-4778-8716-DEC30B78A7A6}"/>
               </a:ext>
             </a:extLst>
           </p:cNvPr>
@@ -23577,7 +23577,7 @@
           <p:cNvPr id="67" name="">
             <a:extLst xmlns:a="http://schemas.openxmlformats.org/drawingml/2006/main">
               <a:ext uri="{FF2B5EF4-FFF2-40B4-BE49-F238E27FC236}">
-                <a16:creationId xmlns:a16="http://schemas.microsoft.com/office/drawing/2014/main" id="{38B2820E-DC41-4076-84B1-0887675486F7}"/>
+                <a16:creationId xmlns:a16="http://schemas.microsoft.com/office/drawing/2014/main" id="{A46F1908-679C-4D81-9D48-F359C1EDFE53}"/>
               </a:ext>
             </a:extLst>
           </p:cNvPr>
@@ -23610,7 +23610,7 @@
           <p:cNvPr id="68" name="">
             <a:extLst xmlns:a="http://schemas.openxmlformats.org/drawingml/2006/main">
               <a:ext uri="{FF2B5EF4-FFF2-40B4-BE49-F238E27FC236}">
-                <a16:creationId xmlns:a16="http://schemas.microsoft.com/office/drawing/2014/main" id="{323913F4-2C57-43A7-83AD-DE43E4E4123C}"/>
+                <a16:creationId xmlns:a16="http://schemas.microsoft.com/office/drawing/2014/main" id="{4317D330-E8D9-4AF6-A4ED-2D211314CB74}"/>
               </a:ext>
             </a:extLst>
           </p:cNvPr>
@@ -23655,7 +23655,7 @@
           <p:cNvPr id="69" name="">
             <a:extLst xmlns:a="http://schemas.openxmlformats.org/drawingml/2006/main">
               <a:ext uri="{FF2B5EF4-FFF2-40B4-BE49-F238E27FC236}">
-                <a16:creationId xmlns:a16="http://schemas.microsoft.com/office/drawing/2014/main" id="{D0E66CE1-5A57-4933-A02B-C9DBF16A23D6}"/>
+                <a16:creationId xmlns:a16="http://schemas.microsoft.com/office/drawing/2014/main" id="{65934859-8E36-45DA-8E06-87A9FF93E1CF}"/>
               </a:ext>
             </a:extLst>
           </p:cNvPr>
@@ -23700,7 +23700,7 @@
           <p:cNvPr id="70" name="">
             <a:extLst xmlns:a="http://schemas.openxmlformats.org/drawingml/2006/main">
               <a:ext uri="{FF2B5EF4-FFF2-40B4-BE49-F238E27FC236}">
-                <a16:creationId xmlns:a16="http://schemas.microsoft.com/office/drawing/2014/main" id="{7317F1FD-086C-44AD-8BD0-F07D545ACA1D}"/>
+                <a16:creationId xmlns:a16="http://schemas.microsoft.com/office/drawing/2014/main" id="{72CC69C9-9498-4E13-9C4B-4478751EB9A5}"/>
               </a:ext>
             </a:extLst>
           </p:cNvPr>
@@ -23745,7 +23745,7 @@
           <p:cNvPr id="71" name="">
             <a:extLst xmlns:a="http://schemas.openxmlformats.org/drawingml/2006/main">
               <a:ext uri="{FF2B5EF4-FFF2-40B4-BE49-F238E27FC236}">
-                <a16:creationId xmlns:a16="http://schemas.microsoft.com/office/drawing/2014/main" id="{470C4AC1-809D-46F6-BBD0-582C9FC2B86D}"/>
+                <a16:creationId xmlns:a16="http://schemas.microsoft.com/office/drawing/2014/main" id="{824362E0-5F8F-4249-8AA3-E1BA04C063B8}"/>
               </a:ext>
             </a:extLst>
           </p:cNvPr>
@@ -23790,7 +23790,7 @@
           <p:cNvPr id="72" name="">
             <a:extLst xmlns:a="http://schemas.openxmlformats.org/drawingml/2006/main">
               <a:ext uri="{FF2B5EF4-FFF2-40B4-BE49-F238E27FC236}">
-                <a16:creationId xmlns:a16="http://schemas.microsoft.com/office/drawing/2014/main" id="{58CFD235-36CD-45F0-B3F7-1CACD4E45F27}"/>
+                <a16:creationId xmlns:a16="http://schemas.microsoft.com/office/drawing/2014/main" id="{1C729033-CDD2-4C67-B60E-2B2A228B8A9E}"/>
               </a:ext>
             </a:extLst>
           </p:cNvPr>
@@ -23823,7 +23823,7 @@
           <p:cNvPr id="73" name="">
             <a:extLst xmlns:a="http://schemas.openxmlformats.org/drawingml/2006/main">
               <a:ext uri="{FF2B5EF4-FFF2-40B4-BE49-F238E27FC236}">
-                <a16:creationId xmlns:a16="http://schemas.microsoft.com/office/drawing/2014/main" id="{6054B34C-4FDE-4A4B-9F51-E06D6B5A5ECE}"/>
+                <a16:creationId xmlns:a16="http://schemas.microsoft.com/office/drawing/2014/main" id="{B4D81437-91B9-4822-B21C-F362EB20A548}"/>
               </a:ext>
             </a:extLst>
           </p:cNvPr>
@@ -23868,7 +23868,7 @@
           <p:cNvPr id="74" name="">
             <a:extLst xmlns:a="http://schemas.openxmlformats.org/drawingml/2006/main">
               <a:ext uri="{FF2B5EF4-FFF2-40B4-BE49-F238E27FC236}">
-                <a16:creationId xmlns:a16="http://schemas.microsoft.com/office/drawing/2014/main" id="{F81CD8E2-D68D-4E08-A67F-7E1A28FC2DA8}"/>
+                <a16:creationId xmlns:a16="http://schemas.microsoft.com/office/drawing/2014/main" id="{95F23BFE-1EF5-4543-9D12-D319EA577B7F}"/>
               </a:ext>
             </a:extLst>
           </p:cNvPr>
@@ -23913,7 +23913,7 @@
           <p:cNvPr id="75" name="">
             <a:extLst xmlns:a="http://schemas.openxmlformats.org/drawingml/2006/main">
               <a:ext uri="{FF2B5EF4-FFF2-40B4-BE49-F238E27FC236}">
-                <a16:creationId xmlns:a16="http://schemas.microsoft.com/office/drawing/2014/main" id="{2E2F9665-B4F8-4AB7-9FE0-CB1346A26D23}"/>
+                <a16:creationId xmlns:a16="http://schemas.microsoft.com/office/drawing/2014/main" id="{1870F176-E925-4080-AE63-621247F96FCC}"/>
               </a:ext>
             </a:extLst>
           </p:cNvPr>
@@ -23958,7 +23958,7 @@
           <p:cNvPr id="76" name="">
             <a:extLst xmlns:a="http://schemas.openxmlformats.org/drawingml/2006/main">
               <a:ext uri="{FF2B5EF4-FFF2-40B4-BE49-F238E27FC236}">
-                <a16:creationId xmlns:a16="http://schemas.microsoft.com/office/drawing/2014/main" id="{224D7970-6E37-4BB4-86D4-A9A93D2280EE}"/>
+                <a16:creationId xmlns:a16="http://schemas.microsoft.com/office/drawing/2014/main" id="{5AFAA74C-9967-4D77-9D13-4F356A552BFB}"/>
               </a:ext>
             </a:extLst>
           </p:cNvPr>
@@ -24003,7 +24003,7 @@
           <p:cNvPr id="77" name="">
             <a:extLst xmlns:a="http://schemas.openxmlformats.org/drawingml/2006/main">
               <a:ext uri="{FF2B5EF4-FFF2-40B4-BE49-F238E27FC236}">
-                <a16:creationId xmlns:a16="http://schemas.microsoft.com/office/drawing/2014/main" id="{C05FA52B-6CCE-4834-97CC-C34592B8B70B}"/>
+                <a16:creationId xmlns:a16="http://schemas.microsoft.com/office/drawing/2014/main" id="{63EF16D1-75EF-4871-B88C-B1C66B55CD5C}"/>
               </a:ext>
             </a:extLst>
           </p:cNvPr>
@@ -24036,7 +24036,7 @@
           <p:cNvPr id="78" name="">
             <a:extLst xmlns:a="http://schemas.openxmlformats.org/drawingml/2006/main">
               <a:ext uri="{FF2B5EF4-FFF2-40B4-BE49-F238E27FC236}">
-                <a16:creationId xmlns:a16="http://schemas.microsoft.com/office/drawing/2014/main" id="{8D8F8AA8-9532-4C7B-8C54-C3BFB4380E55}"/>
+                <a16:creationId xmlns:a16="http://schemas.microsoft.com/office/drawing/2014/main" id="{8CEA7508-8031-4B8D-B460-338884B8CB74}"/>
               </a:ext>
             </a:extLst>
           </p:cNvPr>
@@ -24081,7 +24081,7 @@
           <p:cNvPr id="79" name="">
             <a:extLst xmlns:a="http://schemas.openxmlformats.org/drawingml/2006/main">
               <a:ext uri="{FF2B5EF4-FFF2-40B4-BE49-F238E27FC236}">
-                <a16:creationId xmlns:a16="http://schemas.microsoft.com/office/drawing/2014/main" id="{6A8D5F70-7AB5-431A-85B6-73EE1DCA2E24}"/>
+                <a16:creationId xmlns:a16="http://schemas.microsoft.com/office/drawing/2014/main" id="{644108BA-66CD-40BC-9443-626D0F65EE57}"/>
               </a:ext>
             </a:extLst>
           </p:cNvPr>
@@ -24126,7 +24126,7 @@
           <p:cNvPr id="80" name="">
             <a:extLst xmlns:a="http://schemas.openxmlformats.org/drawingml/2006/main">
               <a:ext uri="{FF2B5EF4-FFF2-40B4-BE49-F238E27FC236}">
-                <a16:creationId xmlns:a16="http://schemas.microsoft.com/office/drawing/2014/main" id="{9B1FE954-86E8-45AE-867C-9B2FE4BC3C58}"/>
+                <a16:creationId xmlns:a16="http://schemas.microsoft.com/office/drawing/2014/main" id="{51D6E392-B06B-4CDF-8431-316FD1103C5E}"/>
               </a:ext>
             </a:extLst>
           </p:cNvPr>
@@ -24171,7 +24171,7 @@
           <p:cNvPr id="81" name="">
             <a:extLst xmlns:a="http://schemas.openxmlformats.org/drawingml/2006/main">
               <a:ext uri="{FF2B5EF4-FFF2-40B4-BE49-F238E27FC236}">
-                <a16:creationId xmlns:a16="http://schemas.microsoft.com/office/drawing/2014/main" id="{5F8103E8-A80B-4DC5-8C45-4EE7752A2537}"/>
+                <a16:creationId xmlns:a16="http://schemas.microsoft.com/office/drawing/2014/main" id="{94707B1D-7E31-4135-802E-E57B0F88E456}"/>
               </a:ext>
             </a:extLst>
           </p:cNvPr>
@@ -24216,7 +24216,7 @@
           <p:cNvPr id="82" name="">
             <a:extLst xmlns:a="http://schemas.openxmlformats.org/drawingml/2006/main">
               <a:ext uri="{FF2B5EF4-FFF2-40B4-BE49-F238E27FC236}">
-                <a16:creationId xmlns:a16="http://schemas.microsoft.com/office/drawing/2014/main" id="{F84C474C-8441-48E2-A1F3-449535427D1C}"/>
+                <a16:creationId xmlns:a16="http://schemas.microsoft.com/office/drawing/2014/main" id="{7DCD15D7-36C2-4F3B-BACD-60F886389FA0}"/>
               </a:ext>
             </a:extLst>
           </p:cNvPr>
@@ -24249,7 +24249,7 @@
           <p:cNvPr id="83" name="">
             <a:extLst xmlns:a="http://schemas.openxmlformats.org/drawingml/2006/main">
               <a:ext uri="{FF2B5EF4-FFF2-40B4-BE49-F238E27FC236}">
-                <a16:creationId xmlns:a16="http://schemas.microsoft.com/office/drawing/2014/main" id="{B36B82B4-D2DA-432D-AFEB-C29C3A13D4CC}"/>
+                <a16:creationId xmlns:a16="http://schemas.microsoft.com/office/drawing/2014/main" id="{D4B90BA4-9347-4CA9-8B3C-E2D976BF4356}"/>
               </a:ext>
             </a:extLst>
           </p:cNvPr>
@@ -24294,7 +24294,7 @@
           <p:cNvPr id="84" name="">
             <a:extLst xmlns:a="http://schemas.openxmlformats.org/drawingml/2006/main">
               <a:ext uri="{FF2B5EF4-FFF2-40B4-BE49-F238E27FC236}">
-                <a16:creationId xmlns:a16="http://schemas.microsoft.com/office/drawing/2014/main" id="{8941AFD6-BAF2-444C-B8CB-479098E2D1AA}"/>
+                <a16:creationId xmlns:a16="http://schemas.microsoft.com/office/drawing/2014/main" id="{DF4C1666-AA95-4A5B-B076-B51312A56B27}"/>
               </a:ext>
             </a:extLst>
           </p:cNvPr>
@@ -24339,7 +24339,7 @@
           <p:cNvPr id="85" name="">
             <a:extLst xmlns:a="http://schemas.openxmlformats.org/drawingml/2006/main">
               <a:ext uri="{FF2B5EF4-FFF2-40B4-BE49-F238E27FC236}">
-                <a16:creationId xmlns:a16="http://schemas.microsoft.com/office/drawing/2014/main" id="{48EF447F-6B15-4E09-9EF7-40FCEC099996}"/>
+                <a16:creationId xmlns:a16="http://schemas.microsoft.com/office/drawing/2014/main" id="{45D9D6C3-35A9-4C07-B305-8D5B4DBA4F6E}"/>
               </a:ext>
             </a:extLst>
           </p:cNvPr>
@@ -24384,7 +24384,7 @@
           <p:cNvPr id="86" name="">
             <a:extLst xmlns:a="http://schemas.openxmlformats.org/drawingml/2006/main">
               <a:ext uri="{FF2B5EF4-FFF2-40B4-BE49-F238E27FC236}">
-                <a16:creationId xmlns:a16="http://schemas.microsoft.com/office/drawing/2014/main" id="{E4EEB3FC-1BF0-48C5-AE36-D32969E94D75}"/>
+                <a16:creationId xmlns:a16="http://schemas.microsoft.com/office/drawing/2014/main" id="{C466E94D-CEAF-4455-B07D-2F64CA789407}"/>
               </a:ext>
             </a:extLst>
           </p:cNvPr>
@@ -24429,7 +24429,7 @@
           <p:cNvPr id="87" name="">
             <a:extLst xmlns:a="http://schemas.openxmlformats.org/drawingml/2006/main">
               <a:ext uri="{FF2B5EF4-FFF2-40B4-BE49-F238E27FC236}">
-                <a16:creationId xmlns:a16="http://schemas.microsoft.com/office/drawing/2014/main" id="{53E57CE9-BA6A-4490-87C7-BA78BA81D261}"/>
+                <a16:creationId xmlns:a16="http://schemas.microsoft.com/office/drawing/2014/main" id="{B472956E-0D64-4844-B269-D1B86C8B41FF}"/>
               </a:ext>
             </a:extLst>
           </p:cNvPr>
@@ -24464,7 +24464,7 @@
           <p:cNvPr id="88" name="">
             <a:extLst xmlns:a="http://schemas.openxmlformats.org/drawingml/2006/main">
               <a:ext uri="{FF2B5EF4-FFF2-40B4-BE49-F238E27FC236}">
-                <a16:creationId xmlns:a16="http://schemas.microsoft.com/office/drawing/2014/main" id="{CFB5C1D3-16F0-47F3-8073-EFE75405B1DE}"/>
+                <a16:creationId xmlns:a16="http://schemas.microsoft.com/office/drawing/2014/main" id="{C002806A-2251-40B6-B190-92D9DA7D33EF}"/>
               </a:ext>
             </a:extLst>
           </p:cNvPr>
@@ -24495,7 +24495,7 @@
           <p:cNvPr id="89" name="">
             <a:extLst xmlns:a="http://schemas.openxmlformats.org/drawingml/2006/main">
               <a:ext uri="{FF2B5EF4-FFF2-40B4-BE49-F238E27FC236}">
-                <a16:creationId xmlns:a16="http://schemas.microsoft.com/office/drawing/2014/main" id="{044CBCEA-588A-4479-948D-5EEC8BBB1521}"/>
+                <a16:creationId xmlns:a16="http://schemas.microsoft.com/office/drawing/2014/main" id="{4F6221D6-2D4E-42CA-A82F-96482634A08F}"/>
               </a:ext>
             </a:extLst>
           </p:cNvPr>
@@ -24540,7 +24540,7 @@
           <p:cNvPr id="90" name="">
             <a:extLst xmlns:a="http://schemas.openxmlformats.org/drawingml/2006/main">
               <a:ext uri="{FF2B5EF4-FFF2-40B4-BE49-F238E27FC236}">
-                <a16:creationId xmlns:a16="http://schemas.microsoft.com/office/drawing/2014/main" id="{5248B6CB-B3E3-4DA0-A212-890D59D39B13}"/>
+                <a16:creationId xmlns:a16="http://schemas.microsoft.com/office/drawing/2014/main" id="{95555DB4-0055-4170-8E1A-209481550E72}"/>
               </a:ext>
             </a:extLst>
           </p:cNvPr>
@@ -24585,7 +24585,7 @@
           <p:cNvPr id="91" name="">
             <a:extLst xmlns:a="http://schemas.openxmlformats.org/drawingml/2006/main">
               <a:ext uri="{FF2B5EF4-FFF2-40B4-BE49-F238E27FC236}">
-                <a16:creationId xmlns:a16="http://schemas.microsoft.com/office/drawing/2014/main" id="{D672C262-8780-4638-9815-DD0318F369B1}"/>
+                <a16:creationId xmlns:a16="http://schemas.microsoft.com/office/drawing/2014/main" id="{A4B995BC-AFD6-4FBA-98F9-45C581B8B323}"/>
               </a:ext>
             </a:extLst>
           </p:cNvPr>
@@ -24628,7 +24628,7 @@
     </p:spTree>
     <p:extLst>
       <p:ext uri="{BB962C8B-B14F-4D97-AF65-F5344CB8AC3E}">
-        <p14:creationId xmlns:p14="http://schemas.microsoft.com/office/powerpoint/2010/main" val="1368735151"/>
+        <p14:creationId xmlns:p14="http://schemas.microsoft.com/office/powerpoint/2010/main" val="1279357919"/>
       </p:ext>
     </p:extLst>
   </p:cSld>
@@ -24652,7 +24652,7 @@
           <p:cNvPr id="64" name="">
             <a:extLst xmlns:a="http://schemas.openxmlformats.org/drawingml/2006/main">
               <a:ext uri="{FF2B5EF4-FFF2-40B4-BE49-F238E27FC236}">
-                <a16:creationId xmlns:a16="http://schemas.microsoft.com/office/drawing/2014/main" id="{E54D07FE-3867-425B-A196-E1EAD25ED845}"/>
+                <a16:creationId xmlns:a16="http://schemas.microsoft.com/office/drawing/2014/main" id="{AC2DFDBA-C805-4179-A97D-86290A3FB197}"/>
               </a:ext>
             </a:extLst>
           </p:cNvPr>
@@ -24683,7 +24683,7 @@
           <p:cNvPr id="2" name="">
             <a:extLst xmlns:a="http://schemas.openxmlformats.org/drawingml/2006/main">
               <a:ext uri="{FF2B5EF4-FFF2-40B4-BE49-F238E27FC236}">
-                <a16:creationId xmlns:a16="http://schemas.microsoft.com/office/drawing/2014/main" id="{9D6E0FE0-062E-4C12-BC04-A9A1C835BE30}"/>
+                <a16:creationId xmlns:a16="http://schemas.microsoft.com/office/drawing/2014/main" id="{4F8D2B7C-0E24-43E7-8206-340E9F3F27CA}"/>
               </a:ext>
             </a:extLst>
           </p:cNvPr>
@@ -24728,7 +24728,7 @@
           <p:cNvPr id="3" name="">
             <a:extLst xmlns:a="http://schemas.openxmlformats.org/drawingml/2006/main">
               <a:ext uri="{FF2B5EF4-FFF2-40B4-BE49-F238E27FC236}">
-                <a16:creationId xmlns:a16="http://schemas.microsoft.com/office/drawing/2014/main" id="{ECA69FD5-B363-4EF0-8379-64744C3A1678}"/>
+                <a16:creationId xmlns:a16="http://schemas.microsoft.com/office/drawing/2014/main" id="{D9BB87F4-067C-4C60-88E7-FF6D249A55E9}"/>
               </a:ext>
             </a:extLst>
           </p:cNvPr>
@@ -24773,7 +24773,7 @@
           <p:cNvPr id="4" name="">
             <a:extLst xmlns:a="http://schemas.openxmlformats.org/drawingml/2006/main">
               <a:ext uri="{FF2B5EF4-FFF2-40B4-BE49-F238E27FC236}">
-                <a16:creationId xmlns:a16="http://schemas.microsoft.com/office/drawing/2014/main" id="{24208748-2770-4D6D-BE41-2E0831AC1269}"/>
+                <a16:creationId xmlns:a16="http://schemas.microsoft.com/office/drawing/2014/main" id="{EBA566D4-9EA0-49E5-A815-4AD81EAB5BA5}"/>
               </a:ext>
             </a:extLst>
           </p:cNvPr>
@@ -24818,7 +24818,7 @@
           <p:cNvPr id="5" name="">
             <a:extLst xmlns:a="http://schemas.openxmlformats.org/drawingml/2006/main">
               <a:ext uri="{FF2B5EF4-FFF2-40B4-BE49-F238E27FC236}">
-                <a16:creationId xmlns:a16="http://schemas.microsoft.com/office/drawing/2014/main" id="{D4C74F48-AE9A-4318-B606-9611EBA4038D}"/>
+                <a16:creationId xmlns:a16="http://schemas.microsoft.com/office/drawing/2014/main" id="{0193C76C-B996-48A0-B372-613F71444FEA}"/>
               </a:ext>
             </a:extLst>
           </p:cNvPr>
@@ -24849,7 +24849,7 @@
           <p:cNvPr id="6" name="">
             <a:extLst xmlns:a="http://schemas.openxmlformats.org/drawingml/2006/main">
               <a:ext uri="{FF2B5EF4-FFF2-40B4-BE49-F238E27FC236}">
-                <a16:creationId xmlns:a16="http://schemas.microsoft.com/office/drawing/2014/main" id="{D6779B64-CC7C-4E9D-97AC-922E2D0525D6}"/>
+                <a16:creationId xmlns:a16="http://schemas.microsoft.com/office/drawing/2014/main" id="{D26FD256-9BAF-4FB4-8B02-59EB0AC438AD}"/>
               </a:ext>
             </a:extLst>
           </p:cNvPr>
@@ -24880,7 +24880,7 @@
           <p:cNvPr id="7" name="">
             <a:extLst xmlns:a="http://schemas.openxmlformats.org/drawingml/2006/main">
               <a:ext uri="{FF2B5EF4-FFF2-40B4-BE49-F238E27FC236}">
-                <a16:creationId xmlns:a16="http://schemas.microsoft.com/office/drawing/2014/main" id="{1FC1E9D7-B623-4EDF-A186-E83BC3518E43}"/>
+                <a16:creationId xmlns:a16="http://schemas.microsoft.com/office/drawing/2014/main" id="{B3C0BDEA-635E-4BD0-9F06-9F842F6B1006}"/>
               </a:ext>
             </a:extLst>
           </p:cNvPr>
@@ -24925,7 +24925,7 @@
           <p:cNvPr id="8" name="">
             <a:extLst xmlns:a="http://schemas.openxmlformats.org/drawingml/2006/main">
               <a:ext uri="{FF2B5EF4-FFF2-40B4-BE49-F238E27FC236}">
-                <a16:creationId xmlns:a16="http://schemas.microsoft.com/office/drawing/2014/main" id="{DB832762-F2B0-4824-81D1-B235E85FC138}"/>
+                <a16:creationId xmlns:a16="http://schemas.microsoft.com/office/drawing/2014/main" id="{F38C6C99-8361-4D40-90CA-8A6C15FCB1EE}"/>
               </a:ext>
             </a:extLst>
           </p:cNvPr>
@@ -24970,7 +24970,7 @@
           <p:cNvPr id="9" name="">
             <a:extLst xmlns:a="http://schemas.openxmlformats.org/drawingml/2006/main">
               <a:ext uri="{FF2B5EF4-FFF2-40B4-BE49-F238E27FC236}">
-                <a16:creationId xmlns:a16="http://schemas.microsoft.com/office/drawing/2014/main" id="{0F07D35B-3403-47DD-8470-2E2AF4DFAE65}"/>
+                <a16:creationId xmlns:a16="http://schemas.microsoft.com/office/drawing/2014/main" id="{3868B319-F312-4E02-9056-DABACCBE1749}"/>
               </a:ext>
             </a:extLst>
           </p:cNvPr>
@@ -25001,7 +25001,7 @@
           <p:cNvPr id="10" name="">
             <a:extLst xmlns:a="http://schemas.openxmlformats.org/drawingml/2006/main">
               <a:ext uri="{FF2B5EF4-FFF2-40B4-BE49-F238E27FC236}">
-                <a16:creationId xmlns:a16="http://schemas.microsoft.com/office/drawing/2014/main" id="{7654AE1E-BF3C-4937-9362-52A944B2B779}"/>
+                <a16:creationId xmlns:a16="http://schemas.microsoft.com/office/drawing/2014/main" id="{E56F33BE-2432-408F-848C-918F86F19B7D}"/>
               </a:ext>
             </a:extLst>
           </p:cNvPr>
@@ -25046,7 +25046,7 @@
           <p:cNvPr id="11" name="">
             <a:extLst xmlns:a="http://schemas.openxmlformats.org/drawingml/2006/main">
               <a:ext uri="{FF2B5EF4-FFF2-40B4-BE49-F238E27FC236}">
-                <a16:creationId xmlns:a16="http://schemas.microsoft.com/office/drawing/2014/main" id="{96725632-8B6F-4F89-8BEA-BDF905C87D96}"/>
+                <a16:creationId xmlns:a16="http://schemas.microsoft.com/office/drawing/2014/main" id="{77300F16-9F9C-435C-8FC3-13E8727BD698}"/>
               </a:ext>
             </a:extLst>
           </p:cNvPr>
@@ -25091,7 +25091,7 @@
           <p:cNvPr id="12" name="">
             <a:extLst xmlns:a="http://schemas.openxmlformats.org/drawingml/2006/main">
               <a:ext uri="{FF2B5EF4-FFF2-40B4-BE49-F238E27FC236}">
-                <a16:creationId xmlns:a16="http://schemas.microsoft.com/office/drawing/2014/main" id="{E21BDE0F-0F52-4FF4-B56C-A9293B1DD609}"/>
+                <a16:creationId xmlns:a16="http://schemas.microsoft.com/office/drawing/2014/main" id="{3DEBCA9C-F395-4984-9A59-2163AFB1C7C5}"/>
               </a:ext>
             </a:extLst>
           </p:cNvPr>
@@ -25136,7 +25136,7 @@
           <p:cNvPr id="13" name="">
             <a:extLst xmlns:a="http://schemas.openxmlformats.org/drawingml/2006/main">
               <a:ext uri="{FF2B5EF4-FFF2-40B4-BE49-F238E27FC236}">
-                <a16:creationId xmlns:a16="http://schemas.microsoft.com/office/drawing/2014/main" id="{416B0F88-4936-4C01-96FE-F9E4424F84C7}"/>
+                <a16:creationId xmlns:a16="http://schemas.microsoft.com/office/drawing/2014/main" id="{B940B45E-0BF8-4923-89C6-4442A2382ED1}"/>
               </a:ext>
             </a:extLst>
           </p:cNvPr>
@@ -25181,7 +25181,7 @@
           <p:cNvPr id="14" name="">
             <a:extLst xmlns:a="http://schemas.openxmlformats.org/drawingml/2006/main">
               <a:ext uri="{FF2B5EF4-FFF2-40B4-BE49-F238E27FC236}">
-                <a16:creationId xmlns:a16="http://schemas.microsoft.com/office/drawing/2014/main" id="{82D074A5-A4FA-455B-9B3C-539BAA1DD363}"/>
+                <a16:creationId xmlns:a16="http://schemas.microsoft.com/office/drawing/2014/main" id="{DC2DB549-168B-47D8-BE3D-23EAD09D80C9}"/>
               </a:ext>
             </a:extLst>
           </p:cNvPr>
@@ -25214,7 +25214,7 @@
           <p:cNvPr id="15" name="">
             <a:extLst xmlns:a="http://schemas.openxmlformats.org/drawingml/2006/main">
               <a:ext uri="{FF2B5EF4-FFF2-40B4-BE49-F238E27FC236}">
-                <a16:creationId xmlns:a16="http://schemas.microsoft.com/office/drawing/2014/main" id="{948D04F6-8F4B-4F63-83A0-E10DC19395B9}"/>
+                <a16:creationId xmlns:a16="http://schemas.microsoft.com/office/drawing/2014/main" id="{034AB415-8E99-427A-95B4-22CAAED31260}"/>
               </a:ext>
             </a:extLst>
           </p:cNvPr>
@@ -25245,7 +25245,7 @@
           <p:cNvPr id="16" name="">
             <a:extLst xmlns:a="http://schemas.openxmlformats.org/drawingml/2006/main">
               <a:ext uri="{FF2B5EF4-FFF2-40B4-BE49-F238E27FC236}">
-                <a16:creationId xmlns:a16="http://schemas.microsoft.com/office/drawing/2014/main" id="{B83CE3D6-9979-44D6-8A62-E365F06BA6CD}"/>
+                <a16:creationId xmlns:a16="http://schemas.microsoft.com/office/drawing/2014/main" id="{30824E27-31A6-481C-8064-72796EE0743B}"/>
               </a:ext>
             </a:extLst>
           </p:cNvPr>
@@ -25290,7 +25290,7 @@
           <p:cNvPr id="17" name="">
             <a:extLst xmlns:a="http://schemas.openxmlformats.org/drawingml/2006/main">
               <a:ext uri="{FF2B5EF4-FFF2-40B4-BE49-F238E27FC236}">
-                <a16:creationId xmlns:a16="http://schemas.microsoft.com/office/drawing/2014/main" id="{06B6C003-EE93-4833-8E16-70B1321F03BB}"/>
+                <a16:creationId xmlns:a16="http://schemas.microsoft.com/office/drawing/2014/main" id="{B035F116-8DFC-418A-9BCE-063CBE9FBC97}"/>
               </a:ext>
             </a:extLst>
           </p:cNvPr>
@@ -25335,7 +25335,7 @@
           <p:cNvPr id="18" name="">
             <a:extLst xmlns:a="http://schemas.openxmlformats.org/drawingml/2006/main">
               <a:ext uri="{FF2B5EF4-FFF2-40B4-BE49-F238E27FC236}">
-                <a16:creationId xmlns:a16="http://schemas.microsoft.com/office/drawing/2014/main" id="{9F0C6842-F3CD-46A9-BF11-23346C435678}"/>
+                <a16:creationId xmlns:a16="http://schemas.microsoft.com/office/drawing/2014/main" id="{739C1170-B46A-4F15-9A41-DC869EB8CD68}"/>
               </a:ext>
             </a:extLst>
           </p:cNvPr>
@@ -25380,7 +25380,7 @@
           <p:cNvPr id="19" name="">
             <a:extLst xmlns:a="http://schemas.openxmlformats.org/drawingml/2006/main">
               <a:ext uri="{FF2B5EF4-FFF2-40B4-BE49-F238E27FC236}">
-                <a16:creationId xmlns:a16="http://schemas.microsoft.com/office/drawing/2014/main" id="{C63AA291-3F5A-44B6-9214-2FE2A5E6AC8F}"/>
+                <a16:creationId xmlns:a16="http://schemas.microsoft.com/office/drawing/2014/main" id="{61C6544E-8A3A-4C11-B4C7-550534A448A9}"/>
               </a:ext>
             </a:extLst>
           </p:cNvPr>
@@ -25425,7 +25425,7 @@
           <p:cNvPr id="20" name="">
             <a:extLst xmlns:a="http://schemas.openxmlformats.org/drawingml/2006/main">
               <a:ext uri="{FF2B5EF4-FFF2-40B4-BE49-F238E27FC236}">
-                <a16:creationId xmlns:a16="http://schemas.microsoft.com/office/drawing/2014/main" id="{AB56E2D5-9116-4541-BB37-84191B601B80}"/>
+                <a16:creationId xmlns:a16="http://schemas.microsoft.com/office/drawing/2014/main" id="{93010EB0-3287-4ECF-A96F-70B9677A02E7}"/>
               </a:ext>
             </a:extLst>
           </p:cNvPr>
@@ -25458,7 +25458,7 @@
           <p:cNvPr id="21" name="">
             <a:extLst xmlns:a="http://schemas.openxmlformats.org/drawingml/2006/main">
               <a:ext uri="{FF2B5EF4-FFF2-40B4-BE49-F238E27FC236}">
-                <a16:creationId xmlns:a16="http://schemas.microsoft.com/office/drawing/2014/main" id="{0D6B9A09-68EA-4212-B631-F96254B75E7C}"/>
+                <a16:creationId xmlns:a16="http://schemas.microsoft.com/office/drawing/2014/main" id="{29ADF070-8A90-4166-8170-84EC16802AA9}"/>
               </a:ext>
             </a:extLst>
           </p:cNvPr>
@@ -25503,7 +25503,7 @@
           <p:cNvPr id="22" name="">
             <a:extLst xmlns:a="http://schemas.openxmlformats.org/drawingml/2006/main">
               <a:ext uri="{FF2B5EF4-FFF2-40B4-BE49-F238E27FC236}">
-                <a16:creationId xmlns:a16="http://schemas.microsoft.com/office/drawing/2014/main" id="{6C088AC6-B56E-4B55-B161-02E172D9542B}"/>
+                <a16:creationId xmlns:a16="http://schemas.microsoft.com/office/drawing/2014/main" id="{903AB1B5-F673-414D-A322-899684EA4DA7}"/>
               </a:ext>
             </a:extLst>
           </p:cNvPr>
@@ -25548,7 +25548,7 @@
           <p:cNvPr id="23" name="">
             <a:extLst xmlns:a="http://schemas.openxmlformats.org/drawingml/2006/main">
               <a:ext uri="{FF2B5EF4-FFF2-40B4-BE49-F238E27FC236}">
-                <a16:creationId xmlns:a16="http://schemas.microsoft.com/office/drawing/2014/main" id="{9E8A4291-EA25-4F51-A2B1-D77BD632D00F}"/>
+                <a16:creationId xmlns:a16="http://schemas.microsoft.com/office/drawing/2014/main" id="{29F71148-0E89-4CFF-8416-B43416EDBF00}"/>
               </a:ext>
             </a:extLst>
           </p:cNvPr>
@@ -25593,7 +25593,7 @@
           <p:cNvPr id="24" name="">
             <a:extLst xmlns:a="http://schemas.openxmlformats.org/drawingml/2006/main">
               <a:ext uri="{FF2B5EF4-FFF2-40B4-BE49-F238E27FC236}">
-                <a16:creationId xmlns:a16="http://schemas.microsoft.com/office/drawing/2014/main" id="{D0A8C261-EEB5-48AA-9385-E6732B7E3496}"/>
+                <a16:creationId xmlns:a16="http://schemas.microsoft.com/office/drawing/2014/main" id="{D8DFC174-4A98-4322-9D95-53A338C2EF9B}"/>
               </a:ext>
             </a:extLst>
           </p:cNvPr>
@@ -25638,7 +25638,7 @@
           <p:cNvPr id="25" name="">
             <a:extLst xmlns:a="http://schemas.openxmlformats.org/drawingml/2006/main">
               <a:ext uri="{FF2B5EF4-FFF2-40B4-BE49-F238E27FC236}">
-                <a16:creationId xmlns:a16="http://schemas.microsoft.com/office/drawing/2014/main" id="{F0D48517-2695-4434-9CB0-80C6CDE2DA6C}"/>
+                <a16:creationId xmlns:a16="http://schemas.microsoft.com/office/drawing/2014/main" id="{677BCBB7-DE7D-427D-9037-689BDF5B437D}"/>
               </a:ext>
             </a:extLst>
           </p:cNvPr>
@@ -25671,7 +25671,7 @@
           <p:cNvPr id="26" name="">
             <a:extLst xmlns:a="http://schemas.openxmlformats.org/drawingml/2006/main">
               <a:ext uri="{FF2B5EF4-FFF2-40B4-BE49-F238E27FC236}">
-                <a16:creationId xmlns:a16="http://schemas.microsoft.com/office/drawing/2014/main" id="{CDCC8024-BC62-4EE7-BDE8-BDBA329F3EA7}"/>
+                <a16:creationId xmlns:a16="http://schemas.microsoft.com/office/drawing/2014/main" id="{1C534F6A-E654-42B3-A057-50064B40D8E0}"/>
               </a:ext>
             </a:extLst>
           </p:cNvPr>
@@ -25716,7 +25716,7 @@
           <p:cNvPr id="27" name="">
             <a:extLst xmlns:a="http://schemas.openxmlformats.org/drawingml/2006/main">
               <a:ext uri="{FF2B5EF4-FFF2-40B4-BE49-F238E27FC236}">
-                <a16:creationId xmlns:a16="http://schemas.microsoft.com/office/drawing/2014/main" id="{D4121FAB-A79C-4FCE-B236-53735E027304}"/>
+                <a16:creationId xmlns:a16="http://schemas.microsoft.com/office/drawing/2014/main" id="{16C78AB3-97E4-4FC5-AB8A-9AE93ED9EB86}"/>
               </a:ext>
             </a:extLst>
           </p:cNvPr>
@@ -25761,7 +25761,7 @@
           <p:cNvPr id="28" name="">
             <a:extLst xmlns:a="http://schemas.openxmlformats.org/drawingml/2006/main">
               <a:ext uri="{FF2B5EF4-FFF2-40B4-BE49-F238E27FC236}">
-                <a16:creationId xmlns:a16="http://schemas.microsoft.com/office/drawing/2014/main" id="{5FEE9B41-B342-40E3-9B70-BA153F6F7FBF}"/>
+                <a16:creationId xmlns:a16="http://schemas.microsoft.com/office/drawing/2014/main" id="{4F89485C-8230-403D-B7FF-253E2A613184}"/>
               </a:ext>
             </a:extLst>
           </p:cNvPr>
@@ -25806,7 +25806,7 @@
           <p:cNvPr id="29" name="">
             <a:extLst xmlns:a="http://schemas.openxmlformats.org/drawingml/2006/main">
               <a:ext uri="{FF2B5EF4-FFF2-40B4-BE49-F238E27FC236}">
-                <a16:creationId xmlns:a16="http://schemas.microsoft.com/office/drawing/2014/main" id="{724FE931-15DC-4682-A27D-C0F3F628777F}"/>
+                <a16:creationId xmlns:a16="http://schemas.microsoft.com/office/drawing/2014/main" id="{933676AF-1FCB-4DDA-A3B0-B84D125C4BFB}"/>
               </a:ext>
             </a:extLst>
           </p:cNvPr>
@@ -25851,7 +25851,7 @@
           <p:cNvPr id="30" name="">
             <a:extLst xmlns:a="http://schemas.openxmlformats.org/drawingml/2006/main">
               <a:ext uri="{FF2B5EF4-FFF2-40B4-BE49-F238E27FC236}">
-                <a16:creationId xmlns:a16="http://schemas.microsoft.com/office/drawing/2014/main" id="{506445CE-A7F5-4826-AE5F-369932B583C8}"/>
+                <a16:creationId xmlns:a16="http://schemas.microsoft.com/office/drawing/2014/main" id="{22C8B0E2-AC05-4C15-BA47-3D3E56D2CBC5}"/>
               </a:ext>
             </a:extLst>
           </p:cNvPr>
@@ -25884,7 +25884,7 @@
           <p:cNvPr id="31" name="">
             <a:extLst xmlns:a="http://schemas.openxmlformats.org/drawingml/2006/main">
               <a:ext uri="{FF2B5EF4-FFF2-40B4-BE49-F238E27FC236}">
-                <a16:creationId xmlns:a16="http://schemas.microsoft.com/office/drawing/2014/main" id="{406EEB45-10A3-4F12-9646-C7DF6C3F4D71}"/>
+                <a16:creationId xmlns:a16="http://schemas.microsoft.com/office/drawing/2014/main" id="{1A765FF3-1C15-45D6-B568-3B21A64474A4}"/>
               </a:ext>
             </a:extLst>
           </p:cNvPr>
@@ -25929,7 +25929,7 @@
           <p:cNvPr id="32" name="">
             <a:extLst xmlns:a="http://schemas.openxmlformats.org/drawingml/2006/main">
               <a:ext uri="{FF2B5EF4-FFF2-40B4-BE49-F238E27FC236}">
-                <a16:creationId xmlns:a16="http://schemas.microsoft.com/office/drawing/2014/main" id="{71955546-29AE-4BDC-BB94-3B8A820E3F91}"/>
+                <a16:creationId xmlns:a16="http://schemas.microsoft.com/office/drawing/2014/main" id="{F07161F1-FB94-4C47-9E63-D9644EA7AF4F}"/>
               </a:ext>
             </a:extLst>
           </p:cNvPr>
@@ -25974,7 +25974,7 @@
           <p:cNvPr id="33" name="">
             <a:extLst xmlns:a="http://schemas.openxmlformats.org/drawingml/2006/main">
               <a:ext uri="{FF2B5EF4-FFF2-40B4-BE49-F238E27FC236}">
-                <a16:creationId xmlns:a16="http://schemas.microsoft.com/office/drawing/2014/main" id="{5CAC7F59-6A6A-437B-9E81-6FF4B9E6FF4A}"/>
+                <a16:creationId xmlns:a16="http://schemas.microsoft.com/office/drawing/2014/main" id="{AF09FD5E-F011-4C81-908D-16733A62ACF1}"/>
               </a:ext>
             </a:extLst>
           </p:cNvPr>
@@ -26019,7 +26019,7 @@
           <p:cNvPr id="34" name="">
             <a:extLst xmlns:a="http://schemas.openxmlformats.org/drawingml/2006/main">
               <a:ext uri="{FF2B5EF4-FFF2-40B4-BE49-F238E27FC236}">
-                <a16:creationId xmlns:a16="http://schemas.microsoft.com/office/drawing/2014/main" id="{9DE9B454-89AD-4A64-92BD-032727804C92}"/>
+                <a16:creationId xmlns:a16="http://schemas.microsoft.com/office/drawing/2014/main" id="{89391ADD-71E3-4778-B454-3B544835DA08}"/>
               </a:ext>
             </a:extLst>
           </p:cNvPr>
@@ -26064,7 +26064,7 @@
           <p:cNvPr id="35" name="">
             <a:extLst xmlns:a="http://schemas.openxmlformats.org/drawingml/2006/main">
               <a:ext uri="{FF2B5EF4-FFF2-40B4-BE49-F238E27FC236}">
-                <a16:creationId xmlns:a16="http://schemas.microsoft.com/office/drawing/2014/main" id="{D286219E-67A2-445A-8CAB-65E8CB61BD16}"/>
+                <a16:creationId xmlns:a16="http://schemas.microsoft.com/office/drawing/2014/main" id="{6DE8DB7A-6372-4D85-A359-50AFFF2AE5CE}"/>
               </a:ext>
             </a:extLst>
           </p:cNvPr>
@@ -26097,7 +26097,7 @@
           <p:cNvPr id="36" name="">
             <a:extLst xmlns:a="http://schemas.openxmlformats.org/drawingml/2006/main">
               <a:ext uri="{FF2B5EF4-FFF2-40B4-BE49-F238E27FC236}">
-                <a16:creationId xmlns:a16="http://schemas.microsoft.com/office/drawing/2014/main" id="{043F099C-8B0E-4F33-9FE2-D4B77CDEFEDB}"/>
+                <a16:creationId xmlns:a16="http://schemas.microsoft.com/office/drawing/2014/main" id="{6B7B87EC-991C-4357-91DE-2140096399C3}"/>
               </a:ext>
             </a:extLst>
           </p:cNvPr>
@@ -26142,7 +26142,7 @@
           <p:cNvPr id="37" name="">
             <a:extLst xmlns:a="http://schemas.openxmlformats.org/drawingml/2006/main">
               <a:ext uri="{FF2B5EF4-FFF2-40B4-BE49-F238E27FC236}">
-                <a16:creationId xmlns:a16="http://schemas.microsoft.com/office/drawing/2014/main" id="{621EAB1D-904D-410A-8D19-7747F4BE6D15}"/>
+                <a16:creationId xmlns:a16="http://schemas.microsoft.com/office/drawing/2014/main" id="{FA042D23-D5C7-42E3-B118-AADF0D077D1A}"/>
               </a:ext>
             </a:extLst>
           </p:cNvPr>
@@ -26187,7 +26187,7 @@
           <p:cNvPr id="38" name="">
             <a:extLst xmlns:a="http://schemas.openxmlformats.org/drawingml/2006/main">
               <a:ext uri="{FF2B5EF4-FFF2-40B4-BE49-F238E27FC236}">
-                <a16:creationId xmlns:a16="http://schemas.microsoft.com/office/drawing/2014/main" id="{3510E9AF-BC7A-4875-AD89-82445628021C}"/>
+                <a16:creationId xmlns:a16="http://schemas.microsoft.com/office/drawing/2014/main" id="{6AD8BADB-7CA2-49B7-9F67-59108E90AFE5}"/>
               </a:ext>
             </a:extLst>
           </p:cNvPr>
@@ -26232,7 +26232,7 @@
           <p:cNvPr id="39" name="">
             <a:extLst xmlns:a="http://schemas.openxmlformats.org/drawingml/2006/main">
               <a:ext uri="{FF2B5EF4-FFF2-40B4-BE49-F238E27FC236}">
-                <a16:creationId xmlns:a16="http://schemas.microsoft.com/office/drawing/2014/main" id="{3AD17969-F019-445E-B9FF-B92BF4D035FE}"/>
+                <a16:creationId xmlns:a16="http://schemas.microsoft.com/office/drawing/2014/main" id="{E0E43A2C-F673-4425-BF59-9FFADF75D6FA}"/>
               </a:ext>
             </a:extLst>
           </p:cNvPr>
@@ -26277,7 +26277,7 @@
           <p:cNvPr id="40" name="">
             <a:extLst xmlns:a="http://schemas.openxmlformats.org/drawingml/2006/main">
               <a:ext uri="{FF2B5EF4-FFF2-40B4-BE49-F238E27FC236}">
-                <a16:creationId xmlns:a16="http://schemas.microsoft.com/office/drawing/2014/main" id="{DD27F8DB-1BBA-4F25-8D00-6685044A9FD2}"/>
+                <a16:creationId xmlns:a16="http://schemas.microsoft.com/office/drawing/2014/main" id="{67DC69D1-8CFF-4BD0-889B-7CB6CDBFAF6E}"/>
               </a:ext>
             </a:extLst>
           </p:cNvPr>
@@ -26310,7 +26310,7 @@
           <p:cNvPr id="41" name="">
             <a:extLst xmlns:a="http://schemas.openxmlformats.org/drawingml/2006/main">
               <a:ext uri="{FF2B5EF4-FFF2-40B4-BE49-F238E27FC236}">
-                <a16:creationId xmlns:a16="http://schemas.microsoft.com/office/drawing/2014/main" id="{D743EDD8-BB13-4E12-AEB0-32A3A1EDD484}"/>
+                <a16:creationId xmlns:a16="http://schemas.microsoft.com/office/drawing/2014/main" id="{E385410B-2B31-4353-8FF9-427092DE71C5}"/>
               </a:ext>
             </a:extLst>
           </p:cNvPr>
@@ -26355,7 +26355,7 @@
           <p:cNvPr id="42" name="">
             <a:extLst xmlns:a="http://schemas.openxmlformats.org/drawingml/2006/main">
               <a:ext uri="{FF2B5EF4-FFF2-40B4-BE49-F238E27FC236}">
-                <a16:creationId xmlns:a16="http://schemas.microsoft.com/office/drawing/2014/main" id="{84415700-F1EB-4BFA-888B-E9F47D0BD2FA}"/>
+                <a16:creationId xmlns:a16="http://schemas.microsoft.com/office/drawing/2014/main" id="{B9204EE7-8775-4C46-AA38-455462553D0F}"/>
               </a:ext>
             </a:extLst>
           </p:cNvPr>
@@ -26400,7 +26400,7 @@
           <p:cNvPr id="43" name="">
             <a:extLst xmlns:a="http://schemas.openxmlformats.org/drawingml/2006/main">
               <a:ext uri="{FF2B5EF4-FFF2-40B4-BE49-F238E27FC236}">
-                <a16:creationId xmlns:a16="http://schemas.microsoft.com/office/drawing/2014/main" id="{1CAB9760-BCB9-4B9F-874D-BC3106A2C489}"/>
+                <a16:creationId xmlns:a16="http://schemas.microsoft.com/office/drawing/2014/main" id="{4030DDC0-4F0C-4891-9889-34192B746294}"/>
               </a:ext>
             </a:extLst>
           </p:cNvPr>
@@ -26445,7 +26445,7 @@
           <p:cNvPr id="44" name="">
             <a:extLst xmlns:a="http://schemas.openxmlformats.org/drawingml/2006/main">
               <a:ext uri="{FF2B5EF4-FFF2-40B4-BE49-F238E27FC236}">
-                <a16:creationId xmlns:a16="http://schemas.microsoft.com/office/drawing/2014/main" id="{246672FD-7597-4657-95B8-2D3B3680B9EF}"/>
+                <a16:creationId xmlns:a16="http://schemas.microsoft.com/office/drawing/2014/main" id="{8D68BBBD-2A62-413D-8FD9-D621B97BC95E}"/>
               </a:ext>
             </a:extLst>
           </p:cNvPr>
@@ -26490,7 +26490,7 @@
           <p:cNvPr id="45" name="">
             <a:extLst xmlns:a="http://schemas.openxmlformats.org/drawingml/2006/main">
               <a:ext uri="{FF2B5EF4-FFF2-40B4-BE49-F238E27FC236}">
-                <a16:creationId xmlns:a16="http://schemas.microsoft.com/office/drawing/2014/main" id="{8D1BD4DC-537D-4C77-B2BA-9CB1C71BAE9B}"/>
+                <a16:creationId xmlns:a16="http://schemas.microsoft.com/office/drawing/2014/main" id="{992B8711-73D2-4CC5-B712-9390B6AAF564}"/>
               </a:ext>
             </a:extLst>
           </p:cNvPr>
@@ -26523,7 +26523,7 @@
           <p:cNvPr id="46" name="">
             <a:extLst xmlns:a="http://schemas.openxmlformats.org/drawingml/2006/main">
               <a:ext uri="{FF2B5EF4-FFF2-40B4-BE49-F238E27FC236}">
-                <a16:creationId xmlns:a16="http://schemas.microsoft.com/office/drawing/2014/main" id="{391532B6-AAE7-4BE4-BAFD-3261EE0BD2B4}"/>
+                <a16:creationId xmlns:a16="http://schemas.microsoft.com/office/drawing/2014/main" id="{C0CBF271-51F1-474D-B6DA-D8FADFA1A8FB}"/>
               </a:ext>
             </a:extLst>
           </p:cNvPr>
@@ -26568,7 +26568,7 @@
           <p:cNvPr id="47" name="">
             <a:extLst xmlns:a="http://schemas.openxmlformats.org/drawingml/2006/main">
               <a:ext uri="{FF2B5EF4-FFF2-40B4-BE49-F238E27FC236}">
-                <a16:creationId xmlns:a16="http://schemas.microsoft.com/office/drawing/2014/main" id="{E0335FD9-1DCB-4790-BE14-6F6B18D32FCF}"/>
+                <a16:creationId xmlns:a16="http://schemas.microsoft.com/office/drawing/2014/main" id="{F2C423C3-E273-46F9-B6B5-54A95E386C12}"/>
               </a:ext>
             </a:extLst>
           </p:cNvPr>
@@ -26613,7 +26613,7 @@
           <p:cNvPr id="48" name="">
             <a:extLst xmlns:a="http://schemas.openxmlformats.org/drawingml/2006/main">
               <a:ext uri="{FF2B5EF4-FFF2-40B4-BE49-F238E27FC236}">
-                <a16:creationId xmlns:a16="http://schemas.microsoft.com/office/drawing/2014/main" id="{834F4328-2D9F-42CF-BB9A-56C4396528BD}"/>
+                <a16:creationId xmlns:a16="http://schemas.microsoft.com/office/drawing/2014/main" id="{3E315175-7211-427E-8142-6723203E9267}"/>
               </a:ext>
             </a:extLst>
           </p:cNvPr>
@@ -26658,7 +26658,7 @@
           <p:cNvPr id="49" name="">
             <a:extLst xmlns:a="http://schemas.openxmlformats.org/drawingml/2006/main">
               <a:ext uri="{FF2B5EF4-FFF2-40B4-BE49-F238E27FC236}">
-                <a16:creationId xmlns:a16="http://schemas.microsoft.com/office/drawing/2014/main" id="{7CD58D9C-06A8-45D4-8609-B5FEDAD17BD1}"/>
+                <a16:creationId xmlns:a16="http://schemas.microsoft.com/office/drawing/2014/main" id="{F7F49F46-F354-48CE-8D51-8890B22750D3}"/>
               </a:ext>
             </a:extLst>
           </p:cNvPr>
@@ -26703,7 +26703,7 @@
           <p:cNvPr id="50" name="">
             <a:extLst xmlns:a="http://schemas.openxmlformats.org/drawingml/2006/main">
               <a:ext uri="{FF2B5EF4-FFF2-40B4-BE49-F238E27FC236}">
-                <a16:creationId xmlns:a16="http://schemas.microsoft.com/office/drawing/2014/main" id="{BE95FEA5-8CC8-44E1-AB5B-A1BC4C76018F}"/>
+                <a16:creationId xmlns:a16="http://schemas.microsoft.com/office/drawing/2014/main" id="{30E3F7A5-E461-4C3A-B338-DAD3A712A986}"/>
               </a:ext>
             </a:extLst>
           </p:cNvPr>
@@ -26748,7 +26748,7 @@
           <p:cNvPr id="51" name="">
             <a:extLst xmlns:a="http://schemas.openxmlformats.org/drawingml/2006/main">
               <a:ext uri="{FF2B5EF4-FFF2-40B4-BE49-F238E27FC236}">
-                <a16:creationId xmlns:a16="http://schemas.microsoft.com/office/drawing/2014/main" id="{5D5F3601-BE3C-4A43-82CA-0D34C9D59ABE}"/>
+                <a16:creationId xmlns:a16="http://schemas.microsoft.com/office/drawing/2014/main" id="{CE63CB38-D187-4905-8914-5B3255E78DA0}"/>
               </a:ext>
             </a:extLst>
           </p:cNvPr>
@@ -26783,7 +26783,7 @@
           <p:cNvPr id="52" name="">
             <a:extLst xmlns:a="http://schemas.openxmlformats.org/drawingml/2006/main">
               <a:ext uri="{FF2B5EF4-FFF2-40B4-BE49-F238E27FC236}">
-                <a16:creationId xmlns:a16="http://schemas.microsoft.com/office/drawing/2014/main" id="{DF9434E5-EBA2-4397-B80C-21D7605A315B}"/>
+                <a16:creationId xmlns:a16="http://schemas.microsoft.com/office/drawing/2014/main" id="{342A76F5-1AEA-4BD7-9A29-E22E08FF7C33}"/>
               </a:ext>
             </a:extLst>
           </p:cNvPr>
@@ -26828,7 +26828,7 @@
           <p:cNvPr id="53" name="">
             <a:extLst xmlns:a="http://schemas.openxmlformats.org/drawingml/2006/main">
               <a:ext uri="{FF2B5EF4-FFF2-40B4-BE49-F238E27FC236}">
-                <a16:creationId xmlns:a16="http://schemas.microsoft.com/office/drawing/2014/main" id="{00F5591D-0BAE-4E8F-B57B-DB9A289898F5}"/>
+                <a16:creationId xmlns:a16="http://schemas.microsoft.com/office/drawing/2014/main" id="{C26B3C5B-BB15-4CFD-BF64-5529FA0C6202}"/>
               </a:ext>
             </a:extLst>
           </p:cNvPr>
@@ -26873,7 +26873,7 @@
           <p:cNvPr id="54" name="">
             <a:extLst xmlns:a="http://schemas.openxmlformats.org/drawingml/2006/main">
               <a:ext uri="{FF2B5EF4-FFF2-40B4-BE49-F238E27FC236}">
-                <a16:creationId xmlns:a16="http://schemas.microsoft.com/office/drawing/2014/main" id="{D412790E-12B1-4F47-87BD-D370B1F993D3}"/>
+                <a16:creationId xmlns:a16="http://schemas.microsoft.com/office/drawing/2014/main" id="{80B901ED-78A6-414A-B23D-B2DC6AEF77C4}"/>
               </a:ext>
             </a:extLst>
           </p:cNvPr>
@@ -26918,7 +26918,7 @@
           <p:cNvPr id="55" name="">
             <a:extLst xmlns:a="http://schemas.openxmlformats.org/drawingml/2006/main">
               <a:ext uri="{FF2B5EF4-FFF2-40B4-BE49-F238E27FC236}">
-                <a16:creationId xmlns:a16="http://schemas.microsoft.com/office/drawing/2014/main" id="{1D5B0888-D70C-469D-98FF-209D092D1189}"/>
+                <a16:creationId xmlns:a16="http://schemas.microsoft.com/office/drawing/2014/main" id="{2BA1BC28-6416-4150-9789-85A352A1E0FD}"/>
               </a:ext>
             </a:extLst>
           </p:cNvPr>
@@ -26953,7 +26953,7 @@
           <p:cNvPr id="56" name="">
             <a:extLst xmlns:a="http://schemas.openxmlformats.org/drawingml/2006/main">
               <a:ext uri="{FF2B5EF4-FFF2-40B4-BE49-F238E27FC236}">
-                <a16:creationId xmlns:a16="http://schemas.microsoft.com/office/drawing/2014/main" id="{A22571B7-8D91-43B9-B011-CD2BF09F7A4A}"/>
+                <a16:creationId xmlns:a16="http://schemas.microsoft.com/office/drawing/2014/main" id="{0ED0B027-0222-4ACB-B47B-70842AA50851}"/>
               </a:ext>
             </a:extLst>
           </p:cNvPr>
@@ -26984,7 +26984,7 @@
           <p:cNvPr id="57" name="">
             <a:extLst xmlns:a="http://schemas.openxmlformats.org/drawingml/2006/main">
               <a:ext uri="{FF2B5EF4-FFF2-40B4-BE49-F238E27FC236}">
-                <a16:creationId xmlns:a16="http://schemas.microsoft.com/office/drawing/2014/main" id="{A86CACC6-5EB8-4013-8E6C-FA61E71EEE55}"/>
+                <a16:creationId xmlns:a16="http://schemas.microsoft.com/office/drawing/2014/main" id="{1495B638-9B25-4A1A-B75B-85C342208BA8}"/>
               </a:ext>
             </a:extLst>
           </p:cNvPr>
@@ -27029,7 +27029,7 @@
           <p:cNvPr id="58" name="">
             <a:extLst xmlns:a="http://schemas.openxmlformats.org/drawingml/2006/main">
               <a:ext uri="{FF2B5EF4-FFF2-40B4-BE49-F238E27FC236}">
-                <a16:creationId xmlns:a16="http://schemas.microsoft.com/office/drawing/2014/main" id="{138E5354-10C9-4173-B388-607C8C2B8C0D}"/>
+                <a16:creationId xmlns:a16="http://schemas.microsoft.com/office/drawing/2014/main" id="{6A05A5C3-2B60-4D2F-B433-46B53CE336A0}"/>
               </a:ext>
             </a:extLst>
           </p:cNvPr>
@@ -27074,7 +27074,7 @@
           <p:cNvPr id="59" name="">
             <a:extLst xmlns:a="http://schemas.openxmlformats.org/drawingml/2006/main">
               <a:ext uri="{FF2B5EF4-FFF2-40B4-BE49-F238E27FC236}">
-                <a16:creationId xmlns:a16="http://schemas.microsoft.com/office/drawing/2014/main" id="{9CD3F461-190B-41D9-85F2-E560DFD61242}"/>
+                <a16:creationId xmlns:a16="http://schemas.microsoft.com/office/drawing/2014/main" id="{440C2679-6F12-4FDF-A36D-477C76CE1DE4}"/>
               </a:ext>
             </a:extLst>
           </p:cNvPr>
@@ -27109,7 +27109,7 @@
           <p:cNvPr id="60" name="">
             <a:extLst xmlns:a="http://schemas.openxmlformats.org/drawingml/2006/main">
               <a:ext uri="{FF2B5EF4-FFF2-40B4-BE49-F238E27FC236}">
-                <a16:creationId xmlns:a16="http://schemas.microsoft.com/office/drawing/2014/main" id="{FF58FB17-8ABF-47A1-B1C4-C1478197D92B}"/>
+                <a16:creationId xmlns:a16="http://schemas.microsoft.com/office/drawing/2014/main" id="{7D87C612-119B-4151-99D2-8CC531C4914D}"/>
               </a:ext>
             </a:extLst>
           </p:cNvPr>
@@ -27140,7 +27140,7 @@
           <p:cNvPr id="61" name="">
             <a:extLst xmlns:a="http://schemas.openxmlformats.org/drawingml/2006/main">
               <a:ext uri="{FF2B5EF4-FFF2-40B4-BE49-F238E27FC236}">
-                <a16:creationId xmlns:a16="http://schemas.microsoft.com/office/drawing/2014/main" id="{EF0B351C-B284-4947-9D03-E65AE77AF427}"/>
+                <a16:creationId xmlns:a16="http://schemas.microsoft.com/office/drawing/2014/main" id="{1655BBAF-BEAA-42BE-BE15-6DCF3A916B7D}"/>
               </a:ext>
             </a:extLst>
           </p:cNvPr>
@@ -27185,7 +27185,7 @@
           <p:cNvPr id="62" name="">
             <a:extLst xmlns:a="http://schemas.openxmlformats.org/drawingml/2006/main">
               <a:ext uri="{FF2B5EF4-FFF2-40B4-BE49-F238E27FC236}">
-                <a16:creationId xmlns:a16="http://schemas.microsoft.com/office/drawing/2014/main" id="{64D1A690-6FFA-472D-92AC-7543A85B0817}"/>
+                <a16:creationId xmlns:a16="http://schemas.microsoft.com/office/drawing/2014/main" id="{78F56B7B-F527-4A3E-BB5E-D82215BE53C1}"/>
               </a:ext>
             </a:extLst>
           </p:cNvPr>
@@ -27230,7 +27230,7 @@
           <p:cNvPr id="63" name="">
             <a:extLst xmlns:a="http://schemas.openxmlformats.org/drawingml/2006/main">
               <a:ext uri="{FF2B5EF4-FFF2-40B4-BE49-F238E27FC236}">
-                <a16:creationId xmlns:a16="http://schemas.microsoft.com/office/drawing/2014/main" id="{7D0E612B-AE63-4678-902C-F9EF731AC571}"/>
+                <a16:creationId xmlns:a16="http://schemas.microsoft.com/office/drawing/2014/main" id="{F912C58A-EF87-45E4-9E8A-6DD19030E534}"/>
               </a:ext>
             </a:extLst>
           </p:cNvPr>
@@ -27273,7 +27273,7 @@
     </p:spTree>
     <p:extLst>
       <p:ext uri="{BB962C8B-B14F-4D97-AF65-F5344CB8AC3E}">
-        <p14:creationId xmlns:p14="http://schemas.microsoft.com/office/powerpoint/2010/main" val="1643476596"/>
+        <p14:creationId xmlns:p14="http://schemas.microsoft.com/office/powerpoint/2010/main" val="231149585"/>
       </p:ext>
     </p:extLst>
   </p:cSld>
@@ -27297,7 +27297,7 @@
           <p:cNvPr id="51" name="">
             <a:extLst xmlns:a="http://schemas.openxmlformats.org/drawingml/2006/main">
               <a:ext uri="{FF2B5EF4-FFF2-40B4-BE49-F238E27FC236}">
-                <a16:creationId xmlns:a16="http://schemas.microsoft.com/office/drawing/2014/main" id="{704DD79B-3E5C-4C3D-B72C-0303C74494D0}"/>
+                <a16:creationId xmlns:a16="http://schemas.microsoft.com/office/drawing/2014/main" id="{CA07BB42-D258-4DD4-BDDF-F05A1352EC2A}"/>
               </a:ext>
             </a:extLst>
           </p:cNvPr>
@@ -27328,7 +27328,7 @@
           <p:cNvPr id="2" name="">
             <a:extLst xmlns:a="http://schemas.openxmlformats.org/drawingml/2006/main">
               <a:ext uri="{FF2B5EF4-FFF2-40B4-BE49-F238E27FC236}">
-                <a16:creationId xmlns:a16="http://schemas.microsoft.com/office/drawing/2014/main" id="{0452D0FF-AECC-4BC0-A1AC-A227CDBB295C}"/>
+                <a16:creationId xmlns:a16="http://schemas.microsoft.com/office/drawing/2014/main" id="{84CCA6AB-05EA-4D6C-8241-28702A825900}"/>
               </a:ext>
             </a:extLst>
           </p:cNvPr>
@@ -27373,7 +27373,7 @@
           <p:cNvPr id="3" name="">
             <a:extLst xmlns:a="http://schemas.openxmlformats.org/drawingml/2006/main">
               <a:ext uri="{FF2B5EF4-FFF2-40B4-BE49-F238E27FC236}">
-                <a16:creationId xmlns:a16="http://schemas.microsoft.com/office/drawing/2014/main" id="{69C3961F-511F-4409-BAFC-622D0EDD8999}"/>
+                <a16:creationId xmlns:a16="http://schemas.microsoft.com/office/drawing/2014/main" id="{27CDE418-AD5F-4BCA-BA2E-74A724D1C5DE}"/>
               </a:ext>
             </a:extLst>
           </p:cNvPr>
@@ -27418,7 +27418,7 @@
           <p:cNvPr id="4" name="">
             <a:extLst xmlns:a="http://schemas.openxmlformats.org/drawingml/2006/main">
               <a:ext uri="{FF2B5EF4-FFF2-40B4-BE49-F238E27FC236}">
-                <a16:creationId xmlns:a16="http://schemas.microsoft.com/office/drawing/2014/main" id="{74F7FAC0-AB4E-4500-BE6F-96D35D69F238}"/>
+                <a16:creationId xmlns:a16="http://schemas.microsoft.com/office/drawing/2014/main" id="{0A86D9B8-653B-43D4-B6DA-99117A848FE7}"/>
               </a:ext>
             </a:extLst>
           </p:cNvPr>
@@ -27463,7 +27463,7 @@
           <p:cNvPr id="5" name="">
             <a:extLst xmlns:a="http://schemas.openxmlformats.org/drawingml/2006/main">
               <a:ext uri="{FF2B5EF4-FFF2-40B4-BE49-F238E27FC236}">
-                <a16:creationId xmlns:a16="http://schemas.microsoft.com/office/drawing/2014/main" id="{DAB300E2-90D8-4B69-8F1C-55CA4FEF34D3}"/>
+                <a16:creationId xmlns:a16="http://schemas.microsoft.com/office/drawing/2014/main" id="{E6B229DE-46A9-478F-9E93-A39445737975}"/>
               </a:ext>
             </a:extLst>
           </p:cNvPr>
@@ -27494,7 +27494,7 @@
           <p:cNvPr id="6" name="">
             <a:extLst xmlns:a="http://schemas.openxmlformats.org/drawingml/2006/main">
               <a:ext uri="{FF2B5EF4-FFF2-40B4-BE49-F238E27FC236}">
-                <a16:creationId xmlns:a16="http://schemas.microsoft.com/office/drawing/2014/main" id="{F6F7672D-8E05-41B8-A0CA-0EA581F05E6F}"/>
+                <a16:creationId xmlns:a16="http://schemas.microsoft.com/office/drawing/2014/main" id="{1FFC834A-577F-4233-8AAB-A80219AA9E3F}"/>
               </a:ext>
             </a:extLst>
           </p:cNvPr>
@@ -27525,7 +27525,7 @@
           <p:cNvPr id="7" name="">
             <a:extLst xmlns:a="http://schemas.openxmlformats.org/drawingml/2006/main">
               <a:ext uri="{FF2B5EF4-FFF2-40B4-BE49-F238E27FC236}">
-                <a16:creationId xmlns:a16="http://schemas.microsoft.com/office/drawing/2014/main" id="{36A272FB-25EB-4B47-87A5-3EA62C598A1F}"/>
+                <a16:creationId xmlns:a16="http://schemas.microsoft.com/office/drawing/2014/main" id="{199705CF-CE44-4B60-B1CE-A7680588F514}"/>
               </a:ext>
             </a:extLst>
           </p:cNvPr>
@@ -27570,7 +27570,7 @@
           <p:cNvPr id="8" name="">
             <a:extLst xmlns:a="http://schemas.openxmlformats.org/drawingml/2006/main">
               <a:ext uri="{FF2B5EF4-FFF2-40B4-BE49-F238E27FC236}">
-                <a16:creationId xmlns:a16="http://schemas.microsoft.com/office/drawing/2014/main" id="{959E2E3D-4F76-443D-B8E5-90430FF7CAB8}"/>
+                <a16:creationId xmlns:a16="http://schemas.microsoft.com/office/drawing/2014/main" id="{91BE401B-B7C5-4DAF-BD1B-6029CB4FA3B3}"/>
               </a:ext>
             </a:extLst>
           </p:cNvPr>
@@ -27615,7 +27615,7 @@
           <p:cNvPr id="9" name="">
             <a:extLst xmlns:a="http://schemas.openxmlformats.org/drawingml/2006/main">
               <a:ext uri="{FF2B5EF4-FFF2-40B4-BE49-F238E27FC236}">
-                <a16:creationId xmlns:a16="http://schemas.microsoft.com/office/drawing/2014/main" id="{2B750ED7-2CCB-4139-AA9D-9372DBCAD0B7}"/>
+                <a16:creationId xmlns:a16="http://schemas.microsoft.com/office/drawing/2014/main" id="{3DC1C79F-F71C-4A29-B5D1-E9621C8B4A1C}"/>
               </a:ext>
             </a:extLst>
           </p:cNvPr>
@@ -27648,7 +27648,7 @@
           <p:cNvPr id="10" name="">
             <a:extLst xmlns:a="http://schemas.openxmlformats.org/drawingml/2006/main">
               <a:ext uri="{FF2B5EF4-FFF2-40B4-BE49-F238E27FC236}">
-                <a16:creationId xmlns:a16="http://schemas.microsoft.com/office/drawing/2014/main" id="{6220D32C-2966-48C7-AD49-7EFE7F0E644E}"/>
+                <a16:creationId xmlns:a16="http://schemas.microsoft.com/office/drawing/2014/main" id="{BC4BC585-B8DC-4288-A02B-2241E21D58F0}"/>
               </a:ext>
             </a:extLst>
           </p:cNvPr>
@@ -27679,7 +27679,7 @@
           <p:cNvPr id="11" name="">
             <a:extLst xmlns:a="http://schemas.openxmlformats.org/drawingml/2006/main">
               <a:ext uri="{FF2B5EF4-FFF2-40B4-BE49-F238E27FC236}">
-                <a16:creationId xmlns:a16="http://schemas.microsoft.com/office/drawing/2014/main" id="{2E6E6752-A6ED-4676-ACD0-40366D208241}"/>
+                <a16:creationId xmlns:a16="http://schemas.microsoft.com/office/drawing/2014/main" id="{D1A272FD-B2C7-48BE-86F9-E0A216BA64A3}"/>
               </a:ext>
             </a:extLst>
           </p:cNvPr>
@@ -27724,7 +27724,7 @@
           <p:cNvPr id="12" name="">
             <a:extLst xmlns:a="http://schemas.openxmlformats.org/drawingml/2006/main">
               <a:ext uri="{FF2B5EF4-FFF2-40B4-BE49-F238E27FC236}">
-                <a16:creationId xmlns:a16="http://schemas.microsoft.com/office/drawing/2014/main" id="{C8C62716-7ED1-4D1A-91BA-A43717606894}"/>
+                <a16:creationId xmlns:a16="http://schemas.microsoft.com/office/drawing/2014/main" id="{AB7703FE-C593-4C41-9A3F-B1597CEDC75F}"/>
               </a:ext>
             </a:extLst>
           </p:cNvPr>
@@ -27769,7 +27769,7 @@
           <p:cNvPr id="13" name="">
             <a:extLst xmlns:a="http://schemas.openxmlformats.org/drawingml/2006/main">
               <a:ext uri="{FF2B5EF4-FFF2-40B4-BE49-F238E27FC236}">
-                <a16:creationId xmlns:a16="http://schemas.microsoft.com/office/drawing/2014/main" id="{713DBF7A-6D52-45DE-9C65-CA4179CA8FA8}"/>
+                <a16:creationId xmlns:a16="http://schemas.microsoft.com/office/drawing/2014/main" id="{84A0189E-92E2-456F-A92E-B57E159F3910}"/>
               </a:ext>
             </a:extLst>
           </p:cNvPr>
@@ -27802,7 +27802,7 @@
           <p:cNvPr id="14" name="">
             <a:extLst xmlns:a="http://schemas.openxmlformats.org/drawingml/2006/main">
               <a:ext uri="{FF2B5EF4-FFF2-40B4-BE49-F238E27FC236}">
-                <a16:creationId xmlns:a16="http://schemas.microsoft.com/office/drawing/2014/main" id="{3CFB58CF-C7C6-411C-9BFE-E9A2F962D899}"/>
+                <a16:creationId xmlns:a16="http://schemas.microsoft.com/office/drawing/2014/main" id="{93B4DB87-DE7E-4147-85A7-0C3D161C691B}"/>
               </a:ext>
             </a:extLst>
           </p:cNvPr>
@@ -27835,7 +27835,7 @@
           <p:cNvPr id="15" name="">
             <a:extLst xmlns:a="http://schemas.openxmlformats.org/drawingml/2006/main">
               <a:ext uri="{FF2B5EF4-FFF2-40B4-BE49-F238E27FC236}">
-                <a16:creationId xmlns:a16="http://schemas.microsoft.com/office/drawing/2014/main" id="{8A481063-C6EC-45CB-836B-81A4EC6A2BD3}"/>
+                <a16:creationId xmlns:a16="http://schemas.microsoft.com/office/drawing/2014/main" id="{09B52741-12FE-4BB6-94C6-76459CDD2930}"/>
               </a:ext>
             </a:extLst>
           </p:cNvPr>
@@ -27866,7 +27866,7 @@
           <p:cNvPr id="16" name="">
             <a:extLst xmlns:a="http://schemas.openxmlformats.org/drawingml/2006/main">
               <a:ext uri="{FF2B5EF4-FFF2-40B4-BE49-F238E27FC236}">
-                <a16:creationId xmlns:a16="http://schemas.microsoft.com/office/drawing/2014/main" id="{D6A98488-A640-4BC2-8DF2-DAB2EC64B2E6}"/>
+                <a16:creationId xmlns:a16="http://schemas.microsoft.com/office/drawing/2014/main" id="{3EC78888-1A6E-4976-A8B7-1C75FCDB7A98}"/>
               </a:ext>
             </a:extLst>
           </p:cNvPr>
@@ -27911,7 +27911,7 @@
           <p:cNvPr id="17" name="">
             <a:extLst xmlns:a="http://schemas.openxmlformats.org/drawingml/2006/main">
               <a:ext uri="{FF2B5EF4-FFF2-40B4-BE49-F238E27FC236}">
-                <a16:creationId xmlns:a16="http://schemas.microsoft.com/office/drawing/2014/main" id="{7621BD77-8CD8-41E8-B701-C164F20AA332}"/>
+                <a16:creationId xmlns:a16="http://schemas.microsoft.com/office/drawing/2014/main" id="{C36AC7F4-1B2C-4AEA-97ED-C0ADB8DD31A7}"/>
               </a:ext>
             </a:extLst>
           </p:cNvPr>
@@ -27956,7 +27956,7 @@
           <p:cNvPr id="18" name="">
             <a:extLst xmlns:a="http://schemas.openxmlformats.org/drawingml/2006/main">
               <a:ext uri="{FF2B5EF4-FFF2-40B4-BE49-F238E27FC236}">
-                <a16:creationId xmlns:a16="http://schemas.microsoft.com/office/drawing/2014/main" id="{2B7E6691-313A-460E-8520-498EAB483F50}"/>
+                <a16:creationId xmlns:a16="http://schemas.microsoft.com/office/drawing/2014/main" id="{B7400A92-AB08-4096-8BCE-499B1E751D84}"/>
               </a:ext>
             </a:extLst>
           </p:cNvPr>
@@ -27989,7 +27989,7 @@
           <p:cNvPr id="19" name="">
             <a:extLst xmlns:a="http://schemas.openxmlformats.org/drawingml/2006/main">
               <a:ext uri="{FF2B5EF4-FFF2-40B4-BE49-F238E27FC236}">
-                <a16:creationId xmlns:a16="http://schemas.microsoft.com/office/drawing/2014/main" id="{1D005686-CB21-4C72-BD5B-19329B2E103E}"/>
+                <a16:creationId xmlns:a16="http://schemas.microsoft.com/office/drawing/2014/main" id="{7CA8B825-99BC-4F15-9868-76371A6142BC}"/>
               </a:ext>
             </a:extLst>
           </p:cNvPr>
@@ -28022,7 +28022,7 @@
           <p:cNvPr id="20" name="">
             <a:extLst xmlns:a="http://schemas.openxmlformats.org/drawingml/2006/main">
               <a:ext uri="{FF2B5EF4-FFF2-40B4-BE49-F238E27FC236}">
-                <a16:creationId xmlns:a16="http://schemas.microsoft.com/office/drawing/2014/main" id="{D9801A33-C355-476F-8235-8E60398A1159}"/>
+                <a16:creationId xmlns:a16="http://schemas.microsoft.com/office/drawing/2014/main" id="{95CAA25C-EDA0-43D8-9B3B-ED4DCE3885D2}"/>
               </a:ext>
             </a:extLst>
           </p:cNvPr>
@@ -28053,7 +28053,7 @@
           <p:cNvPr id="21" name="">
             <a:extLst xmlns:a="http://schemas.openxmlformats.org/drawingml/2006/main">
               <a:ext uri="{FF2B5EF4-FFF2-40B4-BE49-F238E27FC236}">
-                <a16:creationId xmlns:a16="http://schemas.microsoft.com/office/drawing/2014/main" id="{4A492179-837C-4B5D-A23F-85F3D9471EF3}"/>
+                <a16:creationId xmlns:a16="http://schemas.microsoft.com/office/drawing/2014/main" id="{D8CA0D7D-4256-4C8D-882D-FC37C55AA385}"/>
               </a:ext>
             </a:extLst>
           </p:cNvPr>
@@ -28098,7 +28098,7 @@
           <p:cNvPr id="22" name="">
             <a:extLst xmlns:a="http://schemas.openxmlformats.org/drawingml/2006/main">
               <a:ext uri="{FF2B5EF4-FFF2-40B4-BE49-F238E27FC236}">
-                <a16:creationId xmlns:a16="http://schemas.microsoft.com/office/drawing/2014/main" id="{1A51681C-0A7C-41EC-AFE1-D712F87622BA}"/>
+                <a16:creationId xmlns:a16="http://schemas.microsoft.com/office/drawing/2014/main" id="{7B9398AF-3336-4236-B199-6AFB2BF745DD}"/>
               </a:ext>
             </a:extLst>
           </p:cNvPr>
@@ -28143,7 +28143,7 @@
           <p:cNvPr id="23" name="">
             <a:extLst xmlns:a="http://schemas.openxmlformats.org/drawingml/2006/main">
               <a:ext uri="{FF2B5EF4-FFF2-40B4-BE49-F238E27FC236}">
-                <a16:creationId xmlns:a16="http://schemas.microsoft.com/office/drawing/2014/main" id="{135F7A50-3273-4EFB-BFC3-4A18B6D513ED}"/>
+                <a16:creationId xmlns:a16="http://schemas.microsoft.com/office/drawing/2014/main" id="{3E508F41-7F03-4639-A348-1AB87C21C2B9}"/>
               </a:ext>
             </a:extLst>
           </p:cNvPr>
@@ -28176,7 +28176,7 @@
           <p:cNvPr id="24" name="">
             <a:extLst xmlns:a="http://schemas.openxmlformats.org/drawingml/2006/main">
               <a:ext uri="{FF2B5EF4-FFF2-40B4-BE49-F238E27FC236}">
-                <a16:creationId xmlns:a16="http://schemas.microsoft.com/office/drawing/2014/main" id="{AB281AA7-E413-4046-88AA-A16DC995CC93}"/>
+                <a16:creationId xmlns:a16="http://schemas.microsoft.com/office/drawing/2014/main" id="{E8C96B04-4CA2-4A6F-9D2C-A5C156BEF3B1}"/>
               </a:ext>
             </a:extLst>
           </p:cNvPr>
@@ -28207,7 +28207,7 @@
           <p:cNvPr id="25" name="">
             <a:extLst xmlns:a="http://schemas.openxmlformats.org/drawingml/2006/main">
               <a:ext uri="{FF2B5EF4-FFF2-40B4-BE49-F238E27FC236}">
-                <a16:creationId xmlns:a16="http://schemas.microsoft.com/office/drawing/2014/main" id="{D12C71A2-8BA2-435E-B4A0-A5C92EED8784}"/>
+                <a16:creationId xmlns:a16="http://schemas.microsoft.com/office/drawing/2014/main" id="{CD19AFC0-3617-4CEE-9077-E6FBF7E7E0ED}"/>
               </a:ext>
             </a:extLst>
           </p:cNvPr>
@@ -28252,7 +28252,7 @@
           <p:cNvPr id="26" name="">
             <a:extLst xmlns:a="http://schemas.openxmlformats.org/drawingml/2006/main">
               <a:ext uri="{FF2B5EF4-FFF2-40B4-BE49-F238E27FC236}">
-                <a16:creationId xmlns:a16="http://schemas.microsoft.com/office/drawing/2014/main" id="{F752B691-8D80-4646-B05D-A82C55EAFB50}"/>
+                <a16:creationId xmlns:a16="http://schemas.microsoft.com/office/drawing/2014/main" id="{F2B0D390-6164-43CF-90EC-5CB1ADD48437}"/>
               </a:ext>
             </a:extLst>
           </p:cNvPr>
@@ -28297,7 +28297,7 @@
           <p:cNvPr id="27" name="">
             <a:extLst xmlns:a="http://schemas.openxmlformats.org/drawingml/2006/main">
               <a:ext uri="{FF2B5EF4-FFF2-40B4-BE49-F238E27FC236}">
-                <a16:creationId xmlns:a16="http://schemas.microsoft.com/office/drawing/2014/main" id="{68F967C7-BE3C-46FE-8674-F5D2F1218119}"/>
+                <a16:creationId xmlns:a16="http://schemas.microsoft.com/office/drawing/2014/main" id="{56B79E81-4E85-48D1-932E-5F9412A6CCD6}"/>
               </a:ext>
             </a:extLst>
           </p:cNvPr>
@@ -28330,7 +28330,7 @@
           <p:cNvPr id="28" name="">
             <a:extLst xmlns:a="http://schemas.openxmlformats.org/drawingml/2006/main">
               <a:ext uri="{FF2B5EF4-FFF2-40B4-BE49-F238E27FC236}">
-                <a16:creationId xmlns:a16="http://schemas.microsoft.com/office/drawing/2014/main" id="{A26D233C-765B-4250-AF8D-B4B54A4BE23A}"/>
+                <a16:creationId xmlns:a16="http://schemas.microsoft.com/office/drawing/2014/main" id="{15119299-AD21-4945-846A-6FB3E77D4019}"/>
               </a:ext>
             </a:extLst>
           </p:cNvPr>
@@ -28363,7 +28363,7 @@
           <p:cNvPr id="29" name="">
             <a:extLst xmlns:a="http://schemas.openxmlformats.org/drawingml/2006/main">
               <a:ext uri="{FF2B5EF4-FFF2-40B4-BE49-F238E27FC236}">
-                <a16:creationId xmlns:a16="http://schemas.microsoft.com/office/drawing/2014/main" id="{EBB5EAB7-E68E-4CCA-97E5-67925743F304}"/>
+                <a16:creationId xmlns:a16="http://schemas.microsoft.com/office/drawing/2014/main" id="{A11A82EB-F626-4938-89B9-1F1184CA9721}"/>
               </a:ext>
             </a:extLst>
           </p:cNvPr>
@@ -28394,7 +28394,7 @@
           <p:cNvPr id="30" name="">
             <a:extLst xmlns:a="http://schemas.openxmlformats.org/drawingml/2006/main">
               <a:ext uri="{FF2B5EF4-FFF2-40B4-BE49-F238E27FC236}">
-                <a16:creationId xmlns:a16="http://schemas.microsoft.com/office/drawing/2014/main" id="{A8FCE6BE-B002-4C37-96A3-5114F948F0FE}"/>
+                <a16:creationId xmlns:a16="http://schemas.microsoft.com/office/drawing/2014/main" id="{A3D6EB1B-1CBF-427A-AC84-D54F3080A867}"/>
               </a:ext>
             </a:extLst>
           </p:cNvPr>
@@ -28439,7 +28439,7 @@
           <p:cNvPr id="31" name="">
             <a:extLst xmlns:a="http://schemas.openxmlformats.org/drawingml/2006/main">
               <a:ext uri="{FF2B5EF4-FFF2-40B4-BE49-F238E27FC236}">
-                <a16:creationId xmlns:a16="http://schemas.microsoft.com/office/drawing/2014/main" id="{B40285AD-ADA2-42AC-9D60-D75EA0C50BB4}"/>
+                <a16:creationId xmlns:a16="http://schemas.microsoft.com/office/drawing/2014/main" id="{269626ED-4C67-4D0E-9E54-17B53315ADC3}"/>
               </a:ext>
             </a:extLst>
           </p:cNvPr>
@@ -28484,7 +28484,7 @@
           <p:cNvPr id="32" name="">
             <a:extLst xmlns:a="http://schemas.openxmlformats.org/drawingml/2006/main">
               <a:ext uri="{FF2B5EF4-FFF2-40B4-BE49-F238E27FC236}">
-                <a16:creationId xmlns:a16="http://schemas.microsoft.com/office/drawing/2014/main" id="{B0548836-F483-43F6-8BD8-4EC83B7AE388}"/>
+                <a16:creationId xmlns:a16="http://schemas.microsoft.com/office/drawing/2014/main" id="{63E11C89-20D9-4FD5-B4CC-AC4663E3A192}"/>
               </a:ext>
             </a:extLst>
           </p:cNvPr>
@@ -28517,7 +28517,7 @@
           <p:cNvPr id="33" name="">
             <a:extLst xmlns:a="http://schemas.openxmlformats.org/drawingml/2006/main">
               <a:ext uri="{FF2B5EF4-FFF2-40B4-BE49-F238E27FC236}">
-                <a16:creationId xmlns:a16="http://schemas.microsoft.com/office/drawing/2014/main" id="{EA213766-ECDB-4CE3-A68B-C934788454BC}"/>
+                <a16:creationId xmlns:a16="http://schemas.microsoft.com/office/drawing/2014/main" id="{1B2138BB-11EA-4B7F-82A2-B554626E20F2}"/>
               </a:ext>
             </a:extLst>
           </p:cNvPr>
@@ -28550,7 +28550,7 @@
           <p:cNvPr id="34" name="">
             <a:extLst xmlns:a="http://schemas.openxmlformats.org/drawingml/2006/main">
               <a:ext uri="{FF2B5EF4-FFF2-40B4-BE49-F238E27FC236}">
-                <a16:creationId xmlns:a16="http://schemas.microsoft.com/office/drawing/2014/main" id="{CA9DB6B5-7ADB-4275-8F51-218AE40E7A29}"/>
+                <a16:creationId xmlns:a16="http://schemas.microsoft.com/office/drawing/2014/main" id="{402293A9-764C-4010-A5C6-15333FA84E59}"/>
               </a:ext>
             </a:extLst>
           </p:cNvPr>
@@ -28581,7 +28581,7 @@
           <p:cNvPr id="35" name="">
             <a:extLst xmlns:a="http://schemas.openxmlformats.org/drawingml/2006/main">
               <a:ext uri="{FF2B5EF4-FFF2-40B4-BE49-F238E27FC236}">
-                <a16:creationId xmlns:a16="http://schemas.microsoft.com/office/drawing/2014/main" id="{05DC9D84-E6C6-40CB-8C43-BEC879141303}"/>
+                <a16:creationId xmlns:a16="http://schemas.microsoft.com/office/drawing/2014/main" id="{757FA3DD-5704-4CDD-942B-4F3FBD37A9C8}"/>
               </a:ext>
             </a:extLst>
           </p:cNvPr>
@@ -28626,7 +28626,7 @@
           <p:cNvPr id="36" name="">
             <a:extLst xmlns:a="http://schemas.openxmlformats.org/drawingml/2006/main">
               <a:ext uri="{FF2B5EF4-FFF2-40B4-BE49-F238E27FC236}">
-                <a16:creationId xmlns:a16="http://schemas.microsoft.com/office/drawing/2014/main" id="{69717F4A-DC94-4EF4-B9A7-A77FAC76569C}"/>
+                <a16:creationId xmlns:a16="http://schemas.microsoft.com/office/drawing/2014/main" id="{6EBC7B8E-3B40-402D-8D1E-A1CB6176CFCB}"/>
               </a:ext>
             </a:extLst>
           </p:cNvPr>
@@ -28671,7 +28671,7 @@
           <p:cNvPr id="37" name="">
             <a:extLst xmlns:a="http://schemas.openxmlformats.org/drawingml/2006/main">
               <a:ext uri="{FF2B5EF4-FFF2-40B4-BE49-F238E27FC236}">
-                <a16:creationId xmlns:a16="http://schemas.microsoft.com/office/drawing/2014/main" id="{BFC812A4-0E5E-4612-99F8-BFE80CA64658}"/>
+                <a16:creationId xmlns:a16="http://schemas.microsoft.com/office/drawing/2014/main" id="{945DF193-F7E1-480D-8106-D2DE40F71560}"/>
               </a:ext>
             </a:extLst>
           </p:cNvPr>
@@ -28704,7 +28704,7 @@
           <p:cNvPr id="38" name="">
             <a:extLst xmlns:a="http://schemas.openxmlformats.org/drawingml/2006/main">
               <a:ext uri="{FF2B5EF4-FFF2-40B4-BE49-F238E27FC236}">
-                <a16:creationId xmlns:a16="http://schemas.microsoft.com/office/drawing/2014/main" id="{F2BFCE5C-346D-4912-9B7A-B7B08279FBBA}"/>
+                <a16:creationId xmlns:a16="http://schemas.microsoft.com/office/drawing/2014/main" id="{A0A74A50-DB92-4289-8AD6-0AD37FB439A4}"/>
               </a:ext>
             </a:extLst>
           </p:cNvPr>
@@ -28737,7 +28737,7 @@
           <p:cNvPr id="39" name="">
             <a:extLst xmlns:a="http://schemas.openxmlformats.org/drawingml/2006/main">
               <a:ext uri="{FF2B5EF4-FFF2-40B4-BE49-F238E27FC236}">
-                <a16:creationId xmlns:a16="http://schemas.microsoft.com/office/drawing/2014/main" id="{120FFE42-20C4-47EE-829B-20FBEDFA8BD9}"/>
+                <a16:creationId xmlns:a16="http://schemas.microsoft.com/office/drawing/2014/main" id="{3A7C601A-4674-4E98-8C40-BE18259D3C8B}"/>
               </a:ext>
             </a:extLst>
           </p:cNvPr>
@@ -28768,7 +28768,7 @@
           <p:cNvPr id="40" name="">
             <a:extLst xmlns:a="http://schemas.openxmlformats.org/drawingml/2006/main">
               <a:ext uri="{FF2B5EF4-FFF2-40B4-BE49-F238E27FC236}">
-                <a16:creationId xmlns:a16="http://schemas.microsoft.com/office/drawing/2014/main" id="{32EFC2E8-85EB-4B00-8537-34BE19E73BA0}"/>
+                <a16:creationId xmlns:a16="http://schemas.microsoft.com/office/drawing/2014/main" id="{A363AB1F-40BA-47BB-B571-14179E1D391C}"/>
               </a:ext>
             </a:extLst>
           </p:cNvPr>
@@ -28813,7 +28813,7 @@
           <p:cNvPr id="41" name="">
             <a:extLst xmlns:a="http://schemas.openxmlformats.org/drawingml/2006/main">
               <a:ext uri="{FF2B5EF4-FFF2-40B4-BE49-F238E27FC236}">
-                <a16:creationId xmlns:a16="http://schemas.microsoft.com/office/drawing/2014/main" id="{C5FFD027-F216-4FE6-B2C4-98AF7911D4C1}"/>
+                <a16:creationId xmlns:a16="http://schemas.microsoft.com/office/drawing/2014/main" id="{B19B4943-F253-4832-9910-0DE4596FE47D}"/>
               </a:ext>
             </a:extLst>
           </p:cNvPr>
@@ -28858,7 +28858,7 @@
           <p:cNvPr id="42" name="">
             <a:extLst xmlns:a="http://schemas.openxmlformats.org/drawingml/2006/main">
               <a:ext uri="{FF2B5EF4-FFF2-40B4-BE49-F238E27FC236}">
-                <a16:creationId xmlns:a16="http://schemas.microsoft.com/office/drawing/2014/main" id="{CDF10C93-4215-47B5-8664-C8BCC9B7FD92}"/>
+                <a16:creationId xmlns:a16="http://schemas.microsoft.com/office/drawing/2014/main" id="{3D8BE333-583E-4FCE-B1E3-C01897C90360}"/>
               </a:ext>
             </a:extLst>
           </p:cNvPr>
@@ -28893,7 +28893,7 @@
           <p:cNvPr id="43" name="">
             <a:extLst xmlns:a="http://schemas.openxmlformats.org/drawingml/2006/main">
               <a:ext uri="{FF2B5EF4-FFF2-40B4-BE49-F238E27FC236}">
-                <a16:creationId xmlns:a16="http://schemas.microsoft.com/office/drawing/2014/main" id="{87CF7F9C-3BEC-4018-AD08-6D2231BB5BB6}"/>
+                <a16:creationId xmlns:a16="http://schemas.microsoft.com/office/drawing/2014/main" id="{0B4E1FA2-8C9B-4F5D-BCBD-0093864305D2}"/>
               </a:ext>
             </a:extLst>
           </p:cNvPr>
@@ -28924,7 +28924,7 @@
           <p:cNvPr id="44" name="">
             <a:extLst xmlns:a="http://schemas.openxmlformats.org/drawingml/2006/main">
               <a:ext uri="{FF2B5EF4-FFF2-40B4-BE49-F238E27FC236}">
-                <a16:creationId xmlns:a16="http://schemas.microsoft.com/office/drawing/2014/main" id="{D7255DD6-0E5B-44F6-A976-2E2012EB8CA4}"/>
+                <a16:creationId xmlns:a16="http://schemas.microsoft.com/office/drawing/2014/main" id="{356149FA-EB80-401E-8FE4-0197679AE87C}"/>
               </a:ext>
             </a:extLst>
           </p:cNvPr>
@@ -28969,7 +28969,7 @@
           <p:cNvPr id="45" name="">
             <a:extLst xmlns:a="http://schemas.openxmlformats.org/drawingml/2006/main">
               <a:ext uri="{FF2B5EF4-FFF2-40B4-BE49-F238E27FC236}">
-                <a16:creationId xmlns:a16="http://schemas.microsoft.com/office/drawing/2014/main" id="{73C43059-F76B-48B7-A746-0DD78E622C80}"/>
+                <a16:creationId xmlns:a16="http://schemas.microsoft.com/office/drawing/2014/main" id="{E433B256-77D0-428B-A3B9-EA6E867B9844}"/>
               </a:ext>
             </a:extLst>
           </p:cNvPr>
@@ -29014,7 +29014,7 @@
           <p:cNvPr id="46" name="">
             <a:extLst xmlns:a="http://schemas.openxmlformats.org/drawingml/2006/main">
               <a:ext uri="{FF2B5EF4-FFF2-40B4-BE49-F238E27FC236}">
-                <a16:creationId xmlns:a16="http://schemas.microsoft.com/office/drawing/2014/main" id="{9D7D1FC3-3C8C-4F15-ADD3-EB413E2A0E25}"/>
+                <a16:creationId xmlns:a16="http://schemas.microsoft.com/office/drawing/2014/main" id="{4A385A75-54E6-44C2-98BE-7F7AAD886224}"/>
               </a:ext>
             </a:extLst>
           </p:cNvPr>
@@ -29049,7 +29049,7 @@
           <p:cNvPr id="47" name="">
             <a:extLst xmlns:a="http://schemas.openxmlformats.org/drawingml/2006/main">
               <a:ext uri="{FF2B5EF4-FFF2-40B4-BE49-F238E27FC236}">
-                <a16:creationId xmlns:a16="http://schemas.microsoft.com/office/drawing/2014/main" id="{032DAEF9-6AC5-4A54-9646-2EF9AE699626}"/>
+                <a16:creationId xmlns:a16="http://schemas.microsoft.com/office/drawing/2014/main" id="{0BF95C75-DE61-4427-855E-41144769F1C1}"/>
               </a:ext>
             </a:extLst>
           </p:cNvPr>
@@ -29080,7 +29080,7 @@
           <p:cNvPr id="48" name="">
             <a:extLst xmlns:a="http://schemas.openxmlformats.org/drawingml/2006/main">
               <a:ext uri="{FF2B5EF4-FFF2-40B4-BE49-F238E27FC236}">
-                <a16:creationId xmlns:a16="http://schemas.microsoft.com/office/drawing/2014/main" id="{8D1A52B3-2050-4EAB-8FB0-A6652FF5DC6B}"/>
+                <a16:creationId xmlns:a16="http://schemas.microsoft.com/office/drawing/2014/main" id="{1B9A0FBC-9FAF-4A66-A948-D3C15FDF353E}"/>
               </a:ext>
             </a:extLst>
           </p:cNvPr>
@@ -29125,7 +29125,7 @@
           <p:cNvPr id="49" name="">
             <a:extLst xmlns:a="http://schemas.openxmlformats.org/drawingml/2006/main">
               <a:ext uri="{FF2B5EF4-FFF2-40B4-BE49-F238E27FC236}">
-                <a16:creationId xmlns:a16="http://schemas.microsoft.com/office/drawing/2014/main" id="{637D2881-DDD7-4005-BDD3-B126ABE2ACEE}"/>
+                <a16:creationId xmlns:a16="http://schemas.microsoft.com/office/drawing/2014/main" id="{B2BA3DA2-339E-465C-9509-997BD4EE2284}"/>
               </a:ext>
             </a:extLst>
           </p:cNvPr>
@@ -29170,7 +29170,7 @@
           <p:cNvPr id="50" name="">
             <a:extLst xmlns:a="http://schemas.openxmlformats.org/drawingml/2006/main">
               <a:ext uri="{FF2B5EF4-FFF2-40B4-BE49-F238E27FC236}">
-                <a16:creationId xmlns:a16="http://schemas.microsoft.com/office/drawing/2014/main" id="{E9D79E40-9DD1-45DB-8774-4E76E34E13A0}"/>
+                <a16:creationId xmlns:a16="http://schemas.microsoft.com/office/drawing/2014/main" id="{4CF2FFCB-CED3-4018-A544-40BA79A2F321}"/>
               </a:ext>
             </a:extLst>
           </p:cNvPr>
@@ -29213,7 +29213,7 @@
     </p:spTree>
     <p:extLst>
       <p:ext uri="{BB962C8B-B14F-4D97-AF65-F5344CB8AC3E}">
-        <p14:creationId xmlns:p14="http://schemas.microsoft.com/office/powerpoint/2010/main" val="1824674488"/>
+        <p14:creationId xmlns:p14="http://schemas.microsoft.com/office/powerpoint/2010/main" val="312918694"/>
       </p:ext>
     </p:extLst>
   </p:cSld>
@@ -29237,7 +29237,7 @@
           <p:cNvPr id="49" name="">
             <a:extLst xmlns:a="http://schemas.openxmlformats.org/drawingml/2006/main">
               <a:ext uri="{FF2B5EF4-FFF2-40B4-BE49-F238E27FC236}">
-                <a16:creationId xmlns:a16="http://schemas.microsoft.com/office/drawing/2014/main" id="{22005EAE-8FD7-49A7-918A-85467CC4365D}"/>
+                <a16:creationId xmlns:a16="http://schemas.microsoft.com/office/drawing/2014/main" id="{0FA4E271-2F16-463A-A004-3FE6240B5510}"/>
               </a:ext>
             </a:extLst>
           </p:cNvPr>
@@ -29268,7 +29268,7 @@
           <p:cNvPr id="2" name="">
             <a:extLst xmlns:a="http://schemas.openxmlformats.org/drawingml/2006/main">
               <a:ext uri="{FF2B5EF4-FFF2-40B4-BE49-F238E27FC236}">
-                <a16:creationId xmlns:a16="http://schemas.microsoft.com/office/drawing/2014/main" id="{F8D2E721-3254-4CEC-8B68-4690358DA0F8}"/>
+                <a16:creationId xmlns:a16="http://schemas.microsoft.com/office/drawing/2014/main" id="{36879547-9BA7-4B12-B1C6-4D518F299853}"/>
               </a:ext>
             </a:extLst>
           </p:cNvPr>
@@ -29313,7 +29313,7 @@
           <p:cNvPr id="3" name="">
             <a:extLst xmlns:a="http://schemas.openxmlformats.org/drawingml/2006/main">
               <a:ext uri="{FF2B5EF4-FFF2-40B4-BE49-F238E27FC236}">
-                <a16:creationId xmlns:a16="http://schemas.microsoft.com/office/drawing/2014/main" id="{41C5ED98-24D7-4D3A-BCED-CE7A6ED951E4}"/>
+                <a16:creationId xmlns:a16="http://schemas.microsoft.com/office/drawing/2014/main" id="{5B91B2FA-E126-480B-B557-F6C7B98A286F}"/>
               </a:ext>
             </a:extLst>
           </p:cNvPr>
@@ -29358,7 +29358,7 @@
           <p:cNvPr id="4" name="">
             <a:extLst xmlns:a="http://schemas.openxmlformats.org/drawingml/2006/main">
               <a:ext uri="{FF2B5EF4-FFF2-40B4-BE49-F238E27FC236}">
-                <a16:creationId xmlns:a16="http://schemas.microsoft.com/office/drawing/2014/main" id="{2608C0BC-C749-4898-A21A-A10384FDB97C}"/>
+                <a16:creationId xmlns:a16="http://schemas.microsoft.com/office/drawing/2014/main" id="{5D62B294-0E89-4792-903C-01636C7F0BEE}"/>
               </a:ext>
             </a:extLst>
           </p:cNvPr>
@@ -29403,7 +29403,7 @@
           <p:cNvPr id="5" name="">
             <a:extLst xmlns:a="http://schemas.openxmlformats.org/drawingml/2006/main">
               <a:ext uri="{FF2B5EF4-FFF2-40B4-BE49-F238E27FC236}">
-                <a16:creationId xmlns:a16="http://schemas.microsoft.com/office/drawing/2014/main" id="{B9D94607-CA7D-4291-957A-767B44612997}"/>
+                <a16:creationId xmlns:a16="http://schemas.microsoft.com/office/drawing/2014/main" id="{E8F68AF6-A83B-4012-99F6-7F4916535634}"/>
               </a:ext>
             </a:extLst>
           </p:cNvPr>
@@ -29434,7 +29434,7 @@
           <p:cNvPr id="6" name="">
             <a:extLst xmlns:a="http://schemas.openxmlformats.org/drawingml/2006/main">
               <a:ext uri="{FF2B5EF4-FFF2-40B4-BE49-F238E27FC236}">
-                <a16:creationId xmlns:a16="http://schemas.microsoft.com/office/drawing/2014/main" id="{E9D27F4C-5A9C-43BE-8884-5969E3E0314A}"/>
+                <a16:creationId xmlns:a16="http://schemas.microsoft.com/office/drawing/2014/main" id="{A428C251-3E77-447C-B5DB-323BDB8ACBB3}"/>
               </a:ext>
             </a:extLst>
           </p:cNvPr>
@@ -29465,7 +29465,7 @@
           <p:cNvPr id="7" name="">
             <a:extLst xmlns:a="http://schemas.openxmlformats.org/drawingml/2006/main">
               <a:ext uri="{FF2B5EF4-FFF2-40B4-BE49-F238E27FC236}">
-                <a16:creationId xmlns:a16="http://schemas.microsoft.com/office/drawing/2014/main" id="{717FDFEA-33A2-46C6-8B68-394AE5B4CFA5}"/>
+                <a16:creationId xmlns:a16="http://schemas.microsoft.com/office/drawing/2014/main" id="{A33DFFDE-38D0-4B65-A99F-853449E26B73}"/>
               </a:ext>
             </a:extLst>
           </p:cNvPr>
@@ -29510,7 +29510,7 @@
           <p:cNvPr id="8" name="">
             <a:extLst xmlns:a="http://schemas.openxmlformats.org/drawingml/2006/main">
               <a:ext uri="{FF2B5EF4-FFF2-40B4-BE49-F238E27FC236}">
-                <a16:creationId xmlns:a16="http://schemas.microsoft.com/office/drawing/2014/main" id="{5F5816B2-7347-4F7B-9F17-56C5B1B5A54B}"/>
+                <a16:creationId xmlns:a16="http://schemas.microsoft.com/office/drawing/2014/main" id="{46056548-B63D-42EB-B6D2-42458587A574}"/>
               </a:ext>
             </a:extLst>
           </p:cNvPr>
@@ -29555,7 +29555,7 @@
           <p:cNvPr id="9" name="">
             <a:extLst xmlns:a="http://schemas.openxmlformats.org/drawingml/2006/main">
               <a:ext uri="{FF2B5EF4-FFF2-40B4-BE49-F238E27FC236}">
-                <a16:creationId xmlns:a16="http://schemas.microsoft.com/office/drawing/2014/main" id="{AD0CD981-B076-4423-9307-7E73122307E4}"/>
+                <a16:creationId xmlns:a16="http://schemas.microsoft.com/office/drawing/2014/main" id="{02B24999-52BB-4C3D-BD99-4AD7342CB753}"/>
               </a:ext>
             </a:extLst>
           </p:cNvPr>
@@ -29588,7 +29588,7 @@
           <p:cNvPr id="10" name="">
             <a:extLst xmlns:a="http://schemas.openxmlformats.org/drawingml/2006/main">
               <a:ext uri="{FF2B5EF4-FFF2-40B4-BE49-F238E27FC236}">
-                <a16:creationId xmlns:a16="http://schemas.microsoft.com/office/drawing/2014/main" id="{35D014C6-2EAD-4721-B10F-394E643AF902}"/>
+                <a16:creationId xmlns:a16="http://schemas.microsoft.com/office/drawing/2014/main" id="{D23F420E-DD7A-4ED4-B288-814CF4BF590F}"/>
               </a:ext>
             </a:extLst>
           </p:cNvPr>
@@ -29619,7 +29619,7 @@
           <p:cNvPr id="11" name="">
             <a:extLst xmlns:a="http://schemas.openxmlformats.org/drawingml/2006/main">
               <a:ext uri="{FF2B5EF4-FFF2-40B4-BE49-F238E27FC236}">
-                <a16:creationId xmlns:a16="http://schemas.microsoft.com/office/drawing/2014/main" id="{B85B8835-F419-445D-AC2C-43D66800923F}"/>
+                <a16:creationId xmlns:a16="http://schemas.microsoft.com/office/drawing/2014/main" id="{9FFA293F-5A98-446F-9EB2-11430BA79E5E}"/>
               </a:ext>
             </a:extLst>
           </p:cNvPr>
@@ -29664,7 +29664,7 @@
           <p:cNvPr id="12" name="">
             <a:extLst xmlns:a="http://schemas.openxmlformats.org/drawingml/2006/main">
               <a:ext uri="{FF2B5EF4-FFF2-40B4-BE49-F238E27FC236}">
-                <a16:creationId xmlns:a16="http://schemas.microsoft.com/office/drawing/2014/main" id="{A9C06501-3ACB-4E7E-80AB-74AB7B6856DC}"/>
+                <a16:creationId xmlns:a16="http://schemas.microsoft.com/office/drawing/2014/main" id="{5900039A-4EE5-4A20-B5E9-228743A00C47}"/>
               </a:ext>
             </a:extLst>
           </p:cNvPr>
@@ -29709,7 +29709,7 @@
           <p:cNvPr id="13" name="">
             <a:extLst xmlns:a="http://schemas.openxmlformats.org/drawingml/2006/main">
               <a:ext uri="{FF2B5EF4-FFF2-40B4-BE49-F238E27FC236}">
-                <a16:creationId xmlns:a16="http://schemas.microsoft.com/office/drawing/2014/main" id="{434056A8-C3C9-4E98-A462-7489458FD18C}"/>
+                <a16:creationId xmlns:a16="http://schemas.microsoft.com/office/drawing/2014/main" id="{895FBAD2-E923-43F9-B580-84E4D1B82EEE}"/>
               </a:ext>
             </a:extLst>
           </p:cNvPr>
@@ -29742,7 +29742,7 @@
           <p:cNvPr id="14" name="">
             <a:extLst xmlns:a="http://schemas.openxmlformats.org/drawingml/2006/main">
               <a:ext uri="{FF2B5EF4-FFF2-40B4-BE49-F238E27FC236}">
-                <a16:creationId xmlns:a16="http://schemas.microsoft.com/office/drawing/2014/main" id="{735CA769-36E8-4AAB-B255-B71C60FD7743}"/>
+                <a16:creationId xmlns:a16="http://schemas.microsoft.com/office/drawing/2014/main" id="{9010B584-8206-4024-B17B-67E1EC35BF4F}"/>
               </a:ext>
             </a:extLst>
           </p:cNvPr>
@@ -29775,7 +29775,7 @@
           <p:cNvPr id="15" name="">
             <a:extLst xmlns:a="http://schemas.openxmlformats.org/drawingml/2006/main">
               <a:ext uri="{FF2B5EF4-FFF2-40B4-BE49-F238E27FC236}">
-                <a16:creationId xmlns:a16="http://schemas.microsoft.com/office/drawing/2014/main" id="{A98F69D5-D1CE-481E-80A3-8DF555E97853}"/>
+                <a16:creationId xmlns:a16="http://schemas.microsoft.com/office/drawing/2014/main" id="{6B1EADCE-2A59-42A0-B164-F5B4E4626AC8}"/>
               </a:ext>
             </a:extLst>
           </p:cNvPr>
@@ -29806,7 +29806,7 @@
           <p:cNvPr id="16" name="">
             <a:extLst xmlns:a="http://schemas.openxmlformats.org/drawingml/2006/main">
               <a:ext uri="{FF2B5EF4-FFF2-40B4-BE49-F238E27FC236}">
-                <a16:creationId xmlns:a16="http://schemas.microsoft.com/office/drawing/2014/main" id="{14D0FD9C-4D00-4842-8408-07FAE1275F50}"/>
+                <a16:creationId xmlns:a16="http://schemas.microsoft.com/office/drawing/2014/main" id="{E5CAA8F1-0A46-4ECE-8926-48B8441E623E}"/>
               </a:ext>
             </a:extLst>
           </p:cNvPr>
@@ -29851,7 +29851,7 @@
           <p:cNvPr id="17" name="">
             <a:extLst xmlns:a="http://schemas.openxmlformats.org/drawingml/2006/main">
               <a:ext uri="{FF2B5EF4-FFF2-40B4-BE49-F238E27FC236}">
-                <a16:creationId xmlns:a16="http://schemas.microsoft.com/office/drawing/2014/main" id="{913E3849-B301-4FA4-8405-104E95940E5B}"/>
+                <a16:creationId xmlns:a16="http://schemas.microsoft.com/office/drawing/2014/main" id="{BAF79E35-5D29-4C9F-B6DA-924BE174C929}"/>
               </a:ext>
             </a:extLst>
           </p:cNvPr>
@@ -29896,7 +29896,7 @@
           <p:cNvPr id="18" name="">
             <a:extLst xmlns:a="http://schemas.openxmlformats.org/drawingml/2006/main">
               <a:ext uri="{FF2B5EF4-FFF2-40B4-BE49-F238E27FC236}">
-                <a16:creationId xmlns:a16="http://schemas.microsoft.com/office/drawing/2014/main" id="{68890049-6DE4-4C4E-9204-3202AED211A6}"/>
+                <a16:creationId xmlns:a16="http://schemas.microsoft.com/office/drawing/2014/main" id="{9A80D02D-27BC-488B-A0FC-1D99BC933C6A}"/>
               </a:ext>
             </a:extLst>
           </p:cNvPr>
@@ -29929,7 +29929,7 @@
           <p:cNvPr id="19" name="">
             <a:extLst xmlns:a="http://schemas.openxmlformats.org/drawingml/2006/main">
               <a:ext uri="{FF2B5EF4-FFF2-40B4-BE49-F238E27FC236}">
-                <a16:creationId xmlns:a16="http://schemas.microsoft.com/office/drawing/2014/main" id="{2347B7D0-A734-4E9B-BCA7-246B732DADF9}"/>
+                <a16:creationId xmlns:a16="http://schemas.microsoft.com/office/drawing/2014/main" id="{149B5B17-19D4-4AF8-8E30-E26D2909C45E}"/>
               </a:ext>
             </a:extLst>
           </p:cNvPr>
@@ -29962,7 +29962,7 @@
           <p:cNvPr id="20" name="">
             <a:extLst xmlns:a="http://schemas.openxmlformats.org/drawingml/2006/main">
               <a:ext uri="{FF2B5EF4-FFF2-40B4-BE49-F238E27FC236}">
-                <a16:creationId xmlns:a16="http://schemas.microsoft.com/office/drawing/2014/main" id="{66645966-4E7F-4715-A99D-DABD882B078A}"/>
+                <a16:creationId xmlns:a16="http://schemas.microsoft.com/office/drawing/2014/main" id="{3CA7BD48-5013-4271-860E-460485B91DDC}"/>
               </a:ext>
             </a:extLst>
           </p:cNvPr>
@@ -29993,7 +29993,7 @@
           <p:cNvPr id="21" name="">
             <a:extLst xmlns:a="http://schemas.openxmlformats.org/drawingml/2006/main">
               <a:ext uri="{FF2B5EF4-FFF2-40B4-BE49-F238E27FC236}">
-                <a16:creationId xmlns:a16="http://schemas.microsoft.com/office/drawing/2014/main" id="{09AF9A54-3889-4310-82E9-CD8F879CAEE5}"/>
+                <a16:creationId xmlns:a16="http://schemas.microsoft.com/office/drawing/2014/main" id="{85C36D19-3F0E-491F-AD8C-7832E0D95151}"/>
               </a:ext>
             </a:extLst>
           </p:cNvPr>
@@ -30038,7 +30038,7 @@
           <p:cNvPr id="22" name="">
             <a:extLst xmlns:a="http://schemas.openxmlformats.org/drawingml/2006/main">
               <a:ext uri="{FF2B5EF4-FFF2-40B4-BE49-F238E27FC236}">
-                <a16:creationId xmlns:a16="http://schemas.microsoft.com/office/drawing/2014/main" id="{126B98DA-FE74-4325-8221-B48E6A1A19D3}"/>
+                <a16:creationId xmlns:a16="http://schemas.microsoft.com/office/drawing/2014/main" id="{90F45B32-7B89-42B8-83F1-44150571A03A}"/>
               </a:ext>
             </a:extLst>
           </p:cNvPr>
@@ -30083,7 +30083,7 @@
           <p:cNvPr id="23" name="">
             <a:extLst xmlns:a="http://schemas.openxmlformats.org/drawingml/2006/main">
               <a:ext uri="{FF2B5EF4-FFF2-40B4-BE49-F238E27FC236}">
-                <a16:creationId xmlns:a16="http://schemas.microsoft.com/office/drawing/2014/main" id="{9F1435FD-7290-49E6-8369-152E2A2601F2}"/>
+                <a16:creationId xmlns:a16="http://schemas.microsoft.com/office/drawing/2014/main" id="{05895E19-16C8-418C-B398-7ACE74C98F52}"/>
               </a:ext>
             </a:extLst>
           </p:cNvPr>
@@ -30116,7 +30116,7 @@
           <p:cNvPr id="24" name="">
             <a:extLst xmlns:a="http://schemas.openxmlformats.org/drawingml/2006/main">
               <a:ext uri="{FF2B5EF4-FFF2-40B4-BE49-F238E27FC236}">
-                <a16:creationId xmlns:a16="http://schemas.microsoft.com/office/drawing/2014/main" id="{7F9AC071-C6AE-43CA-A46B-7C8DD81913CA}"/>
+                <a16:creationId xmlns:a16="http://schemas.microsoft.com/office/drawing/2014/main" id="{AD8576B3-AF7E-4CA8-9FD2-905C4F15DCBF}"/>
               </a:ext>
             </a:extLst>
           </p:cNvPr>
@@ -30149,7 +30149,7 @@
           <p:cNvPr id="25" name="">
             <a:extLst xmlns:a="http://schemas.openxmlformats.org/drawingml/2006/main">
               <a:ext uri="{FF2B5EF4-FFF2-40B4-BE49-F238E27FC236}">
-                <a16:creationId xmlns:a16="http://schemas.microsoft.com/office/drawing/2014/main" id="{7470E97E-024D-4688-A212-B48DD9927C2A}"/>
+                <a16:creationId xmlns:a16="http://schemas.microsoft.com/office/drawing/2014/main" id="{19305551-4FA5-4670-9442-5DE6B52AEEE0}"/>
               </a:ext>
             </a:extLst>
           </p:cNvPr>
@@ -30180,7 +30180,7 @@
           <p:cNvPr id="26" name="">
             <a:extLst xmlns:a="http://schemas.openxmlformats.org/drawingml/2006/main">
               <a:ext uri="{FF2B5EF4-FFF2-40B4-BE49-F238E27FC236}">
-                <a16:creationId xmlns:a16="http://schemas.microsoft.com/office/drawing/2014/main" id="{E45C036C-A0E6-4FC2-BBA6-2B0E2AFCCCA7}"/>
+                <a16:creationId xmlns:a16="http://schemas.microsoft.com/office/drawing/2014/main" id="{AB6E3711-4A4D-47E3-A3C4-59B1176C684C}"/>
               </a:ext>
             </a:extLst>
           </p:cNvPr>
@@ -30225,7 +30225,7 @@
           <p:cNvPr id="27" name="">
             <a:extLst xmlns:a="http://schemas.openxmlformats.org/drawingml/2006/main">
               <a:ext uri="{FF2B5EF4-FFF2-40B4-BE49-F238E27FC236}">
-                <a16:creationId xmlns:a16="http://schemas.microsoft.com/office/drawing/2014/main" id="{20A4F1DD-2C64-498E-9E84-D692EC107759}"/>
+                <a16:creationId xmlns:a16="http://schemas.microsoft.com/office/drawing/2014/main" id="{5626970E-2957-414A-98E1-74036CE08F4B}"/>
               </a:ext>
             </a:extLst>
           </p:cNvPr>
@@ -30270,7 +30270,7 @@
           <p:cNvPr id="28" name="">
             <a:extLst xmlns:a="http://schemas.openxmlformats.org/drawingml/2006/main">
               <a:ext uri="{FF2B5EF4-FFF2-40B4-BE49-F238E27FC236}">
-                <a16:creationId xmlns:a16="http://schemas.microsoft.com/office/drawing/2014/main" id="{41D65190-1142-4A9C-9427-95FC5B1492E5}"/>
+                <a16:creationId xmlns:a16="http://schemas.microsoft.com/office/drawing/2014/main" id="{71B84AAA-091F-48F6-9CEA-0BD4F18AA61E}"/>
               </a:ext>
             </a:extLst>
           </p:cNvPr>
@@ -30305,7 +30305,7 @@
           <p:cNvPr id="29" name="">
             <a:extLst xmlns:a="http://schemas.openxmlformats.org/drawingml/2006/main">
               <a:ext uri="{FF2B5EF4-FFF2-40B4-BE49-F238E27FC236}">
-                <a16:creationId xmlns:a16="http://schemas.microsoft.com/office/drawing/2014/main" id="{6C5F8AA4-EB04-4373-ABC1-053310BA1F18}"/>
+                <a16:creationId xmlns:a16="http://schemas.microsoft.com/office/drawing/2014/main" id="{6F69072F-A560-48D1-ABBB-CD6CB8214D3C}"/>
               </a:ext>
             </a:extLst>
           </p:cNvPr>
@@ -30336,7 +30336,7 @@
           <p:cNvPr id="30" name="">
             <a:extLst xmlns:a="http://schemas.openxmlformats.org/drawingml/2006/main">
               <a:ext uri="{FF2B5EF4-FFF2-40B4-BE49-F238E27FC236}">
-                <a16:creationId xmlns:a16="http://schemas.microsoft.com/office/drawing/2014/main" id="{D8B34092-7F00-4E0C-AE63-91394F94230B}"/>
+                <a16:creationId xmlns:a16="http://schemas.microsoft.com/office/drawing/2014/main" id="{0C270771-4E9F-48A9-8D3D-4A828D61FA3F}"/>
               </a:ext>
             </a:extLst>
           </p:cNvPr>
@@ -30381,7 +30381,7 @@
           <p:cNvPr id="31" name="">
             <a:extLst xmlns:a="http://schemas.openxmlformats.org/drawingml/2006/main">
               <a:ext uri="{FF2B5EF4-FFF2-40B4-BE49-F238E27FC236}">
-                <a16:creationId xmlns:a16="http://schemas.microsoft.com/office/drawing/2014/main" id="{A7F5DA3E-9E52-4185-952B-7EFB035E4C6F}"/>
+                <a16:creationId xmlns:a16="http://schemas.microsoft.com/office/drawing/2014/main" id="{3B87AA01-630A-408F-9A6E-5FB98A950CF9}"/>
               </a:ext>
             </a:extLst>
           </p:cNvPr>
@@ -30426,7 +30426,7 @@
           <p:cNvPr id="32" name="">
             <a:extLst xmlns:a="http://schemas.openxmlformats.org/drawingml/2006/main">
               <a:ext uri="{FF2B5EF4-FFF2-40B4-BE49-F238E27FC236}">
-                <a16:creationId xmlns:a16="http://schemas.microsoft.com/office/drawing/2014/main" id="{0EFD1E7A-30E2-477B-A435-54DBF6E23496}"/>
+                <a16:creationId xmlns:a16="http://schemas.microsoft.com/office/drawing/2014/main" id="{985C41A9-6221-40BC-95D9-73AA59070536}"/>
               </a:ext>
             </a:extLst>
           </p:cNvPr>
@@ -30461,7 +30461,7 @@
           <p:cNvPr id="33" name="">
             <a:extLst xmlns:a="http://schemas.openxmlformats.org/drawingml/2006/main">
               <a:ext uri="{FF2B5EF4-FFF2-40B4-BE49-F238E27FC236}">
-                <a16:creationId xmlns:a16="http://schemas.microsoft.com/office/drawing/2014/main" id="{78687418-AB5F-4AA1-B371-BB42ED7CF2E0}"/>
+                <a16:creationId xmlns:a16="http://schemas.microsoft.com/office/drawing/2014/main" id="{0B06825A-E829-4FB4-ADE5-79544CC06E19}"/>
               </a:ext>
             </a:extLst>
           </p:cNvPr>
@@ -30492,7 +30492,7 @@
           <p:cNvPr id="34" name="">
             <a:extLst xmlns:a="http://schemas.openxmlformats.org/drawingml/2006/main">
               <a:ext uri="{FF2B5EF4-FFF2-40B4-BE49-F238E27FC236}">
-                <a16:creationId xmlns:a16="http://schemas.microsoft.com/office/drawing/2014/main" id="{14B55AD4-665D-4E79-AEAC-B5AE3A9E5839}"/>
+                <a16:creationId xmlns:a16="http://schemas.microsoft.com/office/drawing/2014/main" id="{A1518F20-0400-423F-A597-03613289A8FF}"/>
               </a:ext>
             </a:extLst>
           </p:cNvPr>
@@ -30537,7 +30537,7 @@
           <p:cNvPr id="35" name="">
             <a:extLst xmlns:a="http://schemas.openxmlformats.org/drawingml/2006/main">
               <a:ext uri="{FF2B5EF4-FFF2-40B4-BE49-F238E27FC236}">
-                <a16:creationId xmlns:a16="http://schemas.microsoft.com/office/drawing/2014/main" id="{C5A604FB-8B8A-4084-A11D-A80E2F887EE4}"/>
+                <a16:creationId xmlns:a16="http://schemas.microsoft.com/office/drawing/2014/main" id="{D5D49A4D-C726-4BA5-8316-571DD4DC0CCD}"/>
               </a:ext>
             </a:extLst>
           </p:cNvPr>
@@ -30582,7 +30582,7 @@
           <p:cNvPr id="36" name="">
             <a:extLst xmlns:a="http://schemas.openxmlformats.org/drawingml/2006/main">
               <a:ext uri="{FF2B5EF4-FFF2-40B4-BE49-F238E27FC236}">
-                <a16:creationId xmlns:a16="http://schemas.microsoft.com/office/drawing/2014/main" id="{2855494B-755C-41C0-89DB-44877B2BC3FA}"/>
+                <a16:creationId xmlns:a16="http://schemas.microsoft.com/office/drawing/2014/main" id="{02E7AB49-6F5C-498D-8B44-0A927CFBEECB}"/>
               </a:ext>
             </a:extLst>
           </p:cNvPr>
@@ -30617,7 +30617,7 @@
           <p:cNvPr id="37" name="">
             <a:extLst xmlns:a="http://schemas.openxmlformats.org/drawingml/2006/main">
               <a:ext uri="{FF2B5EF4-FFF2-40B4-BE49-F238E27FC236}">
-                <a16:creationId xmlns:a16="http://schemas.microsoft.com/office/drawing/2014/main" id="{03E19882-8286-4B4C-B877-7B0B3A6B9D94}"/>
+                <a16:creationId xmlns:a16="http://schemas.microsoft.com/office/drawing/2014/main" id="{F3AEB1C6-8D6B-4E9E-AFA4-C2A8E4FB1673}"/>
               </a:ext>
             </a:extLst>
           </p:cNvPr>
@@ -30662,7 +30662,7 @@
           <p:cNvPr id="38" name="">
             <a:extLst xmlns:a="http://schemas.openxmlformats.org/drawingml/2006/main">
               <a:ext uri="{FF2B5EF4-FFF2-40B4-BE49-F238E27FC236}">
-                <a16:creationId xmlns:a16="http://schemas.microsoft.com/office/drawing/2014/main" id="{C4183B1B-203D-491A-A869-B9A58AF8ECFE}"/>
+                <a16:creationId xmlns:a16="http://schemas.microsoft.com/office/drawing/2014/main" id="{AA272D16-A313-4AB0-A3CC-8583472E83FF}"/>
               </a:ext>
             </a:extLst>
           </p:cNvPr>
@@ -30707,7 +30707,7 @@
           <p:cNvPr id="39" name="">
             <a:extLst xmlns:a="http://schemas.openxmlformats.org/drawingml/2006/main">
               <a:ext uri="{FF2B5EF4-FFF2-40B4-BE49-F238E27FC236}">
-                <a16:creationId xmlns:a16="http://schemas.microsoft.com/office/drawing/2014/main" id="{7233346B-8DA7-4548-8D53-FC62FBA462E0}"/>
+                <a16:creationId xmlns:a16="http://schemas.microsoft.com/office/drawing/2014/main" id="{57C52296-36BE-446F-9CB1-7299A772D4E2}"/>
               </a:ext>
             </a:extLst>
           </p:cNvPr>
@@ -30752,7 +30752,7 @@
           <p:cNvPr id="40" name="">
             <a:extLst xmlns:a="http://schemas.openxmlformats.org/drawingml/2006/main">
               <a:ext uri="{FF2B5EF4-FFF2-40B4-BE49-F238E27FC236}">
-                <a16:creationId xmlns:a16="http://schemas.microsoft.com/office/drawing/2014/main" id="{0D78E727-885B-4E40-B4AE-1A09CB8D0B35}"/>
+                <a16:creationId xmlns:a16="http://schemas.microsoft.com/office/drawing/2014/main" id="{6668A3C0-3254-438A-94F6-7D154499C682}"/>
               </a:ext>
             </a:extLst>
           </p:cNvPr>
@@ -30787,7 +30787,7 @@
           <p:cNvPr id="41" name="">
             <a:extLst xmlns:a="http://schemas.openxmlformats.org/drawingml/2006/main">
               <a:ext uri="{FF2B5EF4-FFF2-40B4-BE49-F238E27FC236}">
-                <a16:creationId xmlns:a16="http://schemas.microsoft.com/office/drawing/2014/main" id="{85CD4CE6-D101-4417-9018-8D95A659C3E1}"/>
+                <a16:creationId xmlns:a16="http://schemas.microsoft.com/office/drawing/2014/main" id="{AB32D7C6-58C1-4A1E-9296-EE910FB84131}"/>
               </a:ext>
             </a:extLst>
           </p:cNvPr>
@@ -30832,7 +30832,7 @@
           <p:cNvPr id="42" name="">
             <a:extLst xmlns:a="http://schemas.openxmlformats.org/drawingml/2006/main">
               <a:ext uri="{FF2B5EF4-FFF2-40B4-BE49-F238E27FC236}">
-                <a16:creationId xmlns:a16="http://schemas.microsoft.com/office/drawing/2014/main" id="{9BCA2F5A-1FD6-4DEE-AD46-CA799FBAA91B}"/>
+                <a16:creationId xmlns:a16="http://schemas.microsoft.com/office/drawing/2014/main" id="{876AA0C7-5600-4F6F-BBAA-9414B2FF81CB}"/>
               </a:ext>
             </a:extLst>
           </p:cNvPr>
@@ -30877,7 +30877,7 @@
           <p:cNvPr id="43" name="">
             <a:extLst xmlns:a="http://schemas.openxmlformats.org/drawingml/2006/main">
               <a:ext uri="{FF2B5EF4-FFF2-40B4-BE49-F238E27FC236}">
-                <a16:creationId xmlns:a16="http://schemas.microsoft.com/office/drawing/2014/main" id="{0EC92EB4-8F96-4200-8938-93761F3EB1BB}"/>
+                <a16:creationId xmlns:a16="http://schemas.microsoft.com/office/drawing/2014/main" id="{EBD661A7-4F72-4F6A-96AF-DAE0AB3E13DB}"/>
               </a:ext>
             </a:extLst>
           </p:cNvPr>
@@ -30922,7 +30922,7 @@
           <p:cNvPr id="44" name="">
             <a:extLst xmlns:a="http://schemas.openxmlformats.org/drawingml/2006/main">
               <a:ext uri="{FF2B5EF4-FFF2-40B4-BE49-F238E27FC236}">
-                <a16:creationId xmlns:a16="http://schemas.microsoft.com/office/drawing/2014/main" id="{F6C5802B-75D6-42D4-93EE-17EFDDB3DA4D}"/>
+                <a16:creationId xmlns:a16="http://schemas.microsoft.com/office/drawing/2014/main" id="{23B77EBA-B34A-4B7D-8503-B1488E47B404}"/>
               </a:ext>
             </a:extLst>
           </p:cNvPr>
@@ -30957,7 +30957,7 @@
           <p:cNvPr id="45" name="">
             <a:extLst xmlns:a="http://schemas.openxmlformats.org/drawingml/2006/main">
               <a:ext uri="{FF2B5EF4-FFF2-40B4-BE49-F238E27FC236}">
-                <a16:creationId xmlns:a16="http://schemas.microsoft.com/office/drawing/2014/main" id="{5AE01A30-E88A-4045-8399-9326E5F96144}"/>
+                <a16:creationId xmlns:a16="http://schemas.microsoft.com/office/drawing/2014/main" id="{1DB43A37-DE7D-4F94-B41D-69D5596830C8}"/>
               </a:ext>
             </a:extLst>
           </p:cNvPr>
@@ -31002,7 +31002,7 @@
           <p:cNvPr id="46" name="">
             <a:extLst xmlns:a="http://schemas.openxmlformats.org/drawingml/2006/main">
               <a:ext uri="{FF2B5EF4-FFF2-40B4-BE49-F238E27FC236}">
-                <a16:creationId xmlns:a16="http://schemas.microsoft.com/office/drawing/2014/main" id="{88821643-FAD3-42A8-BD5F-12D28110531E}"/>
+                <a16:creationId xmlns:a16="http://schemas.microsoft.com/office/drawing/2014/main" id="{973671B3-BAF4-4F48-8C89-53E6D0037151}"/>
               </a:ext>
             </a:extLst>
           </p:cNvPr>
@@ -31047,7 +31047,7 @@
           <p:cNvPr id="47" name="">
             <a:extLst xmlns:a="http://schemas.openxmlformats.org/drawingml/2006/main">
               <a:ext uri="{FF2B5EF4-FFF2-40B4-BE49-F238E27FC236}">
-                <a16:creationId xmlns:a16="http://schemas.microsoft.com/office/drawing/2014/main" id="{ACA9D76E-BC7F-4DBE-9E1B-5D539A0761C0}"/>
+                <a16:creationId xmlns:a16="http://schemas.microsoft.com/office/drawing/2014/main" id="{1C240CD9-0AC5-4A5D-9D96-4B2037AFD82E}"/>
               </a:ext>
             </a:extLst>
           </p:cNvPr>
@@ -31092,7 +31092,7 @@
           <p:cNvPr id="48" name="">
             <a:extLst xmlns:a="http://schemas.openxmlformats.org/drawingml/2006/main">
               <a:ext uri="{FF2B5EF4-FFF2-40B4-BE49-F238E27FC236}">
-                <a16:creationId xmlns:a16="http://schemas.microsoft.com/office/drawing/2014/main" id="{67B3ED85-624A-4219-85C3-D1F1A53855DD}"/>
+                <a16:creationId xmlns:a16="http://schemas.microsoft.com/office/drawing/2014/main" id="{EFBCC2CC-B9DC-44DA-8AD6-DA0F3D7DD46F}"/>
               </a:ext>
             </a:extLst>
           </p:cNvPr>
@@ -31135,7 +31135,7 @@
     </p:spTree>
     <p:extLst>
       <p:ext uri="{BB962C8B-B14F-4D97-AF65-F5344CB8AC3E}">
-        <p14:creationId xmlns:p14="http://schemas.microsoft.com/office/powerpoint/2010/main" val="96982545"/>
+        <p14:creationId xmlns:p14="http://schemas.microsoft.com/office/powerpoint/2010/main" val="1634924027"/>
       </p:ext>
     </p:extLst>
   </p:cSld>
